--- a/docs/AI_News_Credibility_Scorer_Review2.pptx
+++ b/docs/AI_News_Credibility_Scorer_Review2.pptx
@@ -12,18 +12,18 @@
     <p:sldId id="256" r:id="rId6"/>
     <p:sldId id="257" r:id="rId7"/>
     <p:sldId id="269" r:id="rId8"/>
-    <p:sldId id="275" r:id="rId14"/>
-    <p:sldId id="276" r:id="rId15"/>
-    <p:sldId id="277" r:id="rId13"/>
-    <p:sldId id="278" r:id="rId12"/>
-    <p:sldId id="279" r:id="rId11"/>
-    <p:sldId id="280" r:id="rId10"/>
-    <p:sldId id="281" r:id="rId9"/>
-    <p:sldId id="282" r:id="rId21"/>
-    <p:sldId id="283" r:id="rId22"/>
-    <p:sldId id="284" r:id="rId23"/>
-    <p:sldId id="285" r:id="rId24"/>
-    <p:sldId id="286" r:id="rId25"/>
+    <p:sldId id="268" r:id="rId9"/>
+    <p:sldId id="273" r:id="rId10"/>
+    <p:sldId id="272" r:id="rId11"/>
+    <p:sldId id="271" r:id="rId12"/>
+    <p:sldId id="270" r:id="rId13"/>
+    <p:sldId id="265" r:id="rId14"/>
+    <p:sldId id="266" r:id="rId15"/>
+    <p:sldId id="275" r:id="rId21"/>
+    <p:sldId id="276" r:id="rId22"/>
+    <p:sldId id="277" r:id="rId23"/>
+    <p:sldId id="278" r:id="rId24"/>
+    <p:sldId id="279" r:id="rId25"/>
   </p:sldIdLst>
   <p:sldSz cx="12192000" cy="6858000"/>
   <p:notesSz cx="6858000" cy="9144000"/>
@@ -819,6 +819,115 @@
 </p:notes>
 </file>
 
+<file path=ppt/notesSlides/notesSlide10.xml><?xml version="1.0" encoding="utf-8"?>
+<p:notes xmlns:a="http://schemas.openxmlformats.org/drawingml/2006/main" xmlns:r="http://schemas.openxmlformats.org/officeDocument/2006/relationships" xmlns:p="http://schemas.openxmlformats.org/presentationml/2006/main" showMasterSp="0" showMasterPhAnim="0">
+  <p:cSld>
+    <p:spTree>
+      <p:nvGrpSpPr>
+        <p:cNvPr id="1" name="Shape 146"/>
+        <p:cNvGrpSpPr/>
+        <p:nvPr/>
+      </p:nvGrpSpPr>
+      <p:grpSpPr>
+        <a:xfrm>
+          <a:off x="0" y="0"/>
+          <a:ext cx="0" cy="0"/>
+          <a:chOff x="0" y="0"/>
+          <a:chExt cx="0" cy="0"/>
+        </a:xfrm>
+      </p:grpSpPr>
+      <p:sp>
+        <p:nvSpPr>
+          <p:cNvPr id="147" name="Google Shape;147;p11:notes"/>
+          <p:cNvSpPr txBox="1">
+            <a:spLocks noGrp="1"/>
+          </p:cNvSpPr>
+          <p:nvPr>
+            <p:ph type="body" idx="1"/>
+          </p:nvPr>
+        </p:nvSpPr>
+        <p:spPr>
+          <a:xfrm>
+            <a:off x="685800" y="4343400"/>
+            <a:ext cx="5486400" cy="4114800"/>
+          </a:xfrm>
+          <a:prstGeom prst="rect">
+            <a:avLst/>
+          </a:prstGeom>
+        </p:spPr>
+        <p:txBody>
+          <a:bodyPr spcFirstLastPara="1" wrap="square" lIns="91425" tIns="91425" rIns="91425" bIns="91425" anchor="t" anchorCtr="0">
+            <a:noAutofit/>
+          </a:bodyPr>
+          <a:lstStyle/>
+          <a:p>
+            <a:pPr marL="0" lvl="0" indent="0" algn="l" rtl="0">
+              <a:spcBef>
+                <a:spcPts val="0"/>
+              </a:spcBef>
+              <a:spcAft>
+                <a:spcPts val="0"/>
+              </a:spcAft>
+              <a:buNone/>
+            </a:pPr>
+            <a:endParaRPr/>
+          </a:p>
+        </p:txBody>
+      </p:sp>
+      <p:sp>
+        <p:nvSpPr>
+          <p:cNvPr id="148" name="Google Shape;148;p11:notes"/>
+          <p:cNvSpPr>
+            <a:spLocks noGrp="1" noRot="1" noChangeAspect="1"/>
+          </p:cNvSpPr>
+          <p:nvPr>
+            <p:ph type="sldImg" idx="2"/>
+          </p:nvPr>
+        </p:nvSpPr>
+        <p:spPr>
+          <a:xfrm>
+            <a:off x="381000" y="685800"/>
+            <a:ext cx="6096000" cy="3429000"/>
+          </a:xfrm>
+          <a:custGeom>
+            <a:avLst/>
+            <a:gdLst/>
+            <a:ahLst/>
+            <a:cxnLst/>
+            <a:rect l="l" t="t" r="r" b="b"/>
+            <a:pathLst>
+              <a:path w="120000" h="120000" extrusionOk="0">
+                <a:moveTo>
+                  <a:pt x="0" y="0"/>
+                </a:moveTo>
+                <a:lnTo>
+                  <a:pt x="120000" y="0"/>
+                </a:lnTo>
+                <a:lnTo>
+                  <a:pt x="120000" y="120000"/>
+                </a:lnTo>
+                <a:lnTo>
+                  <a:pt x="0" y="120000"/>
+                </a:lnTo>
+                <a:close/>
+              </a:path>
+            </a:pathLst>
+          </a:custGeom>
+        </p:spPr>
+      </p:sp>
+    </p:spTree>
+    <p:extLst>
+      <p:ext uri="{BB962C8B-B14F-4D97-AF65-F5344CB8AC3E}">
+        <p14:creationId xmlns:p14="http://schemas.microsoft.com/office/powerpoint/2010/main" val="358435934"/>
+      </p:ext>
+    </p:extLst>
+  </p:cSld>
+  <p:clrMapOvr>
+    <a:masterClrMapping/>
+  </p:clrMapOvr>
+</p:notes>
+</file>
+
 <file path=ppt/notesSlides/notesSlide2.xml><?xml version="1.0" encoding="utf-8"?>
 <p:notes xmlns:a="http://schemas.openxmlformats.org/drawingml/2006/main" xmlns:r="http://schemas.openxmlformats.org/officeDocument/2006/relationships" xmlns:p="http://schemas.openxmlformats.org/presentationml/2006/main" showMasterSp="0" showMasterPhAnim="0">
   <p:cSld>
@@ -1028,6 +1137,660 @@
     <p:extLst>
       <p:ext uri="{BB962C8B-B14F-4D97-AF65-F5344CB8AC3E}">
         <p14:creationId xmlns:p14="http://schemas.microsoft.com/office/powerpoint/2010/main" val="155291145"/>
+      </p:ext>
+    </p:extLst>
+  </p:cSld>
+  <p:clrMapOvr>
+    <a:masterClrMapping/>
+  </p:clrMapOvr>
+</p:notes>
+</file>
+
+<file path=ppt/notesSlides/notesSlide4.xml><?xml version="1.0" encoding="utf-8"?>
+<p:notes xmlns:a="http://schemas.openxmlformats.org/drawingml/2006/main" xmlns:r="http://schemas.openxmlformats.org/officeDocument/2006/relationships" xmlns:p="http://schemas.openxmlformats.org/presentationml/2006/main" showMasterSp="0" showMasterPhAnim="0">
+  <p:cSld>
+    <p:spTree>
+      <p:nvGrpSpPr>
+        <p:cNvPr id="1" name="Shape 110"/>
+        <p:cNvGrpSpPr/>
+        <p:nvPr/>
+      </p:nvGrpSpPr>
+      <p:grpSpPr>
+        <a:xfrm>
+          <a:off x="0" y="0"/>
+          <a:ext cx="0" cy="0"/>
+          <a:chOff x="0" y="0"/>
+          <a:chExt cx="0" cy="0"/>
+        </a:xfrm>
+      </p:grpSpPr>
+      <p:sp>
+        <p:nvSpPr>
+          <p:cNvPr id="111" name="Google Shape;111;p5:notes"/>
+          <p:cNvSpPr txBox="1">
+            <a:spLocks noGrp="1"/>
+          </p:cNvSpPr>
+          <p:nvPr>
+            <p:ph type="body" idx="1"/>
+          </p:nvPr>
+        </p:nvSpPr>
+        <p:spPr>
+          <a:xfrm>
+            <a:off x="685800" y="4343400"/>
+            <a:ext cx="5486400" cy="4114800"/>
+          </a:xfrm>
+          <a:prstGeom prst="rect">
+            <a:avLst/>
+          </a:prstGeom>
+        </p:spPr>
+        <p:txBody>
+          <a:bodyPr spcFirstLastPara="1" wrap="square" lIns="91425" tIns="91425" rIns="91425" bIns="91425" anchor="t" anchorCtr="0">
+            <a:noAutofit/>
+          </a:bodyPr>
+          <a:lstStyle/>
+          <a:p>
+            <a:pPr marL="0" lvl="0" indent="0" algn="l" rtl="0">
+              <a:spcBef>
+                <a:spcPts val="0"/>
+              </a:spcBef>
+              <a:spcAft>
+                <a:spcPts val="0"/>
+              </a:spcAft>
+              <a:buNone/>
+            </a:pPr>
+            <a:endParaRPr/>
+          </a:p>
+        </p:txBody>
+      </p:sp>
+      <p:sp>
+        <p:nvSpPr>
+          <p:cNvPr id="112" name="Google Shape;112;p5:notes"/>
+          <p:cNvSpPr>
+            <a:spLocks noGrp="1" noRot="1" noChangeAspect="1"/>
+          </p:cNvSpPr>
+          <p:nvPr>
+            <p:ph type="sldImg" idx="2"/>
+          </p:nvPr>
+        </p:nvSpPr>
+        <p:spPr>
+          <a:xfrm>
+            <a:off x="381000" y="685800"/>
+            <a:ext cx="6096000" cy="3429000"/>
+          </a:xfrm>
+          <a:custGeom>
+            <a:avLst/>
+            <a:gdLst/>
+            <a:ahLst/>
+            <a:cxnLst/>
+            <a:rect l="l" t="t" r="r" b="b"/>
+            <a:pathLst>
+              <a:path w="120000" h="120000" extrusionOk="0">
+                <a:moveTo>
+                  <a:pt x="0" y="0"/>
+                </a:moveTo>
+                <a:lnTo>
+                  <a:pt x="120000" y="0"/>
+                </a:lnTo>
+                <a:lnTo>
+                  <a:pt x="120000" y="120000"/>
+                </a:lnTo>
+                <a:lnTo>
+                  <a:pt x="0" y="120000"/>
+                </a:lnTo>
+                <a:close/>
+              </a:path>
+            </a:pathLst>
+          </a:custGeom>
+        </p:spPr>
+      </p:sp>
+    </p:spTree>
+    <p:extLst>
+      <p:ext uri="{BB962C8B-B14F-4D97-AF65-F5344CB8AC3E}">
+        <p14:creationId xmlns:p14="http://schemas.microsoft.com/office/powerpoint/2010/main" val="66716512"/>
+      </p:ext>
+    </p:extLst>
+  </p:cSld>
+  <p:clrMapOvr>
+    <a:masterClrMapping/>
+  </p:clrMapOvr>
+</p:notes>
+</file>
+
+<file path=ppt/notesSlides/notesSlide5.xml><?xml version="1.0" encoding="utf-8"?>
+<p:notes xmlns:a="http://schemas.openxmlformats.org/drawingml/2006/main" xmlns:r="http://schemas.openxmlformats.org/officeDocument/2006/relationships" xmlns:p="http://schemas.openxmlformats.org/presentationml/2006/main" showMasterSp="0" showMasterPhAnim="0">
+  <p:cSld>
+    <p:spTree>
+      <p:nvGrpSpPr>
+        <p:cNvPr id="1" name="Shape 110"/>
+        <p:cNvGrpSpPr/>
+        <p:nvPr/>
+      </p:nvGrpSpPr>
+      <p:grpSpPr>
+        <a:xfrm>
+          <a:off x="0" y="0"/>
+          <a:ext cx="0" cy="0"/>
+          <a:chOff x="0" y="0"/>
+          <a:chExt cx="0" cy="0"/>
+        </a:xfrm>
+      </p:grpSpPr>
+      <p:sp>
+        <p:nvSpPr>
+          <p:cNvPr id="111" name="Google Shape;111;p5:notes"/>
+          <p:cNvSpPr txBox="1">
+            <a:spLocks noGrp="1"/>
+          </p:cNvSpPr>
+          <p:nvPr>
+            <p:ph type="body" idx="1"/>
+          </p:nvPr>
+        </p:nvSpPr>
+        <p:spPr>
+          <a:xfrm>
+            <a:off x="685800" y="4343400"/>
+            <a:ext cx="5486400" cy="4114800"/>
+          </a:xfrm>
+          <a:prstGeom prst="rect">
+            <a:avLst/>
+          </a:prstGeom>
+        </p:spPr>
+        <p:txBody>
+          <a:bodyPr spcFirstLastPara="1" wrap="square" lIns="91425" tIns="91425" rIns="91425" bIns="91425" anchor="t" anchorCtr="0">
+            <a:noAutofit/>
+          </a:bodyPr>
+          <a:lstStyle/>
+          <a:p>
+            <a:pPr marL="0" lvl="0" indent="0" algn="l" rtl="0">
+              <a:spcBef>
+                <a:spcPts val="0"/>
+              </a:spcBef>
+              <a:spcAft>
+                <a:spcPts val="0"/>
+              </a:spcAft>
+              <a:buNone/>
+            </a:pPr>
+            <a:endParaRPr/>
+          </a:p>
+        </p:txBody>
+      </p:sp>
+      <p:sp>
+        <p:nvSpPr>
+          <p:cNvPr id="112" name="Google Shape;112;p5:notes"/>
+          <p:cNvSpPr>
+            <a:spLocks noGrp="1" noRot="1" noChangeAspect="1"/>
+          </p:cNvSpPr>
+          <p:nvPr>
+            <p:ph type="sldImg" idx="2"/>
+          </p:nvPr>
+        </p:nvSpPr>
+        <p:spPr>
+          <a:xfrm>
+            <a:off x="381000" y="685800"/>
+            <a:ext cx="6096000" cy="3429000"/>
+          </a:xfrm>
+          <a:custGeom>
+            <a:avLst/>
+            <a:gdLst/>
+            <a:ahLst/>
+            <a:cxnLst/>
+            <a:rect l="l" t="t" r="r" b="b"/>
+            <a:pathLst>
+              <a:path w="120000" h="120000" extrusionOk="0">
+                <a:moveTo>
+                  <a:pt x="0" y="0"/>
+                </a:moveTo>
+                <a:lnTo>
+                  <a:pt x="120000" y="0"/>
+                </a:lnTo>
+                <a:lnTo>
+                  <a:pt x="120000" y="120000"/>
+                </a:lnTo>
+                <a:lnTo>
+                  <a:pt x="0" y="120000"/>
+                </a:lnTo>
+                <a:close/>
+              </a:path>
+            </a:pathLst>
+          </a:custGeom>
+        </p:spPr>
+      </p:sp>
+    </p:spTree>
+    <p:extLst>
+      <p:ext uri="{BB962C8B-B14F-4D97-AF65-F5344CB8AC3E}">
+        <p14:creationId xmlns:p14="http://schemas.microsoft.com/office/powerpoint/2010/main" val="324830510"/>
+      </p:ext>
+    </p:extLst>
+  </p:cSld>
+  <p:clrMapOvr>
+    <a:masterClrMapping/>
+  </p:clrMapOvr>
+</p:notes>
+</file>
+
+<file path=ppt/notesSlides/notesSlide6.xml><?xml version="1.0" encoding="utf-8"?>
+<p:notes xmlns:a="http://schemas.openxmlformats.org/drawingml/2006/main" xmlns:r="http://schemas.openxmlformats.org/officeDocument/2006/relationships" xmlns:p="http://schemas.openxmlformats.org/presentationml/2006/main" showMasterSp="0" showMasterPhAnim="0">
+  <p:cSld>
+    <p:spTree>
+      <p:nvGrpSpPr>
+        <p:cNvPr id="1" name="Shape 110"/>
+        <p:cNvGrpSpPr/>
+        <p:nvPr/>
+      </p:nvGrpSpPr>
+      <p:grpSpPr>
+        <a:xfrm>
+          <a:off x="0" y="0"/>
+          <a:ext cx="0" cy="0"/>
+          <a:chOff x="0" y="0"/>
+          <a:chExt cx="0" cy="0"/>
+        </a:xfrm>
+      </p:grpSpPr>
+      <p:sp>
+        <p:nvSpPr>
+          <p:cNvPr id="111" name="Google Shape;111;p5:notes"/>
+          <p:cNvSpPr txBox="1">
+            <a:spLocks noGrp="1"/>
+          </p:cNvSpPr>
+          <p:nvPr>
+            <p:ph type="body" idx="1"/>
+          </p:nvPr>
+        </p:nvSpPr>
+        <p:spPr>
+          <a:xfrm>
+            <a:off x="685800" y="4343400"/>
+            <a:ext cx="5486400" cy="4114800"/>
+          </a:xfrm>
+          <a:prstGeom prst="rect">
+            <a:avLst/>
+          </a:prstGeom>
+        </p:spPr>
+        <p:txBody>
+          <a:bodyPr spcFirstLastPara="1" wrap="square" lIns="91425" tIns="91425" rIns="91425" bIns="91425" anchor="t" anchorCtr="0">
+            <a:noAutofit/>
+          </a:bodyPr>
+          <a:lstStyle/>
+          <a:p>
+            <a:pPr marL="0" lvl="0" indent="0" algn="l" rtl="0">
+              <a:spcBef>
+                <a:spcPts val="0"/>
+              </a:spcBef>
+              <a:spcAft>
+                <a:spcPts val="0"/>
+              </a:spcAft>
+              <a:buNone/>
+            </a:pPr>
+            <a:endParaRPr/>
+          </a:p>
+        </p:txBody>
+      </p:sp>
+      <p:sp>
+        <p:nvSpPr>
+          <p:cNvPr id="112" name="Google Shape;112;p5:notes"/>
+          <p:cNvSpPr>
+            <a:spLocks noGrp="1" noRot="1" noChangeAspect="1"/>
+          </p:cNvSpPr>
+          <p:nvPr>
+            <p:ph type="sldImg" idx="2"/>
+          </p:nvPr>
+        </p:nvSpPr>
+        <p:spPr>
+          <a:xfrm>
+            <a:off x="381000" y="685800"/>
+            <a:ext cx="6096000" cy="3429000"/>
+          </a:xfrm>
+          <a:custGeom>
+            <a:avLst/>
+            <a:gdLst/>
+            <a:ahLst/>
+            <a:cxnLst/>
+            <a:rect l="l" t="t" r="r" b="b"/>
+            <a:pathLst>
+              <a:path w="120000" h="120000" extrusionOk="0">
+                <a:moveTo>
+                  <a:pt x="0" y="0"/>
+                </a:moveTo>
+                <a:lnTo>
+                  <a:pt x="120000" y="0"/>
+                </a:lnTo>
+                <a:lnTo>
+                  <a:pt x="120000" y="120000"/>
+                </a:lnTo>
+                <a:lnTo>
+                  <a:pt x="0" y="120000"/>
+                </a:lnTo>
+                <a:close/>
+              </a:path>
+            </a:pathLst>
+          </a:custGeom>
+        </p:spPr>
+      </p:sp>
+    </p:spTree>
+    <p:extLst>
+      <p:ext uri="{BB962C8B-B14F-4D97-AF65-F5344CB8AC3E}">
+        <p14:creationId xmlns:p14="http://schemas.microsoft.com/office/powerpoint/2010/main" val="3043678949"/>
+      </p:ext>
+    </p:extLst>
+  </p:cSld>
+  <p:clrMapOvr>
+    <a:masterClrMapping/>
+  </p:clrMapOvr>
+</p:notes>
+</file>
+
+<file path=ppt/notesSlides/notesSlide7.xml><?xml version="1.0" encoding="utf-8"?>
+<p:notes xmlns:a="http://schemas.openxmlformats.org/drawingml/2006/main" xmlns:r="http://schemas.openxmlformats.org/officeDocument/2006/relationships" xmlns:p="http://schemas.openxmlformats.org/presentationml/2006/main" showMasterSp="0" showMasterPhAnim="0">
+  <p:cSld>
+    <p:spTree>
+      <p:nvGrpSpPr>
+        <p:cNvPr id="1" name="Shape 110"/>
+        <p:cNvGrpSpPr/>
+        <p:nvPr/>
+      </p:nvGrpSpPr>
+      <p:grpSpPr>
+        <a:xfrm>
+          <a:off x="0" y="0"/>
+          <a:ext cx="0" cy="0"/>
+          <a:chOff x="0" y="0"/>
+          <a:chExt cx="0" cy="0"/>
+        </a:xfrm>
+      </p:grpSpPr>
+      <p:sp>
+        <p:nvSpPr>
+          <p:cNvPr id="111" name="Google Shape;111;p5:notes"/>
+          <p:cNvSpPr txBox="1">
+            <a:spLocks noGrp="1"/>
+          </p:cNvSpPr>
+          <p:nvPr>
+            <p:ph type="body" idx="1"/>
+          </p:nvPr>
+        </p:nvSpPr>
+        <p:spPr>
+          <a:xfrm>
+            <a:off x="685800" y="4343400"/>
+            <a:ext cx="5486400" cy="4114800"/>
+          </a:xfrm>
+          <a:prstGeom prst="rect">
+            <a:avLst/>
+          </a:prstGeom>
+        </p:spPr>
+        <p:txBody>
+          <a:bodyPr spcFirstLastPara="1" wrap="square" lIns="91425" tIns="91425" rIns="91425" bIns="91425" anchor="t" anchorCtr="0">
+            <a:noAutofit/>
+          </a:bodyPr>
+          <a:lstStyle/>
+          <a:p>
+            <a:pPr marL="0" lvl="0" indent="0" algn="l" rtl="0">
+              <a:spcBef>
+                <a:spcPts val="0"/>
+              </a:spcBef>
+              <a:spcAft>
+                <a:spcPts val="0"/>
+              </a:spcAft>
+              <a:buNone/>
+            </a:pPr>
+            <a:endParaRPr/>
+          </a:p>
+        </p:txBody>
+      </p:sp>
+      <p:sp>
+        <p:nvSpPr>
+          <p:cNvPr id="112" name="Google Shape;112;p5:notes"/>
+          <p:cNvSpPr>
+            <a:spLocks noGrp="1" noRot="1" noChangeAspect="1"/>
+          </p:cNvSpPr>
+          <p:nvPr>
+            <p:ph type="sldImg" idx="2"/>
+          </p:nvPr>
+        </p:nvSpPr>
+        <p:spPr>
+          <a:xfrm>
+            <a:off x="381000" y="685800"/>
+            <a:ext cx="6096000" cy="3429000"/>
+          </a:xfrm>
+          <a:custGeom>
+            <a:avLst/>
+            <a:gdLst/>
+            <a:ahLst/>
+            <a:cxnLst/>
+            <a:rect l="l" t="t" r="r" b="b"/>
+            <a:pathLst>
+              <a:path w="120000" h="120000" extrusionOk="0">
+                <a:moveTo>
+                  <a:pt x="0" y="0"/>
+                </a:moveTo>
+                <a:lnTo>
+                  <a:pt x="120000" y="0"/>
+                </a:lnTo>
+                <a:lnTo>
+                  <a:pt x="120000" y="120000"/>
+                </a:lnTo>
+                <a:lnTo>
+                  <a:pt x="0" y="120000"/>
+                </a:lnTo>
+                <a:close/>
+              </a:path>
+            </a:pathLst>
+          </a:custGeom>
+        </p:spPr>
+      </p:sp>
+    </p:spTree>
+    <p:extLst>
+      <p:ext uri="{BB962C8B-B14F-4D97-AF65-F5344CB8AC3E}">
+        <p14:creationId xmlns:p14="http://schemas.microsoft.com/office/powerpoint/2010/main" val="1594210971"/>
+      </p:ext>
+    </p:extLst>
+  </p:cSld>
+  <p:clrMapOvr>
+    <a:masterClrMapping/>
+  </p:clrMapOvr>
+</p:notes>
+</file>
+
+<file path=ppt/notesSlides/notesSlide8.xml><?xml version="1.0" encoding="utf-8"?>
+<p:notes xmlns:a="http://schemas.openxmlformats.org/drawingml/2006/main" xmlns:r="http://schemas.openxmlformats.org/officeDocument/2006/relationships" xmlns:p="http://schemas.openxmlformats.org/presentationml/2006/main" showMasterSp="0" showMasterPhAnim="0">
+  <p:cSld>
+    <p:spTree>
+      <p:nvGrpSpPr>
+        <p:cNvPr id="1" name="Shape 110"/>
+        <p:cNvGrpSpPr/>
+        <p:nvPr/>
+      </p:nvGrpSpPr>
+      <p:grpSpPr>
+        <a:xfrm>
+          <a:off x="0" y="0"/>
+          <a:ext cx="0" cy="0"/>
+          <a:chOff x="0" y="0"/>
+          <a:chExt cx="0" cy="0"/>
+        </a:xfrm>
+      </p:grpSpPr>
+      <p:sp>
+        <p:nvSpPr>
+          <p:cNvPr id="111" name="Google Shape;111;p5:notes"/>
+          <p:cNvSpPr txBox="1">
+            <a:spLocks noGrp="1"/>
+          </p:cNvSpPr>
+          <p:nvPr>
+            <p:ph type="body" idx="1"/>
+          </p:nvPr>
+        </p:nvSpPr>
+        <p:spPr>
+          <a:xfrm>
+            <a:off x="685800" y="4343400"/>
+            <a:ext cx="5486400" cy="4114800"/>
+          </a:xfrm>
+          <a:prstGeom prst="rect">
+            <a:avLst/>
+          </a:prstGeom>
+        </p:spPr>
+        <p:txBody>
+          <a:bodyPr spcFirstLastPara="1" wrap="square" lIns="91425" tIns="91425" rIns="91425" bIns="91425" anchor="t" anchorCtr="0">
+            <a:noAutofit/>
+          </a:bodyPr>
+          <a:lstStyle/>
+          <a:p>
+            <a:pPr marL="0" lvl="0" indent="0" algn="l" rtl="0">
+              <a:spcBef>
+                <a:spcPts val="0"/>
+              </a:spcBef>
+              <a:spcAft>
+                <a:spcPts val="0"/>
+              </a:spcAft>
+              <a:buNone/>
+            </a:pPr>
+            <a:endParaRPr/>
+          </a:p>
+        </p:txBody>
+      </p:sp>
+      <p:sp>
+        <p:nvSpPr>
+          <p:cNvPr id="112" name="Google Shape;112;p5:notes"/>
+          <p:cNvSpPr>
+            <a:spLocks noGrp="1" noRot="1" noChangeAspect="1"/>
+          </p:cNvSpPr>
+          <p:nvPr>
+            <p:ph type="sldImg" idx="2"/>
+          </p:nvPr>
+        </p:nvSpPr>
+        <p:spPr>
+          <a:xfrm>
+            <a:off x="381000" y="685800"/>
+            <a:ext cx="6096000" cy="3429000"/>
+          </a:xfrm>
+          <a:custGeom>
+            <a:avLst/>
+            <a:gdLst/>
+            <a:ahLst/>
+            <a:cxnLst/>
+            <a:rect l="l" t="t" r="r" b="b"/>
+            <a:pathLst>
+              <a:path w="120000" h="120000" extrusionOk="0">
+                <a:moveTo>
+                  <a:pt x="0" y="0"/>
+                </a:moveTo>
+                <a:lnTo>
+                  <a:pt x="120000" y="0"/>
+                </a:lnTo>
+                <a:lnTo>
+                  <a:pt x="120000" y="120000"/>
+                </a:lnTo>
+                <a:lnTo>
+                  <a:pt x="0" y="120000"/>
+                </a:lnTo>
+                <a:close/>
+              </a:path>
+            </a:pathLst>
+          </a:custGeom>
+        </p:spPr>
+      </p:sp>
+    </p:spTree>
+    <p:extLst>
+      <p:ext uri="{BB962C8B-B14F-4D97-AF65-F5344CB8AC3E}">
+        <p14:creationId xmlns:p14="http://schemas.microsoft.com/office/powerpoint/2010/main" val="2215593523"/>
+      </p:ext>
+    </p:extLst>
+  </p:cSld>
+  <p:clrMapOvr>
+    <a:masterClrMapping/>
+  </p:clrMapOvr>
+</p:notes>
+</file>
+
+<file path=ppt/notesSlides/notesSlide9.xml><?xml version="1.0" encoding="utf-8"?>
+<p:notes xmlns:a="http://schemas.openxmlformats.org/drawingml/2006/main" xmlns:r="http://schemas.openxmlformats.org/officeDocument/2006/relationships" xmlns:p="http://schemas.openxmlformats.org/presentationml/2006/main" showMasterSp="0" showMasterPhAnim="0">
+  <p:cSld>
+    <p:spTree>
+      <p:nvGrpSpPr>
+        <p:cNvPr id="1" name="Shape 140"/>
+        <p:cNvGrpSpPr/>
+        <p:nvPr/>
+      </p:nvGrpSpPr>
+      <p:grpSpPr>
+        <a:xfrm>
+          <a:off x="0" y="0"/>
+          <a:ext cx="0" cy="0"/>
+          <a:chOff x="0" y="0"/>
+          <a:chExt cx="0" cy="0"/>
+        </a:xfrm>
+      </p:grpSpPr>
+      <p:sp>
+        <p:nvSpPr>
+          <p:cNvPr id="141" name="Google Shape;141;p10:notes"/>
+          <p:cNvSpPr txBox="1">
+            <a:spLocks noGrp="1"/>
+          </p:cNvSpPr>
+          <p:nvPr>
+            <p:ph type="body" idx="1"/>
+          </p:nvPr>
+        </p:nvSpPr>
+        <p:spPr>
+          <a:xfrm>
+            <a:off x="685800" y="4343400"/>
+            <a:ext cx="5486400" cy="4114800"/>
+          </a:xfrm>
+          <a:prstGeom prst="rect">
+            <a:avLst/>
+          </a:prstGeom>
+        </p:spPr>
+        <p:txBody>
+          <a:bodyPr spcFirstLastPara="1" wrap="square" lIns="91425" tIns="91425" rIns="91425" bIns="91425" anchor="t" anchorCtr="0">
+            <a:noAutofit/>
+          </a:bodyPr>
+          <a:lstStyle/>
+          <a:p>
+            <a:pPr marL="0" lvl="0" indent="0" algn="l" rtl="0">
+              <a:spcBef>
+                <a:spcPts val="0"/>
+              </a:spcBef>
+              <a:spcAft>
+                <a:spcPts val="0"/>
+              </a:spcAft>
+              <a:buNone/>
+            </a:pPr>
+            <a:endParaRPr/>
+          </a:p>
+        </p:txBody>
+      </p:sp>
+      <p:sp>
+        <p:nvSpPr>
+          <p:cNvPr id="142" name="Google Shape;142;p10:notes"/>
+          <p:cNvSpPr>
+            <a:spLocks noGrp="1" noRot="1" noChangeAspect="1"/>
+          </p:cNvSpPr>
+          <p:nvPr>
+            <p:ph type="sldImg" idx="2"/>
+          </p:nvPr>
+        </p:nvSpPr>
+        <p:spPr>
+          <a:xfrm>
+            <a:off x="381000" y="685800"/>
+            <a:ext cx="6096000" cy="3429000"/>
+          </a:xfrm>
+          <a:custGeom>
+            <a:avLst/>
+            <a:gdLst/>
+            <a:ahLst/>
+            <a:cxnLst/>
+            <a:rect l="l" t="t" r="r" b="b"/>
+            <a:pathLst>
+              <a:path w="120000" h="120000" extrusionOk="0">
+                <a:moveTo>
+                  <a:pt x="0" y="0"/>
+                </a:moveTo>
+                <a:lnTo>
+                  <a:pt x="120000" y="0"/>
+                </a:lnTo>
+                <a:lnTo>
+                  <a:pt x="120000" y="120000"/>
+                </a:lnTo>
+                <a:lnTo>
+                  <a:pt x="0" y="120000"/>
+                </a:lnTo>
+                <a:close/>
+              </a:path>
+            </a:pathLst>
+          </a:custGeom>
+        </p:spPr>
+      </p:sp>
+    </p:spTree>
+    <p:extLst>
+      <p:ext uri="{BB962C8B-B14F-4D97-AF65-F5344CB8AC3E}">
+        <p14:creationId xmlns:p14="http://schemas.microsoft.com/office/powerpoint/2010/main" val="2812431322"/>
       </p:ext>
     </p:extLst>
   </p:cSld>
@@ -11494,36 +12257,50 @@
 </file>
 
 <file path=ppt/slides/slide10.xml><?xml version="1.0" encoding="utf-8"?>
-<p:sld xmlns:a="http://schemas.openxmlformats.org/drawingml/2006/main" xmlns:p="http://schemas.openxmlformats.org/presentationml/2006/main" xmlns:r="http://schemas.openxmlformats.org/officeDocument/2006/relationships">
+<p:sld xmlns:a="http://schemas.openxmlformats.org/drawingml/2006/main" xmlns:r="http://schemas.openxmlformats.org/officeDocument/2006/relationships" xmlns:p="http://schemas.openxmlformats.org/presentationml/2006/main">
   <p:cSld>
     <p:spTree>
       <p:nvGrpSpPr>
-        <p:cNvPr id="1" name=""/>
+        <p:cNvPr id="1" name="Shape 143"/>
         <p:cNvGrpSpPr/>
         <p:nvPr/>
       </p:nvGrpSpPr>
-      <p:grpSpPr/>
+      <p:grpSpPr>
+        <a:xfrm>
+          <a:off x="0" y="0"/>
+          <a:ext cx="0" cy="0"/>
+          <a:chOff x="0" y="0"/>
+          <a:chExt cx="0" cy="0"/>
+        </a:xfrm>
+      </p:grpSpPr>
       <p:sp>
         <p:nvSpPr>
-          <p:cNvPr id="2" name="Title 1"/>
-          <p:cNvSpPr>
-            <a:spLocks noGrp="1"/>
-          </p:cNvSpPr>
-          <p:nvPr>
-            <p:ph type="title"/>
-          </p:nvPr>
+          <p:cNvPr id="2" name="TextBox 1"/>
+          <p:cNvSpPr txBox="1"/>
+          <p:nvPr/>
         </p:nvSpPr>
-        <p:spPr/>
+        <p:spPr>
+          <a:xfrm>
+            <a:off x="731520" y="365760"/>
+            <a:ext cx="10515600" cy="822960"/>
+          </a:xfrm>
+          <a:prstGeom prst="rect">
+            <a:avLst/>
+          </a:prstGeom>
+          <a:noFill/>
+        </p:spPr>
         <p:txBody>
-          <a:bodyPr/>
+          <a:bodyPr wrap="square" lIns="0" tIns="0" rIns="0" bIns="0">
+            <a:spAutoFit/>
+          </a:bodyPr>
           <a:lstStyle/>
           <a:p>
             <a:pPr>
-              <a:defRPr sz="2000" b="1">
-                <a:solidFill>
-                  <a:srgbClr val="1A365D"/>
-                </a:solidFill>
-                <a:latin typeface="Calibri"/>
+              <a:defRPr sz="2400" b="1">
+                <a:solidFill>
+                  <a:srgbClr val="102C57"/>
+                </a:solidFill>
+                <a:latin typeface="Arial"/>
               </a:defRPr>
             </a:pPr>
             <a:r>
@@ -11534,31 +12311,14 @@
       </p:sp>
       <p:sp>
         <p:nvSpPr>
-          <p:cNvPr id="3" name="Text Placeholder 2"/>
-          <p:cNvSpPr>
-            <a:spLocks noGrp="1"/>
-          </p:cNvSpPr>
-          <p:nvPr>
-            <p:ph type="body" idx="1"/>
-          </p:nvPr>
-        </p:nvSpPr>
-        <p:spPr/>
-        <p:txBody>
-          <a:bodyPr/>
-          <a:lstStyle/>
-          <a:p/>
-        </p:txBody>
-      </p:sp>
-      <p:sp>
-        <p:nvSpPr>
-          <p:cNvPr id="4" name="TextBox 3"/>
+          <p:cNvPr id="3" name="TextBox 2"/>
           <p:cNvSpPr txBox="1"/>
           <p:nvPr/>
         </p:nvSpPr>
         <p:spPr>
           <a:xfrm>
-            <a:off x="822960" y="1188720"/>
-            <a:ext cx="10515600" cy="4754880"/>
+            <a:off x="731520" y="1188720"/>
+            <a:ext cx="10515600" cy="5120640"/>
           </a:xfrm>
           <a:prstGeom prst="rect">
             <a:avLst/>
@@ -11573,161 +12333,125 @@
           <a:p>
             <a:pPr>
               <a:spcAft>
-                <a:spcPts val="600"/>
-              </a:spcAft>
-              <a:defRPr sz="1100">
-                <a:solidFill>
-                  <a:srgbClr val="1E293B"/>
-                </a:solidFill>
-                <a:latin typeface="Calibri"/>
-              </a:defRPr>
+                <a:spcPts val="400"/>
+              </a:spcAft>
             </a:pPr>
             <a:r>
-              <a:t>Proposed Innovation — Multi-Factor Cross-Source Corroboration:</a:t>
+              <a:rPr b="1" sz="1300">
+                <a:solidFill>
+                  <a:srgbClr val="102C57"/>
+                </a:solidFill>
+              </a:rPr>
+              <a:t>Proposed Innovation -- Multi-Factor Cross-Source Corroboration:</a:t>
             </a:r>
           </a:p>
           <a:p>
             <a:pPr>
               <a:spcAft>
-                <a:spcPts val="600"/>
-              </a:spcAft>
-              <a:defRPr sz="1100">
-                <a:solidFill>
-                  <a:srgbClr val="1E293B"/>
-                </a:solidFill>
-                <a:latin typeface="Calibri"/>
-              </a:defRPr>
+                <a:spcPts val="800"/>
+              </a:spcAft>
             </a:pPr>
             <a:r>
-              <a:t>Instead of trusting the article's text, TruthLens verifies the claim against the global consensus of independent reputable outlets:</a:t>
+              <a:rPr sz="1100">
+                <a:solidFill>
+                  <a:srgbClr val="212529"/>
+                </a:solidFill>
+              </a:rPr>
+              <a:t>Instead of trusting the article's text, TruthLens verifies the claim against the global consensus of independent reputable outlets:
+Formula: Credibility Score C = 0.70 * [ Evidence_Score ] + 0.30 * Source_Origin_Score - (0.25 * Manipulation_Index)
+Where Evidence_Score = sum(Source_Reputation_Weight * NLI_Agreement_Signal) / sum(Source_Reputation_Weight)</a:t>
             </a:r>
           </a:p>
           <a:p>
             <a:pPr>
               <a:spcAft>
-                <a:spcPts val="600"/>
-              </a:spcAft>
-              <a:defRPr sz="1100">
-                <a:solidFill>
-                  <a:srgbClr val="1E293B"/>
-                </a:solidFill>
-                <a:latin typeface="Calibri"/>
-              </a:defRPr>
+                <a:spcPts val="400"/>
+              </a:spcAft>
             </a:pPr>
             <a:r>
-              <a:t>Mathematical Formula: Credibility = β · [ Σ(W_rep(d_i) · Φ_NLI(i)) / Σ W_rep(d_i) · 50 + 50 ] + (1-β) · S_origin - α · M_index</a:t>
+              <a:rPr b="1" sz="1100">
+                <a:solidFill>
+                  <a:srgbClr val="3565A9"/>
+                </a:solidFill>
+              </a:rPr>
+              <a:t>1. Technical Feasibility: </a:t>
+            </a:r>
+            <a:r>
+              <a:rPr sz="1100">
+                <a:solidFill>
+                  <a:srgbClr val="212529"/>
+                </a:solidFill>
+              </a:rPr>
+              <a:t>Pretrained RoBERTa-MNLI achieves 90%+ zero-shot NLI accuracy without expensive re-training. SQLite provides &lt;0.02ms indexed lookups locally.</a:t>
             </a:r>
           </a:p>
           <a:p>
             <a:pPr>
               <a:spcAft>
-                <a:spcPts val="600"/>
-              </a:spcAft>
-              <a:defRPr sz="1100">
-                <a:solidFill>
-                  <a:srgbClr val="1E293B"/>
-                </a:solidFill>
-                <a:latin typeface="Calibri"/>
-              </a:defRPr>
+                <a:spcPts val="400"/>
+              </a:spcAft>
             </a:pPr>
             <a:r>
-              <a:t>  • W_rep(d_i): MBFC source reputation weight (Reuters = 1.0, Mixed = 0.45, Conspiracy = 0.05, Satire = 0.0)</a:t>
+              <a:rPr b="1" sz="1100">
+                <a:solidFill>
+                  <a:srgbClr val="3565A9"/>
+                </a:solidFill>
+              </a:rPr>
+              <a:t>2. Economic / Cost Feasibility ($0 Cost): </a:t>
+            </a:r>
+            <a:r>
+              <a:rPr sz="1100">
+                <a:solidFill>
+                  <a:srgbClr val="212529"/>
+                </a:solidFill>
+              </a:rPr>
+              <a:t>Uses free developer tiers of NewsAPI (100 req/day) &amp; GNews API. RoBERTa runs locally with zero cloud API billing.</a:t>
             </a:r>
           </a:p>
           <a:p>
             <a:pPr>
               <a:spcAft>
-                <a:spcPts val="600"/>
-              </a:spcAft>
-              <a:defRPr sz="1100">
-                <a:solidFill>
-                  <a:srgbClr val="1E293B"/>
-                </a:solidFill>
-                <a:latin typeface="Calibri"/>
-              </a:defRPr>
+                <a:spcPts val="400"/>
+              </a:spcAft>
             </a:pPr>
             <a:r>
-              <a:t>  • Φ_NLI(i): RoBERTa-MNLI directional agreement signal: P(Entailment) - P(Contradiction) ∈ [-1.0, +1.0]</a:t>
+              <a:rPr b="1" sz="1100">
+                <a:solidFill>
+                  <a:srgbClr val="3565A9"/>
+                </a:solidFill>
+              </a:rPr>
+              <a:t>3. Computational Feasibility: </a:t>
+            </a:r>
+            <a:r>
+              <a:rPr sz="1100">
+                <a:solidFill>
+                  <a:srgbClr val="212529"/>
+                </a:solidFill>
+              </a:rPr>
+              <a:t>GPU inference takes &lt;50ms per pair (&lt;250ms on CPU). Limiting evidence to top 5 sentences guarantees &lt;4s end-to-end latency.</a:t>
             </a:r>
           </a:p>
           <a:p>
             <a:pPr>
               <a:spcAft>
-                <a:spcPts val="600"/>
-              </a:spcAft>
-              <a:defRPr sz="1100">
-                <a:solidFill>
-                  <a:srgbClr val="1E293B"/>
-                </a:solidFill>
-                <a:latin typeface="Calibri"/>
-              </a:defRPr>
+                <a:spcPts val="400"/>
+              </a:spcAft>
             </a:pPr>
             <a:r>
-              <a:t>  • M_index: Linguistic manipulation score (0-100) scaled by penalty factor α = 0.25 | β = 0.70 (evidence weight)</a:t>
+              <a:rPr b="1" sz="1100">
+                <a:solidFill>
+                  <a:srgbClr val="3565A9"/>
+                </a:solidFill>
+              </a:rPr>
+              <a:t>4. Resource Availability: </a:t>
             </a:r>
-          </a:p>
-          <a:p>
-            <a:pPr>
-              <a:spcAft>
-                <a:spcPts val="600"/>
-              </a:spcAft>
-              <a:defRPr sz="1100">
-                <a:solidFill>
-                  <a:srgbClr val="1E293B"/>
-                </a:solidFill>
-                <a:latin typeface="Calibri"/>
-              </a:defRPr>
-            </a:pPr>
             <a:r>
-              <a:t>Feasibility Study Justification:</a:t>
-            </a:r>
-          </a:p>
-          <a:p>
-            <a:pPr>
-              <a:spcAft>
-                <a:spcPts val="600"/>
-              </a:spcAft>
-              <a:defRPr sz="1100">
-                <a:solidFill>
-                  <a:srgbClr val="1E293B"/>
-                </a:solidFill>
-                <a:latin typeface="Calibri"/>
-              </a:defRPr>
-            </a:pPr>
-            <a:r>
-              <a:t>  1. Technical Feasibility: Pretrained roberta-large-mnli provides 90%+ zero-shot inference. SQLite provides &lt;0.02ms cached lookups.</a:t>
-            </a:r>
-          </a:p>
-          <a:p>
-            <a:pPr>
-              <a:spcAft>
-                <a:spcPts val="600"/>
-              </a:spcAft>
-              <a:defRPr sz="1100">
-                <a:solidFill>
-                  <a:srgbClr val="1E293B"/>
-                </a:solidFill>
-                <a:latin typeface="Calibri"/>
-              </a:defRPr>
-            </a:pPr>
-            <a:r>
-              <a:t>  2. Economic / Cost Feasibility ($0 Cost): Uses free developer tiers of NewsAPI (100 req/day) and GNews API. Local RoBERTa execution requires zero cloud API costs.</a:t>
-            </a:r>
-          </a:p>
-          <a:p>
-            <a:pPr>
-              <a:spcAft>
-                <a:spcPts val="600"/>
-              </a:spcAft>
-              <a:defRPr sz="1100">
-                <a:solidFill>
-                  <a:srgbClr val="1E293B"/>
-                </a:solidFill>
-                <a:latin typeface="Calibri"/>
-              </a:defRPr>
-            </a:pPr>
-            <a:r>
-              <a:t>  3. Computational Feasibility: Pairwise inference is ~250ms on CPU and &lt;50ms on GPU. Total pipeline latency is sub-4 seconds.</a:t>
+              <a:rPr sz="1100">
+                <a:solidFill>
+                  <a:srgbClr val="212529"/>
+                </a:solidFill>
+              </a:rPr>
+              <a:t>Idiap research corpus (4,400+ domains), Hugging Face model hub, and standard open-source Python libraries are fully accessible.</a:t>
             </a:r>
           </a:p>
         </p:txBody>
@@ -11741,36 +12465,50 @@
 </file>
 
 <file path=ppt/slides/slide11.xml><?xml version="1.0" encoding="utf-8"?>
-<p:sld xmlns:a="http://schemas.openxmlformats.org/drawingml/2006/main" xmlns:p="http://schemas.openxmlformats.org/presentationml/2006/main" xmlns:r="http://schemas.openxmlformats.org/officeDocument/2006/relationships">
+<p:sld xmlns:a="http://schemas.openxmlformats.org/drawingml/2006/main" xmlns:r="http://schemas.openxmlformats.org/officeDocument/2006/relationships" xmlns:p="http://schemas.openxmlformats.org/presentationml/2006/main">
   <p:cSld>
     <p:spTree>
       <p:nvGrpSpPr>
-        <p:cNvPr id="1" name=""/>
+        <p:cNvPr id="1" name="Shape 149"/>
         <p:cNvGrpSpPr/>
         <p:nvPr/>
       </p:nvGrpSpPr>
-      <p:grpSpPr/>
+      <p:grpSpPr>
+        <a:xfrm>
+          <a:off x="0" y="0"/>
+          <a:ext cx="0" cy="0"/>
+          <a:chOff x="0" y="0"/>
+          <a:chExt cx="0" cy="0"/>
+        </a:xfrm>
+      </p:grpSpPr>
       <p:sp>
         <p:nvSpPr>
-          <p:cNvPr id="2" name="Title 1"/>
-          <p:cNvSpPr>
-            <a:spLocks noGrp="1"/>
-          </p:cNvSpPr>
-          <p:nvPr>
-            <p:ph type="title"/>
-          </p:nvPr>
+          <p:cNvPr id="2" name="TextBox 1"/>
+          <p:cNvSpPr txBox="1"/>
+          <p:nvPr/>
         </p:nvSpPr>
-        <p:spPr/>
+        <p:spPr>
+          <a:xfrm>
+            <a:off x="731520" y="365760"/>
+            <a:ext cx="10515600" cy="822960"/>
+          </a:xfrm>
+          <a:prstGeom prst="rect">
+            <a:avLst/>
+          </a:prstGeom>
+          <a:noFill/>
+        </p:spPr>
         <p:txBody>
-          <a:bodyPr/>
+          <a:bodyPr wrap="square" lIns="0" tIns="0" rIns="0" bIns="0">
+            <a:spAutoFit/>
+          </a:bodyPr>
           <a:lstStyle/>
           <a:p>
             <a:pPr>
-              <a:defRPr sz="2000" b="1">
-                <a:solidFill>
-                  <a:srgbClr val="1A365D"/>
-                </a:solidFill>
-                <a:latin typeface="Calibri"/>
+              <a:defRPr sz="2400" b="1">
+                <a:solidFill>
+                  <a:srgbClr val="102C57"/>
+                </a:solidFill>
+                <a:latin typeface="Arial"/>
               </a:defRPr>
             </a:pPr>
             <a:r>
@@ -11781,41 +12519,24 @@
       </p:sp>
       <p:sp>
         <p:nvSpPr>
-          <p:cNvPr id="3" name="Text Placeholder 2"/>
-          <p:cNvSpPr>
-            <a:spLocks noGrp="1"/>
-          </p:cNvSpPr>
-          <p:nvPr>
-            <p:ph type="body" idx="1"/>
-          </p:nvPr>
-        </p:nvSpPr>
-        <p:spPr/>
-        <p:txBody>
-          <a:bodyPr/>
-          <a:lstStyle/>
-          <a:p/>
-        </p:txBody>
-      </p:sp>
-      <p:sp>
-        <p:nvSpPr>
-          <p:cNvPr id="4" name="Rounded Rectangle 3"/>
+          <p:cNvPr id="3" name="Rounded Rectangle 2"/>
           <p:cNvSpPr/>
           <p:nvPr/>
         </p:nvSpPr>
         <p:spPr>
           <a:xfrm>
-            <a:off x="822960" y="1280160"/>
-            <a:ext cx="2377440" cy="4389120"/>
+            <a:off x="731520" y="1280160"/>
+            <a:ext cx="3108960" cy="4846320"/>
           </a:xfrm>
           <a:prstGeom prst="roundRect">
             <a:avLst/>
           </a:prstGeom>
           <a:solidFill>
-            <a:srgbClr val="EBF8FF"/>
+            <a:srgbClr val="F5F7FA"/>
           </a:solidFill>
-          <a:ln>
+          <a:ln w="19050">
             <a:solidFill>
-              <a:srgbClr val="2B6CB0"/>
+              <a:srgbClr val="3565A9"/>
             </a:solidFill>
           </a:ln>
         </p:spPr>
@@ -11834,18 +12555,18 @@
           </a:fontRef>
         </p:style>
         <p:txBody>
-          <a:bodyPr rtlCol="0" anchor="ctr" wrap="square"/>
+          <a:bodyPr rtlCol="0" anchor="ctr" wrap="square" lIns="109728" tIns="109728"/>
           <a:lstStyle/>
           <a:p>
             <a:pPr algn="ctr">
               <a:spcAft>
-                <a:spcPts val="1000"/>
-              </a:spcAft>
-              <a:defRPr sz="1300" b="1">
-                <a:solidFill>
-                  <a:srgbClr val="1A365D"/>
-                </a:solidFill>
-                <a:latin typeface="Calibri"/>
+                <a:spcPts val="600"/>
+              </a:spcAft>
+              <a:defRPr sz="1200" b="1">
+                <a:solidFill>
+                  <a:srgbClr val="102C57"/>
+                </a:solidFill>
+                <a:latin typeface="Arial"/>
               </a:defRPr>
             </a:pPr>
             <a:r>
@@ -11855,13 +12576,13 @@
           <a:p>
             <a:pPr>
               <a:spcAft>
-                <a:spcPts val="600"/>
-              </a:spcAft>
-              <a:defRPr sz="1000">
-                <a:solidFill>
-                  <a:srgbClr val="1E293B"/>
-                </a:solidFill>
-                <a:latin typeface="Calibri"/>
+                <a:spcPts val="200"/>
+              </a:spcAft>
+              <a:defRPr sz="1000" b="1">
+                <a:solidFill>
+                  <a:srgbClr val="102C57"/>
+                </a:solidFill>
+                <a:latin typeface="Arial"/>
               </a:defRPr>
             </a:pPr>
             <a:r>
@@ -11871,58 +12592,58 @@
           <a:p>
             <a:pPr>
               <a:spcAft>
-                <a:spcPts val="600"/>
-              </a:spcAft>
-              <a:defRPr sz="1000">
-                <a:solidFill>
-                  <a:srgbClr val="1E293B"/>
-                </a:solidFill>
-                <a:latin typeface="Calibri"/>
+                <a:spcPts val="200"/>
+              </a:spcAft>
+              <a:defRPr sz="1000" b="0">
+                <a:solidFill>
+                  <a:srgbClr val="212529"/>
+                </a:solidFill>
+                <a:latin typeface="Arial"/>
               </a:defRPr>
             </a:pPr>
             <a:r>
-              <a:t> • News Article URL</a:t>
+              <a:t> * News Article URL</a:t>
             </a:r>
           </a:p>
           <a:p>
             <a:pPr>
               <a:spcAft>
-                <a:spcPts val="600"/>
-              </a:spcAft>
-              <a:defRPr sz="1000">
-                <a:solidFill>
-                  <a:srgbClr val="1E293B"/>
-                </a:solidFill>
-                <a:latin typeface="Calibri"/>
+                <a:spcPts val="200"/>
+              </a:spcAft>
+              <a:defRPr sz="1000" b="0">
+                <a:solidFill>
+                  <a:srgbClr val="212529"/>
+                </a:solidFill>
+                <a:latin typeface="Arial"/>
               </a:defRPr>
             </a:pPr>
             <a:r>
-              <a:t> • Raw Claim Text</a:t>
+              <a:t> * Raw Claim Text</a:t>
             </a:r>
           </a:p>
           <a:p>
             <a:pPr>
               <a:spcAft>
-                <a:spcPts val="600"/>
-              </a:spcAft>
-              <a:defRPr sz="1000">
-                <a:solidFill>
-                  <a:srgbClr val="1E293B"/>
-                </a:solidFill>
-                <a:latin typeface="Calibri"/>
+                <a:spcPts val="200"/>
+              </a:spcAft>
+              <a:defRPr sz="1000" b="0">
+                <a:solidFill>
+                  <a:srgbClr val="212529"/>
+                </a:solidFill>
+                <a:latin typeface="Arial"/>
               </a:defRPr>
             </a:pPr>
           </a:p>
           <a:p>
             <a:pPr>
               <a:spcAft>
-                <a:spcPts val="600"/>
-              </a:spcAft>
-              <a:defRPr sz="1000">
-                <a:solidFill>
-                  <a:srgbClr val="1E293B"/>
-                </a:solidFill>
-                <a:latin typeface="Calibri"/>
+                <a:spcPts val="200"/>
+              </a:spcAft>
+              <a:defRPr sz="1000" b="1">
+                <a:solidFill>
+                  <a:srgbClr val="102C57"/>
+                </a:solidFill>
+                <a:latin typeface="Arial"/>
               </a:defRPr>
             </a:pPr>
             <a:r>
@@ -11932,89 +12653,89 @@
           <a:p>
             <a:pPr>
               <a:spcAft>
-                <a:spcPts val="600"/>
-              </a:spcAft>
-              <a:defRPr sz="1000">
-                <a:solidFill>
-                  <a:srgbClr val="1E293B"/>
-                </a:solidFill>
-                <a:latin typeface="Calibri"/>
+                <a:spcPts val="200"/>
+              </a:spcAft>
+              <a:defRPr sz="1000" b="0">
+                <a:solidFill>
+                  <a:srgbClr val="212529"/>
+                </a:solidFill>
+                <a:latin typeface="Arial"/>
               </a:defRPr>
             </a:pPr>
             <a:r>
-              <a:t> • Streamlit / React</a:t>
+              <a:t> * Streamlit / React</a:t>
             </a:r>
           </a:p>
           <a:p>
             <a:pPr>
               <a:spcAft>
-                <a:spcPts val="600"/>
-              </a:spcAft>
-              <a:defRPr sz="1000">
-                <a:solidFill>
-                  <a:srgbClr val="1E293B"/>
-                </a:solidFill>
-                <a:latin typeface="Calibri"/>
+                <a:spcPts val="200"/>
+              </a:spcAft>
+              <a:defRPr sz="1000" b="0">
+                <a:solidFill>
+                  <a:srgbClr val="212529"/>
+                </a:solidFill>
+                <a:latin typeface="Arial"/>
               </a:defRPr>
             </a:pPr>
             <a:r>
-              <a:t> • Credibility Gauge (0-100)</a:t>
+              <a:t> * Credibility Gauge (0-100)</a:t>
             </a:r>
           </a:p>
           <a:p>
             <a:pPr>
               <a:spcAft>
-                <a:spcPts val="600"/>
-              </a:spcAft>
-              <a:defRPr sz="1000">
-                <a:solidFill>
-                  <a:srgbClr val="1E293B"/>
-                </a:solidFill>
-                <a:latin typeface="Calibri"/>
+                <a:spcPts val="200"/>
+              </a:spcAft>
+              <a:defRPr sz="1000" b="0">
+                <a:solidFill>
+                  <a:srgbClr val="212529"/>
+                </a:solidFill>
+                <a:latin typeface="Arial"/>
               </a:defRPr>
             </a:pPr>
             <a:r>
-              <a:t> • Evidence Attribution Cards</a:t>
+              <a:t> * Evidence Attribution Cards</a:t>
             </a:r>
           </a:p>
           <a:p>
             <a:pPr>
               <a:spcAft>
-                <a:spcPts val="600"/>
-              </a:spcAft>
-              <a:defRPr sz="1000">
-                <a:solidFill>
-                  <a:srgbClr val="1E293B"/>
-                </a:solidFill>
-                <a:latin typeface="Calibri"/>
+                <a:spcPts val="200"/>
+              </a:spcAft>
+              <a:defRPr sz="1000" b="0">
+                <a:solidFill>
+                  <a:srgbClr val="212529"/>
+                </a:solidFill>
+                <a:latin typeface="Arial"/>
               </a:defRPr>
             </a:pPr>
             <a:r>
-              <a:t> • Manipulation Risk Warning</a:t>
+              <a:t> * Manipulation Risk Warning</a:t>
             </a:r>
           </a:p>
         </p:txBody>
       </p:sp>
       <p:sp>
         <p:nvSpPr>
-          <p:cNvPr id="5" name="Rounded Rectangle 4"/>
+          <p:cNvPr id="4" name="Rounded Rectangle 3"/>
           <p:cNvSpPr/>
           <p:nvPr/>
         </p:nvSpPr>
         <p:spPr>
           <a:xfrm>
-            <a:off x="3474720" y="1280160"/>
-            <a:ext cx="3291840" cy="4389120"/>
+            <a:off x="4206240" y="1280160"/>
+            <a:ext cx="3474720" cy="4846320"/>
           </a:xfrm>
           <a:prstGeom prst="roundRect">
             <a:avLst/>
           </a:prstGeom>
           <a:solidFill>
-            <a:srgbClr val="F7FAFC"/>
+            <a:srgbClr val="F5F7FA"/>
           </a:solidFill>
-          <a:ln>
+          <a:ln w="19050">
             <a:solidFill>
-              <a:srgbClr val="1A365D"/>
+              <a:srgbClr val="3565A9"/>
             </a:solidFill>
           </a:ln>
         </p:spPr>
@@ -12033,18 +12754,18 @@
           </a:fontRef>
         </p:style>
         <p:txBody>
-          <a:bodyPr rtlCol="0" anchor="ctr" wrap="square"/>
+          <a:bodyPr rtlCol="0" anchor="ctr" wrap="square" lIns="109728" tIns="109728"/>
           <a:lstStyle/>
           <a:p>
             <a:pPr algn="ctr">
               <a:spcAft>
-                <a:spcPts val="1000"/>
-              </a:spcAft>
-              <a:defRPr sz="1300" b="1">
-                <a:solidFill>
-                  <a:srgbClr val="1A365D"/>
-                </a:solidFill>
-                <a:latin typeface="Calibri"/>
+                <a:spcPts val="600"/>
+              </a:spcAft>
+              <a:defRPr sz="1200" b="1">
+                <a:solidFill>
+                  <a:srgbClr val="102C57"/>
+                </a:solidFill>
+                <a:latin typeface="Arial"/>
               </a:defRPr>
             </a:pPr>
             <a:r>
@@ -12054,13 +12775,13 @@
           <a:p>
             <a:pPr>
               <a:spcAft>
-                <a:spcPts val="600"/>
-              </a:spcAft>
-              <a:defRPr sz="1000">
-                <a:solidFill>
-                  <a:srgbClr val="1E293B"/>
-                </a:solidFill>
-                <a:latin typeface="Calibri"/>
+                <a:spcPts val="200"/>
+              </a:spcAft>
+              <a:defRPr sz="1000" b="1">
+                <a:solidFill>
+                  <a:srgbClr val="102C57"/>
+                </a:solidFill>
+                <a:latin typeface="Arial"/>
               </a:defRPr>
             </a:pPr>
             <a:r>
@@ -12070,58 +12791,58 @@
           <a:p>
             <a:pPr>
               <a:spcAft>
-                <a:spcPts val="600"/>
-              </a:spcAft>
-              <a:defRPr sz="1000">
-                <a:solidFill>
-                  <a:srgbClr val="1E293B"/>
-                </a:solidFill>
-                <a:latin typeface="Calibri"/>
+                <a:spcPts val="200"/>
+              </a:spcAft>
+              <a:defRPr sz="1000" b="0">
+                <a:solidFill>
+                  <a:srgbClr val="212529"/>
+                </a:solidFill>
+                <a:latin typeface="Arial"/>
               </a:defRPr>
             </a:pPr>
             <a:r>
-              <a:t> • /analyze/url</a:t>
+              <a:t> * /analyze/url</a:t>
             </a:r>
           </a:p>
           <a:p>
             <a:pPr>
               <a:spcAft>
-                <a:spcPts val="600"/>
-              </a:spcAft>
-              <a:defRPr sz="1000">
-                <a:solidFill>
-                  <a:srgbClr val="1E293B"/>
-                </a:solidFill>
-                <a:latin typeface="Calibri"/>
+                <a:spcPts val="200"/>
+              </a:spcAft>
+              <a:defRPr sz="1000" b="0">
+                <a:solidFill>
+                  <a:srgbClr val="212529"/>
+                </a:solidFill>
+                <a:latin typeface="Arial"/>
               </a:defRPr>
             </a:pPr>
             <a:r>
-              <a:t> • /analyze/text</a:t>
+              <a:t> * /analyze/text</a:t>
             </a:r>
           </a:p>
           <a:p>
             <a:pPr>
               <a:spcAft>
-                <a:spcPts val="600"/>
-              </a:spcAft>
-              <a:defRPr sz="1000">
-                <a:solidFill>
-                  <a:srgbClr val="1E293B"/>
-                </a:solidFill>
-                <a:latin typeface="Calibri"/>
+                <a:spcPts val="200"/>
+              </a:spcAft>
+              <a:defRPr sz="1000" b="0">
+                <a:solidFill>
+                  <a:srgbClr val="212529"/>
+                </a:solidFill>
+                <a:latin typeface="Arial"/>
               </a:defRPr>
             </a:pPr>
           </a:p>
           <a:p>
             <a:pPr>
               <a:spcAft>
-                <a:spcPts val="600"/>
-              </a:spcAft>
-              <a:defRPr sz="1000">
-                <a:solidFill>
-                  <a:srgbClr val="1E293B"/>
-                </a:solidFill>
-                <a:latin typeface="Calibri"/>
+                <a:spcPts val="200"/>
+              </a:spcAft>
+              <a:defRPr sz="1000" b="1">
+                <a:solidFill>
+                  <a:srgbClr val="102C57"/>
+                </a:solidFill>
+                <a:latin typeface="Arial"/>
               </a:defRPr>
             </a:pPr>
             <a:r>
@@ -12131,89 +12852,121 @@
           <a:p>
             <a:pPr>
               <a:spcAft>
-                <a:spcPts val="600"/>
-              </a:spcAft>
-              <a:defRPr sz="1000">
-                <a:solidFill>
-                  <a:srgbClr val="1E293B"/>
-                </a:solidFill>
-                <a:latin typeface="Calibri"/>
+                <a:spcPts val="200"/>
+              </a:spcAft>
+              <a:defRPr sz="1000" b="0">
+                <a:solidFill>
+                  <a:srgbClr val="212529"/>
+                </a:solidFill>
+                <a:latin typeface="Arial"/>
               </a:defRPr>
             </a:pPr>
             <a:r>
-              <a:t> • Web Scraper (trafilatura)</a:t>
+              <a:t> * Web Scraper (trafilatura)</a:t>
             </a:r>
           </a:p>
           <a:p>
             <a:pPr>
               <a:spcAft>
-                <a:spcPts val="600"/>
-              </a:spcAft>
-              <a:defRPr sz="1000">
-                <a:solidFill>
-                  <a:srgbClr val="1E293B"/>
-                </a:solidFill>
-                <a:latin typeface="Calibri"/>
+                <a:spcPts val="200"/>
+              </a:spcAft>
+              <a:defRPr sz="1000" b="0">
+                <a:solidFill>
+                  <a:srgbClr val="212529"/>
+                </a:solidFill>
+                <a:latin typeface="Arial"/>
               </a:defRPr>
             </a:pPr>
             <a:r>
-              <a:t> • Claim Extractor (NER/POS)</a:t>
+              <a:t> * Claim Extractor (NER/POS)</a:t>
             </a:r>
           </a:p>
           <a:p>
             <a:pPr>
               <a:spcAft>
-                <a:spcPts val="600"/>
-              </a:spcAft>
-              <a:defRPr sz="1000">
-                <a:solidFill>
-                  <a:srgbClr val="1E293B"/>
-                </a:solidFill>
-                <a:latin typeface="Calibri"/>
+                <a:spcPts val="200"/>
+              </a:spcAft>
+              <a:defRPr sz="1000" b="0">
+                <a:solidFill>
+                  <a:srgbClr val="212529"/>
+                </a:solidFill>
+                <a:latin typeface="Arial"/>
               </a:defRPr>
             </a:pPr>
             <a:r>
-              <a:t> • News Retrieval Engine (NewsAPI &amp; GNews API)</a:t>
+              <a:t> * News Retrieval Engine</a:t>
             </a:r>
           </a:p>
           <a:p>
             <a:pPr>
               <a:spcAft>
-                <a:spcPts val="600"/>
-              </a:spcAft>
-              <a:defRPr sz="1000">
-                <a:solidFill>
-                  <a:srgbClr val="1E293B"/>
-                </a:solidFill>
-                <a:latin typeface="Calibri"/>
+                <a:spcPts val="200"/>
+              </a:spcAft>
+              <a:defRPr sz="1000" b="0">
+                <a:solidFill>
+                  <a:srgbClr val="212529"/>
+                </a:solidFill>
+                <a:latin typeface="Arial"/>
               </a:defRPr>
             </a:pPr>
             <a:r>
-              <a:t> • Corroboration Pool (5-10 Outlets)</a:t>
+              <a:t>   (NewsAPI &amp; GNews API)</a:t>
+            </a:r>
+          </a:p>
+          <a:p>
+            <a:pPr>
+              <a:spcAft>
+                <a:spcPts val="200"/>
+              </a:spcAft>
+              <a:defRPr sz="1000" b="0">
+                <a:solidFill>
+                  <a:srgbClr val="212529"/>
+                </a:solidFill>
+                <a:latin typeface="Arial"/>
+              </a:defRPr>
+            </a:pPr>
+            <a:r>
+              <a:t> * Corroboration Pool</a:t>
+            </a:r>
+          </a:p>
+          <a:p>
+            <a:pPr>
+              <a:spcAft>
+                <a:spcPts val="200"/>
+              </a:spcAft>
+              <a:defRPr sz="1000" b="0">
+                <a:solidFill>
+                  <a:srgbClr val="212529"/>
+                </a:solidFill>
+                <a:latin typeface="Arial"/>
+              </a:defRPr>
+            </a:pPr>
+            <a:r>
+              <a:t>   (5-10 Outlets)</a:t>
             </a:r>
           </a:p>
         </p:txBody>
       </p:sp>
       <p:sp>
         <p:nvSpPr>
-          <p:cNvPr id="6" name="Rounded Rectangle 5"/>
+          <p:cNvPr id="5" name="Rounded Rectangle 4"/>
           <p:cNvSpPr/>
           <p:nvPr/>
         </p:nvSpPr>
         <p:spPr>
           <a:xfrm>
-            <a:off x="7040880" y="1280160"/>
-            <a:ext cx="3383280" cy="4389120"/>
+            <a:off x="8046720" y="1280160"/>
+            <a:ext cx="3200400" cy="4846320"/>
           </a:xfrm>
           <a:prstGeom prst="roundRect">
             <a:avLst/>
           </a:prstGeom>
           <a:solidFill>
-            <a:srgbClr val="FEF3C7"/>
+            <a:srgbClr val="F5F7FA"/>
           </a:solidFill>
-          <a:ln>
+          <a:ln w="19050">
             <a:solidFill>
-              <a:srgbClr val="D97706"/>
+              <a:srgbClr val="3565A9"/>
             </a:solidFill>
           </a:ln>
         </p:spPr>
@@ -12232,18 +12985,18 @@
           </a:fontRef>
         </p:style>
         <p:txBody>
-          <a:bodyPr rtlCol="0" anchor="ctr" wrap="square"/>
+          <a:bodyPr rtlCol="0" anchor="ctr" wrap="square" lIns="109728" tIns="109728"/>
           <a:lstStyle/>
           <a:p>
             <a:pPr algn="ctr">
               <a:spcAft>
-                <a:spcPts val="1000"/>
-              </a:spcAft>
-              <a:defRPr sz="1300" b="1">
-                <a:solidFill>
-                  <a:srgbClr val="1A365D"/>
-                </a:solidFill>
-                <a:latin typeface="Calibri"/>
+                <a:spcPts val="600"/>
+              </a:spcAft>
+              <a:defRPr sz="1200" b="1">
+                <a:solidFill>
+                  <a:srgbClr val="102C57"/>
+                </a:solidFill>
+                <a:latin typeface="Arial"/>
               </a:defRPr>
             </a:pPr>
             <a:r>
@@ -12253,13 +13006,13 @@
           <a:p>
             <a:pPr>
               <a:spcAft>
-                <a:spcPts val="600"/>
-              </a:spcAft>
-              <a:defRPr sz="1000">
-                <a:solidFill>
-                  <a:srgbClr val="1E293B"/>
-                </a:solidFill>
-                <a:latin typeface="Calibri"/>
+                <a:spcPts val="200"/>
+              </a:spcAft>
+              <a:defRPr sz="1000" b="1">
+                <a:solidFill>
+                  <a:srgbClr val="102C57"/>
+                </a:solidFill>
+                <a:latin typeface="Arial"/>
               </a:defRPr>
             </a:pPr>
             <a:r>
@@ -12269,74 +13022,74 @@
           <a:p>
             <a:pPr>
               <a:spcAft>
-                <a:spcPts val="600"/>
-              </a:spcAft>
-              <a:defRPr sz="1000">
-                <a:solidFill>
-                  <a:srgbClr val="1E293B"/>
-                </a:solidFill>
-                <a:latin typeface="Calibri"/>
+                <a:spcPts val="200"/>
+              </a:spcAft>
+              <a:defRPr sz="1000" b="0">
+                <a:solidFill>
+                  <a:srgbClr val="212529"/>
+                </a:solidFill>
+                <a:latin typeface="Arial"/>
               </a:defRPr>
             </a:pPr>
             <a:r>
-              <a:t> • SQLite 4,442 Domains</a:t>
+              <a:t> * SQLite 4,442 Domains</a:t>
             </a:r>
           </a:p>
           <a:p>
             <a:pPr>
               <a:spcAft>
-                <a:spcPts val="600"/>
-              </a:spcAft>
-              <a:defRPr sz="1000">
-                <a:solidFill>
-                  <a:srgbClr val="1E293B"/>
-                </a:solidFill>
-                <a:latin typeface="Calibri"/>
+                <a:spcPts val="200"/>
+              </a:spcAft>
+              <a:defRPr sz="1000" b="0">
+                <a:solidFill>
+                  <a:srgbClr val="212529"/>
+                </a:solidFill>
+                <a:latin typeface="Arial"/>
               </a:defRPr>
             </a:pPr>
             <a:r>
-              <a:t> • Multi-tier domain resolver</a:t>
+              <a:t> * Multi-tier domain resolver</a:t>
             </a:r>
           </a:p>
           <a:p>
             <a:pPr>
               <a:spcAft>
-                <a:spcPts val="600"/>
-              </a:spcAft>
-              <a:defRPr sz="1000">
-                <a:solidFill>
-                  <a:srgbClr val="1E293B"/>
-                </a:solidFill>
-                <a:latin typeface="Calibri"/>
+                <a:spcPts val="200"/>
+              </a:spcAft>
+              <a:defRPr sz="1000" b="0">
+                <a:solidFill>
+                  <a:srgbClr val="212529"/>
+                </a:solidFill>
+                <a:latin typeface="Arial"/>
               </a:defRPr>
             </a:pPr>
             <a:r>
-              <a:t> • Source weights (W_rep)</a:t>
+              <a:t> * Source weights (W_rep)</a:t>
             </a:r>
           </a:p>
           <a:p>
             <a:pPr>
               <a:spcAft>
-                <a:spcPts val="600"/>
-              </a:spcAft>
-              <a:defRPr sz="1000">
-                <a:solidFill>
-                  <a:srgbClr val="1E293B"/>
-                </a:solidFill>
-                <a:latin typeface="Calibri"/>
+                <a:spcPts val="200"/>
+              </a:spcAft>
+              <a:defRPr sz="1000" b="0">
+                <a:solidFill>
+                  <a:srgbClr val="212529"/>
+                </a:solidFill>
+                <a:latin typeface="Arial"/>
               </a:defRPr>
             </a:pPr>
           </a:p>
           <a:p>
             <a:pPr>
               <a:spcAft>
-                <a:spcPts val="600"/>
-              </a:spcAft>
-              <a:defRPr sz="1000">
-                <a:solidFill>
-                  <a:srgbClr val="1E293B"/>
-                </a:solidFill>
-                <a:latin typeface="Calibri"/>
+                <a:spcPts val="200"/>
+              </a:spcAft>
+              <a:defRPr sz="1000" b="1">
+                <a:solidFill>
+                  <a:srgbClr val="102C57"/>
+                </a:solidFill>
+                <a:latin typeface="Arial"/>
               </a:defRPr>
             </a:pPr>
             <a:r>
@@ -12346,42 +13099,42 @@
           <a:p>
             <a:pPr>
               <a:spcAft>
-                <a:spcPts val="600"/>
-              </a:spcAft>
-              <a:defRPr sz="1000">
-                <a:solidFill>
-                  <a:srgbClr val="1E293B"/>
-                </a:solidFill>
-                <a:latin typeface="Calibri"/>
+                <a:spcPts val="200"/>
+              </a:spcAft>
+              <a:defRPr sz="1000" b="0">
+                <a:solidFill>
+                  <a:srgbClr val="212529"/>
+                </a:solidFill>
+                <a:latin typeface="Arial"/>
               </a:defRPr>
             </a:pPr>
             <a:r>
-              <a:t> • Stance inference (Phi_NLI)</a:t>
+              <a:t> * Stance inference (Phi_NLI)</a:t>
             </a:r>
           </a:p>
           <a:p>
             <a:pPr>
               <a:spcAft>
-                <a:spcPts val="600"/>
-              </a:spcAft>
-              <a:defRPr sz="1000">
-                <a:solidFill>
-                  <a:srgbClr val="1E293B"/>
-                </a:solidFill>
-                <a:latin typeface="Calibri"/>
+                <a:spcPts val="200"/>
+              </a:spcAft>
+              <a:defRPr sz="1000" b="0">
+                <a:solidFill>
+                  <a:srgbClr val="212529"/>
+                </a:solidFill>
+                <a:latin typeface="Arial"/>
               </a:defRPr>
             </a:pPr>
           </a:p>
           <a:p>
             <a:pPr>
               <a:spcAft>
-                <a:spcPts val="600"/>
-              </a:spcAft>
-              <a:defRPr sz="1000">
-                <a:solidFill>
-                  <a:srgbClr val="1E293B"/>
-                </a:solidFill>
-                <a:latin typeface="Calibri"/>
+                <a:spcPts val="200"/>
+              </a:spcAft>
+              <a:defRPr sz="1000" b="1">
+                <a:solidFill>
+                  <a:srgbClr val="102C57"/>
+                </a:solidFill>
+                <a:latin typeface="Arial"/>
               </a:defRPr>
             </a:pPr>
             <a:r>
@@ -12391,42 +13144,42 @@
           <a:p>
             <a:pPr>
               <a:spcAft>
-                <a:spcPts val="600"/>
-              </a:spcAft>
-              <a:defRPr sz="1000">
-                <a:solidFill>
-                  <a:srgbClr val="1E293B"/>
-                </a:solidFill>
-                <a:latin typeface="Calibri"/>
+                <a:spcPts val="200"/>
+              </a:spcAft>
+              <a:defRPr sz="1000" b="0">
+                <a:solidFill>
+                  <a:srgbClr val="212529"/>
+                </a:solidFill>
+                <a:latin typeface="Arial"/>
               </a:defRPr>
             </a:pPr>
             <a:r>
-              <a:t> • 109 Lexical &amp; Stylistic Triggers</a:t>
+              <a:t> * 109 Lexical Triggers</a:t>
             </a:r>
           </a:p>
           <a:p>
             <a:pPr>
               <a:spcAft>
-                <a:spcPts val="600"/>
-              </a:spcAft>
-              <a:defRPr sz="1000">
-                <a:solidFill>
-                  <a:srgbClr val="1E293B"/>
-                </a:solidFill>
-                <a:latin typeface="Calibri"/>
+                <a:spcPts val="200"/>
+              </a:spcAft>
+              <a:defRPr sz="1000" b="0">
+                <a:solidFill>
+                  <a:srgbClr val="212529"/>
+                </a:solidFill>
+                <a:latin typeface="Arial"/>
               </a:defRPr>
             </a:pPr>
           </a:p>
           <a:p>
             <a:pPr>
               <a:spcAft>
-                <a:spcPts val="600"/>
-              </a:spcAft>
-              <a:defRPr sz="1000">
-                <a:solidFill>
-                  <a:srgbClr val="1E293B"/>
-                </a:solidFill>
-                <a:latin typeface="Calibri"/>
+                <a:spcPts val="200"/>
+              </a:spcAft>
+              <a:defRPr sz="1000" b="0">
+                <a:solidFill>
+                  <a:srgbClr val="212529"/>
+                </a:solidFill>
+                <a:latin typeface="Arial"/>
               </a:defRPr>
             </a:pPr>
             <a:r>
@@ -12455,25 +13208,32 @@
       <p:grpSpPr/>
       <p:sp>
         <p:nvSpPr>
-          <p:cNvPr id="2" name="Title 1"/>
-          <p:cNvSpPr>
-            <a:spLocks noGrp="1"/>
-          </p:cNvSpPr>
-          <p:nvPr>
-            <p:ph type="title"/>
-          </p:nvPr>
+          <p:cNvPr id="2" name="TextBox 1"/>
+          <p:cNvSpPr txBox="1"/>
+          <p:nvPr/>
         </p:nvSpPr>
-        <p:spPr/>
+        <p:spPr>
+          <a:xfrm>
+            <a:off x="731520" y="365760"/>
+            <a:ext cx="10515600" cy="822960"/>
+          </a:xfrm>
+          <a:prstGeom prst="rect">
+            <a:avLst/>
+          </a:prstGeom>
+          <a:noFill/>
+        </p:spPr>
         <p:txBody>
-          <a:bodyPr/>
+          <a:bodyPr wrap="square" lIns="0" tIns="0" rIns="0" bIns="0">
+            <a:spAutoFit/>
+          </a:bodyPr>
           <a:lstStyle/>
           <a:p>
             <a:pPr>
-              <a:defRPr sz="2000" b="1">
-                <a:solidFill>
-                  <a:srgbClr val="1A365D"/>
-                </a:solidFill>
-                <a:latin typeface="Calibri"/>
+              <a:defRPr sz="2400" b="1">
+                <a:solidFill>
+                  <a:srgbClr val="102C57"/>
+                </a:solidFill>
+                <a:latin typeface="Arial"/>
               </a:defRPr>
             </a:pPr>
             <a:r>
@@ -12484,31 +13244,14 @@
       </p:sp>
       <p:sp>
         <p:nvSpPr>
-          <p:cNvPr id="3" name="Text Placeholder 2"/>
-          <p:cNvSpPr>
-            <a:spLocks noGrp="1"/>
-          </p:cNvSpPr>
-          <p:nvPr>
-            <p:ph type="body" idx="1"/>
-          </p:nvPr>
-        </p:nvSpPr>
-        <p:spPr/>
-        <p:txBody>
-          <a:bodyPr/>
-          <a:lstStyle/>
-          <a:p/>
-        </p:txBody>
-      </p:sp>
-      <p:sp>
-        <p:nvSpPr>
-          <p:cNvPr id="4" name="TextBox 3"/>
+          <p:cNvPr id="3" name="TextBox 2"/>
           <p:cNvSpPr txBox="1"/>
           <p:nvPr/>
         </p:nvSpPr>
         <p:spPr>
           <a:xfrm>
-            <a:off x="822960" y="1188720"/>
-            <a:ext cx="10515600" cy="4754880"/>
+            <a:off x="731520" y="1188720"/>
+            <a:ext cx="10515600" cy="5120640"/>
           </a:xfrm>
           <a:prstGeom prst="rect">
             <a:avLst/>
@@ -12525,15 +13268,22 @@
               <a:spcAft>
                 <a:spcPts val="600"/>
               </a:spcAft>
-              <a:defRPr sz="1200">
-                <a:solidFill>
-                  <a:srgbClr val="1E293B"/>
-                </a:solidFill>
-                <a:latin typeface="Calibri"/>
-              </a:defRPr>
             </a:pPr>
             <a:r>
-              <a:t>Module 1 — Article Ingestion &amp; Web Scraper: Parses news URLs, strips HTML boilerplate, extracts clean headline and body text, and identifies publisher domain.</a:t>
+              <a:rPr b="1" sz="1100">
+                <a:solidFill>
+                  <a:srgbClr val="102C57"/>
+                </a:solidFill>
+              </a:rPr>
+              <a:t>Module 1 -- Article Ingestion &amp; Web Scraper: </a:t>
+            </a:r>
+            <a:r>
+              <a:rPr sz="1100">
+                <a:solidFill>
+                  <a:srgbClr val="212529"/>
+                </a:solidFill>
+              </a:rPr>
+              <a:t>Parses news URLs, strips HTML boilerplate, extracts clean headline and body text, and identifies publisher domain.</a:t>
             </a:r>
           </a:p>
           <a:p>
@@ -12541,15 +13291,22 @@
               <a:spcAft>
                 <a:spcPts val="600"/>
               </a:spcAft>
-              <a:defRPr sz="1200">
-                <a:solidFill>
-                  <a:srgbClr val="1E293B"/>
-                </a:solidFill>
-                <a:latin typeface="Calibri"/>
-              </a:defRPr>
             </a:pPr>
             <a:r>
-              <a:t>Module 2 — Factual Claim Extraction: Applies Named Entity Recognition (NER), quantity parsing, and quote-attribution syntax to isolate 2-3 checkable factual claims.</a:t>
+              <a:rPr b="1" sz="1100">
+                <a:solidFill>
+                  <a:srgbClr val="102C57"/>
+                </a:solidFill>
+              </a:rPr>
+              <a:t>Module 2 -- Factual Claim Extractor: </a:t>
+            </a:r>
+            <a:r>
+              <a:rPr sz="1100">
+                <a:solidFill>
+                  <a:srgbClr val="212529"/>
+                </a:solidFill>
+              </a:rPr>
+              <a:t>Applies Named Entity Recognition (NER) and syntactic heuristics to identify checkable factual assertions from subjective opinion sentences.</a:t>
             </a:r>
           </a:p>
           <a:p>
@@ -12557,15 +13314,22 @@
               <a:spcAft>
                 <a:spcPts val="600"/>
               </a:spcAft>
-              <a:defRPr sz="1200">
-                <a:solidFill>
-                  <a:srgbClr val="1E293B"/>
-                </a:solidFill>
-                <a:latin typeface="Calibri"/>
-              </a:defRPr>
             </a:pPr>
             <a:r>
-              <a:t>Module 3 — Multi-Source Evidence Retrieval: Formulates keyword queries from claims and fetches 5-10 contemporary reporting articles from NewsAPI and GNews API.</a:t>
+              <a:rPr b="1" sz="1100">
+                <a:solidFill>
+                  <a:srgbClr val="102C57"/>
+                </a:solidFill>
+              </a:rPr>
+              <a:t>Module 3 -- Evidence Retrieval Engine: </a:t>
+            </a:r>
+            <a:r>
+              <a:rPr sz="1100">
+                <a:solidFill>
+                  <a:srgbClr val="212529"/>
+                </a:solidFill>
+              </a:rPr>
+              <a:t>Constructs targeted search queries from claims and fetches 5-10 contemporary articles from NewsAPI &amp; GNews API.</a:t>
             </a:r>
           </a:p>
           <a:p>
@@ -12573,15 +13337,22 @@
               <a:spcAft>
                 <a:spcPts val="600"/>
               </a:spcAft>
-              <a:defRPr sz="1200">
-                <a:solidFill>
-                  <a:srgbClr val="1E293B"/>
-                </a:solidFill>
-                <a:latin typeface="Calibri"/>
-              </a:defRPr>
             </a:pPr>
             <a:r>
-              <a:t>Module 4 — MBFC Source Reputation Database: Queries an indexed SQLite database of 4,442 news outlets; assigns credibility weights (W_rep) and filters satire/conspiracy.</a:t>
+              <a:rPr b="1" sz="1100">
+                <a:solidFill>
+                  <a:srgbClr val="102C57"/>
+                </a:solidFill>
+              </a:rPr>
+              <a:t>Module 4 -- MBFC Source Reputation Database: </a:t>
+            </a:r>
+            <a:r>
+              <a:rPr sz="1100">
+                <a:solidFill>
+                  <a:srgbClr val="212529"/>
+                </a:solidFill>
+              </a:rPr>
+              <a:t>Queries an indexed SQLite database of 4,442 news outlets; applies canonical domain matching and assigns reliability weights (W_rep).</a:t>
             </a:r>
           </a:p>
           <a:p>
@@ -12589,15 +13360,22 @@
               <a:spcAft>
                 <a:spcPts val="600"/>
               </a:spcAft>
-              <a:defRPr sz="1200">
-                <a:solidFill>
-                  <a:srgbClr val="1E293B"/>
-                </a:solidFill>
-                <a:latin typeface="Calibri"/>
-              </a:defRPr>
             </a:pPr>
             <a:r>
-              <a:t>Module 5 — Stance Verifier &amp; Manipulation Engine: (5A) RoBERTa-MNLI classifies claim-evidence stance into Entailment/Contradiction/Neutral; (5B) scans text for 109 manipulation triggers.</a:t>
+              <a:rPr b="1" sz="1100">
+                <a:solidFill>
+                  <a:srgbClr val="102C57"/>
+                </a:solidFill>
+              </a:rPr>
+              <a:t>Module 5 -- RoBERTa-MNLI &amp; Manipulation Engine: </a:t>
+            </a:r>
+            <a:r>
+              <a:rPr sz="1100">
+                <a:solidFill>
+                  <a:srgbClr val="212529"/>
+                </a:solidFill>
+              </a:rPr>
+              <a:t>Submodule 5A evaluates semantic stance (Entailment/Contradiction/Neutral); Submodule 5B scans for 109 clickbait/panic triggers.</a:t>
             </a:r>
           </a:p>
           <a:p>
@@ -12605,15 +13383,22 @@
               <a:spcAft>
                 <a:spcPts val="600"/>
               </a:spcAft>
-              <a:defRPr sz="1200">
-                <a:solidFill>
-                  <a:srgbClr val="1E293B"/>
-                </a:solidFill>
-                <a:latin typeface="Calibri"/>
-              </a:defRPr>
             </a:pPr>
             <a:r>
-              <a:t>Module 6 — Score Aggregator &amp; Visual Dashboard: Computes the 0-100 credibility score and renders interactive evidence breakdown cards on the Streamlit web dashboard.</a:t>
+              <a:rPr b="1" sz="1100">
+                <a:solidFill>
+                  <a:srgbClr val="102C57"/>
+                </a:solidFill>
+              </a:rPr>
+              <a:t>Module 6 -- Score Aggregation &amp; Visual Dashboard: </a:t>
+            </a:r>
+            <a:r>
+              <a:rPr sz="1100">
+                <a:solidFill>
+                  <a:srgbClr val="212529"/>
+                </a:solidFill>
+              </a:rPr>
+              <a:t>Computes the final 0-100 credibility score and renders interactive evidence breakdown cards in Streamlit.</a:t>
             </a:r>
           </a:p>
         </p:txBody>
@@ -12638,25 +13423,32 @@
       <p:grpSpPr/>
       <p:sp>
         <p:nvSpPr>
-          <p:cNvPr id="2" name="Title 1"/>
-          <p:cNvSpPr>
-            <a:spLocks noGrp="1"/>
-          </p:cNvSpPr>
-          <p:nvPr>
-            <p:ph type="title"/>
-          </p:nvPr>
+          <p:cNvPr id="2" name="TextBox 1"/>
+          <p:cNvSpPr txBox="1"/>
+          <p:nvPr/>
         </p:nvSpPr>
-        <p:spPr/>
+        <p:spPr>
+          <a:xfrm>
+            <a:off x="731520" y="365760"/>
+            <a:ext cx="10515600" cy="822960"/>
+          </a:xfrm>
+          <a:prstGeom prst="rect">
+            <a:avLst/>
+          </a:prstGeom>
+          <a:noFill/>
+        </p:spPr>
         <p:txBody>
-          <a:bodyPr/>
+          <a:bodyPr wrap="square" lIns="0" tIns="0" rIns="0" bIns="0">
+            <a:spAutoFit/>
+          </a:bodyPr>
           <a:lstStyle/>
           <a:p>
             <a:pPr>
-              <a:defRPr sz="2000" b="1">
-                <a:solidFill>
-                  <a:srgbClr val="1A365D"/>
-                </a:solidFill>
-                <a:latin typeface="Calibri"/>
+              <a:defRPr sz="2400" b="1">
+                <a:solidFill>
+                  <a:srgbClr val="102C57"/>
+                </a:solidFill>
+                <a:latin typeface="Arial"/>
               </a:defRPr>
             </a:pPr>
             <a:r>
@@ -12665,34 +13457,17 @@
           </a:p>
         </p:txBody>
       </p:sp>
-      <p:sp>
-        <p:nvSpPr>
-          <p:cNvPr id="3" name="Text Placeholder 2"/>
-          <p:cNvSpPr>
-            <a:spLocks noGrp="1"/>
-          </p:cNvSpPr>
-          <p:nvPr>
-            <p:ph type="body" idx="1"/>
-          </p:nvPr>
-        </p:nvSpPr>
-        <p:spPr/>
-        <p:txBody>
-          <a:bodyPr/>
-          <a:lstStyle/>
-          <a:p/>
-        </p:txBody>
-      </p:sp>
       <p:graphicFrame>
         <p:nvGraphicFramePr>
-          <p:cNvPr id="4" name="Table 3"/>
+          <p:cNvPr id="3" name="Table 2"/>
           <p:cNvGraphicFramePr>
             <a:graphicFrameLocks noGrp="1"/>
           </p:cNvGraphicFramePr>
           <p:nvPr/>
         </p:nvGraphicFramePr>
         <p:xfrm>
-          <a:off x="822960" y="1188720"/>
-          <a:ext cx="10515600" cy="4389120"/>
+          <a:off x="731520" y="1188720"/>
+          <a:ext cx="10515600" cy="5120640"/>
         </p:xfrm>
         <a:graphic>
           <a:graphicData uri="http://schemas.openxmlformats.org/drawingml/2006/table">
@@ -12702,21 +13477,21 @@
               </a:tblPr>
               <a:tblGrid>
                 <a:gridCol w="2286000"/>
-                <a:gridCol w="4114800"/>
-                <a:gridCol w="4114800"/>
+                <a:gridCol w="3840480"/>
+                <a:gridCol w="4389120"/>
               </a:tblGrid>
-              <a:tr h="627017">
+              <a:tr h="465512">
                 <a:tc>
                   <a:txBody>
                     <a:bodyPr/>
                     <a:lstStyle/>
                     <a:p>
                       <a:pPr algn="l">
-                        <a:defRPr sz="1100" b="1">
+                        <a:defRPr sz="950" b="1">
                           <a:solidFill>
-                            <a:srgbClr val="1A365D"/>
+                            <a:srgbClr val="FFFFFF"/>
                           </a:solidFill>
-                          <a:latin typeface="Calibri"/>
+                          <a:latin typeface="Arial"/>
                         </a:defRPr>
                       </a:pPr>
                       <a:r>
@@ -12724,9 +13499,9 @@
                       </a:r>
                     </a:p>
                   </a:txBody>
-                  <a:tcPr>
+                  <a:tcPr marL="73152" marR="73152" marT="45720" marB="45720" anchor="ctr">
                     <a:solidFill>
-                      <a:srgbClr val="EDF2F7"/>
+                      <a:srgbClr val="102C57"/>
                     </a:solidFill>
                   </a:tcPr>
                 </a:tc>
@@ -12736,21 +13511,21 @@
                     <a:lstStyle/>
                     <a:p>
                       <a:pPr algn="l">
-                        <a:defRPr sz="1100" b="1">
+                        <a:defRPr sz="950" b="1">
                           <a:solidFill>
-                            <a:srgbClr val="1A365D"/>
+                            <a:srgbClr val="FFFFFF"/>
                           </a:solidFill>
-                          <a:latin typeface="Calibri"/>
+                          <a:latin typeface="Arial"/>
                         </a:defRPr>
                       </a:pPr>
                       <a:r>
-                        <a:t>Specification / Library Used</a:t>
+                        <a:t>Technology / Specification</a:t>
                       </a:r>
                     </a:p>
                   </a:txBody>
-                  <a:tcPr>
+                  <a:tcPr marL="73152" marR="73152" marT="45720" marB="45720" anchor="ctr">
                     <a:solidFill>
-                      <a:srgbClr val="EDF2F7"/>
+                      <a:srgbClr val="102C57"/>
                     </a:solidFill>
                   </a:tcPr>
                 </a:tc>
@@ -12760,37 +13535,37 @@
                     <a:lstStyle/>
                     <a:p>
                       <a:pPr algn="l">
-                        <a:defRPr sz="1100" b="1">
+                        <a:defRPr sz="950" b="1">
                           <a:solidFill>
-                            <a:srgbClr val="1A365D"/>
+                            <a:srgbClr val="FFFFFF"/>
                           </a:solidFill>
-                          <a:latin typeface="Calibri"/>
+                          <a:latin typeface="Arial"/>
                         </a:defRPr>
                       </a:pPr>
                       <a:r>
-                        <a:t>Role in TruthLens System</a:t>
+                        <a:t>Purpose in TruthLens Architecture</a:t>
                       </a:r>
                     </a:p>
                   </a:txBody>
-                  <a:tcPr>
+                  <a:tcPr marL="73152" marR="73152" marT="45720" marB="45720" anchor="ctr">
                     <a:solidFill>
-                      <a:srgbClr val="EDF2F7"/>
+                      <a:srgbClr val="102C57"/>
                     </a:solidFill>
                   </a:tcPr>
                 </a:tc>
               </a:tr>
-              <a:tr h="627017">
+              <a:tr h="465512">
                 <a:tc>
                   <a:txBody>
                     <a:bodyPr/>
                     <a:lstStyle/>
                     <a:p>
                       <a:pPr algn="l">
-                        <a:defRPr sz="1000" b="1">
+                        <a:defRPr sz="850" b="0">
                           <a:solidFill>
-                            <a:srgbClr val="1E293B"/>
+                            <a:srgbClr val="212529"/>
                           </a:solidFill>
-                          <a:latin typeface="Calibri"/>
+                          <a:latin typeface="Arial"/>
                         </a:defRPr>
                       </a:pPr>
                       <a:r>
@@ -12798,9 +13573,9 @@
                       </a:r>
                     </a:p>
                   </a:txBody>
-                  <a:tcPr>
+                  <a:tcPr marL="73152" marR="73152" marT="45720" marB="45720" anchor="ctr">
                     <a:solidFill>
-                      <a:srgbClr val="FFFFFF"/>
+                      <a:srgbClr val="F5F7FA"/>
                     </a:solidFill>
                   </a:tcPr>
                 </a:tc>
@@ -12810,21 +13585,21 @@
                     <a:lstStyle/>
                     <a:p>
                       <a:pPr algn="l">
-                        <a:defRPr sz="1000" b="0">
+                        <a:defRPr sz="850" b="0">
                           <a:solidFill>
-                            <a:srgbClr val="1E293B"/>
+                            <a:srgbClr val="212529"/>
                           </a:solidFill>
-                          <a:latin typeface="Calibri"/>
+                          <a:latin typeface="Arial"/>
                         </a:defRPr>
                       </a:pPr>
                       <a:r>
-                        <a:t>Python 3.11.9+</a:t>
+                        <a:t>Python 3.11+</a:t>
                       </a:r>
                     </a:p>
                   </a:txBody>
-                  <a:tcPr>
+                  <a:tcPr marL="73152" marR="73152" marT="45720" marB="45720" anchor="ctr">
                     <a:solidFill>
-                      <a:srgbClr val="FFFFFF"/>
+                      <a:srgbClr val="F5F7FA"/>
                     </a:solidFill>
                   </a:tcPr>
                 </a:tc>
@@ -12834,37 +13609,37 @@
                     <a:lstStyle/>
                     <a:p>
                       <a:pPr algn="l">
-                        <a:defRPr sz="1000" b="0">
+                        <a:defRPr sz="850" b="0">
                           <a:solidFill>
-                            <a:srgbClr val="1E293B"/>
+                            <a:srgbClr val="212529"/>
                           </a:solidFill>
-                          <a:latin typeface="Calibri"/>
+                          <a:latin typeface="Arial"/>
                         </a:defRPr>
                       </a:pPr>
                       <a:r>
-                        <a:t>Core runtime and pipeline orchestration</a:t>
+                        <a:t>Core runtime for ML pipeline, API server, and data ingestion</a:t>
                       </a:r>
                     </a:p>
                   </a:txBody>
-                  <a:tcPr>
+                  <a:tcPr marL="73152" marR="73152" marT="45720" marB="45720" anchor="ctr">
                     <a:solidFill>
-                      <a:srgbClr val="FFFFFF"/>
+                      <a:srgbClr val="F5F7FA"/>
                     </a:solidFill>
                   </a:tcPr>
                 </a:tc>
               </a:tr>
-              <a:tr h="627017">
+              <a:tr h="465512">
                 <a:tc>
                   <a:txBody>
                     <a:bodyPr/>
                     <a:lstStyle/>
                     <a:p>
                       <a:pPr algn="l">
-                        <a:defRPr sz="1000" b="1">
+                        <a:defRPr sz="850" b="0">
                           <a:solidFill>
-                            <a:srgbClr val="1E293B"/>
+                            <a:srgbClr val="212529"/>
                           </a:solidFill>
-                          <a:latin typeface="Calibri"/>
+                          <a:latin typeface="Arial"/>
                         </a:defRPr>
                       </a:pPr>
                       <a:r>
@@ -12872,9 +13647,71 @@
                       </a:r>
                     </a:p>
                   </a:txBody>
-                  <a:tcPr>
+                  <a:tcPr marL="73152" marR="73152" marT="45720" marB="45720" anchor="ctr"/>
+                </a:tc>
+                <a:tc>
+                  <a:txBody>
+                    <a:bodyPr/>
+                    <a:lstStyle/>
+                    <a:p>
+                      <a:pPr algn="l">
+                        <a:defRPr sz="850" b="0">
+                          <a:solidFill>
+                            <a:srgbClr val="212529"/>
+                          </a:solidFill>
+                          <a:latin typeface="Arial"/>
+                        </a:defRPr>
+                      </a:pPr>
+                      <a:r>
+                        <a:t>Hugging Face Transformers, PyTorch, roberta-large-mnli</a:t>
+                      </a:r>
+                    </a:p>
+                  </a:txBody>
+                  <a:tcPr marL="73152" marR="73152" marT="45720" marB="45720" anchor="ctr"/>
+                </a:tc>
+                <a:tc>
+                  <a:txBody>
+                    <a:bodyPr/>
+                    <a:lstStyle/>
+                    <a:p>
+                      <a:pPr algn="l">
+                        <a:defRPr sz="850" b="0">
+                          <a:solidFill>
+                            <a:srgbClr val="212529"/>
+                          </a:solidFill>
+                          <a:latin typeface="Arial"/>
+                        </a:defRPr>
+                      </a:pPr>
+                      <a:r>
+                        <a:t>Semantic Natural Language Inference (Entailment, Contradiction, Neutral)</a:t>
+                      </a:r>
+                    </a:p>
+                  </a:txBody>
+                  <a:tcPr marL="73152" marR="73152" marT="45720" marB="45720" anchor="ctr"/>
+                </a:tc>
+              </a:tr>
+              <a:tr h="465512">
+                <a:tc>
+                  <a:txBody>
+                    <a:bodyPr/>
+                    <a:lstStyle/>
+                    <a:p>
+                      <a:pPr algn="l">
+                        <a:defRPr sz="850" b="0">
+                          <a:solidFill>
+                            <a:srgbClr val="212529"/>
+                          </a:solidFill>
+                          <a:latin typeface="Arial"/>
+                        </a:defRPr>
+                      </a:pPr>
+                      <a:r>
+                        <a:t>Domain &amp; URL Engine</a:t>
+                      </a:r>
+                    </a:p>
+                  </a:txBody>
+                  <a:tcPr marL="73152" marR="73152" marT="45720" marB="45720" anchor="ctr">
                     <a:solidFill>
-                      <a:srgbClr val="F8FAFC"/>
+                      <a:srgbClr val="F5F7FA"/>
                     </a:solidFill>
                   </a:tcPr>
                 </a:tc>
@@ -12884,21 +13721,21 @@
                     <a:lstStyle/>
                     <a:p>
                       <a:pPr algn="l">
-                        <a:defRPr sz="1000" b="0">
+                        <a:defRPr sz="850" b="0">
                           <a:solidFill>
-                            <a:srgbClr val="1E293B"/>
+                            <a:srgbClr val="212529"/>
                           </a:solidFill>
-                          <a:latin typeface="Calibri"/>
+                          <a:latin typeface="Arial"/>
                         </a:defRPr>
                       </a:pPr>
                       <a:r>
-                        <a:t>PyTorch 2.1+, Hugging Face Transformers, RoBERTa-MNLI</a:t>
+                        <a:t>tldextract, Custom Canonical Resolver</a:t>
                       </a:r>
                     </a:p>
                   </a:txBody>
-                  <a:tcPr>
+                  <a:tcPr marL="73152" marR="73152" marT="45720" marB="45720" anchor="ctr">
                     <a:solidFill>
-                      <a:srgbClr val="F8FAFC"/>
+                      <a:srgbClr val="F5F7FA"/>
                     </a:solidFill>
                   </a:tcPr>
                 </a:tc>
@@ -12908,47 +13745,109 @@
                     <a:lstStyle/>
                     <a:p>
                       <a:pPr algn="l">
-                        <a:defRPr sz="1000" b="0">
+                        <a:defRPr sz="850" b="0">
                           <a:solidFill>
-                            <a:srgbClr val="1E293B"/>
+                            <a:srgbClr val="212529"/>
                           </a:solidFill>
-                          <a:latin typeface="Calibri"/>
+                          <a:latin typeface="Arial"/>
                         </a:defRPr>
                       </a:pPr>
                       <a:r>
-                        <a:t>Natural Language Inference (claim vs. evidence agreement)</a:t>
+                        <a:t>Subdomain stripping, multi-part TLD resolution (.co.uk, .gov.in)</a:t>
                       </a:r>
                     </a:p>
                   </a:txBody>
-                  <a:tcPr>
+                  <a:tcPr marL="73152" marR="73152" marT="45720" marB="45720" anchor="ctr">
                     <a:solidFill>
-                      <a:srgbClr val="F8FAFC"/>
+                      <a:srgbClr val="F5F7FA"/>
                     </a:solidFill>
                   </a:tcPr>
                 </a:tc>
               </a:tr>
-              <a:tr h="627017">
+              <a:tr h="465512">
                 <a:tc>
                   <a:txBody>
                     <a:bodyPr/>
                     <a:lstStyle/>
                     <a:p>
                       <a:pPr algn="l">
-                        <a:defRPr sz="1000" b="1">
+                        <a:defRPr sz="850" b="0">
                           <a:solidFill>
-                            <a:srgbClr val="1E293B"/>
+                            <a:srgbClr val="212529"/>
                           </a:solidFill>
-                          <a:latin typeface="Calibri"/>
+                          <a:latin typeface="Arial"/>
                         </a:defRPr>
                       </a:pPr>
                       <a:r>
-                        <a:t>Database Engine</a:t>
+                        <a:t>Database Layer</a:t>
                       </a:r>
                     </a:p>
                   </a:txBody>
-                  <a:tcPr>
+                  <a:tcPr marL="73152" marR="73152" marT="45720" marB="45720" anchor="ctr"/>
+                </a:tc>
+                <a:tc>
+                  <a:txBody>
+                    <a:bodyPr/>
+                    <a:lstStyle/>
+                    <a:p>
+                      <a:pPr algn="l">
+                        <a:defRPr sz="850" b="0">
+                          <a:solidFill>
+                            <a:srgbClr val="212529"/>
+                          </a:solidFill>
+                          <a:latin typeface="Arial"/>
+                        </a:defRPr>
+                      </a:pPr>
+                      <a:r>
+                        <a:t>SQLite 3 (Indexed embedded database)</a:t>
+                      </a:r>
+                    </a:p>
+                  </a:txBody>
+                  <a:tcPr marL="73152" marR="73152" marT="45720" marB="45720" anchor="ctr"/>
+                </a:tc>
+                <a:tc>
+                  <a:txBody>
+                    <a:bodyPr/>
+                    <a:lstStyle/>
+                    <a:p>
+                      <a:pPr algn="l">
+                        <a:defRPr sz="850" b="0">
+                          <a:solidFill>
+                            <a:srgbClr val="212529"/>
+                          </a:solidFill>
+                          <a:latin typeface="Arial"/>
+                        </a:defRPr>
+                      </a:pPr>
+                      <a:r>
+                        <a:t>Sub-millisecond source reputation lookup across 4,442 outlets (&lt;0.02ms)</a:t>
+                      </a:r>
+                    </a:p>
+                  </a:txBody>
+                  <a:tcPr marL="73152" marR="73152" marT="45720" marB="45720" anchor="ctr"/>
+                </a:tc>
+              </a:tr>
+              <a:tr h="465512">
+                <a:tc>
+                  <a:txBody>
+                    <a:bodyPr/>
+                    <a:lstStyle/>
+                    <a:p>
+                      <a:pPr algn="l">
+                        <a:defRPr sz="850" b="0">
+                          <a:solidFill>
+                            <a:srgbClr val="212529"/>
+                          </a:solidFill>
+                          <a:latin typeface="Arial"/>
+                        </a:defRPr>
+                      </a:pPr>
+                      <a:r>
+                        <a:t>Evidence Retrieval APIs</a:t>
+                      </a:r>
+                    </a:p>
+                  </a:txBody>
+                  <a:tcPr marL="73152" marR="73152" marT="45720" marB="45720" anchor="ctr">
                     <a:solidFill>
-                      <a:srgbClr val="FFFFFF"/>
+                      <a:srgbClr val="F5F7FA"/>
                     </a:solidFill>
                   </a:tcPr>
                 </a:tc>
@@ -12958,21 +13857,21 @@
                     <a:lstStyle/>
                     <a:p>
                       <a:pPr algn="l">
-                        <a:defRPr sz="1000" b="0">
+                        <a:defRPr sz="850" b="0">
                           <a:solidFill>
-                            <a:srgbClr val="1E293B"/>
+                            <a:srgbClr val="212529"/>
                           </a:solidFill>
-                          <a:latin typeface="Calibri"/>
+                          <a:latin typeface="Arial"/>
                         </a:defRPr>
                       </a:pPr>
                       <a:r>
-                        <a:t>SQLite 3 (B-Tree indexed local database)</a:t>
+                        <a:t>NewsAPI &amp; GNews API (Free Developer Tier)</a:t>
                       </a:r>
                     </a:p>
                   </a:txBody>
-                  <a:tcPr>
+                  <a:tcPr marL="73152" marR="73152" marT="45720" marB="45720" anchor="ctr">
                     <a:solidFill>
-                      <a:srgbClr val="FFFFFF"/>
+                      <a:srgbClr val="F5F7FA"/>
                     </a:solidFill>
                   </a:tcPr>
                 </a:tc>
@@ -12982,47 +13881,109 @@
                     <a:lstStyle/>
                     <a:p>
                       <a:pPr algn="l">
-                        <a:defRPr sz="1000" b="0">
+                        <a:defRPr sz="850" b="0">
                           <a:solidFill>
-                            <a:srgbClr val="1E293B"/>
+                            <a:srgbClr val="212529"/>
                           </a:solidFill>
-                          <a:latin typeface="Calibri"/>
+                          <a:latin typeface="Arial"/>
                         </a:defRPr>
                       </a:pPr>
                       <a:r>
-                        <a:t>Sub-millisecond source reputation lookup (4,442 outlets)</a:t>
+                        <a:t>Live multi-source news article search across 80,000+ publishers</a:t>
                       </a:r>
                     </a:p>
                   </a:txBody>
-                  <a:tcPr>
+                  <a:tcPr marL="73152" marR="73152" marT="45720" marB="45720" anchor="ctr">
                     <a:solidFill>
-                      <a:srgbClr val="FFFFFF"/>
+                      <a:srgbClr val="F5F7FA"/>
                     </a:solidFill>
                   </a:tcPr>
                 </a:tc>
               </a:tr>
-              <a:tr h="627017">
+              <a:tr h="465512">
                 <a:tc>
                   <a:txBody>
                     <a:bodyPr/>
                     <a:lstStyle/>
                     <a:p>
                       <a:pPr algn="l">
-                        <a:defRPr sz="1000" b="1">
+                        <a:defRPr sz="850" b="0">
                           <a:solidFill>
-                            <a:srgbClr val="1E293B"/>
+                            <a:srgbClr val="212529"/>
                           </a:solidFill>
-                          <a:latin typeface="Calibri"/>
+                          <a:latin typeface="Arial"/>
                         </a:defRPr>
                       </a:pPr>
                       <a:r>
-                        <a:t>Web &amp; Backend API</a:t>
+                        <a:t>Web Scraping &amp; Parser</a:t>
                       </a:r>
                     </a:p>
                   </a:txBody>
-                  <a:tcPr>
+                  <a:tcPr marL="73152" marR="73152" marT="45720" marB="45720" anchor="ctr"/>
+                </a:tc>
+                <a:tc>
+                  <a:txBody>
+                    <a:bodyPr/>
+                    <a:lstStyle/>
+                    <a:p>
+                      <a:pPr algn="l">
+                        <a:defRPr sz="850" b="0">
+                          <a:solidFill>
+                            <a:srgbClr val="212529"/>
+                          </a:solidFill>
+                          <a:latin typeface="Arial"/>
+                        </a:defRPr>
+                      </a:pPr>
+                      <a:r>
+                        <a:t>trafilatura, newspaper3k</a:t>
+                      </a:r>
+                    </a:p>
+                  </a:txBody>
+                  <a:tcPr marL="73152" marR="73152" marT="45720" marB="45720" anchor="ctr"/>
+                </a:tc>
+                <a:tc>
+                  <a:txBody>
+                    <a:bodyPr/>
+                    <a:lstStyle/>
+                    <a:p>
+                      <a:pPr algn="l">
+                        <a:defRPr sz="850" b="0">
+                          <a:solidFill>
+                            <a:srgbClr val="212529"/>
+                          </a:solidFill>
+                          <a:latin typeface="Arial"/>
+                        </a:defRPr>
+                      </a:pPr>
+                      <a:r>
+                        <a:t>Robust article body, author, date, and clean text extraction</a:t>
+                      </a:r>
+                    </a:p>
+                  </a:txBody>
+                  <a:tcPr marL="73152" marR="73152" marT="45720" marB="45720" anchor="ctr"/>
+                </a:tc>
+              </a:tr>
+              <a:tr h="465512">
+                <a:tc>
+                  <a:txBody>
+                    <a:bodyPr/>
+                    <a:lstStyle/>
+                    <a:p>
+                      <a:pPr algn="l">
+                        <a:defRPr sz="850" b="0">
+                          <a:solidFill>
+                            <a:srgbClr val="212529"/>
+                          </a:solidFill>
+                          <a:latin typeface="Arial"/>
+                        </a:defRPr>
+                      </a:pPr>
+                      <a:r>
+                        <a:t>Backend REST API</a:t>
+                      </a:r>
+                    </a:p>
+                  </a:txBody>
+                  <a:tcPr marL="73152" marR="73152" marT="45720" marB="45720" anchor="ctr">
                     <a:solidFill>
-                      <a:srgbClr val="F8FAFC"/>
+                      <a:srgbClr val="F5F7FA"/>
                     </a:solidFill>
                   </a:tcPr>
                 </a:tc>
@@ -13032,21 +13993,21 @@
                     <a:lstStyle/>
                     <a:p>
                       <a:pPr algn="l">
-                        <a:defRPr sz="1000" b="0">
+                        <a:defRPr sz="850" b="0">
                           <a:solidFill>
-                            <a:srgbClr val="1E293B"/>
+                            <a:srgbClr val="212529"/>
                           </a:solidFill>
-                          <a:latin typeface="Calibri"/>
+                          <a:latin typeface="Arial"/>
                         </a:defRPr>
                       </a:pPr>
                       <a:r>
-                        <a:t>FastAPI 0.104+, Uvicorn, Requests, trafilatura</a:t>
+                        <a:t>FastAPI, Uvicorn, Pydantic v2</a:t>
                       </a:r>
                     </a:p>
                   </a:txBody>
-                  <a:tcPr>
+                  <a:tcPr marL="73152" marR="73152" marT="45720" marB="45720" anchor="ctr">
                     <a:solidFill>
-                      <a:srgbClr val="F8FAFC"/>
+                      <a:srgbClr val="F5F7FA"/>
                     </a:solidFill>
                   </a:tcPr>
                 </a:tc>
@@ -13056,37 +14017,37 @@
                     <a:lstStyle/>
                     <a:p>
                       <a:pPr algn="l">
-                        <a:defRPr sz="1000" b="0">
+                        <a:defRPr sz="850" b="0">
                           <a:solidFill>
-                            <a:srgbClr val="1E293B"/>
+                            <a:srgbClr val="212529"/>
                           </a:solidFill>
-                          <a:latin typeface="Calibri"/>
+                          <a:latin typeface="Arial"/>
                         </a:defRPr>
                       </a:pPr>
                       <a:r>
-                        <a:t>High-throughput asynchronous REST API &amp; web scraping</a:t>
+                        <a:t>Asynchronous, high-throughput REST API endpoints (/analyze, /source)</a:t>
                       </a:r>
                     </a:p>
                   </a:txBody>
-                  <a:tcPr>
+                  <a:tcPr marL="73152" marR="73152" marT="45720" marB="45720" anchor="ctr">
                     <a:solidFill>
-                      <a:srgbClr val="F8FAFC"/>
+                      <a:srgbClr val="F5F7FA"/>
                     </a:solidFill>
                   </a:tcPr>
                 </a:tc>
               </a:tr>
-              <a:tr h="627017">
+              <a:tr h="465512">
                 <a:tc>
                   <a:txBody>
                     <a:bodyPr/>
                     <a:lstStyle/>
                     <a:p>
                       <a:pPr algn="l">
-                        <a:defRPr sz="1000" b="1">
+                        <a:defRPr sz="850" b="0">
                           <a:solidFill>
-                            <a:srgbClr val="1E293B"/>
+                            <a:srgbClr val="212529"/>
                           </a:solidFill>
-                          <a:latin typeface="Calibri"/>
+                          <a:latin typeface="Arial"/>
                         </a:defRPr>
                       </a:pPr>
                       <a:r>
@@ -13094,9 +14055,71 @@
                       </a:r>
                     </a:p>
                   </a:txBody>
-                  <a:tcPr>
+                  <a:tcPr marL="73152" marR="73152" marT="45720" marB="45720" anchor="ctr"/>
+                </a:tc>
+                <a:tc>
+                  <a:txBody>
+                    <a:bodyPr/>
+                    <a:lstStyle/>
+                    <a:p>
+                      <a:pPr algn="l">
+                        <a:defRPr sz="850" b="0">
+                          <a:solidFill>
+                            <a:srgbClr val="212529"/>
+                          </a:solidFill>
+                          <a:latin typeface="Arial"/>
+                        </a:defRPr>
+                      </a:pPr>
+                      <a:r>
+                        <a:t>Streamlit / React</a:t>
+                      </a:r>
+                    </a:p>
+                  </a:txBody>
+                  <a:tcPr marL="73152" marR="73152" marT="45720" marB="45720" anchor="ctr"/>
+                </a:tc>
+                <a:tc>
+                  <a:txBody>
+                    <a:bodyPr/>
+                    <a:lstStyle/>
+                    <a:p>
+                      <a:pPr algn="l">
+                        <a:defRPr sz="850" b="0">
+                          <a:solidFill>
+                            <a:srgbClr val="212529"/>
+                          </a:solidFill>
+                          <a:latin typeface="Arial"/>
+                        </a:defRPr>
+                      </a:pPr>
+                      <a:r>
+                        <a:t>Interactive user dashboard with credibility gauges &amp; evidence cards</a:t>
+                      </a:r>
+                    </a:p>
+                  </a:txBody>
+                  <a:tcPr marL="73152" marR="73152" marT="45720" marB="45720" anchor="ctr"/>
+                </a:tc>
+              </a:tr>
+              <a:tr h="465512">
+                <a:tc>
+                  <a:txBody>
+                    <a:bodyPr/>
+                    <a:lstStyle/>
+                    <a:p>
+                      <a:pPr algn="l">
+                        <a:defRPr sz="850" b="0">
+                          <a:solidFill>
+                            <a:srgbClr val="212529"/>
+                          </a:solidFill>
+                          <a:latin typeface="Arial"/>
+                        </a:defRPr>
+                      </a:pPr>
+                      <a:r>
+                        <a:t>Testing &amp; Quality</a:t>
+                      </a:r>
+                    </a:p>
+                  </a:txBody>
+                  <a:tcPr marL="73152" marR="73152" marT="45720" marB="45720" anchor="ctr">
                     <a:solidFill>
-                      <a:srgbClr val="FFFFFF"/>
+                      <a:srgbClr val="F5F7FA"/>
                     </a:solidFill>
                   </a:tcPr>
                 </a:tc>
@@ -13106,21 +14129,21 @@
                     <a:lstStyle/>
                     <a:p>
                       <a:pPr algn="l">
-                        <a:defRPr sz="1000" b="0">
+                        <a:defRPr sz="850" b="0">
                           <a:solidFill>
-                            <a:srgbClr val="1E293B"/>
+                            <a:srgbClr val="212529"/>
                           </a:solidFill>
-                          <a:latin typeface="Calibri"/>
+                          <a:latin typeface="Arial"/>
                         </a:defRPr>
                       </a:pPr>
                       <a:r>
-                        <a:t>Streamlit 1.28+ / React 18</a:t>
+                        <a:t>pytest 9.1+ (13 unit tests passed)</a:t>
                       </a:r>
                     </a:p>
                   </a:txBody>
-                  <a:tcPr>
+                  <a:tcPr marL="73152" marR="73152" marT="45720" marB="45720" anchor="ctr">
                     <a:solidFill>
-                      <a:srgbClr val="FFFFFF"/>
+                      <a:srgbClr val="F5F7FA"/>
                     </a:solidFill>
                   </a:tcPr>
                 </a:tc>
@@ -13130,49 +14153,45 @@
                     <a:lstStyle/>
                     <a:p>
                       <a:pPr algn="l">
-                        <a:defRPr sz="1000" b="0">
+                        <a:defRPr sz="850" b="0">
                           <a:solidFill>
-                            <a:srgbClr val="1E293B"/>
+                            <a:srgbClr val="212529"/>
                           </a:solidFill>
-                          <a:latin typeface="Calibri"/>
+                          <a:latin typeface="Arial"/>
                         </a:defRPr>
                       </a:pPr>
                       <a:r>
-                        <a:t>Interactive real-time user interface and evidence cards</a:t>
+                        <a:t>Automated domain resolution, scoring, and manipulation tests</a:t>
                       </a:r>
                     </a:p>
                   </a:txBody>
-                  <a:tcPr>
+                  <a:tcPr marL="73152" marR="73152" marT="45720" marB="45720" anchor="ctr">
                     <a:solidFill>
-                      <a:srgbClr val="FFFFFF"/>
+                      <a:srgbClr val="F5F7FA"/>
                     </a:solidFill>
                   </a:tcPr>
                 </a:tc>
               </a:tr>
-              <a:tr h="627018">
+              <a:tr h="465520">
                 <a:tc>
                   <a:txBody>
                     <a:bodyPr/>
                     <a:lstStyle/>
                     <a:p>
                       <a:pPr algn="l">
-                        <a:defRPr sz="1000" b="1">
+                        <a:defRPr sz="850" b="0">
                           <a:solidFill>
-                            <a:srgbClr val="1E293B"/>
+                            <a:srgbClr val="212529"/>
                           </a:solidFill>
-                          <a:latin typeface="Calibri"/>
+                          <a:latin typeface="Arial"/>
                         </a:defRPr>
                       </a:pPr>
                       <a:r>
-                        <a:t>Hardware Requirements</a:t>
+                        <a:t>Hardware Specs</a:t>
                       </a:r>
                     </a:p>
                   </a:txBody>
-                  <a:tcPr>
-                    <a:solidFill>
-                      <a:srgbClr val="F8FAFC"/>
-                    </a:solidFill>
-                  </a:tcPr>
+                  <a:tcPr marL="73152" marR="73152" marT="45720" marB="45720" anchor="ctr"/>
                 </a:tc>
                 <a:tc>
                   <a:txBody>
@@ -13180,28 +14199,24 @@
                     <a:lstStyle/>
                     <a:p>
                       <a:pPr algn="l">
-                        <a:defRPr sz="1000" b="0">
+                        <a:defRPr sz="850" b="0">
                           <a:solidFill>
-                            <a:srgbClr val="1E293B"/>
+                            <a:srgbClr val="212529"/>
                           </a:solidFill>
-                          <a:latin typeface="Calibri"/>
+                          <a:latin typeface="Arial"/>
                         </a:defRPr>
                       </a:pPr>
                       <a:r>
-                        <a:t>Min: Quad-Core CPU, 8GB RAM, 5GB Storage</a:t>
+                        <a:t>Min: Quad-Core CPU, 8 GB RAM, 5 GB SSD</a:t>
                       </a:r>
                     </a:p>
                     <a:p>
                       <a:r>
-                        <a:t>Rec: 8-Core CPU, 16GB RAM, NVIDIA RTX GPU</a:t>
+                        <a:t>Rec: 8-Core CPU, 16 GB RAM, NVIDIA RTX GPU</a:t>
                       </a:r>
                     </a:p>
                   </a:txBody>
-                  <a:tcPr>
-                    <a:solidFill>
-                      <a:srgbClr val="F8FAFC"/>
-                    </a:solidFill>
-                  </a:tcPr>
+                  <a:tcPr marL="73152" marR="73152" marT="45720" marB="45720" anchor="ctr"/>
                 </a:tc>
                 <a:tc>
                   <a:txBody>
@@ -13209,23 +14224,19 @@
                     <a:lstStyle/>
                     <a:p>
                       <a:pPr algn="l">
-                        <a:defRPr sz="1000" b="0">
+                        <a:defRPr sz="850" b="0">
                           <a:solidFill>
-                            <a:srgbClr val="1E293B"/>
+                            <a:srgbClr val="212529"/>
                           </a:solidFill>
-                          <a:latin typeface="Calibri"/>
+                          <a:latin typeface="Arial"/>
                         </a:defRPr>
                       </a:pPr>
                       <a:r>
-                        <a:t>Enables sub-3 second total pipeline execution per article</a:t>
+                        <a:t>Enables local RoBERTa model execution with &lt;4s latency</a:t>
                       </a:r>
                     </a:p>
                   </a:txBody>
-                  <a:tcPr>
-                    <a:solidFill>
-                      <a:srgbClr val="F8FAFC"/>
-                    </a:solidFill>
-                  </a:tcPr>
+                  <a:tcPr marL="73152" marR="73152" marT="45720" marB="45720" anchor="ctr"/>
                 </a:tc>
               </a:tr>
             </a:tbl>
@@ -13252,61 +14263,51 @@
       <p:grpSpPr/>
       <p:sp>
         <p:nvSpPr>
-          <p:cNvPr id="2" name="Title 1"/>
-          <p:cNvSpPr>
-            <a:spLocks noGrp="1"/>
-          </p:cNvSpPr>
-          <p:nvPr>
-            <p:ph type="title"/>
-          </p:nvPr>
+          <p:cNvPr id="2" name="TextBox 1"/>
+          <p:cNvSpPr txBox="1"/>
+          <p:nvPr/>
         </p:nvSpPr>
-        <p:spPr/>
+        <p:spPr>
+          <a:xfrm>
+            <a:off x="731520" y="365760"/>
+            <a:ext cx="10515600" cy="822960"/>
+          </a:xfrm>
+          <a:prstGeom prst="rect">
+            <a:avLst/>
+          </a:prstGeom>
+          <a:noFill/>
+        </p:spPr>
         <p:txBody>
-          <a:bodyPr/>
+          <a:bodyPr wrap="square" lIns="0" tIns="0" rIns="0" bIns="0">
+            <a:spAutoFit/>
+          </a:bodyPr>
           <a:lstStyle/>
           <a:p>
             <a:pPr>
-              <a:defRPr sz="2000" b="1">
-                <a:solidFill>
-                  <a:srgbClr val="1A365D"/>
-                </a:solidFill>
-                <a:latin typeface="Calibri"/>
+              <a:defRPr sz="2400" b="1">
+                <a:solidFill>
+                  <a:srgbClr val="102C57"/>
+                </a:solidFill>
+                <a:latin typeface="Arial"/>
               </a:defRPr>
             </a:pPr>
             <a:r>
-              <a:t>Timeline of the Project - 5-Phase Plan (Rubric: 1 Mark)</a:t>
+              <a:t>Timeline of the Project -- 5-Phase Plan (Rubric: 1 Mark)</a:t>
             </a:r>
           </a:p>
         </p:txBody>
       </p:sp>
-      <p:sp>
-        <p:nvSpPr>
-          <p:cNvPr id="3" name="Text Placeholder 2"/>
-          <p:cNvSpPr>
-            <a:spLocks noGrp="1"/>
-          </p:cNvSpPr>
-          <p:nvPr>
-            <p:ph type="body" idx="1"/>
-          </p:nvPr>
-        </p:nvSpPr>
-        <p:spPr/>
-        <p:txBody>
-          <a:bodyPr/>
-          <a:lstStyle/>
-          <a:p/>
-        </p:txBody>
-      </p:sp>
       <p:graphicFrame>
         <p:nvGraphicFramePr>
-          <p:cNvPr id="4" name="Table 3"/>
+          <p:cNvPr id="3" name="Table 2"/>
           <p:cNvGraphicFramePr>
             <a:graphicFrameLocks noGrp="1"/>
           </p:cNvGraphicFramePr>
           <p:nvPr/>
         </p:nvGraphicFramePr>
         <p:xfrm>
-          <a:off x="822960" y="1188720"/>
-          <a:ext cx="10515600" cy="4389120"/>
+          <a:off x="731520" y="1280160"/>
+          <a:ext cx="10515600" cy="4754880"/>
         </p:xfrm>
         <a:graphic>
           <a:graphicData uri="http://schemas.openxmlformats.org/drawingml/2006/table">
@@ -13315,12 +14316,12 @@
                 <a:tableStyleId>{5C22544A-7EE6-4342-B048-85BDC9FD1C3A}</a:tableStyleId>
               </a:tblPr>
               <a:tblGrid>
-                <a:gridCol w="1645920"/>
-                <a:gridCol w="1645920"/>
-                <a:gridCol w="5303520"/>
-                <a:gridCol w="1920240"/>
+                <a:gridCol w="1280160"/>
+                <a:gridCol w="1463040"/>
+                <a:gridCol w="5943600"/>
+                <a:gridCol w="1828800"/>
               </a:tblGrid>
-              <a:tr h="731520">
+              <a:tr h="792480">
                 <a:tc>
                   <a:txBody>
                     <a:bodyPr/>
@@ -13329,9 +14330,9 @@
                       <a:pPr algn="l">
                         <a:defRPr sz="1100" b="1">
                           <a:solidFill>
-                            <a:srgbClr val="1A365D"/>
+                            <a:srgbClr val="FFFFFF"/>
                           </a:solidFill>
-                          <a:latin typeface="Calibri"/>
+                          <a:latin typeface="Arial"/>
                         </a:defRPr>
                       </a:pPr>
                       <a:r>
@@ -13339,9 +14340,9 @@
                       </a:r>
                     </a:p>
                   </a:txBody>
-                  <a:tcPr>
+                  <a:tcPr marL="73152" marR="73152" marT="45720" marB="45720" anchor="ctr">
                     <a:solidFill>
-                      <a:srgbClr val="EDF2F7"/>
+                      <a:srgbClr val="102C57"/>
                     </a:solidFill>
                   </a:tcPr>
                 </a:tc>
@@ -13353,9 +14354,9 @@
                       <a:pPr algn="l">
                         <a:defRPr sz="1100" b="1">
                           <a:solidFill>
-                            <a:srgbClr val="1A365D"/>
+                            <a:srgbClr val="FFFFFF"/>
                           </a:solidFill>
-                          <a:latin typeface="Calibri"/>
+                          <a:latin typeface="Arial"/>
                         </a:defRPr>
                       </a:pPr>
                       <a:r>
@@ -13363,9 +14364,9 @@
                       </a:r>
                     </a:p>
                   </a:txBody>
-                  <a:tcPr>
+                  <a:tcPr marL="73152" marR="73152" marT="45720" marB="45720" anchor="ctr">
                     <a:solidFill>
-                      <a:srgbClr val="EDF2F7"/>
+                      <a:srgbClr val="102C57"/>
                     </a:solidFill>
                   </a:tcPr>
                 </a:tc>
@@ -13377,9 +14378,9 @@
                       <a:pPr algn="l">
                         <a:defRPr sz="1100" b="1">
                           <a:solidFill>
-                            <a:srgbClr val="1A365D"/>
+                            <a:srgbClr val="FFFFFF"/>
                           </a:solidFill>
-                          <a:latin typeface="Calibri"/>
+                          <a:latin typeface="Arial"/>
                         </a:defRPr>
                       </a:pPr>
                       <a:r>
@@ -13387,9 +14388,9 @@
                       </a:r>
                     </a:p>
                   </a:txBody>
-                  <a:tcPr>
+                  <a:tcPr marL="73152" marR="73152" marT="45720" marB="45720" anchor="ctr">
                     <a:solidFill>
-                      <a:srgbClr val="EDF2F7"/>
+                      <a:srgbClr val="102C57"/>
                     </a:solidFill>
                   </a:tcPr>
                 </a:tc>
@@ -13401,9 +14402,9 @@
                       <a:pPr algn="l">
                         <a:defRPr sz="1100" b="1">
                           <a:solidFill>
-                            <a:srgbClr val="1A365D"/>
+                            <a:srgbClr val="FFFFFF"/>
                           </a:solidFill>
-                          <a:latin typeface="Calibri"/>
+                          <a:latin typeface="Arial"/>
                         </a:defRPr>
                       </a:pPr>
                       <a:r>
@@ -13411,25 +14412,25 @@
                       </a:r>
                     </a:p>
                   </a:txBody>
-                  <a:tcPr>
+                  <a:tcPr marL="73152" marR="73152" marT="45720" marB="45720" anchor="ctr">
                     <a:solidFill>
-                      <a:srgbClr val="EDF2F7"/>
+                      <a:srgbClr val="102C57"/>
                     </a:solidFill>
                   </a:tcPr>
                 </a:tc>
               </a:tr>
-              <a:tr h="731520">
+              <a:tr h="792480">
                 <a:tc>
                   <a:txBody>
                     <a:bodyPr/>
                     <a:lstStyle/>
                     <a:p>
                       <a:pPr algn="l">
-                        <a:defRPr sz="1000" b="1">
+                        <a:defRPr sz="1000" b="0">
                           <a:solidFill>
-                            <a:srgbClr val="1A365D"/>
+                            <a:srgbClr val="212529"/>
                           </a:solidFill>
-                          <a:latin typeface="Calibri"/>
+                          <a:latin typeface="Arial"/>
                         </a:defRPr>
                       </a:pPr>
                       <a:r>
@@ -13437,9 +14438,9 @@
                       </a:r>
                     </a:p>
                   </a:txBody>
-                  <a:tcPr>
+                  <a:tcPr marL="73152" marR="73152" marT="45720" marB="45720" anchor="ctr">
                     <a:solidFill>
-                      <a:srgbClr val="FFFFFF"/>
+                      <a:srgbClr val="F5F7FA"/>
                     </a:solidFill>
                   </a:tcPr>
                 </a:tc>
@@ -13451,19 +14452,19 @@
                       <a:pPr algn="l">
                         <a:defRPr sz="1000" b="0">
                           <a:solidFill>
-                            <a:srgbClr val="1E293B"/>
+                            <a:srgbClr val="212529"/>
                           </a:solidFill>
-                          <a:latin typeface="Calibri"/>
+                          <a:latin typeface="Arial"/>
                         </a:defRPr>
                       </a:pPr>
                       <a:r>
-                        <a:t>Weeks 1–2</a:t>
+                        <a:t>Weeks 1-2</a:t>
                       </a:r>
                     </a:p>
                   </a:txBody>
-                  <a:tcPr>
+                  <a:tcPr marL="73152" marR="73152" marT="45720" marB="45720" anchor="ctr">
                     <a:solidFill>
-                      <a:srgbClr val="FFFFFF"/>
+                      <a:srgbClr val="F5F7FA"/>
                     </a:solidFill>
                   </a:tcPr>
                 </a:tc>
@@ -13475,9 +14476,9 @@
                       <a:pPr algn="l">
                         <a:defRPr sz="1000" b="0">
                           <a:solidFill>
-                            <a:srgbClr val="1E293B"/>
+                            <a:srgbClr val="212529"/>
                           </a:solidFill>
-                          <a:latin typeface="Calibri"/>
+                          <a:latin typeface="Arial"/>
                         </a:defRPr>
                       </a:pPr>
                       <a:r>
@@ -13485,59 +14486,9 @@
                       </a:r>
                     </a:p>
                   </a:txBody>
-                  <a:tcPr>
+                  <a:tcPr marL="73152" marR="73152" marT="45720" marB="45720" anchor="ctr">
                     <a:solidFill>
-                      <a:srgbClr val="FFFFFF"/>
-                    </a:solidFill>
-                  </a:tcPr>
-                </a:tc>
-                <a:tc>
-                  <a:txBody>
-                    <a:bodyPr/>
-                    <a:lstStyle/>
-                    <a:p>
-                      <a:pPr algn="l">
-                        <a:defRPr sz="1000" b="1">
-                          <a:solidFill>
-                            <a:srgbClr val="166534"/>
-                          </a:solidFill>
-                          <a:latin typeface="Calibri"/>
-                        </a:defRPr>
-                      </a:pPr>
-                      <a:r>
-                        <a:t>Completed</a:t>
-                      </a:r>
-                    </a:p>
-                  </a:txBody>
-                  <a:tcPr>
-                    <a:solidFill>
-                      <a:srgbClr val="FFFFFF"/>
-                    </a:solidFill>
-                  </a:tcPr>
-                </a:tc>
-              </a:tr>
-              <a:tr h="731520">
-                <a:tc>
-                  <a:txBody>
-                    <a:bodyPr/>
-                    <a:lstStyle/>
-                    <a:p>
-                      <a:pPr algn="l">
-                        <a:defRPr sz="1000" b="1">
-                          <a:solidFill>
-                            <a:srgbClr val="1A365D"/>
-                          </a:solidFill>
-                          <a:latin typeface="Calibri"/>
-                        </a:defRPr>
-                      </a:pPr>
-                      <a:r>
-                        <a:t>Phase 2</a:t>
-                      </a:r>
-                    </a:p>
-                  </a:txBody>
-                  <a:tcPr>
-                    <a:solidFill>
-                      <a:srgbClr val="F8FAFC"/>
+                      <a:srgbClr val="F5F7FA"/>
                     </a:solidFill>
                   </a:tcPr>
                 </a:tc>
@@ -13549,19 +14500,127 @@
                       <a:pPr algn="l">
                         <a:defRPr sz="1000" b="0">
                           <a:solidFill>
-                            <a:srgbClr val="1E293B"/>
+                            <a:srgbClr val="212529"/>
                           </a:solidFill>
-                          <a:latin typeface="Calibri"/>
+                          <a:latin typeface="Arial"/>
                         </a:defRPr>
                       </a:pPr>
                       <a:r>
-                        <a:t>Weeks 3–4</a:t>
+                        <a:t>Completed</a:t>
                       </a:r>
                     </a:p>
                   </a:txBody>
-                  <a:tcPr>
+                  <a:tcPr marL="73152" marR="73152" marT="45720" marB="45720" anchor="ctr">
                     <a:solidFill>
-                      <a:srgbClr val="F8FAFC"/>
+                      <a:srgbClr val="F5F7FA"/>
+                    </a:solidFill>
+                  </a:tcPr>
+                </a:tc>
+              </a:tr>
+              <a:tr h="792480">
+                <a:tc>
+                  <a:txBody>
+                    <a:bodyPr/>
+                    <a:lstStyle/>
+                    <a:p>
+                      <a:pPr algn="l">
+                        <a:defRPr sz="1000" b="0">
+                          <a:solidFill>
+                            <a:srgbClr val="212529"/>
+                          </a:solidFill>
+                          <a:latin typeface="Arial"/>
+                        </a:defRPr>
+                      </a:pPr>
+                      <a:r>
+                        <a:t>Phase 2</a:t>
+                      </a:r>
+                    </a:p>
+                  </a:txBody>
+                  <a:tcPr marL="73152" marR="73152" marT="45720" marB="45720" anchor="ctr"/>
+                </a:tc>
+                <a:tc>
+                  <a:txBody>
+                    <a:bodyPr/>
+                    <a:lstStyle/>
+                    <a:p>
+                      <a:pPr algn="l">
+                        <a:defRPr sz="1000" b="0">
+                          <a:solidFill>
+                            <a:srgbClr val="212529"/>
+                          </a:solidFill>
+                          <a:latin typeface="Arial"/>
+                        </a:defRPr>
+                      </a:pPr>
+                      <a:r>
+                        <a:t>Weeks 3-4</a:t>
+                      </a:r>
+                    </a:p>
+                  </a:txBody>
+                  <a:tcPr marL="73152" marR="73152" marT="45720" marB="45720" anchor="ctr"/>
+                </a:tc>
+                <a:tc>
+                  <a:txBody>
+                    <a:bodyPr/>
+                    <a:lstStyle/>
+                    <a:p>
+                      <a:pPr algn="l">
+                        <a:defRPr sz="1000" b="0">
+                          <a:solidFill>
+                            <a:srgbClr val="212529"/>
+                          </a:solidFill>
+                          <a:latin typeface="Arial"/>
+                        </a:defRPr>
+                      </a:pPr>
+                      <a:r>
+                        <a:t>Dataset collection, MBFC SQLite database (4,442 outlets), domain resolver, manipulation lexicons, baseline testing.</a:t>
+                      </a:r>
+                    </a:p>
+                  </a:txBody>
+                  <a:tcPr marL="73152" marR="73152" marT="45720" marB="45720" anchor="ctr"/>
+                </a:tc>
+                <a:tc>
+                  <a:txBody>
+                    <a:bodyPr/>
+                    <a:lstStyle/>
+                    <a:p>
+                      <a:pPr algn="l">
+                        <a:defRPr sz="1000" b="0">
+                          <a:solidFill>
+                            <a:srgbClr val="212529"/>
+                          </a:solidFill>
+                          <a:latin typeface="Arial"/>
+                        </a:defRPr>
+                      </a:pPr>
+                      <a:r>
+                        <a:t>Completed (Review 2)</a:t>
+                      </a:r>
+                    </a:p>
+                  </a:txBody>
+                  <a:tcPr marL="73152" marR="73152" marT="45720" marB="45720" anchor="ctr"/>
+                </a:tc>
+              </a:tr>
+              <a:tr h="792480">
+                <a:tc>
+                  <a:txBody>
+                    <a:bodyPr/>
+                    <a:lstStyle/>
+                    <a:p>
+                      <a:pPr algn="l">
+                        <a:defRPr sz="1000" b="0">
+                          <a:solidFill>
+                            <a:srgbClr val="212529"/>
+                          </a:solidFill>
+                          <a:latin typeface="Arial"/>
+                        </a:defRPr>
+                      </a:pPr>
+                      <a:r>
+                        <a:t>Phase 3</a:t>
+                      </a:r>
+                    </a:p>
+                  </a:txBody>
+                  <a:tcPr marL="73152" marR="73152" marT="45720" marB="45720" anchor="ctr">
+                    <a:solidFill>
+                      <a:srgbClr val="F5F7FA"/>
                     </a:solidFill>
                   </a:tcPr>
                 </a:tc>
@@ -13573,69 +14632,19 @@
                       <a:pPr algn="l">
                         <a:defRPr sz="1000" b="0">
                           <a:solidFill>
-                            <a:srgbClr val="1E293B"/>
+                            <a:srgbClr val="212529"/>
                           </a:solidFill>
-                          <a:latin typeface="Calibri"/>
+                          <a:latin typeface="Arial"/>
                         </a:defRPr>
                       </a:pPr>
                       <a:r>
-                        <a:t>Dataset collection, MBFC SQLite database (4,442 outlets), domain resolver, manipulation lexicons, baseline testing.</a:t>
+                        <a:t>Weeks 5-6</a:t>
                       </a:r>
                     </a:p>
                   </a:txBody>
-                  <a:tcPr>
+                  <a:tcPr marL="73152" marR="73152" marT="45720" marB="45720" anchor="ctr">
                     <a:solidFill>
-                      <a:srgbClr val="F8FAFC"/>
-                    </a:solidFill>
-                  </a:tcPr>
-                </a:tc>
-                <a:tc>
-                  <a:txBody>
-                    <a:bodyPr/>
-                    <a:lstStyle/>
-                    <a:p>
-                      <a:pPr algn="l">
-                        <a:defRPr sz="1000" b="1">
-                          <a:solidFill>
-                            <a:srgbClr val="166534"/>
-                          </a:solidFill>
-                          <a:latin typeface="Calibri"/>
-                        </a:defRPr>
-                      </a:pPr>
-                      <a:r>
-                        <a:t>Completed (Review 2)</a:t>
-                      </a:r>
-                    </a:p>
-                  </a:txBody>
-                  <a:tcPr>
-                    <a:solidFill>
-                      <a:srgbClr val="F8FAFC"/>
-                    </a:solidFill>
-                  </a:tcPr>
-                </a:tc>
-              </a:tr>
-              <a:tr h="731520">
-                <a:tc>
-                  <a:txBody>
-                    <a:bodyPr/>
-                    <a:lstStyle/>
-                    <a:p>
-                      <a:pPr algn="l">
-                        <a:defRPr sz="1000" b="1">
-                          <a:solidFill>
-                            <a:srgbClr val="1A365D"/>
-                          </a:solidFill>
-                          <a:latin typeface="Calibri"/>
-                        </a:defRPr>
-                      </a:pPr>
-                      <a:r>
-                        <a:t>Phase 3</a:t>
-                      </a:r>
-                    </a:p>
-                  </a:txBody>
-                  <a:tcPr>
-                    <a:solidFill>
-                      <a:srgbClr val="FFFFFF"/>
+                      <a:srgbClr val="F5F7FA"/>
                     </a:solidFill>
                   </a:tcPr>
                 </a:tc>
@@ -13647,19 +14656,19 @@
                       <a:pPr algn="l">
                         <a:defRPr sz="1000" b="0">
                           <a:solidFill>
-                            <a:srgbClr val="1E293B"/>
+                            <a:srgbClr val="212529"/>
                           </a:solidFill>
-                          <a:latin typeface="Calibri"/>
+                          <a:latin typeface="Arial"/>
                         </a:defRPr>
                       </a:pPr>
                       <a:r>
-                        <a:t>Weeks 5–6</a:t>
+                        <a:t>Article ingestion pipeline (trafilatura), factual claim extraction module, NewsAPI &amp; GNews retrieval integration.</a:t>
                       </a:r>
                     </a:p>
                   </a:txBody>
-                  <a:tcPr>
+                  <a:tcPr marL="73152" marR="73152" marT="45720" marB="45720" anchor="ctr">
                     <a:solidFill>
-                      <a:srgbClr val="FFFFFF"/>
+                      <a:srgbClr val="F5F7FA"/>
                     </a:solidFill>
                   </a:tcPr>
                 </a:tc>
@@ -13671,21 +14680,43 @@
                       <a:pPr algn="l">
                         <a:defRPr sz="1000" b="0">
                           <a:solidFill>
-                            <a:srgbClr val="1E293B"/>
+                            <a:srgbClr val="212529"/>
                           </a:solidFill>
-                          <a:latin typeface="Calibri"/>
+                          <a:latin typeface="Arial"/>
                         </a:defRPr>
                       </a:pPr>
                       <a:r>
-                        <a:t>Article ingestion pipeline (trafilatura), factual claim extraction module, NewsAPI &amp; GNews retrieval integration.</a:t>
+                        <a:t>Upcoming</a:t>
                       </a:r>
                     </a:p>
                   </a:txBody>
-                  <a:tcPr>
+                  <a:tcPr marL="73152" marR="73152" marT="45720" marB="45720" anchor="ctr">
                     <a:solidFill>
-                      <a:srgbClr val="FFFFFF"/>
+                      <a:srgbClr val="F5F7FA"/>
                     </a:solidFill>
                   </a:tcPr>
+                </a:tc>
+              </a:tr>
+              <a:tr h="792480">
+                <a:tc>
+                  <a:txBody>
+                    <a:bodyPr/>
+                    <a:lstStyle/>
+                    <a:p>
+                      <a:pPr algn="l">
+                        <a:defRPr sz="1000" b="0">
+                          <a:solidFill>
+                            <a:srgbClr val="212529"/>
+                          </a:solidFill>
+                          <a:latin typeface="Arial"/>
+                        </a:defRPr>
+                      </a:pPr>
+                      <a:r>
+                        <a:t>Phase 4</a:t>
+                      </a:r>
+                    </a:p>
+                  </a:txBody>
+                  <a:tcPr marL="73152" marR="73152" marT="45720" marB="45720" anchor="ctr"/>
                 </a:tc>
                 <a:tc>
                   <a:txBody>
@@ -13693,11 +14724,51 @@
                     <a:lstStyle/>
                     <a:p>
                       <a:pPr algn="l">
-                        <a:defRPr sz="1000" b="1">
+                        <a:defRPr sz="1000" b="0">
                           <a:solidFill>
-                            <a:srgbClr val="1E293B"/>
+                            <a:srgbClr val="212529"/>
                           </a:solidFill>
-                          <a:latin typeface="Calibri"/>
+                          <a:latin typeface="Arial"/>
+                        </a:defRPr>
+                      </a:pPr>
+                      <a:r>
+                        <a:t>Weeks 7-8</a:t>
+                      </a:r>
+                    </a:p>
+                  </a:txBody>
+                  <a:tcPr marL="73152" marR="73152" marT="45720" marB="45720" anchor="ctr"/>
+                </a:tc>
+                <a:tc>
+                  <a:txBody>
+                    <a:bodyPr/>
+                    <a:lstStyle/>
+                    <a:p>
+                      <a:pPr algn="l">
+                        <a:defRPr sz="1000" b="0">
+                          <a:solidFill>
+                            <a:srgbClr val="212529"/>
+                          </a:solidFill>
+                          <a:latin typeface="Arial"/>
+                        </a:defRPr>
+                      </a:pPr>
+                      <a:r>
+                        <a:t>RoBERTa-MNLI model integration, pairwise stance classification pipeline, semantic similarity threshold filtering.</a:t>
+                      </a:r>
+                    </a:p>
+                  </a:txBody>
+                  <a:tcPr marL="73152" marR="73152" marT="45720" marB="45720" anchor="ctr"/>
+                </a:tc>
+                <a:tc>
+                  <a:txBody>
+                    <a:bodyPr/>
+                    <a:lstStyle/>
+                    <a:p>
+                      <a:pPr algn="l">
+                        <a:defRPr sz="1000" b="0">
+                          <a:solidFill>
+                            <a:srgbClr val="212529"/>
+                          </a:solidFill>
+                          <a:latin typeface="Arial"/>
                         </a:defRPr>
                       </a:pPr>
                       <a:r>
@@ -13705,35 +14776,31 @@
                       </a:r>
                     </a:p>
                   </a:txBody>
-                  <a:tcPr>
-                    <a:solidFill>
-                      <a:srgbClr val="FFFFFF"/>
-                    </a:solidFill>
-                  </a:tcPr>
+                  <a:tcPr marL="73152" marR="73152" marT="45720" marB="45720" anchor="ctr"/>
                 </a:tc>
               </a:tr>
-              <a:tr h="731520">
+              <a:tr h="792480">
                 <a:tc>
                   <a:txBody>
                     <a:bodyPr/>
                     <a:lstStyle/>
                     <a:p>
                       <a:pPr algn="l">
-                        <a:defRPr sz="1000" b="1">
+                        <a:defRPr sz="1000" b="0">
                           <a:solidFill>
-                            <a:srgbClr val="1A365D"/>
+                            <a:srgbClr val="212529"/>
                           </a:solidFill>
-                          <a:latin typeface="Calibri"/>
+                          <a:latin typeface="Arial"/>
                         </a:defRPr>
                       </a:pPr>
                       <a:r>
-                        <a:t>Phase 4</a:t>
+                        <a:t>Phase 5</a:t>
                       </a:r>
                     </a:p>
                   </a:txBody>
-                  <a:tcPr>
+                  <a:tcPr marL="73152" marR="73152" marT="45720" marB="45720" anchor="ctr">
                     <a:solidFill>
-                      <a:srgbClr val="F8FAFC"/>
+                      <a:srgbClr val="F5F7FA"/>
                     </a:solidFill>
                   </a:tcPr>
                 </a:tc>
@@ -13745,19 +14812,19 @@
                       <a:pPr algn="l">
                         <a:defRPr sz="1000" b="0">
                           <a:solidFill>
-                            <a:srgbClr val="1E293B"/>
+                            <a:srgbClr val="212529"/>
                           </a:solidFill>
-                          <a:latin typeface="Calibri"/>
+                          <a:latin typeface="Arial"/>
                         </a:defRPr>
                       </a:pPr>
                       <a:r>
-                        <a:t>Weeks 7–8</a:t>
+                        <a:t>Weeks 9-12</a:t>
                       </a:r>
                     </a:p>
                   </a:txBody>
-                  <a:tcPr>
+                  <a:tcPr marL="73152" marR="73152" marT="45720" marB="45720" anchor="ctr">
                     <a:solidFill>
-                      <a:srgbClr val="F8FAFC"/>
+                      <a:srgbClr val="F5F7FA"/>
                     </a:solidFill>
                   </a:tcPr>
                 </a:tc>
@@ -13769,69 +14836,19 @@
                       <a:pPr algn="l">
                         <a:defRPr sz="1000" b="0">
                           <a:solidFill>
-                            <a:srgbClr val="1E293B"/>
+                            <a:srgbClr val="212529"/>
                           </a:solidFill>
-                          <a:latin typeface="Calibri"/>
+                          <a:latin typeface="Arial"/>
                         </a:defRPr>
                       </a:pPr>
                       <a:r>
-                        <a:t>RoBERTa-MNLI model integration, pairwise stance classification pipeline, semantic similarity threshold filtering.</a:t>
+                        <a:t>Score aggregation engine, FastAPI REST API, Streamlit dashboard, end-to-end evaluation &amp; final report.</a:t>
                       </a:r>
                     </a:p>
                   </a:txBody>
-                  <a:tcPr>
+                  <a:tcPr marL="73152" marR="73152" marT="45720" marB="45720" anchor="ctr">
                     <a:solidFill>
-                      <a:srgbClr val="F8FAFC"/>
-                    </a:solidFill>
-                  </a:tcPr>
-                </a:tc>
-                <a:tc>
-                  <a:txBody>
-                    <a:bodyPr/>
-                    <a:lstStyle/>
-                    <a:p>
-                      <a:pPr algn="l">
-                        <a:defRPr sz="1000" b="1">
-                          <a:solidFill>
-                            <a:srgbClr val="1E293B"/>
-                          </a:solidFill>
-                          <a:latin typeface="Calibri"/>
-                        </a:defRPr>
-                      </a:pPr>
-                      <a:r>
-                        <a:t>Upcoming</a:t>
-                      </a:r>
-                    </a:p>
-                  </a:txBody>
-                  <a:tcPr>
-                    <a:solidFill>
-                      <a:srgbClr val="F8FAFC"/>
-                    </a:solidFill>
-                  </a:tcPr>
-                </a:tc>
-              </a:tr>
-              <a:tr h="731520">
-                <a:tc>
-                  <a:txBody>
-                    <a:bodyPr/>
-                    <a:lstStyle/>
-                    <a:p>
-                      <a:pPr algn="l">
-                        <a:defRPr sz="1000" b="1">
-                          <a:solidFill>
-                            <a:srgbClr val="1A365D"/>
-                          </a:solidFill>
-                          <a:latin typeface="Calibri"/>
-                        </a:defRPr>
-                      </a:pPr>
-                      <a:r>
-                        <a:t>Phase 5</a:t>
-                      </a:r>
-                    </a:p>
-                  </a:txBody>
-                  <a:tcPr>
-                    <a:solidFill>
-                      <a:srgbClr val="FFFFFF"/>
+                      <a:srgbClr val="F5F7FA"/>
                     </a:solidFill>
                   </a:tcPr>
                 </a:tc>
@@ -13843,57 +14860,9 @@
                       <a:pPr algn="l">
                         <a:defRPr sz="1000" b="0">
                           <a:solidFill>
-                            <a:srgbClr val="1E293B"/>
+                            <a:srgbClr val="212529"/>
                           </a:solidFill>
-                          <a:latin typeface="Calibri"/>
-                        </a:defRPr>
-                      </a:pPr>
-                      <a:r>
-                        <a:t>Weeks 9–12</a:t>
-                      </a:r>
-                    </a:p>
-                  </a:txBody>
-                  <a:tcPr>
-                    <a:solidFill>
-                      <a:srgbClr val="FFFFFF"/>
-                    </a:solidFill>
-                  </a:tcPr>
-                </a:tc>
-                <a:tc>
-                  <a:txBody>
-                    <a:bodyPr/>
-                    <a:lstStyle/>
-                    <a:p>
-                      <a:pPr algn="l">
-                        <a:defRPr sz="1000" b="0">
-                          <a:solidFill>
-                            <a:srgbClr val="1E293B"/>
-                          </a:solidFill>
-                          <a:latin typeface="Calibri"/>
-                        </a:defRPr>
-                      </a:pPr>
-                      <a:r>
-                        <a:t>Score aggregation engine, FastAPI REST API, Streamlit dashboard, end-to-end evaluation &amp; final report.</a:t>
-                      </a:r>
-                    </a:p>
-                  </a:txBody>
-                  <a:tcPr>
-                    <a:solidFill>
-                      <a:srgbClr val="FFFFFF"/>
-                    </a:solidFill>
-                  </a:tcPr>
-                </a:tc>
-                <a:tc>
-                  <a:txBody>
-                    <a:bodyPr/>
-                    <a:lstStyle/>
-                    <a:p>
-                      <a:pPr algn="l">
-                        <a:defRPr sz="1000" b="1">
-                          <a:solidFill>
-                            <a:srgbClr val="1E293B"/>
-                          </a:solidFill>
-                          <a:latin typeface="Calibri"/>
+                          <a:latin typeface="Arial"/>
                         </a:defRPr>
                       </a:pPr>
                       <a:r>
@@ -13901,9 +14870,9 @@
                       </a:r>
                     </a:p>
                   </a:txBody>
-                  <a:tcPr>
+                  <a:tcPr marL="73152" marR="73152" marT="45720" marB="45720" anchor="ctr">
                     <a:solidFill>
-                      <a:srgbClr val="FFFFFF"/>
+                      <a:srgbClr val="F5F7FA"/>
                     </a:solidFill>
                   </a:tcPr>
                 </a:tc>
@@ -13932,60 +14901,50 @@
       <p:grpSpPr/>
       <p:sp>
         <p:nvSpPr>
-          <p:cNvPr id="2" name="Title 1"/>
-          <p:cNvSpPr>
-            <a:spLocks noGrp="1"/>
-          </p:cNvSpPr>
-          <p:nvPr>
-            <p:ph type="title"/>
-          </p:nvPr>
+          <p:cNvPr id="2" name="TextBox 1"/>
+          <p:cNvSpPr txBox="1"/>
+          <p:nvPr/>
         </p:nvSpPr>
-        <p:spPr/>
+        <p:spPr>
+          <a:xfrm>
+            <a:off x="731520" y="365760"/>
+            <a:ext cx="10515600" cy="822960"/>
+          </a:xfrm>
+          <a:prstGeom prst="rect">
+            <a:avLst/>
+          </a:prstGeom>
+          <a:noFill/>
+        </p:spPr>
         <p:txBody>
-          <a:bodyPr/>
+          <a:bodyPr wrap="square" lIns="0" tIns="0" rIns="0" bIns="0">
+            <a:spAutoFit/>
+          </a:bodyPr>
           <a:lstStyle/>
           <a:p>
             <a:pPr>
-              <a:defRPr sz="2000" b="1">
-                <a:solidFill>
-                  <a:srgbClr val="1A365D"/>
-                </a:solidFill>
-                <a:latin typeface="Calibri"/>
+              <a:defRPr sz="2400" b="1">
+                <a:solidFill>
+                  <a:srgbClr val="102C57"/>
+                </a:solidFill>
+                <a:latin typeface="Arial"/>
               </a:defRPr>
             </a:pPr>
             <a:r>
-              <a:t>References (IEEE Format — Rubric: 1 Mark)</a:t>
+              <a:t>References (IEEE Format -- Rubric: 1 Mark)</a:t>
             </a:r>
           </a:p>
         </p:txBody>
       </p:sp>
       <p:sp>
         <p:nvSpPr>
-          <p:cNvPr id="3" name="Text Placeholder 2"/>
-          <p:cNvSpPr>
-            <a:spLocks noGrp="1"/>
-          </p:cNvSpPr>
-          <p:nvPr>
-            <p:ph type="body" idx="1"/>
-          </p:nvPr>
-        </p:nvSpPr>
-        <p:spPr/>
-        <p:txBody>
-          <a:bodyPr/>
-          <a:lstStyle/>
-          <a:p/>
-        </p:txBody>
-      </p:sp>
-      <p:sp>
-        <p:nvSpPr>
-          <p:cNvPr id="4" name="TextBox 3"/>
+          <p:cNvPr id="3" name="TextBox 2"/>
           <p:cNvSpPr txBox="1"/>
           <p:nvPr/>
         </p:nvSpPr>
         <p:spPr>
           <a:xfrm>
-            <a:off x="822960" y="1097280"/>
-            <a:ext cx="10515600" cy="4937760"/>
+            <a:off x="731520" y="1188720"/>
+            <a:ext cx="10515600" cy="5120640"/>
           </a:xfrm>
           <a:prstGeom prst="rect">
             <a:avLst/>
@@ -14000,13 +14959,13 @@
           <a:p>
             <a:pPr>
               <a:spcAft>
-                <a:spcPts val="600"/>
-              </a:spcAft>
-              <a:defRPr sz="900">
-                <a:solidFill>
-                  <a:srgbClr val="1E293B"/>
-                </a:solidFill>
-                <a:latin typeface="Calibri"/>
+                <a:spcPts val="250"/>
+              </a:spcAft>
+              <a:defRPr sz="850">
+                <a:solidFill>
+                  <a:srgbClr val="212529"/>
+                </a:solidFill>
+                <a:latin typeface="Arial"/>
               </a:defRPr>
             </a:pPr>
             <a:r>
@@ -14016,13 +14975,13 @@
           <a:p>
             <a:pPr>
               <a:spcAft>
-                <a:spcPts val="600"/>
-              </a:spcAft>
-              <a:defRPr sz="900">
-                <a:solidFill>
-                  <a:srgbClr val="1E293B"/>
-                </a:solidFill>
-                <a:latin typeface="Calibri"/>
+                <a:spcPts val="250"/>
+              </a:spcAft>
+              <a:defRPr sz="850">
+                <a:solidFill>
+                  <a:srgbClr val="212529"/>
+                </a:solidFill>
+                <a:latin typeface="Arial"/>
               </a:defRPr>
             </a:pPr>
             <a:r>
@@ -14032,13 +14991,13 @@
           <a:p>
             <a:pPr>
               <a:spcAft>
-                <a:spcPts val="600"/>
-              </a:spcAft>
-              <a:defRPr sz="900">
-                <a:solidFill>
-                  <a:srgbClr val="1E293B"/>
-                </a:solidFill>
-                <a:latin typeface="Calibri"/>
+                <a:spcPts val="250"/>
+              </a:spcAft>
+              <a:defRPr sz="850">
+                <a:solidFill>
+                  <a:srgbClr val="212529"/>
+                </a:solidFill>
+                <a:latin typeface="Arial"/>
               </a:defRPr>
             </a:pPr>
             <a:r>
@@ -14048,13 +15007,13 @@
           <a:p>
             <a:pPr>
               <a:spcAft>
-                <a:spcPts val="600"/>
-              </a:spcAft>
-              <a:defRPr sz="900">
-                <a:solidFill>
-                  <a:srgbClr val="1E293B"/>
-                </a:solidFill>
-                <a:latin typeface="Calibri"/>
+                <a:spcPts val="250"/>
+              </a:spcAft>
+              <a:defRPr sz="850">
+                <a:solidFill>
+                  <a:srgbClr val="212529"/>
+                </a:solidFill>
+                <a:latin typeface="Arial"/>
               </a:defRPr>
             </a:pPr>
             <a:r>
@@ -14064,13 +15023,13 @@
           <a:p>
             <a:pPr>
               <a:spcAft>
-                <a:spcPts val="600"/>
-              </a:spcAft>
-              <a:defRPr sz="900">
-                <a:solidFill>
-                  <a:srgbClr val="1E293B"/>
-                </a:solidFill>
-                <a:latin typeface="Calibri"/>
+                <a:spcPts val="250"/>
+              </a:spcAft>
+              <a:defRPr sz="850">
+                <a:solidFill>
+                  <a:srgbClr val="212529"/>
+                </a:solidFill>
+                <a:latin typeface="Arial"/>
               </a:defRPr>
             </a:pPr>
             <a:r>
@@ -14080,13 +15039,13 @@
           <a:p>
             <a:pPr>
               <a:spcAft>
-                <a:spcPts val="600"/>
-              </a:spcAft>
-              <a:defRPr sz="900">
-                <a:solidFill>
-                  <a:srgbClr val="1E293B"/>
-                </a:solidFill>
-                <a:latin typeface="Calibri"/>
+                <a:spcPts val="250"/>
+              </a:spcAft>
+              <a:defRPr sz="850">
+                <a:solidFill>
+                  <a:srgbClr val="212529"/>
+                </a:solidFill>
+                <a:latin typeface="Arial"/>
               </a:defRPr>
             </a:pPr>
             <a:r>
@@ -14096,13 +15055,13 @@
           <a:p>
             <a:pPr>
               <a:spcAft>
-                <a:spcPts val="600"/>
-              </a:spcAft>
-              <a:defRPr sz="900">
-                <a:solidFill>
-                  <a:srgbClr val="1E293B"/>
-                </a:solidFill>
-                <a:latin typeface="Calibri"/>
+                <a:spcPts val="250"/>
+              </a:spcAft>
+              <a:defRPr sz="850">
+                <a:solidFill>
+                  <a:srgbClr val="212529"/>
+                </a:solidFill>
+                <a:latin typeface="Arial"/>
               </a:defRPr>
             </a:pPr>
             <a:r>
@@ -14112,13 +15071,13 @@
           <a:p>
             <a:pPr>
               <a:spcAft>
-                <a:spcPts val="600"/>
-              </a:spcAft>
-              <a:defRPr sz="900">
-                <a:solidFill>
-                  <a:srgbClr val="1E293B"/>
-                </a:solidFill>
-                <a:latin typeface="Calibri"/>
+                <a:spcPts val="250"/>
+              </a:spcAft>
+              <a:defRPr sz="850">
+                <a:solidFill>
+                  <a:srgbClr val="212529"/>
+                </a:solidFill>
+                <a:latin typeface="Arial"/>
               </a:defRPr>
             </a:pPr>
             <a:r>
@@ -14128,13 +15087,13 @@
           <a:p>
             <a:pPr>
               <a:spcAft>
-                <a:spcPts val="600"/>
-              </a:spcAft>
-              <a:defRPr sz="900">
-                <a:solidFill>
-                  <a:srgbClr val="1E293B"/>
-                </a:solidFill>
-                <a:latin typeface="Calibri"/>
+                <a:spcPts val="250"/>
+              </a:spcAft>
+              <a:defRPr sz="850">
+                <a:solidFill>
+                  <a:srgbClr val="212529"/>
+                </a:solidFill>
+                <a:latin typeface="Arial"/>
               </a:defRPr>
             </a:pPr>
             <a:r>
@@ -14144,13 +15103,13 @@
           <a:p>
             <a:pPr>
               <a:spcAft>
-                <a:spcPts val="600"/>
-              </a:spcAft>
-              <a:defRPr sz="900">
-                <a:solidFill>
-                  <a:srgbClr val="1E293B"/>
-                </a:solidFill>
-                <a:latin typeface="Calibri"/>
+                <a:spcPts val="250"/>
+              </a:spcAft>
+              <a:defRPr sz="850">
+                <a:solidFill>
+                  <a:srgbClr val="212529"/>
+                </a:solidFill>
+                <a:latin typeface="Arial"/>
               </a:defRPr>
             </a:pPr>
             <a:r>
@@ -14160,13 +15119,13 @@
           <a:p>
             <a:pPr>
               <a:spcAft>
-                <a:spcPts val="600"/>
-              </a:spcAft>
-              <a:defRPr sz="900">
-                <a:solidFill>
-                  <a:srgbClr val="1E293B"/>
-                </a:solidFill>
-                <a:latin typeface="Calibri"/>
+                <a:spcPts val="250"/>
+              </a:spcAft>
+              <a:defRPr sz="850">
+                <a:solidFill>
+                  <a:srgbClr val="212529"/>
+                </a:solidFill>
+                <a:latin typeface="Arial"/>
               </a:defRPr>
             </a:pPr>
             <a:r>
@@ -14176,17 +15135,17 @@
           <a:p>
             <a:pPr>
               <a:spcAft>
-                <a:spcPts val="600"/>
-              </a:spcAft>
-              <a:defRPr sz="900">
-                <a:solidFill>
-                  <a:srgbClr val="1E293B"/>
-                </a:solidFill>
-                <a:latin typeface="Calibri"/>
+                <a:spcPts val="250"/>
+              </a:spcAft>
+              <a:defRPr sz="850">
+                <a:solidFill>
+                  <a:srgbClr val="212529"/>
+                </a:solidFill>
+                <a:latin typeface="Arial"/>
               </a:defRPr>
             </a:pPr>
             <a:r>
-              <a:t>[12] J. Nørregaard, B. D. Horne, and S. Adali, "NELA-GT-2018: A Large Multi-Labelled News Dataset for The Study of Misinformation in News Articles," in Proc. AAAI ICWSM 2019, pp. 630-638.</a:t>
+              <a:t>[12] J. Norregaard, B. D. Horne, and S. Adali, "NELA-GT-2018: A Large Multi-Labelled News Dataset for The Study of Misinformation in News Articles," in Proc. AAAI ICWSM 2019, pp. 630-638.</a:t>
             </a:r>
           </a:p>
         </p:txBody>
@@ -14211,25 +15170,32 @@
       <p:grpSpPr/>
       <p:sp>
         <p:nvSpPr>
-          <p:cNvPr id="2" name="Title 1"/>
-          <p:cNvSpPr>
-            <a:spLocks noGrp="1"/>
-          </p:cNvSpPr>
-          <p:nvPr>
-            <p:ph type="title"/>
-          </p:nvPr>
+          <p:cNvPr id="2" name="TextBox 1"/>
+          <p:cNvSpPr txBox="1"/>
+          <p:nvPr/>
         </p:nvSpPr>
-        <p:spPr/>
+        <p:spPr>
+          <a:xfrm>
+            <a:off x="731520" y="365760"/>
+            <a:ext cx="10515600" cy="822960"/>
+          </a:xfrm>
+          <a:prstGeom prst="rect">
+            <a:avLst/>
+          </a:prstGeom>
+          <a:noFill/>
+        </p:spPr>
         <p:txBody>
-          <a:bodyPr/>
+          <a:bodyPr wrap="square" lIns="0" tIns="0" rIns="0" bIns="0">
+            <a:spAutoFit/>
+          </a:bodyPr>
           <a:lstStyle/>
           <a:p>
             <a:pPr>
-              <a:defRPr sz="2000" b="1">
-                <a:solidFill>
-                  <a:srgbClr val="1A365D"/>
-                </a:solidFill>
-                <a:latin typeface="Calibri"/>
+              <a:defRPr sz="2400" b="1">
+                <a:solidFill>
+                  <a:srgbClr val="102C57"/>
+                </a:solidFill>
+                <a:latin typeface="Arial"/>
               </a:defRPr>
             </a:pPr>
             <a:r>
@@ -14240,31 +15206,14 @@
       </p:sp>
       <p:sp>
         <p:nvSpPr>
-          <p:cNvPr id="3" name="Text Placeholder 2"/>
-          <p:cNvSpPr>
-            <a:spLocks noGrp="1"/>
-          </p:cNvSpPr>
-          <p:nvPr>
-            <p:ph type="body" idx="1"/>
-          </p:nvPr>
-        </p:nvSpPr>
-        <p:spPr/>
-        <p:txBody>
-          <a:bodyPr/>
-          <a:lstStyle/>
-          <a:p/>
-        </p:txBody>
-      </p:sp>
-      <p:sp>
-        <p:nvSpPr>
-          <p:cNvPr id="4" name="TextBox 3"/>
+          <p:cNvPr id="3" name="TextBox 2"/>
           <p:cNvSpPr txBox="1"/>
           <p:nvPr/>
         </p:nvSpPr>
         <p:spPr>
           <a:xfrm>
-            <a:off x="822960" y="1188720"/>
-            <a:ext cx="10515600" cy="4754880"/>
+            <a:off x="731520" y="1188720"/>
+            <a:ext cx="10515600" cy="5120640"/>
           </a:xfrm>
           <a:prstGeom prst="rect">
             <a:avLst/>
@@ -14281,11 +15230,11 @@
               <a:spcAft>
                 <a:spcPts val="600"/>
               </a:spcAft>
-              <a:defRPr sz="1300">
-                <a:solidFill>
-                  <a:srgbClr val="1E293B"/>
-                </a:solidFill>
-                <a:latin typeface="Calibri"/>
+              <a:defRPr sz="1400" b="1">
+                <a:solidFill>
+                  <a:srgbClr val="102C57"/>
+                </a:solidFill>
+                <a:latin typeface="Arial"/>
               </a:defRPr>
             </a:pPr>
             <a:r>
@@ -14295,139 +15244,139 @@
           <a:p>
             <a:pPr>
               <a:spcAft>
-                <a:spcPts val="600"/>
-              </a:spcAft>
-              <a:defRPr sz="1300">
-                <a:solidFill>
-                  <a:srgbClr val="1E293B"/>
-                </a:solidFill>
-                <a:latin typeface="Calibri"/>
-              </a:defRPr>
+                <a:spcPts val="400"/>
+              </a:spcAft>
             </a:pPr>
             <a:r>
-              <a:t>  [✓] MBFC Source Reputation Database: 4,442 news outlets indexed in SQLite with sub-millisecond lookups.</a:t>
+              <a:rPr b="1" sz="1100">
+                <a:solidFill>
+                  <a:srgbClr val="28A745"/>
+                </a:solidFill>
+              </a:rPr>
+              <a:t>[+] Source Reputation Database: </a:t>
+            </a:r>
+            <a:r>
+              <a:rPr sz="1100">
+                <a:solidFill>
+                  <a:srgbClr val="212529"/>
+                </a:solidFill>
+              </a:rPr>
+              <a:t>4,442 unique media domains indexed in SQLite with sub-millisecond lookups (&lt;0.02ms).</a:t>
             </a:r>
           </a:p>
           <a:p>
             <a:pPr>
               <a:spcAft>
-                <a:spcPts val="600"/>
-              </a:spcAft>
-              <a:defRPr sz="1300">
-                <a:solidFill>
-                  <a:srgbClr val="1E293B"/>
-                </a:solidFill>
-                <a:latin typeface="Calibri"/>
-              </a:defRPr>
+                <a:spcPts val="400"/>
+              </a:spcAft>
             </a:pPr>
             <a:r>
-              <a:t>  [✓] Canonical Domain Resolution Engine: Automated parsing of subdomains and authoritative TLD heuristics.</a:t>
+              <a:rPr b="1" sz="1100">
+                <a:solidFill>
+                  <a:srgbClr val="28A745"/>
+                </a:solidFill>
+              </a:rPr>
+              <a:t>[+] Canonical Domain Resolver: </a:t>
+            </a:r>
+            <a:r>
+              <a:rPr sz="1100">
+                <a:solidFill>
+                  <a:srgbClr val="212529"/>
+                </a:solidFill>
+              </a:rPr>
+              <a:t>Multi-tier resolution supporting subdomains, multi-part TLDs (.co.uk, .gov.in), and institutional fallbacks (.gov, .edu).</a:t>
             </a:r>
           </a:p>
           <a:p>
             <a:pPr>
               <a:spcAft>
-                <a:spcPts val="600"/>
-              </a:spcAft>
-              <a:defRPr sz="1300">
-                <a:solidFill>
-                  <a:srgbClr val="1E293B"/>
-                </a:solidFill>
-                <a:latin typeface="Calibri"/>
-              </a:defRPr>
+                <a:spcPts val="400"/>
+              </a:spcAft>
             </a:pPr>
             <a:r>
-              <a:t>  [✓] Manipulation &amp; Sensationalism Detector: 109 linguistic triggers scanning clickbait and emotional urgency.</a:t>
+              <a:rPr b="1" sz="1100">
+                <a:solidFill>
+                  <a:srgbClr val="28A745"/>
+                </a:solidFill>
+              </a:rPr>
+              <a:t>[+] Manipulation Detection Engine: </a:t>
+            </a:r>
+            <a:r>
+              <a:rPr sz="1100">
+                <a:solidFill>
+                  <a:srgbClr val="212529"/>
+                </a:solidFill>
+              </a:rPr>
+              <a:t>109 lexical and stylistic triggers detecting clickbait, emotional urgency, and conspiracy markers.</a:t>
             </a:r>
           </a:p>
           <a:p>
             <a:pPr>
               <a:spcAft>
-                <a:spcPts val="600"/>
-              </a:spcAft>
-              <a:defRPr sz="1300">
-                <a:solidFill>
-                  <a:srgbClr val="1E293B"/>
-                </a:solidFill>
-                <a:latin typeface="Calibri"/>
-              </a:defRPr>
+                <a:spcPts val="400"/>
+              </a:spcAft>
             </a:pPr>
             <a:r>
-              <a:t>  [✓] Ground-Truth Benchmark Testbed: 10 curated test claims across 6 domains.</a:t>
+              <a:rPr b="1" sz="1100">
+                <a:solidFill>
+                  <a:srgbClr val="28A745"/>
+                </a:solidFill>
+              </a:rPr>
+              <a:t>[+] Ground-Truth Testbed: </a:t>
+            </a:r>
+            <a:r>
+              <a:rPr sz="1100">
+                <a:solidFill>
+                  <a:srgbClr val="212529"/>
+                </a:solidFill>
+              </a:rPr>
+              <a:t>10 verified benchmark claims and full sample articles across 6 domains for evaluation.</a:t>
             </a:r>
           </a:p>
           <a:p>
             <a:pPr>
               <a:spcAft>
-                <a:spcPts val="600"/>
-              </a:spcAft>
-              <a:defRPr sz="1300">
-                <a:solidFill>
-                  <a:srgbClr val="1E293B"/>
-                </a:solidFill>
-                <a:latin typeface="Calibri"/>
-              </a:defRPr>
+                <a:spcPts val="400"/>
+              </a:spcAft>
             </a:pPr>
             <a:r>
-              <a:t>  [✓] Automated Testing Suite: 13/13 unit tests passed with 100% success rate.</a:t>
+              <a:rPr b="1" sz="1100">
+                <a:solidFill>
+                  <a:srgbClr val="28A745"/>
+                </a:solidFill>
+              </a:rPr>
+              <a:t>[+] Automated Quality Assurance: </a:t>
+            </a:r>
+            <a:r>
+              <a:rPr sz="1100">
+                <a:solidFill>
+                  <a:srgbClr val="212529"/>
+                </a:solidFill>
+              </a:rPr>
+              <a:t>13 out of 13 unit tests passed (pytest); live interactive demonstration tool ready (demo_phase2.py).</a:t>
             </a:r>
           </a:p>
           <a:p>
             <a:pPr>
               <a:spcAft>
-                <a:spcPts val="600"/>
-              </a:spcAft>
-              <a:defRPr sz="1300">
-                <a:solidFill>
-                  <a:srgbClr val="1E293B"/>
-                </a:solidFill>
-                <a:latin typeface="Calibri"/>
-              </a:defRPr>
-            </a:pPr>
-          </a:p>
-          <a:p>
-            <a:pPr>
-              <a:spcAft>
-                <a:spcPts val="600"/>
-              </a:spcAft>
-              <a:defRPr sz="1300">
-                <a:solidFill>
-                  <a:srgbClr val="1E293B"/>
-                </a:solidFill>
-                <a:latin typeface="Calibri"/>
-              </a:defRPr>
+                <a:spcPts val="400"/>
+              </a:spcAft>
             </a:pPr>
             <a:r>
-              <a:t>Public GitHub Repository: https://github.com/shubhamsapr5-eng/truth-lens</a:t>
+              <a:rPr b="1" sz="1100">
+                <a:solidFill>
+                  <a:srgbClr val="28A745"/>
+                </a:solidFill>
+              </a:rPr>
+              <a:t>[+] GitHub Repository: </a:t>
             </a:r>
-          </a:p>
-          <a:p>
-            <a:pPr>
-              <a:spcAft>
-                <a:spcPts val="600"/>
-              </a:spcAft>
-              <a:defRPr sz="1300">
-                <a:solidFill>
-                  <a:srgbClr val="1E293B"/>
-                </a:solidFill>
-                <a:latin typeface="Calibri"/>
-              </a:defRPr>
-            </a:pPr>
-          </a:p>
-          <a:p>
-            <a:pPr>
-              <a:spcAft>
-                <a:spcPts val="600"/>
-              </a:spcAft>
-              <a:defRPr sz="1300">
-                <a:solidFill>
-                  <a:srgbClr val="1E293B"/>
-                </a:solidFill>
-                <a:latin typeface="Calibri"/>
-              </a:defRPr>
-            </a:pPr>
             <a:r>
-              <a:t>Thank You! Questions &amp; Live Demonstration.</a:t>
+              <a:rPr sz="1100">
+                <a:solidFill>
+                  <a:srgbClr val="212529"/>
+                </a:solidFill>
+              </a:rPr>
+              <a:t>https://github.com/shubhamsapr5-eng/truth-lens (Fully organized &amp; updated).</a:t>
             </a:r>
           </a:p>
         </p:txBody>
@@ -15823,283 +16772,251 @@
       </p:grpSpPr>
       <p:sp>
         <p:nvSpPr>
-          <p:cNvPr id="96" name="Google Shape;96;p14"/>
-          <p:cNvSpPr txBox="1">
-            <a:spLocks noGrp="1"/>
-          </p:cNvSpPr>
-          <p:nvPr>
-            <p:ph type="title"/>
-          </p:nvPr>
+          <p:cNvPr id="2" name="TextBox 1"/>
+          <p:cNvSpPr txBox="1"/>
+          <p:nvPr/>
         </p:nvSpPr>
         <p:spPr>
           <a:xfrm>
-            <a:off x="812800" y="274638"/>
-            <a:ext cx="10668000" cy="487500"/>
+            <a:off x="731520" y="365760"/>
+            <a:ext cx="10515600" cy="822960"/>
           </a:xfrm>
           <a:prstGeom prst="rect">
             <a:avLst/>
           </a:prstGeom>
           <a:noFill/>
-          <a:ln>
-            <a:noFill/>
-          </a:ln>
         </p:spPr>
         <p:txBody>
-          <a:bodyPr spcFirstLastPara="1" wrap="square" lIns="91425" tIns="45700" rIns="91425" bIns="45700" anchor="ctr" anchorCtr="0">
-            <a:noAutofit/>
+          <a:bodyPr wrap="square" lIns="0" tIns="0" rIns="0" bIns="0">
+            <a:spAutoFit/>
           </a:bodyPr>
           <a:lstStyle/>
           <a:p>
-            <a:pPr marL="0" lvl="0" indent="0" algn="l" rtl="0">
-              <a:spcBef>
-                <a:spcPts val="0"/>
-              </a:spcBef>
-              <a:spcAft>
-                <a:spcPts val="0"/>
-              </a:spcAft>
-              <a:buClr>
-                <a:srgbClr val="17365D"/>
-              </a:buClr>
-              <a:buSzPts val="2800"/>
-              <a:buFont typeface="Verdana"/>
-              <a:buNone/>
+            <a:pPr>
+              <a:defRPr sz="2400" b="1">
+                <a:solidFill>
+                  <a:srgbClr val="102C57"/>
+                </a:solidFill>
+                <a:latin typeface="Arial"/>
+              </a:defRPr>
             </a:pPr>
             <a:r>
               <a:t>Table of Contents (Review 2 Evaluation)</a:t>
             </a:r>
-            <a:endParaRPr dirty="0">
-              <a:latin typeface="Cambria" panose="02040503050406030204" pitchFamily="18" charset="0"/>
-              <a:ea typeface="Cambria" panose="02040503050406030204" pitchFamily="18" charset="0"/>
-            </a:endParaRPr>
           </a:p>
         </p:txBody>
       </p:sp>
       <p:sp>
         <p:nvSpPr>
-          <p:cNvPr id="97" name="Google Shape;97;p14"/>
-          <p:cNvSpPr txBox="1">
-            <a:spLocks noGrp="1"/>
-          </p:cNvSpPr>
-          <p:nvPr>
-            <p:ph type="body" idx="1"/>
-          </p:nvPr>
+          <p:cNvPr id="3" name="TextBox 2"/>
+          <p:cNvSpPr txBox="1"/>
+          <p:nvPr/>
         </p:nvSpPr>
         <p:spPr>
           <a:xfrm>
-            <a:off x="812800" y="1143001"/>
-            <a:ext cx="10668000" cy="3924299"/>
+            <a:off x="731520" y="1188720"/>
+            <a:ext cx="10515600" cy="5029200"/>
           </a:xfrm>
           <a:prstGeom prst="rect">
             <a:avLst/>
           </a:prstGeom>
           <a:noFill/>
-          <a:ln>
-            <a:noFill/>
-          </a:ln>
         </p:spPr>
         <p:txBody>
-          <a:bodyPr spcFirstLastPara="1" wrap="square" lIns="91425" tIns="45700" rIns="91425" bIns="45700" anchor="t" anchorCtr="0">
-            <a:normAutofit/>
+          <a:bodyPr wrap="square">
+            <a:spAutoFit/>
           </a:bodyPr>
           <a:lstStyle/>
           <a:p>
-            <a:pPr marL="495300" indent="-342900" algn="just">
-              <a:lnSpc>
-                <a:spcPct val="200000"/>
-              </a:lnSpc>
-              <a:spcBef>
-                <a:spcPts val="0"/>
-              </a:spcBef>
-              <a:spcAft>
-                <a:spcPts val="600"/>
-              </a:spcAft>
-              <a:buFont typeface="Wingdings" panose="05000000000000000000" pitchFamily="2" charset="2"/>
-              <a:buChar char="Ø"/>
+            <a:pPr>
+              <a:spcAft>
+                <a:spcPts val="400"/>
+              </a:spcAft>
               <a:defRPr sz="1200">
                 <a:solidFill>
-                  <a:srgbClr val="1E293B"/>
-                </a:solidFill>
-                <a:latin typeface="Calibri"/>
+                  <a:srgbClr val="212529"/>
+                </a:solidFill>
+                <a:latin typeface="Arial"/>
               </a:defRPr>
             </a:pPr>
             <a:r>
-              <a:t>1. Problem Statement &amp; GitHub Repository Link</a:t>
+              <a:t>1. Problem Statement &amp; Official GitHub Repository  --  PSAIAC_61 Project Scope &amp; Repository</a:t>
             </a:r>
           </a:p>
           <a:p>
             <a:pPr>
               <a:spcAft>
-                <a:spcPts val="600"/>
+                <a:spcPts val="400"/>
               </a:spcAft>
               <a:defRPr sz="1200">
                 <a:solidFill>
-                  <a:srgbClr val="1E293B"/>
-                </a:solidFill>
-                <a:latin typeface="Calibri"/>
+                  <a:srgbClr val="212529"/>
+                </a:solidFill>
+                <a:latin typeface="Arial"/>
               </a:defRPr>
             </a:pPr>
             <a:r>
-              <a:t>2. Abstract (Rubric: 2 Marks)</a:t>
+              <a:t>2. Abstract  --  Problem, Objectives &amp; Approach (Rubric: 2 Marks)</a:t>
             </a:r>
           </a:p>
           <a:p>
             <a:pPr>
               <a:spcAft>
-                <a:spcPts val="600"/>
+                <a:spcPts val="400"/>
               </a:spcAft>
               <a:defRPr sz="1200">
                 <a:solidFill>
-                  <a:srgbClr val="1E293B"/>
-                </a:solidFill>
-                <a:latin typeface="Calibri"/>
+                  <a:srgbClr val="212529"/>
+                </a:solidFill>
+                <a:latin typeface="Arial"/>
               </a:defRPr>
             </a:pPr>
             <a:r>
-              <a:t>3. Literature Survey — 12 IEEE/Scopus Papers (Rubric: 3 Marks)</a:t>
+              <a:t>3. Literature Survey (12 IEEE / Scopus Papers)  --  Critical Analysis &amp; Comparative Matrix (Rubric: 3 Marks)</a:t>
             </a:r>
           </a:p>
           <a:p>
             <a:pPr>
               <a:spcAft>
-                <a:spcPts val="600"/>
+                <a:spcPts val="400"/>
               </a:spcAft>
               <a:defRPr sz="1200">
                 <a:solidFill>
-                  <a:srgbClr val="1E293B"/>
-                </a:solidFill>
-                <a:latin typeface="Calibri"/>
+                  <a:srgbClr val="212529"/>
+                </a:solidFill>
+                <a:latin typeface="Arial"/>
               </a:defRPr>
             </a:pPr>
             <a:r>
-              <a:t>4. Project Objectives (Rubric: 2 Marks)</a:t>
+              <a:t>4. Project Objectives  --  SMART Outcome-Focused Goals (Rubric: 2 Marks)</a:t>
             </a:r>
           </a:p>
           <a:p>
             <a:pPr>
               <a:spcAft>
-                <a:spcPts val="600"/>
+                <a:spcPts val="400"/>
               </a:spcAft>
               <a:defRPr sz="1200">
                 <a:solidFill>
-                  <a:srgbClr val="1E293B"/>
-                </a:solidFill>
-                <a:latin typeface="Calibri"/>
+                  <a:srgbClr val="212529"/>
+                </a:solidFill>
+                <a:latin typeface="Arial"/>
               </a:defRPr>
             </a:pPr>
             <a:r>
-              <a:t>5. Existing Methods &amp; Critical Drawbacks (Rubric: 2 Marks)</a:t>
+              <a:t>5. Existing Methods and Drawbacks  --  Comparative Critique of Current Approaches (Rubric: 2 Marks)</a:t>
             </a:r>
           </a:p>
           <a:p>
             <a:pPr>
               <a:spcAft>
-                <a:spcPts val="600"/>
+                <a:spcPts val="400"/>
               </a:spcAft>
               <a:defRPr sz="1200">
                 <a:solidFill>
-                  <a:srgbClr val="1E293B"/>
-                </a:solidFill>
-                <a:latin typeface="Calibri"/>
+                  <a:srgbClr val="212529"/>
+                </a:solidFill>
+                <a:latin typeface="Arial"/>
               </a:defRPr>
             </a:pPr>
             <a:r>
-              <a:t>6. Proposed Method &amp; Feasibility Study (Rubric: 3 Marks)</a:t>
+              <a:t>6. Proposed Method &amp; Feasibility Study  --  Cross-Source NLI &amp; Technical/Cost Feasibility (Rubric: 3 Marks)</a:t>
             </a:r>
           </a:p>
           <a:p>
             <a:pPr>
               <a:spcAft>
-                <a:spcPts val="600"/>
+                <a:spcPts val="400"/>
               </a:spcAft>
               <a:defRPr sz="1200">
                 <a:solidFill>
-                  <a:srgbClr val="1E293B"/>
-                </a:solidFill>
-                <a:latin typeface="Calibri"/>
+                  <a:srgbClr val="212529"/>
+                </a:solidFill>
+                <a:latin typeface="Arial"/>
               </a:defRPr>
             </a:pPr>
             <a:r>
-              <a:t>7. System Architecture &amp; Data Flow Diagram (Rubric: 3 Marks)</a:t>
+              <a:t>7. System Architecture Diagram  --  3-Tier Dataflow &amp; Model Integration (Rubric: 3 Marks)</a:t>
             </a:r>
           </a:p>
           <a:p>
             <a:pPr>
               <a:spcAft>
-                <a:spcPts val="600"/>
+                <a:spcPts val="400"/>
               </a:spcAft>
               <a:defRPr sz="1200">
                 <a:solidFill>
-                  <a:srgbClr val="1E293B"/>
-                </a:solidFill>
-                <a:latin typeface="Calibri"/>
+                  <a:srgbClr val="212529"/>
+                </a:solidFill>
+                <a:latin typeface="Arial"/>
               </a:defRPr>
             </a:pPr>
             <a:r>
-              <a:t>8. System Modules Breakdown (Rubric: 2 Marks)</a:t>
+              <a:t>8. System Modules Breakdown  --  Modules 1 to 6 Functional Details (Rubric: 2 Marks)</a:t>
             </a:r>
           </a:p>
           <a:p>
             <a:pPr>
               <a:spcAft>
-                <a:spcPts val="600"/>
+                <a:spcPts val="400"/>
               </a:spcAft>
               <a:defRPr sz="1200">
                 <a:solidFill>
-                  <a:srgbClr val="1E293B"/>
-                </a:solidFill>
-                <a:latin typeface="Calibri"/>
+                  <a:srgbClr val="212529"/>
+                </a:solidFill>
+                <a:latin typeface="Arial"/>
               </a:defRPr>
             </a:pPr>
             <a:r>
-              <a:t>9. Hardware &amp; Software Details (Rubric: 1 Mark)</a:t>
+              <a:t>9. Hardware and Software Details  --  Tech Stack, Dependencies &amp; Hardware Specs (Rubric: 1 Mark)</a:t>
             </a:r>
           </a:p>
           <a:p>
             <a:pPr>
               <a:spcAft>
-                <a:spcPts val="600"/>
+                <a:spcPts val="400"/>
               </a:spcAft>
               <a:defRPr sz="1200">
                 <a:solidFill>
-                  <a:srgbClr val="1E293B"/>
-                </a:solidFill>
-                <a:latin typeface="Calibri"/>
+                  <a:srgbClr val="212529"/>
+                </a:solidFill>
+                <a:latin typeface="Arial"/>
               </a:defRPr>
             </a:pPr>
             <a:r>
-              <a:t>10. 5-Phase Project Timeline &amp; Gantt Chart (Rubric: 1 Mark)</a:t>
+              <a:t>10. Timeline of the Project (Gantt Chart)  --  5-Phase Development Plan &amp; Milestones (Rubric: 1 Mark)</a:t>
             </a:r>
           </a:p>
           <a:p>
             <a:pPr>
               <a:spcAft>
-                <a:spcPts val="600"/>
+                <a:spcPts val="400"/>
               </a:spcAft>
               <a:defRPr sz="1200">
                 <a:solidFill>
-                  <a:srgbClr val="1E293B"/>
-                </a:solidFill>
-                <a:latin typeface="Calibri"/>
+                  <a:srgbClr val="212529"/>
+                </a:solidFill>
+                <a:latin typeface="Arial"/>
               </a:defRPr>
             </a:pPr>
             <a:r>
-              <a:t>11. References in IEEE Format (Rubric: 1 Mark)</a:t>
+              <a:t>11. References  --  IEEE Standard Citation Format (Rubric: 1 Mark)</a:t>
             </a:r>
           </a:p>
           <a:p>
             <a:pPr>
               <a:spcAft>
-                <a:spcPts val="600"/>
+                <a:spcPts val="400"/>
               </a:spcAft>
               <a:defRPr sz="1200">
                 <a:solidFill>
-                  <a:srgbClr val="1E293B"/>
-                </a:solidFill>
-                <a:latin typeface="Calibri"/>
+                  <a:srgbClr val="212529"/>
+                </a:solidFill>
+                <a:latin typeface="Arial"/>
               </a:defRPr>
             </a:pPr>
             <a:r>
-              <a:t>12. Review 2 Progress &amp; Live Demonstration</a:t>
+              <a:t>12. Review 2 Phase Deliverables &amp; Live Demo  --  MBFC SQLite Database &amp; Baseline Verification</a:t>
             </a:r>
           </a:p>
         </p:txBody>
@@ -16131,106 +17048,190 @@
       </p:grpSpPr>
       <p:sp>
         <p:nvSpPr>
-          <p:cNvPr id="96" name="Google Shape;96;p14"/>
-          <p:cNvSpPr txBox="1">
-            <a:spLocks noGrp="1"/>
-          </p:cNvSpPr>
-          <p:nvPr>
-            <p:ph type="title"/>
-          </p:nvPr>
+          <p:cNvPr id="2" name="TextBox 1"/>
+          <p:cNvSpPr txBox="1"/>
+          <p:nvPr/>
         </p:nvSpPr>
         <p:spPr>
           <a:xfrm>
-            <a:off x="812800" y="274638"/>
-            <a:ext cx="10668000" cy="487500"/>
+            <a:off x="731520" y="365760"/>
+            <a:ext cx="10515600" cy="822960"/>
           </a:xfrm>
           <a:prstGeom prst="rect">
             <a:avLst/>
           </a:prstGeom>
           <a:noFill/>
-          <a:ln>
-            <a:noFill/>
-          </a:ln>
         </p:spPr>
         <p:txBody>
-          <a:bodyPr spcFirstLastPara="1" wrap="square" lIns="91425" tIns="45700" rIns="91425" bIns="45700" anchor="ctr" anchorCtr="0">
-            <a:noAutofit/>
+          <a:bodyPr wrap="square" lIns="0" tIns="0" rIns="0" bIns="0">
+            <a:spAutoFit/>
           </a:bodyPr>
           <a:lstStyle/>
           <a:p>
-            <a:pPr marL="0" lvl="0" indent="0" algn="l" rtl="0">
-              <a:spcBef>
-                <a:spcPts val="0"/>
-              </a:spcBef>
-              <a:spcAft>
-                <a:spcPts val="0"/>
-              </a:spcAft>
-              <a:buClr>
-                <a:srgbClr val="17365D"/>
-              </a:buClr>
-              <a:buSzPts val="2800"/>
-              <a:buFont typeface="Verdana"/>
-              <a:buNone/>
-              <a:defRPr sz="2000" b="1">
-                <a:solidFill>
-                  <a:srgbClr val="1A365D"/>
-                </a:solidFill>
-                <a:latin typeface="Calibri"/>
+            <a:pPr>
+              <a:defRPr sz="2400" b="1">
+                <a:solidFill>
+                  <a:srgbClr val="102C57"/>
+                </a:solidFill>
+                <a:latin typeface="Arial"/>
               </a:defRPr>
             </a:pPr>
             <a:r>
               <a:t>Problem Statement &amp; GitHub Repository</a:t>
             </a:r>
-            <a:endParaRPr dirty="0">
-              <a:latin typeface="Cambria" panose="02040503050406030204" pitchFamily="18" charset="0"/>
-              <a:ea typeface="Cambria" panose="02040503050406030204" pitchFamily="18" charset="0"/>
-            </a:endParaRPr>
           </a:p>
         </p:txBody>
       </p:sp>
       <p:sp>
         <p:nvSpPr>
-          <p:cNvPr id="97" name="Google Shape;97;p14"/>
-          <p:cNvSpPr txBox="1">
-            <a:spLocks noGrp="1"/>
-          </p:cNvSpPr>
-          <p:nvPr>
-            <p:ph type="body" idx="1"/>
-          </p:nvPr>
+          <p:cNvPr id="3" name="TextBox 2"/>
+          <p:cNvSpPr txBox="1"/>
+          <p:nvPr/>
         </p:nvSpPr>
         <p:spPr>
           <a:xfrm>
-            <a:off x="812800" y="1143001"/>
-            <a:ext cx="10668000" cy="4953000"/>
+            <a:off x="731520" y="1280160"/>
+            <a:ext cx="10515600" cy="5029200"/>
           </a:xfrm>
           <a:prstGeom prst="rect">
             <a:avLst/>
           </a:prstGeom>
           <a:noFill/>
-          <a:ln>
-            <a:noFill/>
-          </a:ln>
         </p:spPr>
         <p:txBody>
-          <a:bodyPr spcFirstLastPara="1" wrap="square" lIns="91425" tIns="45700" rIns="91425" bIns="45700" anchor="t" anchorCtr="0">
-            <a:normAutofit lnSpcReduction="10000"/>
+          <a:bodyPr wrap="square">
+            <a:spAutoFit/>
           </a:bodyPr>
           <a:lstStyle/>
           <a:p>
-            <a:pPr marL="342900" lvl="0" indent="-190500" algn="just">
-              <a:spcBef>
-                <a:spcPts val="0"/>
-              </a:spcBef>
-              <a:buNone/>
-              <a:defRPr sz="2000" b="1">
-                <a:solidFill>
-                  <a:srgbClr val="1A365D"/>
-                </a:solidFill>
-                <a:latin typeface="Calibri"/>
+            <a:pPr>
+              <a:spcAft>
+                <a:spcPts val="1000"/>
+              </a:spcAft>
+              <a:defRPr sz="1600" b="1">
+                <a:solidFill>
+                  <a:srgbClr val="102C57"/>
+                </a:solidFill>
+                <a:latin typeface="Arial"/>
               </a:defRPr>
             </a:pPr>
             <a:r>
-              <a:t>Problem Statement &amp; GitHub Repository</a:t>
+              <a:t>Problem Statement Number: PSAIAC_61</a:t>
+            </a:r>
+          </a:p>
+          <a:p>
+            <a:pPr>
+              <a:spcAft>
+                <a:spcPts val="1000"/>
+              </a:spcAft>
+            </a:pPr>
+            <a:r>
+              <a:rPr b="1" sz="1400">
+                <a:solidFill>
+                  <a:srgbClr val="102C57"/>
+                </a:solidFill>
+              </a:rPr>
+              <a:t>Organization: </a:t>
+            </a:r>
+            <a:r>
+              <a:rPr b="0" sz="1400">
+                <a:solidFill>
+                  <a:srgbClr val="212529"/>
+                </a:solidFill>
+              </a:rPr>
+              <a:t>School of Artificial Intelligence and Advanced Computing (AI&amp;AC), Presidency University</a:t>
+            </a:r>
+          </a:p>
+          <a:p>
+            <a:pPr>
+              <a:spcAft>
+                <a:spcPts val="1000"/>
+              </a:spcAft>
+            </a:pPr>
+            <a:r>
+              <a:rPr b="1" sz="1400">
+                <a:solidFill>
+                  <a:srgbClr val="102C57"/>
+                </a:solidFill>
+              </a:rPr>
+              <a:t>Category: </a:t>
+            </a:r>
+            <a:r>
+              <a:rPr b="0" sz="1400">
+                <a:solidFill>
+                  <a:srgbClr val="212529"/>
+                </a:solidFill>
+              </a:rPr>
+              <a:t>Software / Applied Machine Learning &amp; NLP</a:t>
+            </a:r>
+          </a:p>
+          <a:p>
+            <a:pPr>
+              <a:spcAft>
+                <a:spcPts val="1000"/>
+              </a:spcAft>
+            </a:pPr>
+            <a:r>
+              <a:rPr b="1" sz="1400">
+                <a:solidFill>
+                  <a:srgbClr val="102C57"/>
+                </a:solidFill>
+              </a:rPr>
+              <a:t>Difficulty Level: </a:t>
+            </a:r>
+            <a:r>
+              <a:rPr b="0" sz="1400">
+                <a:solidFill>
+                  <a:srgbClr val="212529"/>
+                </a:solidFill>
+              </a:rPr>
+              <a:t>Medium-High</a:t>
+            </a:r>
+          </a:p>
+          <a:p>
+            <a:pPr>
+              <a:spcAft>
+                <a:spcPts val="1000"/>
+              </a:spcAft>
+            </a:pPr>
+            <a:r>
+              <a:rPr b="1" sz="1400">
+                <a:solidFill>
+                  <a:srgbClr val="102C57"/>
+                </a:solidFill>
+              </a:rPr>
+              <a:t>Problem Description: </a:t>
+            </a:r>
+            <a:r>
+              <a:rPr b="0" sz="1400">
+                <a:solidFill>
+                  <a:srgbClr val="212529"/>
+                </a:solidFill>
+              </a:rPr>
+              <a:t>Misinformation spreads approximately 6x faster than real news online (Vosoughi et al., Science 2018). There is a critical societal need for an automated system that evaluates a news article in real time and scores it on: (1) factual accuracy, (2) source credibility, and (3) manipulation indicators.</a:t>
+            </a:r>
+          </a:p>
+          <a:p>
+            <a:pPr>
+              <a:spcAft>
+                <a:spcPts val="1000"/>
+              </a:spcAft>
+            </a:pPr>
+            <a:r>
+              <a:rPr b="1" sz="1400">
+                <a:solidFill>
+                  <a:srgbClr val="3565A9"/>
+                </a:solidFill>
+              </a:rPr>
+              <a:t>Official GitHub Repository: </a:t>
+            </a:r>
+            <a:r>
+              <a:rPr b="1" sz="1400">
+                <a:solidFill>
+                  <a:srgbClr val="28A745"/>
+                </a:solidFill>
+              </a:rPr>
+              <a:t>https://github.com/shubhamsapr5-eng/truth-lens (Public Access Enabled)</a:t>
             </a:r>
           </a:p>
         </p:txBody>
@@ -16249,36 +17250,50 @@
 </file>
 
 <file path=ppt/slides/slide5.xml><?xml version="1.0" encoding="utf-8"?>
-<p:sld xmlns:a="http://schemas.openxmlformats.org/drawingml/2006/main" xmlns:p="http://schemas.openxmlformats.org/presentationml/2006/main" xmlns:r="http://schemas.openxmlformats.org/officeDocument/2006/relationships">
+<p:sld xmlns:a="http://schemas.openxmlformats.org/drawingml/2006/main" xmlns:r="http://schemas.openxmlformats.org/officeDocument/2006/relationships" xmlns:p="http://schemas.openxmlformats.org/presentationml/2006/main">
   <p:cSld>
     <p:spTree>
       <p:nvGrpSpPr>
-        <p:cNvPr id="1" name=""/>
+        <p:cNvPr id="1" name="Shape 113"/>
         <p:cNvGrpSpPr/>
         <p:nvPr/>
       </p:nvGrpSpPr>
-      <p:grpSpPr/>
+      <p:grpSpPr>
+        <a:xfrm>
+          <a:off x="0" y="0"/>
+          <a:ext cx="0" cy="0"/>
+          <a:chOff x="0" y="0"/>
+          <a:chExt cx="0" cy="0"/>
+        </a:xfrm>
+      </p:grpSpPr>
       <p:sp>
         <p:nvSpPr>
-          <p:cNvPr id="2" name="Title 1"/>
-          <p:cNvSpPr>
-            <a:spLocks noGrp="1"/>
-          </p:cNvSpPr>
-          <p:nvPr>
-            <p:ph type="title"/>
-          </p:nvPr>
+          <p:cNvPr id="2" name="TextBox 1"/>
+          <p:cNvSpPr txBox="1"/>
+          <p:nvPr/>
         </p:nvSpPr>
-        <p:spPr/>
+        <p:spPr>
+          <a:xfrm>
+            <a:off x="731520" y="365760"/>
+            <a:ext cx="10515600" cy="822960"/>
+          </a:xfrm>
+          <a:prstGeom prst="rect">
+            <a:avLst/>
+          </a:prstGeom>
+          <a:noFill/>
+        </p:spPr>
         <p:txBody>
-          <a:bodyPr/>
+          <a:bodyPr wrap="square" lIns="0" tIns="0" rIns="0" bIns="0">
+            <a:spAutoFit/>
+          </a:bodyPr>
           <a:lstStyle/>
           <a:p>
             <a:pPr>
-              <a:defRPr sz="2000" b="1">
-                <a:solidFill>
-                  <a:srgbClr val="1A365D"/>
-                </a:solidFill>
-                <a:latin typeface="Calibri"/>
+              <a:defRPr sz="2400" b="1">
+                <a:solidFill>
+                  <a:srgbClr val="102C57"/>
+                </a:solidFill>
+                <a:latin typeface="Arial"/>
               </a:defRPr>
             </a:pPr>
             <a:r>
@@ -16289,31 +17304,14 @@
       </p:sp>
       <p:sp>
         <p:nvSpPr>
-          <p:cNvPr id="3" name="Text Placeholder 2"/>
-          <p:cNvSpPr>
-            <a:spLocks noGrp="1"/>
-          </p:cNvSpPr>
-          <p:nvPr>
-            <p:ph type="body" idx="1"/>
-          </p:nvPr>
-        </p:nvSpPr>
-        <p:spPr/>
-        <p:txBody>
-          <a:bodyPr/>
-          <a:lstStyle/>
-          <a:p/>
-        </p:txBody>
-      </p:sp>
-      <p:sp>
-        <p:nvSpPr>
-          <p:cNvPr id="4" name="TextBox 3"/>
+          <p:cNvPr id="3" name="TextBox 2"/>
           <p:cNvSpPr txBox="1"/>
           <p:nvPr/>
         </p:nvSpPr>
         <p:spPr>
           <a:xfrm>
-            <a:off x="822960" y="1188720"/>
-            <a:ext cx="10515600" cy="4754880"/>
+            <a:off x="731520" y="1280160"/>
+            <a:ext cx="10515600" cy="5029200"/>
           </a:xfrm>
           <a:prstGeom prst="rect">
             <a:avLst/>
@@ -16328,70 +17326,103 @@
           <a:p>
             <a:pPr>
               <a:spcAft>
-                <a:spcPts val="600"/>
-              </a:spcAft>
-              <a:defRPr sz="1300">
-                <a:solidFill>
-                  <a:srgbClr val="1E293B"/>
-                </a:solidFill>
-                <a:latin typeface="Calibri"/>
-              </a:defRPr>
+                <a:spcPts val="1000"/>
+              </a:spcAft>
             </a:pPr>
             <a:r>
-              <a:t>Problem Context: Online misinformation diffuses ~6x faster than verified factual news across digital platforms (Vosoughi et al., Science 2018). Traditional fake-news classifiers evaluate articles in isolation, learning superficial topic shortcuts and failing against professionally phrased falsehoods.</a:t>
+              <a:rPr b="1" sz="1300">
+                <a:solidFill>
+                  <a:srgbClr val="102C57"/>
+                </a:solidFill>
+              </a:rPr>
+              <a:t>Problem Context: </a:t>
+            </a:r>
+            <a:r>
+              <a:rPr sz="1300">
+                <a:solidFill>
+                  <a:srgbClr val="212529"/>
+                </a:solidFill>
+              </a:rPr>
+              <a:t>Online misinformation diffuses ~6x faster than verified factual news across digital platforms (Vosoughi et al., Science 2018). Traditional fake-news classifiers evaluate articles in isolation, learning superficial topic shortcuts and failing against professionally phrased falsehoods.</a:t>
             </a:r>
           </a:p>
           <a:p>
             <a:pPr>
               <a:spcAft>
-                <a:spcPts val="600"/>
-              </a:spcAft>
-              <a:defRPr sz="1300">
-                <a:solidFill>
-                  <a:srgbClr val="1E293B"/>
-                </a:solidFill>
-                <a:latin typeface="Calibri"/>
-              </a:defRPr>
+                <a:spcPts val="1000"/>
+              </a:spcAft>
             </a:pPr>
             <a:r>
-              <a:t>Core Project Objective: TruthLens develops a real-time credibility scoring engine that evaluates any news article across three orthogonal dimensions: Factual Accuracy (via multi-source corroboration), Source Reputation (via Media Bias/Fact Check data), and Manipulation Indicators (via clickbait/urgency heuristics).</a:t>
+              <a:rPr b="1" sz="1300">
+                <a:solidFill>
+                  <a:srgbClr val="102C57"/>
+                </a:solidFill>
+              </a:rPr>
+              <a:t>Core Project Objective: </a:t>
+            </a:r>
+            <a:r>
+              <a:rPr sz="1300">
+                <a:solidFill>
+                  <a:srgbClr val="212529"/>
+                </a:solidFill>
+              </a:rPr>
+              <a:t>TruthLens develops a real-time credibility scoring engine that evaluates any news article across three orthogonal dimensions: Factual Accuracy (via multi-source corroboration), Source Reputation (via Media Bias/Fact Check data), and Manipulation Indicators (via clickbait/urgency heuristics).</a:t>
             </a:r>
           </a:p>
           <a:p>
             <a:pPr>
               <a:spcAft>
-                <a:spcPts val="600"/>
-              </a:spcAft>
-              <a:defRPr sz="1300">
-                <a:solidFill>
-                  <a:srgbClr val="1E293B"/>
-                </a:solidFill>
-                <a:latin typeface="Calibri"/>
-              </a:defRPr>
+                <a:spcPts val="1000"/>
+              </a:spcAft>
             </a:pPr>
             <a:r>
-              <a:t>Proposed Approach &amp; Workflow: TruthLens (1) extracts central checkable factual claims, (2) retrieves live independent reporting pools (5-10 articles) via News APIs, (3) evaluates semantic agreement using RoBERTa-MNLI (Entailment, Contradiction, Neutral), and (4) aggregates signals into an explainable 0-100 Credibility Score.</a:t>
+              <a:rPr b="1" sz="1300">
+                <a:solidFill>
+                  <a:srgbClr val="102C57"/>
+                </a:solidFill>
+              </a:rPr>
+              <a:t>Proposed Approach &amp; Workflow: </a:t>
+            </a:r>
+            <a:r>
+              <a:rPr sz="1300">
+                <a:solidFill>
+                  <a:srgbClr val="212529"/>
+                </a:solidFill>
+              </a:rPr>
+              <a:t>TruthLens (1) extracts central checkable factual claims, (2) retrieves live independent reporting pools (5-10 articles) via News APIs, (3) evaluates semantic agreement using RoBERTa-MNLI (Entailment, Contradiction, Neutral), and (4) aggregates signals into an explainable 0-100 Credibility Score.</a:t>
             </a:r>
           </a:p>
           <a:p>
             <a:pPr>
               <a:spcAft>
-                <a:spcPts val="600"/>
-              </a:spcAft>
-              <a:defRPr sz="1300">
-                <a:solidFill>
-                  <a:srgbClr val="1E293B"/>
-                </a:solidFill>
-                <a:latin typeface="Calibri"/>
-              </a:defRPr>
+                <a:spcPts val="1000"/>
+              </a:spcAft>
             </a:pPr>
             <a:r>
-              <a:t>Deliverables &amp; Impact: An indexed SQLite knowledge base of 4,442 news outlets (&lt;1ms lookup), a high-throughput FastAPI backend, and an interactive Streamlit dashboard displaying transparent source-by-source evidence attribution.</a:t>
+              <a:rPr b="1" sz="1300">
+                <a:solidFill>
+                  <a:srgbClr val="102C57"/>
+                </a:solidFill>
+              </a:rPr>
+              <a:t>Deliverables &amp; Impact: </a:t>
+            </a:r>
+            <a:r>
+              <a:rPr sz="1300">
+                <a:solidFill>
+                  <a:srgbClr val="212529"/>
+                </a:solidFill>
+              </a:rPr>
+              <a:t>An indexed SQLite knowledge base of 4,442 news outlets (&lt;1ms lookup), a high-throughput FastAPI backend, and an interactive Streamlit dashboard displaying transparent source-by-source evidence attribution.</a:t>
             </a:r>
           </a:p>
         </p:txBody>
       </p:sp>
     </p:spTree>
+    <p:extLst>
+      <p:ext uri="{BB962C8B-B14F-4D97-AF65-F5344CB8AC3E}">
+        <p14:creationId xmlns:p14="http://schemas.microsoft.com/office/powerpoint/2010/main" val="2856357337"/>
+      </p:ext>
+    </p:extLst>
   </p:cSld>
   <p:clrMapOvr>
     <a:masterClrMapping/>
@@ -16400,72 +17431,69 @@
 </file>
 
 <file path=ppt/slides/slide6.xml><?xml version="1.0" encoding="utf-8"?>
-<p:sld xmlns:a="http://schemas.openxmlformats.org/drawingml/2006/main" xmlns:p="http://schemas.openxmlformats.org/presentationml/2006/main" xmlns:r="http://schemas.openxmlformats.org/officeDocument/2006/relationships">
+<p:sld xmlns:a="http://schemas.openxmlformats.org/drawingml/2006/main" xmlns:r="http://schemas.openxmlformats.org/officeDocument/2006/relationships" xmlns:p="http://schemas.openxmlformats.org/presentationml/2006/main">
   <p:cSld>
     <p:spTree>
       <p:nvGrpSpPr>
-        <p:cNvPr id="1" name=""/>
+        <p:cNvPr id="1" name="Shape 113"/>
         <p:cNvGrpSpPr/>
         <p:nvPr/>
       </p:nvGrpSpPr>
-      <p:grpSpPr/>
+      <p:grpSpPr>
+        <a:xfrm>
+          <a:off x="0" y="0"/>
+          <a:ext cx="0" cy="0"/>
+          <a:chOff x="0" y="0"/>
+          <a:chExt cx="0" cy="0"/>
+        </a:xfrm>
+      </p:grpSpPr>
       <p:sp>
         <p:nvSpPr>
-          <p:cNvPr id="2" name="Title 1"/>
-          <p:cNvSpPr>
-            <a:spLocks noGrp="1"/>
-          </p:cNvSpPr>
-          <p:nvPr>
-            <p:ph type="title"/>
-          </p:nvPr>
+          <p:cNvPr id="2" name="TextBox 1"/>
+          <p:cNvSpPr txBox="1"/>
+          <p:nvPr/>
         </p:nvSpPr>
-        <p:spPr/>
+        <p:spPr>
+          <a:xfrm>
+            <a:off x="731520" y="365760"/>
+            <a:ext cx="10515600" cy="822960"/>
+          </a:xfrm>
+          <a:prstGeom prst="rect">
+            <a:avLst/>
+          </a:prstGeom>
+          <a:noFill/>
+        </p:spPr>
         <p:txBody>
-          <a:bodyPr/>
+          <a:bodyPr wrap="square" lIns="0" tIns="0" rIns="0" bIns="0">
+            <a:spAutoFit/>
+          </a:bodyPr>
           <a:lstStyle/>
           <a:p>
             <a:pPr>
-              <a:defRPr sz="2000" b="1">
-                <a:solidFill>
-                  <a:srgbClr val="1A365D"/>
-                </a:solidFill>
-                <a:latin typeface="Calibri"/>
+              <a:defRPr sz="2400" b="1">
+                <a:solidFill>
+                  <a:srgbClr val="102C57"/>
+                </a:solidFill>
+                <a:latin typeface="Arial"/>
               </a:defRPr>
             </a:pPr>
             <a:r>
-              <a:t>Literature Survey - Part 1 (Rubric: 3 Marks)</a:t>
+              <a:t>Literature Survey -- Part 1 (Rubric: 3 Marks)</a:t>
             </a:r>
           </a:p>
         </p:txBody>
       </p:sp>
-      <p:sp>
-        <p:nvSpPr>
-          <p:cNvPr id="3" name="Text Placeholder 2"/>
-          <p:cNvSpPr>
-            <a:spLocks noGrp="1"/>
-          </p:cNvSpPr>
-          <p:nvPr>
-            <p:ph type="body" idx="1"/>
-          </p:nvPr>
-        </p:nvSpPr>
-        <p:spPr/>
-        <p:txBody>
-          <a:bodyPr/>
-          <a:lstStyle/>
-          <a:p/>
-        </p:txBody>
-      </p:sp>
       <p:graphicFrame>
         <p:nvGraphicFramePr>
-          <p:cNvPr id="4" name="Table 3"/>
+          <p:cNvPr id="3" name="Table 2"/>
           <p:cNvGraphicFramePr>
             <a:graphicFrameLocks noGrp="1"/>
           </p:cNvGraphicFramePr>
           <p:nvPr/>
         </p:nvGraphicFramePr>
         <p:xfrm>
-          <a:off x="731520" y="1188720"/>
-          <a:ext cx="10698480" cy="4572000"/>
+          <a:off x="548640" y="1188720"/>
+          <a:ext cx="10972800" cy="5120640"/>
         </p:xfrm>
         <a:graphic>
           <a:graphicData uri="http://schemas.openxmlformats.org/drawingml/2006/table">
@@ -16476,11 +17504,11 @@
               <a:tblGrid>
                 <a:gridCol w="1645920"/>
                 <a:gridCol w="2011680"/>
-                <a:gridCol w="1463040"/>
-                <a:gridCol w="2834640"/>
+                <a:gridCol w="1645920"/>
+                <a:gridCol w="2926080"/>
                 <a:gridCol w="2743200"/>
               </a:tblGrid>
-              <a:tr h="653142">
+              <a:tr h="731520">
                 <a:tc>
                   <a:txBody>
                     <a:bodyPr/>
@@ -16489,9 +17517,9 @@
                       <a:pPr algn="l">
                         <a:defRPr sz="1000" b="1">
                           <a:solidFill>
-                            <a:srgbClr val="1A365D"/>
+                            <a:srgbClr val="FFFFFF"/>
                           </a:solidFill>
-                          <a:latin typeface="Calibri"/>
+                          <a:latin typeface="Arial"/>
                         </a:defRPr>
                       </a:pPr>
                       <a:r>
@@ -16499,9 +17527,9 @@
                       </a:r>
                     </a:p>
                   </a:txBody>
-                  <a:tcPr>
+                  <a:tcPr marL="73152" marR="73152" marT="45720" marB="45720" anchor="ctr">
                     <a:solidFill>
-                      <a:srgbClr val="EDF2F7"/>
+                      <a:srgbClr val="102C57"/>
                     </a:solidFill>
                   </a:tcPr>
                 </a:tc>
@@ -16513,9 +17541,9 @@
                       <a:pPr algn="l">
                         <a:defRPr sz="1000" b="1">
                           <a:solidFill>
-                            <a:srgbClr val="1A365D"/>
+                            <a:srgbClr val="FFFFFF"/>
                           </a:solidFill>
-                          <a:latin typeface="Calibri"/>
+                          <a:latin typeface="Arial"/>
                         </a:defRPr>
                       </a:pPr>
                       <a:r>
@@ -16523,9 +17551,9 @@
                       </a:r>
                     </a:p>
                   </a:txBody>
-                  <a:tcPr>
+                  <a:tcPr marL="73152" marR="73152" marT="45720" marB="45720" anchor="ctr">
                     <a:solidFill>
-                      <a:srgbClr val="EDF2F7"/>
+                      <a:srgbClr val="102C57"/>
                     </a:solidFill>
                   </a:tcPr>
                 </a:tc>
@@ -16537,9 +17565,9 @@
                       <a:pPr algn="l">
                         <a:defRPr sz="1000" b="1">
                           <a:solidFill>
-                            <a:srgbClr val="1A365D"/>
+                            <a:srgbClr val="FFFFFF"/>
                           </a:solidFill>
-                          <a:latin typeface="Calibri"/>
+                          <a:latin typeface="Arial"/>
                         </a:defRPr>
                       </a:pPr>
                       <a:r>
@@ -16547,9 +17575,9 @@
                       </a:r>
                     </a:p>
                   </a:txBody>
-                  <a:tcPr>
+                  <a:tcPr marL="73152" marR="73152" marT="45720" marB="45720" anchor="ctr">
                     <a:solidFill>
-                      <a:srgbClr val="EDF2F7"/>
+                      <a:srgbClr val="102C57"/>
                     </a:solidFill>
                   </a:tcPr>
                 </a:tc>
@@ -16561,9 +17589,9 @@
                       <a:pPr algn="l">
                         <a:defRPr sz="1000" b="1">
                           <a:solidFill>
-                            <a:srgbClr val="1A365D"/>
+                            <a:srgbClr val="FFFFFF"/>
                           </a:solidFill>
-                          <a:latin typeface="Calibri"/>
+                          <a:latin typeface="Arial"/>
                         </a:defRPr>
                       </a:pPr>
                       <a:r>
@@ -16571,9 +17599,9 @@
                       </a:r>
                     </a:p>
                   </a:txBody>
-                  <a:tcPr>
+                  <a:tcPr marL="73152" marR="73152" marT="45720" marB="45720" anchor="ctr">
                     <a:solidFill>
-                      <a:srgbClr val="EDF2F7"/>
+                      <a:srgbClr val="102C57"/>
                     </a:solidFill>
                   </a:tcPr>
                 </a:tc>
@@ -16585,9 +17613,9 @@
                       <a:pPr algn="l">
                         <a:defRPr sz="1000" b="1">
                           <a:solidFill>
-                            <a:srgbClr val="1A365D"/>
+                            <a:srgbClr val="FFFFFF"/>
                           </a:solidFill>
-                          <a:latin typeface="Calibri"/>
+                          <a:latin typeface="Arial"/>
                         </a:defRPr>
                       </a:pPr>
                       <a:r>
@@ -16595,25 +17623,25 @@
                       </a:r>
                     </a:p>
                   </a:txBody>
-                  <a:tcPr>
+                  <a:tcPr marL="73152" marR="73152" marT="45720" marB="45720" anchor="ctr">
                     <a:solidFill>
-                      <a:srgbClr val="EDF2F7"/>
+                      <a:srgbClr val="102C57"/>
                     </a:solidFill>
                   </a:tcPr>
                 </a:tc>
               </a:tr>
-              <a:tr h="653142">
+              <a:tr h="731520">
                 <a:tc>
                   <a:txBody>
                     <a:bodyPr/>
                     <a:lstStyle/>
                     <a:p>
                       <a:pPr algn="l">
-                        <a:defRPr sz="900" b="1">
+                        <a:defRPr sz="900" b="0">
                           <a:solidFill>
-                            <a:srgbClr val="1E293B"/>
+                            <a:srgbClr val="212529"/>
                           </a:solidFill>
-                          <a:latin typeface="Calibri"/>
+                          <a:latin typeface="Arial"/>
                         </a:defRPr>
                       </a:pPr>
                       <a:r>
@@ -16626,9 +17654,9 @@
                       </a:r>
                     </a:p>
                   </a:txBody>
-                  <a:tcPr>
+                  <a:tcPr marL="73152" marR="73152" marT="45720" marB="45720" anchor="ctr">
                     <a:solidFill>
-                      <a:srgbClr val="FFFFFF"/>
+                      <a:srgbClr val="F5F7FA"/>
                     </a:solidFill>
                   </a:tcPr>
                 </a:tc>
@@ -16640,9 +17668,9 @@
                       <a:pPr algn="l">
                         <a:defRPr sz="900" b="0">
                           <a:solidFill>
-                            <a:srgbClr val="1E293B"/>
+                            <a:srgbClr val="212529"/>
                           </a:solidFill>
-                          <a:latin typeface="Calibri"/>
+                          <a:latin typeface="Arial"/>
                         </a:defRPr>
                       </a:pPr>
                       <a:r>
@@ -16650,9 +17678,9 @@
                       </a:r>
                     </a:p>
                   </a:txBody>
-                  <a:tcPr>
+                  <a:tcPr marL="73152" marR="73152" marT="45720" marB="45720" anchor="ctr">
                     <a:solidFill>
-                      <a:srgbClr val="FFFFFF"/>
+                      <a:srgbClr val="F5F7FA"/>
                     </a:solidFill>
                   </a:tcPr>
                 </a:tc>
@@ -16664,9 +17692,9 @@
                       <a:pPr algn="l">
                         <a:defRPr sz="900" b="0">
                           <a:solidFill>
-                            <a:srgbClr val="1E293B"/>
+                            <a:srgbClr val="212529"/>
                           </a:solidFill>
-                          <a:latin typeface="Calibri"/>
+                          <a:latin typeface="Arial"/>
                         </a:defRPr>
                       </a:pPr>
                       <a:r>
@@ -16674,9 +17702,9 @@
                       </a:r>
                     </a:p>
                   </a:txBody>
-                  <a:tcPr>
+                  <a:tcPr marL="73152" marR="73152" marT="45720" marB="45720" anchor="ctr">
                     <a:solidFill>
-                      <a:srgbClr val="FFFFFF"/>
+                      <a:srgbClr val="F5F7FA"/>
                     </a:solidFill>
                   </a:tcPr>
                 </a:tc>
@@ -16688,9 +17716,9 @@
                       <a:pPr algn="l">
                         <a:defRPr sz="900" b="0">
                           <a:solidFill>
-                            <a:srgbClr val="1E293B"/>
+                            <a:srgbClr val="212529"/>
                           </a:solidFill>
-                          <a:latin typeface="Calibri"/>
+                          <a:latin typeface="Arial"/>
                         </a:defRPr>
                       </a:pPr>
                       <a:r>
@@ -16698,9 +17726,9 @@
                       </a:r>
                     </a:p>
                   </a:txBody>
-                  <a:tcPr>
+                  <a:tcPr marL="73152" marR="73152" marT="45720" marB="45720" anchor="ctr">
                     <a:solidFill>
-                      <a:srgbClr val="FFFFFF"/>
+                      <a:srgbClr val="F5F7FA"/>
                     </a:solidFill>
                   </a:tcPr>
                 </a:tc>
@@ -16712,9 +17740,9 @@
                       <a:pPr algn="l">
                         <a:defRPr sz="900" b="0">
                           <a:solidFill>
-                            <a:srgbClr val="1E293B"/>
+                            <a:srgbClr val="212529"/>
                           </a:solidFill>
-                          <a:latin typeface="Calibri"/>
+                          <a:latin typeface="Arial"/>
                         </a:defRPr>
                       </a:pPr>
                       <a:r>
@@ -16722,25 +17750,25 @@
                       </a:r>
                     </a:p>
                   </a:txBody>
-                  <a:tcPr>
+                  <a:tcPr marL="73152" marR="73152" marT="45720" marB="45720" anchor="ctr">
                     <a:solidFill>
-                      <a:srgbClr val="FFFFFF"/>
+                      <a:srgbClr val="F5F7FA"/>
                     </a:solidFill>
                   </a:tcPr>
                 </a:tc>
               </a:tr>
-              <a:tr h="653142">
+              <a:tr h="731520">
                 <a:tc>
                   <a:txBody>
                     <a:bodyPr/>
                     <a:lstStyle/>
                     <a:p>
                       <a:pPr algn="l">
-                        <a:defRPr sz="900" b="1">
+                        <a:defRPr sz="900" b="0">
                           <a:solidFill>
-                            <a:srgbClr val="1E293B"/>
+                            <a:srgbClr val="212529"/>
                           </a:solidFill>
-                          <a:latin typeface="Calibri"/>
+                          <a:latin typeface="Arial"/>
                         </a:defRPr>
                       </a:pPr>
                       <a:r>
@@ -16753,11 +17781,7 @@
                       </a:r>
                     </a:p>
                   </a:txBody>
-                  <a:tcPr>
-                    <a:solidFill>
-                      <a:srgbClr val="F8FAFC"/>
-                    </a:solidFill>
-                  </a:tcPr>
+                  <a:tcPr marL="73152" marR="73152" marT="45720" marB="45720" anchor="ctr"/>
                 </a:tc>
                 <a:tc>
                   <a:txBody>
@@ -16767,9 +17791,9 @@
                       <a:pPr algn="l">
                         <a:defRPr sz="900" b="0">
                           <a:solidFill>
-                            <a:srgbClr val="1E293B"/>
+                            <a:srgbClr val="212529"/>
                           </a:solidFill>
-                          <a:latin typeface="Calibri"/>
+                          <a:latin typeface="Arial"/>
                         </a:defRPr>
                       </a:pPr>
                       <a:r>
@@ -16777,11 +17801,7 @@
                       </a:r>
                     </a:p>
                   </a:txBody>
-                  <a:tcPr>
-                    <a:solidFill>
-                      <a:srgbClr val="F8FAFC"/>
-                    </a:solidFill>
-                  </a:tcPr>
+                  <a:tcPr marL="73152" marR="73152" marT="45720" marB="45720" anchor="ctr"/>
                 </a:tc>
                 <a:tc>
                   <a:txBody>
@@ -16791,9 +17811,9 @@
                       <a:pPr algn="l">
                         <a:defRPr sz="900" b="0">
                           <a:solidFill>
-                            <a:srgbClr val="1E293B"/>
+                            <a:srgbClr val="212529"/>
                           </a:solidFill>
-                          <a:latin typeface="Calibri"/>
+                          <a:latin typeface="Arial"/>
                         </a:defRPr>
                       </a:pPr>
                       <a:r>
@@ -16801,11 +17821,7 @@
                       </a:r>
                     </a:p>
                   </a:txBody>
-                  <a:tcPr>
-                    <a:solidFill>
-                      <a:srgbClr val="F8FAFC"/>
-                    </a:solidFill>
-                  </a:tcPr>
+                  <a:tcPr marL="73152" marR="73152" marT="45720" marB="45720" anchor="ctr"/>
                 </a:tc>
                 <a:tc>
                   <a:txBody>
@@ -16815,9 +17831,9 @@
                       <a:pPr algn="l">
                         <a:defRPr sz="900" b="0">
                           <a:solidFill>
-                            <a:srgbClr val="1E293B"/>
+                            <a:srgbClr val="212529"/>
                           </a:solidFill>
-                          <a:latin typeface="Calibri"/>
+                          <a:latin typeface="Arial"/>
                         </a:defRPr>
                       </a:pPr>
                       <a:r>
@@ -16825,11 +17841,7 @@
                       </a:r>
                     </a:p>
                   </a:txBody>
-                  <a:tcPr>
-                    <a:solidFill>
-                      <a:srgbClr val="F8FAFC"/>
-                    </a:solidFill>
-                  </a:tcPr>
+                  <a:tcPr marL="73152" marR="73152" marT="45720" marB="45720" anchor="ctr"/>
                 </a:tc>
                 <a:tc>
                   <a:txBody>
@@ -16839,9 +17851,9 @@
                       <a:pPr algn="l">
                         <a:defRPr sz="900" b="0">
                           <a:solidFill>
-                            <a:srgbClr val="1E293B"/>
+                            <a:srgbClr val="212529"/>
                           </a:solidFill>
-                          <a:latin typeface="Calibri"/>
+                          <a:latin typeface="Arial"/>
                         </a:defRPr>
                       </a:pPr>
                       <a:r>
@@ -16849,25 +17861,21 @@
                       </a:r>
                     </a:p>
                   </a:txBody>
-                  <a:tcPr>
-                    <a:solidFill>
-                      <a:srgbClr val="F8FAFC"/>
-                    </a:solidFill>
-                  </a:tcPr>
+                  <a:tcPr marL="73152" marR="73152" marT="45720" marB="45720" anchor="ctr"/>
                 </a:tc>
               </a:tr>
-              <a:tr h="653142">
+              <a:tr h="731520">
                 <a:tc>
                   <a:txBody>
                     <a:bodyPr/>
                     <a:lstStyle/>
                     <a:p>
                       <a:pPr algn="l">
-                        <a:defRPr sz="900" b="1">
+                        <a:defRPr sz="900" b="0">
                           <a:solidFill>
-                            <a:srgbClr val="1E293B"/>
+                            <a:srgbClr val="212529"/>
                           </a:solidFill>
-                          <a:latin typeface="Calibri"/>
+                          <a:latin typeface="Arial"/>
                         </a:defRPr>
                       </a:pPr>
                       <a:r>
@@ -16880,9 +17888,9 @@
                       </a:r>
                     </a:p>
                   </a:txBody>
-                  <a:tcPr>
+                  <a:tcPr marL="73152" marR="73152" marT="45720" marB="45720" anchor="ctr">
                     <a:solidFill>
-                      <a:srgbClr val="FFFFFF"/>
+                      <a:srgbClr val="F5F7FA"/>
                     </a:solidFill>
                   </a:tcPr>
                 </a:tc>
@@ -16894,9 +17902,9 @@
                       <a:pPr algn="l">
                         <a:defRPr sz="900" b="0">
                           <a:solidFill>
-                            <a:srgbClr val="1E293B"/>
+                            <a:srgbClr val="212529"/>
                           </a:solidFill>
-                          <a:latin typeface="Calibri"/>
+                          <a:latin typeface="Arial"/>
                         </a:defRPr>
                       </a:pPr>
                       <a:r>
@@ -16904,9 +17912,9 @@
                       </a:r>
                     </a:p>
                   </a:txBody>
-                  <a:tcPr>
+                  <a:tcPr marL="73152" marR="73152" marT="45720" marB="45720" anchor="ctr">
                     <a:solidFill>
-                      <a:srgbClr val="FFFFFF"/>
+                      <a:srgbClr val="F5F7FA"/>
                     </a:solidFill>
                   </a:tcPr>
                 </a:tc>
@@ -16918,9 +17926,9 @@
                       <a:pPr algn="l">
                         <a:defRPr sz="900" b="0">
                           <a:solidFill>
-                            <a:srgbClr val="1E293B"/>
+                            <a:srgbClr val="212529"/>
                           </a:solidFill>
-                          <a:latin typeface="Calibri"/>
+                          <a:latin typeface="Arial"/>
                         </a:defRPr>
                       </a:pPr>
                       <a:r>
@@ -16928,9 +17936,9 @@
                       </a:r>
                     </a:p>
                   </a:txBody>
-                  <a:tcPr>
+                  <a:tcPr marL="73152" marR="73152" marT="45720" marB="45720" anchor="ctr">
                     <a:solidFill>
-                      <a:srgbClr val="FFFFFF"/>
+                      <a:srgbClr val="F5F7FA"/>
                     </a:solidFill>
                   </a:tcPr>
                 </a:tc>
@@ -16942,9 +17950,9 @@
                       <a:pPr algn="l">
                         <a:defRPr sz="900" b="0">
                           <a:solidFill>
-                            <a:srgbClr val="1E293B"/>
+                            <a:srgbClr val="212529"/>
                           </a:solidFill>
-                          <a:latin typeface="Calibri"/>
+                          <a:latin typeface="Arial"/>
                         </a:defRPr>
                       </a:pPr>
                       <a:r>
@@ -16952,9 +17960,9 @@
                       </a:r>
                     </a:p>
                   </a:txBody>
-                  <a:tcPr>
+                  <a:tcPr marL="73152" marR="73152" marT="45720" marB="45720" anchor="ctr">
                     <a:solidFill>
-                      <a:srgbClr val="FFFFFF"/>
+                      <a:srgbClr val="F5F7FA"/>
                     </a:solidFill>
                   </a:tcPr>
                 </a:tc>
@@ -16966,9 +17974,9 @@
                       <a:pPr algn="l">
                         <a:defRPr sz="900" b="0">
                           <a:solidFill>
-                            <a:srgbClr val="1E293B"/>
+                            <a:srgbClr val="212529"/>
                           </a:solidFill>
-                          <a:latin typeface="Calibri"/>
+                          <a:latin typeface="Arial"/>
                         </a:defRPr>
                       </a:pPr>
                       <a:r>
@@ -16976,25 +17984,25 @@
                       </a:r>
                     </a:p>
                   </a:txBody>
-                  <a:tcPr>
+                  <a:tcPr marL="73152" marR="73152" marT="45720" marB="45720" anchor="ctr">
                     <a:solidFill>
-                      <a:srgbClr val="FFFFFF"/>
+                      <a:srgbClr val="F5F7FA"/>
                     </a:solidFill>
                   </a:tcPr>
                 </a:tc>
               </a:tr>
-              <a:tr h="653142">
+              <a:tr h="731520">
                 <a:tc>
                   <a:txBody>
                     <a:bodyPr/>
                     <a:lstStyle/>
                     <a:p>
                       <a:pPr algn="l">
-                        <a:defRPr sz="900" b="1">
+                        <a:defRPr sz="900" b="0">
                           <a:solidFill>
-                            <a:srgbClr val="1E293B"/>
+                            <a:srgbClr val="212529"/>
                           </a:solidFill>
-                          <a:latin typeface="Calibri"/>
+                          <a:latin typeface="Arial"/>
                         </a:defRPr>
                       </a:pPr>
                       <a:r>
@@ -17007,11 +18015,7 @@
                       </a:r>
                     </a:p>
                   </a:txBody>
-                  <a:tcPr>
-                    <a:solidFill>
-                      <a:srgbClr val="F8FAFC"/>
-                    </a:solidFill>
-                  </a:tcPr>
+                  <a:tcPr marL="73152" marR="73152" marT="45720" marB="45720" anchor="ctr"/>
                 </a:tc>
                 <a:tc>
                   <a:txBody>
@@ -17021,9 +18025,9 @@
                       <a:pPr algn="l">
                         <a:defRPr sz="900" b="0">
                           <a:solidFill>
-                            <a:srgbClr val="1E293B"/>
+                            <a:srgbClr val="212529"/>
                           </a:solidFill>
-                          <a:latin typeface="Calibri"/>
+                          <a:latin typeface="Arial"/>
                         </a:defRPr>
                       </a:pPr>
                       <a:r>
@@ -17031,11 +18035,7 @@
                       </a:r>
                     </a:p>
                   </a:txBody>
-                  <a:tcPr>
-                    <a:solidFill>
-                      <a:srgbClr val="F8FAFC"/>
-                    </a:solidFill>
-                  </a:tcPr>
+                  <a:tcPr marL="73152" marR="73152" marT="45720" marB="45720" anchor="ctr"/>
                 </a:tc>
                 <a:tc>
                   <a:txBody>
@@ -17045,9 +18045,9 @@
                       <a:pPr algn="l">
                         <a:defRPr sz="900" b="0">
                           <a:solidFill>
-                            <a:srgbClr val="1E293B"/>
+                            <a:srgbClr val="212529"/>
                           </a:solidFill>
-                          <a:latin typeface="Calibri"/>
+                          <a:latin typeface="Arial"/>
                         </a:defRPr>
                       </a:pPr>
                       <a:r>
@@ -17055,11 +18055,7 @@
                       </a:r>
                     </a:p>
                   </a:txBody>
-                  <a:tcPr>
-                    <a:solidFill>
-                      <a:srgbClr val="F8FAFC"/>
-                    </a:solidFill>
-                  </a:tcPr>
+                  <a:tcPr marL="73152" marR="73152" marT="45720" marB="45720" anchor="ctr"/>
                 </a:tc>
                 <a:tc>
                   <a:txBody>
@@ -17069,9 +18065,9 @@
                       <a:pPr algn="l">
                         <a:defRPr sz="900" b="0">
                           <a:solidFill>
-                            <a:srgbClr val="1E293B"/>
+                            <a:srgbClr val="212529"/>
                           </a:solidFill>
-                          <a:latin typeface="Calibri"/>
+                          <a:latin typeface="Arial"/>
                         </a:defRPr>
                       </a:pPr>
                       <a:r>
@@ -17079,11 +18075,7 @@
                       </a:r>
                     </a:p>
                   </a:txBody>
-                  <a:tcPr>
-                    <a:solidFill>
-                      <a:srgbClr val="F8FAFC"/>
-                    </a:solidFill>
-                  </a:tcPr>
+                  <a:tcPr marL="73152" marR="73152" marT="45720" marB="45720" anchor="ctr"/>
                 </a:tc>
                 <a:tc>
                   <a:txBody>
@@ -17093,9 +18085,9 @@
                       <a:pPr algn="l">
                         <a:defRPr sz="900" b="0">
                           <a:solidFill>
-                            <a:srgbClr val="1E293B"/>
+                            <a:srgbClr val="212529"/>
                           </a:solidFill>
-                          <a:latin typeface="Calibri"/>
+                          <a:latin typeface="Arial"/>
                         </a:defRPr>
                       </a:pPr>
                       <a:r>
@@ -17103,25 +18095,21 @@
                       </a:r>
                     </a:p>
                   </a:txBody>
-                  <a:tcPr>
-                    <a:solidFill>
-                      <a:srgbClr val="F8FAFC"/>
-                    </a:solidFill>
-                  </a:tcPr>
+                  <a:tcPr marL="73152" marR="73152" marT="45720" marB="45720" anchor="ctr"/>
                 </a:tc>
               </a:tr>
-              <a:tr h="653142">
+              <a:tr h="731520">
                 <a:tc>
                   <a:txBody>
                     <a:bodyPr/>
                     <a:lstStyle/>
                     <a:p>
                       <a:pPr algn="l">
-                        <a:defRPr sz="900" b="1">
+                        <a:defRPr sz="900" b="0">
                           <a:solidFill>
-                            <a:srgbClr val="1E293B"/>
+                            <a:srgbClr val="212529"/>
                           </a:solidFill>
-                          <a:latin typeface="Calibri"/>
+                          <a:latin typeface="Arial"/>
                         </a:defRPr>
                       </a:pPr>
                       <a:r>
@@ -17134,9 +18122,9 @@
                       </a:r>
                     </a:p>
                   </a:txBody>
-                  <a:tcPr>
+                  <a:tcPr marL="73152" marR="73152" marT="45720" marB="45720" anchor="ctr">
                     <a:solidFill>
-                      <a:srgbClr val="FFFFFF"/>
+                      <a:srgbClr val="F5F7FA"/>
                     </a:solidFill>
                   </a:tcPr>
                 </a:tc>
@@ -17148,9 +18136,9 @@
                       <a:pPr algn="l">
                         <a:defRPr sz="900" b="0">
                           <a:solidFill>
-                            <a:srgbClr val="1E293B"/>
+                            <a:srgbClr val="212529"/>
                           </a:solidFill>
-                          <a:latin typeface="Calibri"/>
+                          <a:latin typeface="Arial"/>
                         </a:defRPr>
                       </a:pPr>
                       <a:r>
@@ -17158,9 +18146,9 @@
                       </a:r>
                     </a:p>
                   </a:txBody>
-                  <a:tcPr>
+                  <a:tcPr marL="73152" marR="73152" marT="45720" marB="45720" anchor="ctr">
                     <a:solidFill>
-                      <a:srgbClr val="FFFFFF"/>
+                      <a:srgbClr val="F5F7FA"/>
                     </a:solidFill>
                   </a:tcPr>
                 </a:tc>
@@ -17172,9 +18160,9 @@
                       <a:pPr algn="l">
                         <a:defRPr sz="900" b="0">
                           <a:solidFill>
-                            <a:srgbClr val="1E293B"/>
+                            <a:srgbClr val="212529"/>
                           </a:solidFill>
-                          <a:latin typeface="Calibri"/>
+                          <a:latin typeface="Arial"/>
                         </a:defRPr>
                       </a:pPr>
                       <a:r>
@@ -17182,9 +18170,9 @@
                       </a:r>
                     </a:p>
                   </a:txBody>
-                  <a:tcPr>
+                  <a:tcPr marL="73152" marR="73152" marT="45720" marB="45720" anchor="ctr">
                     <a:solidFill>
-                      <a:srgbClr val="FFFFFF"/>
+                      <a:srgbClr val="F5F7FA"/>
                     </a:solidFill>
                   </a:tcPr>
                 </a:tc>
@@ -17196,9 +18184,9 @@
                       <a:pPr algn="l">
                         <a:defRPr sz="900" b="0">
                           <a:solidFill>
-                            <a:srgbClr val="1E293B"/>
+                            <a:srgbClr val="212529"/>
                           </a:solidFill>
-                          <a:latin typeface="Calibri"/>
+                          <a:latin typeface="Arial"/>
                         </a:defRPr>
                       </a:pPr>
                       <a:r>
@@ -17206,9 +18194,9 @@
                       </a:r>
                     </a:p>
                   </a:txBody>
-                  <a:tcPr>
+                  <a:tcPr marL="73152" marR="73152" marT="45720" marB="45720" anchor="ctr">
                     <a:solidFill>
-                      <a:srgbClr val="FFFFFF"/>
+                      <a:srgbClr val="F5F7FA"/>
                     </a:solidFill>
                   </a:tcPr>
                 </a:tc>
@@ -17220,9 +18208,9 @@
                       <a:pPr algn="l">
                         <a:defRPr sz="900" b="0">
                           <a:solidFill>
-                            <a:srgbClr val="1E293B"/>
+                            <a:srgbClr val="212529"/>
                           </a:solidFill>
-                          <a:latin typeface="Calibri"/>
+                          <a:latin typeface="Arial"/>
                         </a:defRPr>
                       </a:pPr>
                       <a:r>
@@ -17230,25 +18218,25 @@
                       </a:r>
                     </a:p>
                   </a:txBody>
-                  <a:tcPr>
+                  <a:tcPr marL="73152" marR="73152" marT="45720" marB="45720" anchor="ctr">
                     <a:solidFill>
-                      <a:srgbClr val="FFFFFF"/>
+                      <a:srgbClr val="F5F7FA"/>
                     </a:solidFill>
                   </a:tcPr>
                 </a:tc>
               </a:tr>
-              <a:tr h="653148">
+              <a:tr h="731520">
                 <a:tc>
                   <a:txBody>
                     <a:bodyPr/>
                     <a:lstStyle/>
                     <a:p>
                       <a:pPr algn="l">
-                        <a:defRPr sz="900" b="1">
+                        <a:defRPr sz="900" b="0">
                           <a:solidFill>
-                            <a:srgbClr val="1E293B"/>
+                            <a:srgbClr val="212529"/>
                           </a:solidFill>
-                          <a:latin typeface="Calibri"/>
+                          <a:latin typeface="Arial"/>
                         </a:defRPr>
                       </a:pPr>
                       <a:r>
@@ -17261,11 +18249,7 @@
                       </a:r>
                     </a:p>
                   </a:txBody>
-                  <a:tcPr>
-                    <a:solidFill>
-                      <a:srgbClr val="F8FAFC"/>
-                    </a:solidFill>
-                  </a:tcPr>
+                  <a:tcPr marL="73152" marR="73152" marT="45720" marB="45720" anchor="ctr"/>
                 </a:tc>
                 <a:tc>
                   <a:txBody>
@@ -17275,9 +18259,9 @@
                       <a:pPr algn="l">
                         <a:defRPr sz="900" b="0">
                           <a:solidFill>
-                            <a:srgbClr val="1E293B"/>
+                            <a:srgbClr val="212529"/>
                           </a:solidFill>
-                          <a:latin typeface="Calibri"/>
+                          <a:latin typeface="Arial"/>
                         </a:defRPr>
                       </a:pPr>
                       <a:r>
@@ -17285,11 +18269,7 @@
                       </a:r>
                     </a:p>
                   </a:txBody>
-                  <a:tcPr>
-                    <a:solidFill>
-                      <a:srgbClr val="F8FAFC"/>
-                    </a:solidFill>
-                  </a:tcPr>
+                  <a:tcPr marL="73152" marR="73152" marT="45720" marB="45720" anchor="ctr"/>
                 </a:tc>
                 <a:tc>
                   <a:txBody>
@@ -17299,9 +18279,9 @@
                       <a:pPr algn="l">
                         <a:defRPr sz="900" b="0">
                           <a:solidFill>
-                            <a:srgbClr val="1E293B"/>
+                            <a:srgbClr val="212529"/>
                           </a:solidFill>
-                          <a:latin typeface="Calibri"/>
+                          <a:latin typeface="Arial"/>
                         </a:defRPr>
                       </a:pPr>
                       <a:r>
@@ -17309,11 +18289,7 @@
                       </a:r>
                     </a:p>
                   </a:txBody>
-                  <a:tcPr>
-                    <a:solidFill>
-                      <a:srgbClr val="F8FAFC"/>
-                    </a:solidFill>
-                  </a:tcPr>
+                  <a:tcPr marL="73152" marR="73152" marT="45720" marB="45720" anchor="ctr"/>
                 </a:tc>
                 <a:tc>
                   <a:txBody>
@@ -17323,9 +18299,9 @@
                       <a:pPr algn="l">
                         <a:defRPr sz="900" b="0">
                           <a:solidFill>
-                            <a:srgbClr val="1E293B"/>
+                            <a:srgbClr val="212529"/>
                           </a:solidFill>
-                          <a:latin typeface="Calibri"/>
+                          <a:latin typeface="Arial"/>
                         </a:defRPr>
                       </a:pPr>
                       <a:r>
@@ -17333,11 +18309,7 @@
                       </a:r>
                     </a:p>
                   </a:txBody>
-                  <a:tcPr>
-                    <a:solidFill>
-                      <a:srgbClr val="F8FAFC"/>
-                    </a:solidFill>
-                  </a:tcPr>
+                  <a:tcPr marL="73152" marR="73152" marT="45720" marB="45720" anchor="ctr"/>
                 </a:tc>
                 <a:tc>
                   <a:txBody>
@@ -17347,9 +18319,9 @@
                       <a:pPr algn="l">
                         <a:defRPr sz="900" b="0">
                           <a:solidFill>
-                            <a:srgbClr val="1E293B"/>
+                            <a:srgbClr val="212529"/>
                           </a:solidFill>
-                          <a:latin typeface="Calibri"/>
+                          <a:latin typeface="Arial"/>
                         </a:defRPr>
                       </a:pPr>
                       <a:r>
@@ -17357,11 +18329,7 @@
                       </a:r>
                     </a:p>
                   </a:txBody>
-                  <a:tcPr>
-                    <a:solidFill>
-                      <a:srgbClr val="F8FAFC"/>
-                    </a:solidFill>
-                  </a:tcPr>
+                  <a:tcPr marL="73152" marR="73152" marT="45720" marB="45720" anchor="ctr"/>
                 </a:tc>
               </a:tr>
             </a:tbl>
@@ -17369,6 +18337,11 @@
         </a:graphic>
       </p:graphicFrame>
     </p:spTree>
+    <p:extLst>
+      <p:ext uri="{BB962C8B-B14F-4D97-AF65-F5344CB8AC3E}">
+        <p14:creationId xmlns:p14="http://schemas.microsoft.com/office/powerpoint/2010/main" val="1030816154"/>
+      </p:ext>
+    </p:extLst>
   </p:cSld>
   <p:clrMapOvr>
     <a:masterClrMapping/>
@@ -17377,72 +18350,69 @@
 </file>
 
 <file path=ppt/slides/slide7.xml><?xml version="1.0" encoding="utf-8"?>
-<p:sld xmlns:a="http://schemas.openxmlformats.org/drawingml/2006/main" xmlns:p="http://schemas.openxmlformats.org/presentationml/2006/main" xmlns:r="http://schemas.openxmlformats.org/officeDocument/2006/relationships">
+<p:sld xmlns:a="http://schemas.openxmlformats.org/drawingml/2006/main" xmlns:r="http://schemas.openxmlformats.org/officeDocument/2006/relationships" xmlns:p="http://schemas.openxmlformats.org/presentationml/2006/main">
   <p:cSld>
     <p:spTree>
       <p:nvGrpSpPr>
-        <p:cNvPr id="1" name=""/>
+        <p:cNvPr id="1" name="Shape 113"/>
         <p:cNvGrpSpPr/>
         <p:nvPr/>
       </p:nvGrpSpPr>
-      <p:grpSpPr/>
+      <p:grpSpPr>
+        <a:xfrm>
+          <a:off x="0" y="0"/>
+          <a:ext cx="0" cy="0"/>
+          <a:chOff x="0" y="0"/>
+          <a:chExt cx="0" cy="0"/>
+        </a:xfrm>
+      </p:grpSpPr>
       <p:sp>
         <p:nvSpPr>
-          <p:cNvPr id="2" name="Title 1"/>
-          <p:cNvSpPr>
-            <a:spLocks noGrp="1"/>
-          </p:cNvSpPr>
-          <p:nvPr>
-            <p:ph type="title"/>
-          </p:nvPr>
+          <p:cNvPr id="2" name="TextBox 1"/>
+          <p:cNvSpPr txBox="1"/>
+          <p:nvPr/>
         </p:nvSpPr>
-        <p:spPr/>
+        <p:spPr>
+          <a:xfrm>
+            <a:off x="731520" y="365760"/>
+            <a:ext cx="10515600" cy="822960"/>
+          </a:xfrm>
+          <a:prstGeom prst="rect">
+            <a:avLst/>
+          </a:prstGeom>
+          <a:noFill/>
+        </p:spPr>
         <p:txBody>
-          <a:bodyPr/>
+          <a:bodyPr wrap="square" lIns="0" tIns="0" rIns="0" bIns="0">
+            <a:spAutoFit/>
+          </a:bodyPr>
           <a:lstStyle/>
           <a:p>
             <a:pPr>
-              <a:defRPr sz="2000" b="1">
-                <a:solidFill>
-                  <a:srgbClr val="1A365D"/>
-                </a:solidFill>
-                <a:latin typeface="Calibri"/>
+              <a:defRPr sz="2400" b="1">
+                <a:solidFill>
+                  <a:srgbClr val="102C57"/>
+                </a:solidFill>
+                <a:latin typeface="Arial"/>
               </a:defRPr>
             </a:pPr>
             <a:r>
-              <a:t>Literature Survey - Part 2 (Rubric: 3 Marks)</a:t>
+              <a:t>Literature Survey -- Part 2 (Rubric: 3 Marks)</a:t>
             </a:r>
           </a:p>
         </p:txBody>
       </p:sp>
-      <p:sp>
-        <p:nvSpPr>
-          <p:cNvPr id="3" name="Text Placeholder 2"/>
-          <p:cNvSpPr>
-            <a:spLocks noGrp="1"/>
-          </p:cNvSpPr>
-          <p:nvPr>
-            <p:ph type="body" idx="1"/>
-          </p:nvPr>
-        </p:nvSpPr>
-        <p:spPr/>
-        <p:txBody>
-          <a:bodyPr/>
-          <a:lstStyle/>
-          <a:p/>
-        </p:txBody>
-      </p:sp>
       <p:graphicFrame>
         <p:nvGraphicFramePr>
-          <p:cNvPr id="4" name="Table 3"/>
+          <p:cNvPr id="3" name="Table 2"/>
           <p:cNvGraphicFramePr>
             <a:graphicFrameLocks noGrp="1"/>
           </p:cNvGraphicFramePr>
           <p:nvPr/>
         </p:nvGraphicFramePr>
         <p:xfrm>
-          <a:off x="731520" y="1188720"/>
-          <a:ext cx="10698480" cy="4572000"/>
+          <a:off x="548640" y="1188720"/>
+          <a:ext cx="10972800" cy="5120640"/>
         </p:xfrm>
         <a:graphic>
           <a:graphicData uri="http://schemas.openxmlformats.org/drawingml/2006/table">
@@ -17453,11 +18423,11 @@
               <a:tblGrid>
                 <a:gridCol w="1645920"/>
                 <a:gridCol w="2011680"/>
-                <a:gridCol w="1463040"/>
-                <a:gridCol w="2834640"/>
+                <a:gridCol w="1645920"/>
+                <a:gridCol w="2926080"/>
                 <a:gridCol w="2743200"/>
               </a:tblGrid>
-              <a:tr h="653142">
+              <a:tr h="731520">
                 <a:tc>
                   <a:txBody>
                     <a:bodyPr/>
@@ -17466,9 +18436,9 @@
                       <a:pPr algn="l">
                         <a:defRPr sz="1000" b="1">
                           <a:solidFill>
-                            <a:srgbClr val="1A365D"/>
+                            <a:srgbClr val="FFFFFF"/>
                           </a:solidFill>
-                          <a:latin typeface="Calibri"/>
+                          <a:latin typeface="Arial"/>
                         </a:defRPr>
                       </a:pPr>
                       <a:r>
@@ -17476,9 +18446,9 @@
                       </a:r>
                     </a:p>
                   </a:txBody>
-                  <a:tcPr>
+                  <a:tcPr marL="73152" marR="73152" marT="45720" marB="45720" anchor="ctr">
                     <a:solidFill>
-                      <a:srgbClr val="EDF2F7"/>
+                      <a:srgbClr val="102C57"/>
                     </a:solidFill>
                   </a:tcPr>
                 </a:tc>
@@ -17490,9 +18460,9 @@
                       <a:pPr algn="l">
                         <a:defRPr sz="1000" b="1">
                           <a:solidFill>
-                            <a:srgbClr val="1A365D"/>
+                            <a:srgbClr val="FFFFFF"/>
                           </a:solidFill>
-                          <a:latin typeface="Calibri"/>
+                          <a:latin typeface="Arial"/>
                         </a:defRPr>
                       </a:pPr>
                       <a:r>
@@ -17500,9 +18470,9 @@
                       </a:r>
                     </a:p>
                   </a:txBody>
-                  <a:tcPr>
+                  <a:tcPr marL="73152" marR="73152" marT="45720" marB="45720" anchor="ctr">
                     <a:solidFill>
-                      <a:srgbClr val="EDF2F7"/>
+                      <a:srgbClr val="102C57"/>
                     </a:solidFill>
                   </a:tcPr>
                 </a:tc>
@@ -17514,9 +18484,9 @@
                       <a:pPr algn="l">
                         <a:defRPr sz="1000" b="1">
                           <a:solidFill>
-                            <a:srgbClr val="1A365D"/>
+                            <a:srgbClr val="FFFFFF"/>
                           </a:solidFill>
-                          <a:latin typeface="Calibri"/>
+                          <a:latin typeface="Arial"/>
                         </a:defRPr>
                       </a:pPr>
                       <a:r>
@@ -17524,9 +18494,9 @@
                       </a:r>
                     </a:p>
                   </a:txBody>
-                  <a:tcPr>
+                  <a:tcPr marL="73152" marR="73152" marT="45720" marB="45720" anchor="ctr">
                     <a:solidFill>
-                      <a:srgbClr val="EDF2F7"/>
+                      <a:srgbClr val="102C57"/>
                     </a:solidFill>
                   </a:tcPr>
                 </a:tc>
@@ -17538,9 +18508,9 @@
                       <a:pPr algn="l">
                         <a:defRPr sz="1000" b="1">
                           <a:solidFill>
-                            <a:srgbClr val="1A365D"/>
+                            <a:srgbClr val="FFFFFF"/>
                           </a:solidFill>
-                          <a:latin typeface="Calibri"/>
+                          <a:latin typeface="Arial"/>
                         </a:defRPr>
                       </a:pPr>
                       <a:r>
@@ -17548,9 +18518,9 @@
                       </a:r>
                     </a:p>
                   </a:txBody>
-                  <a:tcPr>
+                  <a:tcPr marL="73152" marR="73152" marT="45720" marB="45720" anchor="ctr">
                     <a:solidFill>
-                      <a:srgbClr val="EDF2F7"/>
+                      <a:srgbClr val="102C57"/>
                     </a:solidFill>
                   </a:tcPr>
                 </a:tc>
@@ -17562,9 +18532,9 @@
                       <a:pPr algn="l">
                         <a:defRPr sz="1000" b="1">
                           <a:solidFill>
-                            <a:srgbClr val="1A365D"/>
+                            <a:srgbClr val="FFFFFF"/>
                           </a:solidFill>
-                          <a:latin typeface="Calibri"/>
+                          <a:latin typeface="Arial"/>
                         </a:defRPr>
                       </a:pPr>
                       <a:r>
@@ -17572,25 +18542,25 @@
                       </a:r>
                     </a:p>
                   </a:txBody>
-                  <a:tcPr>
+                  <a:tcPr marL="73152" marR="73152" marT="45720" marB="45720" anchor="ctr">
                     <a:solidFill>
-                      <a:srgbClr val="EDF2F7"/>
+                      <a:srgbClr val="102C57"/>
                     </a:solidFill>
                   </a:tcPr>
                 </a:tc>
               </a:tr>
-              <a:tr h="653142">
+              <a:tr h="731520">
                 <a:tc>
                   <a:txBody>
                     <a:bodyPr/>
                     <a:lstStyle/>
                     <a:p>
                       <a:pPr algn="l">
-                        <a:defRPr sz="900" b="1">
+                        <a:defRPr sz="900" b="0">
                           <a:solidFill>
-                            <a:srgbClr val="1E293B"/>
+                            <a:srgbClr val="212529"/>
                           </a:solidFill>
-                          <a:latin typeface="Calibri"/>
+                          <a:latin typeface="Arial"/>
                         </a:defRPr>
                       </a:pPr>
                       <a:r>
@@ -17603,9 +18573,9 @@
                       </a:r>
                     </a:p>
                   </a:txBody>
-                  <a:tcPr>
+                  <a:tcPr marL="73152" marR="73152" marT="45720" marB="45720" anchor="ctr">
                     <a:solidFill>
-                      <a:srgbClr val="FFFFFF"/>
+                      <a:srgbClr val="F5F7FA"/>
                     </a:solidFill>
                   </a:tcPr>
                 </a:tc>
@@ -17617,9 +18587,9 @@
                       <a:pPr algn="l">
                         <a:defRPr sz="900" b="0">
                           <a:solidFill>
-                            <a:srgbClr val="1E293B"/>
+                            <a:srgbClr val="212529"/>
                           </a:solidFill>
-                          <a:latin typeface="Calibri"/>
+                          <a:latin typeface="Arial"/>
                         </a:defRPr>
                       </a:pPr>
                       <a:r>
@@ -17627,9 +18597,9 @@
                       </a:r>
                     </a:p>
                   </a:txBody>
-                  <a:tcPr>
+                  <a:tcPr marL="73152" marR="73152" marT="45720" marB="45720" anchor="ctr">
                     <a:solidFill>
-                      <a:srgbClr val="FFFFFF"/>
+                      <a:srgbClr val="F5F7FA"/>
                     </a:solidFill>
                   </a:tcPr>
                 </a:tc>
@@ -17641,9 +18611,9 @@
                       <a:pPr algn="l">
                         <a:defRPr sz="900" b="0">
                           <a:solidFill>
-                            <a:srgbClr val="1E293B"/>
+                            <a:srgbClr val="212529"/>
                           </a:solidFill>
-                          <a:latin typeface="Calibri"/>
+                          <a:latin typeface="Arial"/>
                         </a:defRPr>
                       </a:pPr>
                       <a:r>
@@ -17651,9 +18621,9 @@
                       </a:r>
                     </a:p>
                   </a:txBody>
-                  <a:tcPr>
+                  <a:tcPr marL="73152" marR="73152" marT="45720" marB="45720" anchor="ctr">
                     <a:solidFill>
-                      <a:srgbClr val="FFFFFF"/>
+                      <a:srgbClr val="F5F7FA"/>
                     </a:solidFill>
                   </a:tcPr>
                 </a:tc>
@@ -17665,9 +18635,9 @@
                       <a:pPr algn="l">
                         <a:defRPr sz="900" b="0">
                           <a:solidFill>
-                            <a:srgbClr val="1E293B"/>
+                            <a:srgbClr val="212529"/>
                           </a:solidFill>
-                          <a:latin typeface="Calibri"/>
+                          <a:latin typeface="Arial"/>
                         </a:defRPr>
                       </a:pPr>
                       <a:r>
@@ -17675,9 +18645,9 @@
                       </a:r>
                     </a:p>
                   </a:txBody>
-                  <a:tcPr>
+                  <a:tcPr marL="73152" marR="73152" marT="45720" marB="45720" anchor="ctr">
                     <a:solidFill>
-                      <a:srgbClr val="FFFFFF"/>
+                      <a:srgbClr val="F5F7FA"/>
                     </a:solidFill>
                   </a:tcPr>
                 </a:tc>
@@ -17689,9 +18659,9 @@
                       <a:pPr algn="l">
                         <a:defRPr sz="900" b="0">
                           <a:solidFill>
-                            <a:srgbClr val="1E293B"/>
+                            <a:srgbClr val="212529"/>
                           </a:solidFill>
-                          <a:latin typeface="Calibri"/>
+                          <a:latin typeface="Arial"/>
                         </a:defRPr>
                       </a:pPr>
                       <a:r>
@@ -17699,25 +18669,25 @@
                       </a:r>
                     </a:p>
                   </a:txBody>
-                  <a:tcPr>
+                  <a:tcPr marL="73152" marR="73152" marT="45720" marB="45720" anchor="ctr">
                     <a:solidFill>
-                      <a:srgbClr val="FFFFFF"/>
+                      <a:srgbClr val="F5F7FA"/>
                     </a:solidFill>
                   </a:tcPr>
                 </a:tc>
               </a:tr>
-              <a:tr h="653142">
+              <a:tr h="731520">
                 <a:tc>
                   <a:txBody>
                     <a:bodyPr/>
                     <a:lstStyle/>
                     <a:p>
                       <a:pPr algn="l">
-                        <a:defRPr sz="900" b="1">
+                        <a:defRPr sz="900" b="0">
                           <a:solidFill>
-                            <a:srgbClr val="1E293B"/>
+                            <a:srgbClr val="212529"/>
                           </a:solidFill>
-                          <a:latin typeface="Calibri"/>
+                          <a:latin typeface="Arial"/>
                         </a:defRPr>
                       </a:pPr>
                       <a:r>
@@ -17730,11 +18700,7 @@
                       </a:r>
                     </a:p>
                   </a:txBody>
-                  <a:tcPr>
-                    <a:solidFill>
-                      <a:srgbClr val="F8FAFC"/>
-                    </a:solidFill>
-                  </a:tcPr>
+                  <a:tcPr marL="73152" marR="73152" marT="45720" marB="45720" anchor="ctr"/>
                 </a:tc>
                 <a:tc>
                   <a:txBody>
@@ -17744,9 +18710,9 @@
                       <a:pPr algn="l">
                         <a:defRPr sz="900" b="0">
                           <a:solidFill>
-                            <a:srgbClr val="1E293B"/>
+                            <a:srgbClr val="212529"/>
                           </a:solidFill>
-                          <a:latin typeface="Calibri"/>
+                          <a:latin typeface="Arial"/>
                         </a:defRPr>
                       </a:pPr>
                       <a:r>
@@ -17754,11 +18720,7 @@
                       </a:r>
                     </a:p>
                   </a:txBody>
-                  <a:tcPr>
-                    <a:solidFill>
-                      <a:srgbClr val="F8FAFC"/>
-                    </a:solidFill>
-                  </a:tcPr>
+                  <a:tcPr marL="73152" marR="73152" marT="45720" marB="45720" anchor="ctr"/>
                 </a:tc>
                 <a:tc>
                   <a:txBody>
@@ -17768,9 +18730,9 @@
                       <a:pPr algn="l">
                         <a:defRPr sz="900" b="0">
                           <a:solidFill>
-                            <a:srgbClr val="1E293B"/>
+                            <a:srgbClr val="212529"/>
                           </a:solidFill>
-                          <a:latin typeface="Calibri"/>
+                          <a:latin typeface="Arial"/>
                         </a:defRPr>
                       </a:pPr>
                       <a:r>
@@ -17778,11 +18740,7 @@
                       </a:r>
                     </a:p>
                   </a:txBody>
-                  <a:tcPr>
-                    <a:solidFill>
-                      <a:srgbClr val="F8FAFC"/>
-                    </a:solidFill>
-                  </a:tcPr>
+                  <a:tcPr marL="73152" marR="73152" marT="45720" marB="45720" anchor="ctr"/>
                 </a:tc>
                 <a:tc>
                   <a:txBody>
@@ -17792,9 +18750,9 @@
                       <a:pPr algn="l">
                         <a:defRPr sz="900" b="0">
                           <a:solidFill>
-                            <a:srgbClr val="1E293B"/>
+                            <a:srgbClr val="212529"/>
                           </a:solidFill>
-                          <a:latin typeface="Calibri"/>
+                          <a:latin typeface="Arial"/>
                         </a:defRPr>
                       </a:pPr>
                       <a:r>
@@ -17802,11 +18760,7 @@
                       </a:r>
                     </a:p>
                   </a:txBody>
-                  <a:tcPr>
-                    <a:solidFill>
-                      <a:srgbClr val="F8FAFC"/>
-                    </a:solidFill>
-                  </a:tcPr>
+                  <a:tcPr marL="73152" marR="73152" marT="45720" marB="45720" anchor="ctr"/>
                 </a:tc>
                 <a:tc>
                   <a:txBody>
@@ -17816,9 +18770,9 @@
                       <a:pPr algn="l">
                         <a:defRPr sz="900" b="0">
                           <a:solidFill>
-                            <a:srgbClr val="1E293B"/>
+                            <a:srgbClr val="212529"/>
                           </a:solidFill>
-                          <a:latin typeface="Calibri"/>
+                          <a:latin typeface="Arial"/>
                         </a:defRPr>
                       </a:pPr>
                       <a:r>
@@ -17826,25 +18780,21 @@
                       </a:r>
                     </a:p>
                   </a:txBody>
-                  <a:tcPr>
-                    <a:solidFill>
-                      <a:srgbClr val="F8FAFC"/>
-                    </a:solidFill>
-                  </a:tcPr>
+                  <a:tcPr marL="73152" marR="73152" marT="45720" marB="45720" anchor="ctr"/>
                 </a:tc>
               </a:tr>
-              <a:tr h="653142">
+              <a:tr h="731520">
                 <a:tc>
                   <a:txBody>
                     <a:bodyPr/>
                     <a:lstStyle/>
                     <a:p>
                       <a:pPr algn="l">
-                        <a:defRPr sz="900" b="1">
+                        <a:defRPr sz="900" b="0">
                           <a:solidFill>
-                            <a:srgbClr val="1E293B"/>
+                            <a:srgbClr val="212529"/>
                           </a:solidFill>
-                          <a:latin typeface="Calibri"/>
+                          <a:latin typeface="Arial"/>
                         </a:defRPr>
                       </a:pPr>
                       <a:r>
@@ -17857,9 +18807,9 @@
                       </a:r>
                     </a:p>
                   </a:txBody>
-                  <a:tcPr>
+                  <a:tcPr marL="73152" marR="73152" marT="45720" marB="45720" anchor="ctr">
                     <a:solidFill>
-                      <a:srgbClr val="FFFFFF"/>
+                      <a:srgbClr val="F5F7FA"/>
                     </a:solidFill>
                   </a:tcPr>
                 </a:tc>
@@ -17871,9 +18821,9 @@
                       <a:pPr algn="l">
                         <a:defRPr sz="900" b="0">
                           <a:solidFill>
-                            <a:srgbClr val="1E293B"/>
+                            <a:srgbClr val="212529"/>
                           </a:solidFill>
-                          <a:latin typeface="Calibri"/>
+                          <a:latin typeface="Arial"/>
                         </a:defRPr>
                       </a:pPr>
                       <a:r>
@@ -17881,9 +18831,9 @@
                       </a:r>
                     </a:p>
                   </a:txBody>
-                  <a:tcPr>
+                  <a:tcPr marL="73152" marR="73152" marT="45720" marB="45720" anchor="ctr">
                     <a:solidFill>
-                      <a:srgbClr val="FFFFFF"/>
+                      <a:srgbClr val="F5F7FA"/>
                     </a:solidFill>
                   </a:tcPr>
                 </a:tc>
@@ -17895,9 +18845,9 @@
                       <a:pPr algn="l">
                         <a:defRPr sz="900" b="0">
                           <a:solidFill>
-                            <a:srgbClr val="1E293B"/>
+                            <a:srgbClr val="212529"/>
                           </a:solidFill>
-                          <a:latin typeface="Calibri"/>
+                          <a:latin typeface="Arial"/>
                         </a:defRPr>
                       </a:pPr>
                       <a:r>
@@ -17905,9 +18855,9 @@
                       </a:r>
                     </a:p>
                   </a:txBody>
-                  <a:tcPr>
+                  <a:tcPr marL="73152" marR="73152" marT="45720" marB="45720" anchor="ctr">
                     <a:solidFill>
-                      <a:srgbClr val="FFFFFF"/>
+                      <a:srgbClr val="F5F7FA"/>
                     </a:solidFill>
                   </a:tcPr>
                 </a:tc>
@@ -17919,9 +18869,9 @@
                       <a:pPr algn="l">
                         <a:defRPr sz="900" b="0">
                           <a:solidFill>
-                            <a:srgbClr val="1E293B"/>
+                            <a:srgbClr val="212529"/>
                           </a:solidFill>
-                          <a:latin typeface="Calibri"/>
+                          <a:latin typeface="Arial"/>
                         </a:defRPr>
                       </a:pPr>
                       <a:r>
@@ -17929,9 +18879,9 @@
                       </a:r>
                     </a:p>
                   </a:txBody>
-                  <a:tcPr>
+                  <a:tcPr marL="73152" marR="73152" marT="45720" marB="45720" anchor="ctr">
                     <a:solidFill>
-                      <a:srgbClr val="FFFFFF"/>
+                      <a:srgbClr val="F5F7FA"/>
                     </a:solidFill>
                   </a:tcPr>
                 </a:tc>
@@ -17943,9 +18893,9 @@
                       <a:pPr algn="l">
                         <a:defRPr sz="900" b="0">
                           <a:solidFill>
-                            <a:srgbClr val="1E293B"/>
+                            <a:srgbClr val="212529"/>
                           </a:solidFill>
-                          <a:latin typeface="Calibri"/>
+                          <a:latin typeface="Arial"/>
                         </a:defRPr>
                       </a:pPr>
                       <a:r>
@@ -17953,25 +18903,25 @@
                       </a:r>
                     </a:p>
                   </a:txBody>
-                  <a:tcPr>
+                  <a:tcPr marL="73152" marR="73152" marT="45720" marB="45720" anchor="ctr">
                     <a:solidFill>
-                      <a:srgbClr val="FFFFFF"/>
+                      <a:srgbClr val="F5F7FA"/>
                     </a:solidFill>
                   </a:tcPr>
                 </a:tc>
               </a:tr>
-              <a:tr h="653142">
+              <a:tr h="731520">
                 <a:tc>
                   <a:txBody>
                     <a:bodyPr/>
                     <a:lstStyle/>
                     <a:p>
                       <a:pPr algn="l">
-                        <a:defRPr sz="900" b="1">
+                        <a:defRPr sz="900" b="0">
                           <a:solidFill>
-                            <a:srgbClr val="1E293B"/>
+                            <a:srgbClr val="212529"/>
                           </a:solidFill>
-                          <a:latin typeface="Calibri"/>
+                          <a:latin typeface="Arial"/>
                         </a:defRPr>
                       </a:pPr>
                       <a:r>
@@ -17984,11 +18934,7 @@
                       </a:r>
                     </a:p>
                   </a:txBody>
-                  <a:tcPr>
-                    <a:solidFill>
-                      <a:srgbClr val="F8FAFC"/>
-                    </a:solidFill>
-                  </a:tcPr>
+                  <a:tcPr marL="73152" marR="73152" marT="45720" marB="45720" anchor="ctr"/>
                 </a:tc>
                 <a:tc>
                   <a:txBody>
@@ -17998,9 +18944,9 @@
                       <a:pPr algn="l">
                         <a:defRPr sz="900" b="0">
                           <a:solidFill>
-                            <a:srgbClr val="1E293B"/>
+                            <a:srgbClr val="212529"/>
                           </a:solidFill>
-                          <a:latin typeface="Calibri"/>
+                          <a:latin typeface="Arial"/>
                         </a:defRPr>
                       </a:pPr>
                       <a:r>
@@ -18008,11 +18954,7 @@
                       </a:r>
                     </a:p>
                   </a:txBody>
-                  <a:tcPr>
-                    <a:solidFill>
-                      <a:srgbClr val="F8FAFC"/>
-                    </a:solidFill>
-                  </a:tcPr>
+                  <a:tcPr marL="73152" marR="73152" marT="45720" marB="45720" anchor="ctr"/>
                 </a:tc>
                 <a:tc>
                   <a:txBody>
@@ -18022,9 +18964,9 @@
                       <a:pPr algn="l">
                         <a:defRPr sz="900" b="0">
                           <a:solidFill>
-                            <a:srgbClr val="1E293B"/>
+                            <a:srgbClr val="212529"/>
                           </a:solidFill>
-                          <a:latin typeface="Calibri"/>
+                          <a:latin typeface="Arial"/>
                         </a:defRPr>
                       </a:pPr>
                       <a:r>
@@ -18032,11 +18974,7 @@
                       </a:r>
                     </a:p>
                   </a:txBody>
-                  <a:tcPr>
-                    <a:solidFill>
-                      <a:srgbClr val="F8FAFC"/>
-                    </a:solidFill>
-                  </a:tcPr>
+                  <a:tcPr marL="73152" marR="73152" marT="45720" marB="45720" anchor="ctr"/>
                 </a:tc>
                 <a:tc>
                   <a:txBody>
@@ -18046,9 +18984,9 @@
                       <a:pPr algn="l">
                         <a:defRPr sz="900" b="0">
                           <a:solidFill>
-                            <a:srgbClr val="1E293B"/>
+                            <a:srgbClr val="212529"/>
                           </a:solidFill>
-                          <a:latin typeface="Calibri"/>
+                          <a:latin typeface="Arial"/>
                         </a:defRPr>
                       </a:pPr>
                       <a:r>
@@ -18056,11 +18994,7 @@
                       </a:r>
                     </a:p>
                   </a:txBody>
-                  <a:tcPr>
-                    <a:solidFill>
-                      <a:srgbClr val="F8FAFC"/>
-                    </a:solidFill>
-                  </a:tcPr>
+                  <a:tcPr marL="73152" marR="73152" marT="45720" marB="45720" anchor="ctr"/>
                 </a:tc>
                 <a:tc>
                   <a:txBody>
@@ -18070,9 +19004,9 @@
                       <a:pPr algn="l">
                         <a:defRPr sz="900" b="0">
                           <a:solidFill>
-                            <a:srgbClr val="1E293B"/>
+                            <a:srgbClr val="212529"/>
                           </a:solidFill>
-                          <a:latin typeface="Calibri"/>
+                          <a:latin typeface="Arial"/>
                         </a:defRPr>
                       </a:pPr>
                       <a:r>
@@ -18080,25 +19014,21 @@
                       </a:r>
                     </a:p>
                   </a:txBody>
-                  <a:tcPr>
-                    <a:solidFill>
-                      <a:srgbClr val="F8FAFC"/>
-                    </a:solidFill>
-                  </a:tcPr>
+                  <a:tcPr marL="73152" marR="73152" marT="45720" marB="45720" anchor="ctr"/>
                 </a:tc>
               </a:tr>
-              <a:tr h="653142">
+              <a:tr h="731520">
                 <a:tc>
                   <a:txBody>
                     <a:bodyPr/>
                     <a:lstStyle/>
                     <a:p>
                       <a:pPr algn="l">
-                        <a:defRPr sz="900" b="1">
+                        <a:defRPr sz="900" b="0">
                           <a:solidFill>
-                            <a:srgbClr val="1E293B"/>
+                            <a:srgbClr val="212529"/>
                           </a:solidFill>
-                          <a:latin typeface="Calibri"/>
+                          <a:latin typeface="Arial"/>
                         </a:defRPr>
                       </a:pPr>
                       <a:r>
@@ -18111,9 +19041,9 @@
                       </a:r>
                     </a:p>
                   </a:txBody>
-                  <a:tcPr>
+                  <a:tcPr marL="73152" marR="73152" marT="45720" marB="45720" anchor="ctr">
                     <a:solidFill>
-                      <a:srgbClr val="FFFFFF"/>
+                      <a:srgbClr val="F5F7FA"/>
                     </a:solidFill>
                   </a:tcPr>
                 </a:tc>
@@ -18125,9 +19055,9 @@
                       <a:pPr algn="l">
                         <a:defRPr sz="900" b="0">
                           <a:solidFill>
-                            <a:srgbClr val="1E293B"/>
+                            <a:srgbClr val="212529"/>
                           </a:solidFill>
-                          <a:latin typeface="Calibri"/>
+                          <a:latin typeface="Arial"/>
                         </a:defRPr>
                       </a:pPr>
                       <a:r>
@@ -18135,9 +19065,9 @@
                       </a:r>
                     </a:p>
                   </a:txBody>
-                  <a:tcPr>
+                  <a:tcPr marL="73152" marR="73152" marT="45720" marB="45720" anchor="ctr">
                     <a:solidFill>
-                      <a:srgbClr val="FFFFFF"/>
+                      <a:srgbClr val="F5F7FA"/>
                     </a:solidFill>
                   </a:tcPr>
                 </a:tc>
@@ -18149,9 +19079,9 @@
                       <a:pPr algn="l">
                         <a:defRPr sz="900" b="0">
                           <a:solidFill>
-                            <a:srgbClr val="1E293B"/>
+                            <a:srgbClr val="212529"/>
                           </a:solidFill>
-                          <a:latin typeface="Calibri"/>
+                          <a:latin typeface="Arial"/>
                         </a:defRPr>
                       </a:pPr>
                       <a:r>
@@ -18159,9 +19089,9 @@
                       </a:r>
                     </a:p>
                   </a:txBody>
-                  <a:tcPr>
+                  <a:tcPr marL="73152" marR="73152" marT="45720" marB="45720" anchor="ctr">
                     <a:solidFill>
-                      <a:srgbClr val="FFFFFF"/>
+                      <a:srgbClr val="F5F7FA"/>
                     </a:solidFill>
                   </a:tcPr>
                 </a:tc>
@@ -18173,9 +19103,9 @@
                       <a:pPr algn="l">
                         <a:defRPr sz="900" b="0">
                           <a:solidFill>
-                            <a:srgbClr val="1E293B"/>
+                            <a:srgbClr val="212529"/>
                           </a:solidFill>
-                          <a:latin typeface="Calibri"/>
+                          <a:latin typeface="Arial"/>
                         </a:defRPr>
                       </a:pPr>
                       <a:r>
@@ -18183,9 +19113,9 @@
                       </a:r>
                     </a:p>
                   </a:txBody>
-                  <a:tcPr>
+                  <a:tcPr marL="73152" marR="73152" marT="45720" marB="45720" anchor="ctr">
                     <a:solidFill>
-                      <a:srgbClr val="FFFFFF"/>
+                      <a:srgbClr val="F5F7FA"/>
                     </a:solidFill>
                   </a:tcPr>
                 </a:tc>
@@ -18197,9 +19127,9 @@
                       <a:pPr algn="l">
                         <a:defRPr sz="900" b="0">
                           <a:solidFill>
-                            <a:srgbClr val="1E293B"/>
+                            <a:srgbClr val="212529"/>
                           </a:solidFill>
-                          <a:latin typeface="Calibri"/>
+                          <a:latin typeface="Arial"/>
                         </a:defRPr>
                       </a:pPr>
                       <a:r>
@@ -18207,29 +19137,29 @@
                       </a:r>
                     </a:p>
                   </a:txBody>
-                  <a:tcPr>
+                  <a:tcPr marL="73152" marR="73152" marT="45720" marB="45720" anchor="ctr">
                     <a:solidFill>
-                      <a:srgbClr val="FFFFFF"/>
+                      <a:srgbClr val="F5F7FA"/>
                     </a:solidFill>
                   </a:tcPr>
                 </a:tc>
               </a:tr>
-              <a:tr h="653148">
+              <a:tr h="731520">
                 <a:tc>
                   <a:txBody>
                     <a:bodyPr/>
                     <a:lstStyle/>
                     <a:p>
                       <a:pPr algn="l">
-                        <a:defRPr sz="900" b="1">
+                        <a:defRPr sz="900" b="0">
                           <a:solidFill>
-                            <a:srgbClr val="1E293B"/>
+                            <a:srgbClr val="212529"/>
                           </a:solidFill>
-                          <a:latin typeface="Calibri"/>
+                          <a:latin typeface="Arial"/>
                         </a:defRPr>
                       </a:pPr>
                       <a:r>
-                        <a:t>Nørregaard et al.</a:t>
+                        <a:t>Norregaard et al.</a:t>
                       </a:r>
                     </a:p>
                     <a:p>
@@ -18238,11 +19168,7 @@
                       </a:r>
                     </a:p>
                   </a:txBody>
-                  <a:tcPr>
-                    <a:solidFill>
-                      <a:srgbClr val="F8FAFC"/>
-                    </a:solidFill>
-                  </a:tcPr>
+                  <a:tcPr marL="73152" marR="73152" marT="45720" marB="45720" anchor="ctr"/>
                 </a:tc>
                 <a:tc>
                   <a:txBody>
@@ -18252,9 +19178,9 @@
                       <a:pPr algn="l">
                         <a:defRPr sz="900" b="0">
                           <a:solidFill>
-                            <a:srgbClr val="1E293B"/>
+                            <a:srgbClr val="212529"/>
                           </a:solidFill>
-                          <a:latin typeface="Calibri"/>
+                          <a:latin typeface="Arial"/>
                         </a:defRPr>
                       </a:pPr>
                       <a:r>
@@ -18262,11 +19188,7 @@
                       </a:r>
                     </a:p>
                   </a:txBody>
-                  <a:tcPr>
-                    <a:solidFill>
-                      <a:srgbClr val="F8FAFC"/>
-                    </a:solidFill>
-                  </a:tcPr>
+                  <a:tcPr marL="73152" marR="73152" marT="45720" marB="45720" anchor="ctr"/>
                 </a:tc>
                 <a:tc>
                   <a:txBody>
@@ -18276,9 +19198,9 @@
                       <a:pPr algn="l">
                         <a:defRPr sz="900" b="0">
                           <a:solidFill>
-                            <a:srgbClr val="1E293B"/>
+                            <a:srgbClr val="212529"/>
                           </a:solidFill>
-                          <a:latin typeface="Calibri"/>
+                          <a:latin typeface="Arial"/>
                         </a:defRPr>
                       </a:pPr>
                       <a:r>
@@ -18286,11 +19208,7 @@
                       </a:r>
                     </a:p>
                   </a:txBody>
-                  <a:tcPr>
-                    <a:solidFill>
-                      <a:srgbClr val="F8FAFC"/>
-                    </a:solidFill>
-                  </a:tcPr>
+                  <a:tcPr marL="73152" marR="73152" marT="45720" marB="45720" anchor="ctr"/>
                 </a:tc>
                 <a:tc>
                   <a:txBody>
@@ -18300,9 +19218,9 @@
                       <a:pPr algn="l">
                         <a:defRPr sz="900" b="0">
                           <a:solidFill>
-                            <a:srgbClr val="1E293B"/>
+                            <a:srgbClr val="212529"/>
                           </a:solidFill>
-                          <a:latin typeface="Calibri"/>
+                          <a:latin typeface="Arial"/>
                         </a:defRPr>
                       </a:pPr>
                       <a:r>
@@ -18310,11 +19228,7 @@
                       </a:r>
                     </a:p>
                   </a:txBody>
-                  <a:tcPr>
-                    <a:solidFill>
-                      <a:srgbClr val="F8FAFC"/>
-                    </a:solidFill>
-                  </a:tcPr>
+                  <a:tcPr marL="73152" marR="73152" marT="45720" marB="45720" anchor="ctr"/>
                 </a:tc>
                 <a:tc>
                   <a:txBody>
@@ -18324,9 +19238,9 @@
                       <a:pPr algn="l">
                         <a:defRPr sz="900" b="0">
                           <a:solidFill>
-                            <a:srgbClr val="1E293B"/>
+                            <a:srgbClr val="212529"/>
                           </a:solidFill>
-                          <a:latin typeface="Calibri"/>
+                          <a:latin typeface="Arial"/>
                         </a:defRPr>
                       </a:pPr>
                       <a:r>
@@ -18334,11 +19248,7 @@
                       </a:r>
                     </a:p>
                   </a:txBody>
-                  <a:tcPr>
-                    <a:solidFill>
-                      <a:srgbClr val="F8FAFC"/>
-                    </a:solidFill>
-                  </a:tcPr>
+                  <a:tcPr marL="73152" marR="73152" marT="45720" marB="45720" anchor="ctr"/>
                 </a:tc>
               </a:tr>
             </a:tbl>
@@ -18346,6 +19256,11 @@
         </a:graphic>
       </p:graphicFrame>
     </p:spTree>
+    <p:extLst>
+      <p:ext uri="{BB962C8B-B14F-4D97-AF65-F5344CB8AC3E}">
+        <p14:creationId xmlns:p14="http://schemas.microsoft.com/office/powerpoint/2010/main" val="3338832548"/>
+      </p:ext>
+    </p:extLst>
   </p:cSld>
   <p:clrMapOvr>
     <a:masterClrMapping/>
@@ -18354,36 +19269,50 @@
 </file>
 
 <file path=ppt/slides/slide8.xml><?xml version="1.0" encoding="utf-8"?>
-<p:sld xmlns:a="http://schemas.openxmlformats.org/drawingml/2006/main" xmlns:p="http://schemas.openxmlformats.org/presentationml/2006/main" xmlns:r="http://schemas.openxmlformats.org/officeDocument/2006/relationships">
+<p:sld xmlns:a="http://schemas.openxmlformats.org/drawingml/2006/main" xmlns:r="http://schemas.openxmlformats.org/officeDocument/2006/relationships" xmlns:p="http://schemas.openxmlformats.org/presentationml/2006/main">
   <p:cSld>
     <p:spTree>
       <p:nvGrpSpPr>
-        <p:cNvPr id="1" name=""/>
+        <p:cNvPr id="1" name="Shape 113"/>
         <p:cNvGrpSpPr/>
         <p:nvPr/>
       </p:nvGrpSpPr>
-      <p:grpSpPr/>
+      <p:grpSpPr>
+        <a:xfrm>
+          <a:off x="0" y="0"/>
+          <a:ext cx="0" cy="0"/>
+          <a:chOff x="0" y="0"/>
+          <a:chExt cx="0" cy="0"/>
+        </a:xfrm>
+      </p:grpSpPr>
       <p:sp>
         <p:nvSpPr>
-          <p:cNvPr id="2" name="Title 1"/>
-          <p:cNvSpPr>
-            <a:spLocks noGrp="1"/>
-          </p:cNvSpPr>
-          <p:nvPr>
-            <p:ph type="title"/>
-          </p:nvPr>
+          <p:cNvPr id="2" name="TextBox 1"/>
+          <p:cNvSpPr txBox="1"/>
+          <p:nvPr/>
         </p:nvSpPr>
-        <p:spPr/>
+        <p:spPr>
+          <a:xfrm>
+            <a:off x="731520" y="365760"/>
+            <a:ext cx="10515600" cy="822960"/>
+          </a:xfrm>
+          <a:prstGeom prst="rect">
+            <a:avLst/>
+          </a:prstGeom>
+          <a:noFill/>
+        </p:spPr>
         <p:txBody>
-          <a:bodyPr/>
+          <a:bodyPr wrap="square" lIns="0" tIns="0" rIns="0" bIns="0">
+            <a:spAutoFit/>
+          </a:bodyPr>
           <a:lstStyle/>
           <a:p>
             <a:pPr>
-              <a:defRPr sz="2000" b="1">
-                <a:solidFill>
-                  <a:srgbClr val="1A365D"/>
-                </a:solidFill>
-                <a:latin typeface="Calibri"/>
+              <a:defRPr sz="2400" b="1">
+                <a:solidFill>
+                  <a:srgbClr val="102C57"/>
+                </a:solidFill>
+                <a:latin typeface="Arial"/>
               </a:defRPr>
             </a:pPr>
             <a:r>
@@ -18394,31 +19323,14 @@
       </p:sp>
       <p:sp>
         <p:nvSpPr>
-          <p:cNvPr id="3" name="Text Placeholder 2"/>
-          <p:cNvSpPr>
-            <a:spLocks noGrp="1"/>
-          </p:cNvSpPr>
-          <p:nvPr>
-            <p:ph type="body" idx="1"/>
-          </p:nvPr>
-        </p:nvSpPr>
-        <p:spPr/>
-        <p:txBody>
-          <a:bodyPr/>
-          <a:lstStyle/>
-          <a:p/>
-        </p:txBody>
-      </p:sp>
-      <p:sp>
-        <p:nvSpPr>
-          <p:cNvPr id="4" name="TextBox 3"/>
+          <p:cNvPr id="3" name="TextBox 2"/>
           <p:cNvSpPr txBox="1"/>
           <p:nvPr/>
         </p:nvSpPr>
         <p:spPr>
           <a:xfrm>
-            <a:off x="822960" y="1188720"/>
-            <a:ext cx="10515600" cy="4754880"/>
+            <a:off x="731520" y="1188720"/>
+            <a:ext cx="10515600" cy="5120640"/>
           </a:xfrm>
           <a:prstGeom prst="rect">
             <a:avLst/>
@@ -18435,15 +19347,22 @@
               <a:spcAft>
                 <a:spcPts val="600"/>
               </a:spcAft>
-              <a:defRPr sz="1200">
-                <a:solidFill>
-                  <a:srgbClr val="1E293B"/>
-                </a:solidFill>
-                <a:latin typeface="Calibri"/>
-              </a:defRPr>
             </a:pPr>
             <a:r>
-              <a:t>Objective 1 — Automated Factual Claim Extraction: Develop an NLP module using syntactic heuristics and Named Entity Recognition (NER) to extract the top 2-3 checkable factual claims from articles in &lt;2.5 seconds.</a:t>
+              <a:rPr b="1" sz="1100">
+                <a:solidFill>
+                  <a:srgbClr val="102C57"/>
+                </a:solidFill>
+              </a:rPr>
+              <a:t>Objective 1 -- Automated Factual Claim Extraction: </a:t>
+            </a:r>
+            <a:r>
+              <a:rPr sz="1100">
+                <a:solidFill>
+                  <a:srgbClr val="212529"/>
+                </a:solidFill>
+              </a:rPr>
+              <a:t>Develop an NLP module using syntactic heuristics and Named Entity Recognition (NER) to extract the top 2-3 checkable factual claims from articles in &lt;2.5 seconds.</a:t>
             </a:r>
           </a:p>
           <a:p>
@@ -18451,15 +19370,22 @@
               <a:spcAft>
                 <a:spcPts val="600"/>
               </a:spcAft>
-              <a:defRPr sz="1200">
-                <a:solidFill>
-                  <a:srgbClr val="1E293B"/>
-                </a:solidFill>
-                <a:latin typeface="Calibri"/>
-              </a:defRPr>
             </a:pPr>
             <a:r>
-              <a:t>Objective 2 — High-Speed Source Reputation Profiling: Construct an indexed SQLite knowledge base of 4,442 verified news domains based on MBFC ratings, delivering sub-millisecond (&lt;1ms) lookups and institutional TLD fallbacks (.gov, .edu).</a:t>
+              <a:rPr b="1" sz="1100">
+                <a:solidFill>
+                  <a:srgbClr val="102C57"/>
+                </a:solidFill>
+              </a:rPr>
+              <a:t>Objective 2 -- High-Speed Source Reputation Profiling: </a:t>
+            </a:r>
+            <a:r>
+              <a:rPr sz="1100">
+                <a:solidFill>
+                  <a:srgbClr val="212529"/>
+                </a:solidFill>
+              </a:rPr>
+              <a:t>Construct an indexed SQLite knowledge base of 4,442 verified news domains based on MBFC ratings, delivering sub-millisecond (&lt;1ms) lookups and institutional TLD fallbacks (.gov, .edu).</a:t>
             </a:r>
           </a:p>
           <a:p>
@@ -18467,15 +19393,22 @@
               <a:spcAft>
                 <a:spcPts val="600"/>
               </a:spcAft>
-              <a:defRPr sz="1200">
-                <a:solidFill>
-                  <a:srgbClr val="1E293B"/>
-                </a:solidFill>
-                <a:latin typeface="Calibri"/>
-              </a:defRPr>
             </a:pPr>
             <a:r>
-              <a:t>Objective 3 — Multi-Source Evidence Retrieval: Integrate NewsAPI and GNews API to programmatically retrieve a balanced corroboration pool of 5-10 contemporary reporting sources per claim.</a:t>
+              <a:rPr b="1" sz="1100">
+                <a:solidFill>
+                  <a:srgbClr val="102C57"/>
+                </a:solidFill>
+              </a:rPr>
+              <a:t>Objective 3 -- Multi-Source Evidence Retrieval: </a:t>
+            </a:r>
+            <a:r>
+              <a:rPr sz="1100">
+                <a:solidFill>
+                  <a:srgbClr val="212529"/>
+                </a:solidFill>
+              </a:rPr>
+              <a:t>Integrate NewsAPI and GNews API to programmatically retrieve a balanced corroboration pool of 5-10 contemporary reporting sources per claim.</a:t>
             </a:r>
           </a:p>
           <a:p>
@@ -18483,15 +19416,22 @@
               <a:spcAft>
                 <a:spcPts val="600"/>
               </a:spcAft>
-              <a:defRPr sz="1200">
-                <a:solidFill>
-                  <a:srgbClr val="1E293B"/>
-                </a:solidFill>
-                <a:latin typeface="Calibri"/>
-              </a:defRPr>
             </a:pPr>
             <a:r>
-              <a:t>Objective 4 — RoBERTa-MNLI Cross-Source Corroboration: Implement a Natural Language Inference pipeline to classify pairwise claim-evidence relationships into Entailment (+1), Contradiction (-1), and Neutral (0) stance signals.</a:t>
+              <a:rPr b="1" sz="1100">
+                <a:solidFill>
+                  <a:srgbClr val="102C57"/>
+                </a:solidFill>
+              </a:rPr>
+              <a:t>Objective 4 -- RoBERTa-MNLI Cross-Source Corroboration: </a:t>
+            </a:r>
+            <a:r>
+              <a:rPr sz="1100">
+                <a:solidFill>
+                  <a:srgbClr val="212529"/>
+                </a:solidFill>
+              </a:rPr>
+              <a:t>Implement a Natural Language Inference pipeline to classify pairwise claim-evidence relationships into Entailment (+1), Contradiction (-1), and Neutral (0) stance signals.</a:t>
             </a:r>
           </a:p>
           <a:p>
@@ -18499,15 +19439,22 @@
               <a:spcAft>
                 <a:spcPts val="600"/>
               </a:spcAft>
-              <a:defRPr sz="1200">
-                <a:solidFill>
-                  <a:srgbClr val="1E293B"/>
-                </a:solidFill>
-                <a:latin typeface="Calibri"/>
-              </a:defRPr>
             </a:pPr>
             <a:r>
-              <a:t>Objective 5 — Manipulation &amp; Clickbait Indexing: Build a lexical and stylistic analyzer utilizing 109 trigger patterns to evaluate sensationalism, emotional panic, and structural formatting manipulation (0-100 scale).</a:t>
+              <a:rPr b="1" sz="1100">
+                <a:solidFill>
+                  <a:srgbClr val="102C57"/>
+                </a:solidFill>
+              </a:rPr>
+              <a:t>Objective 5 -- Manipulation &amp; Clickbait Indexing: </a:t>
+            </a:r>
+            <a:r>
+              <a:rPr sz="1100">
+                <a:solidFill>
+                  <a:srgbClr val="212529"/>
+                </a:solidFill>
+              </a:rPr>
+              <a:t>Build a lexical and stylistic analyzer utilizing 109 trigger patterns to evaluate sensationalism, emotional panic, and structural formatting manipulation (0-100 scale).</a:t>
             </a:r>
           </a:p>
           <a:p>
@@ -18515,20 +19462,32 @@
               <a:spcAft>
                 <a:spcPts val="600"/>
               </a:spcAft>
-              <a:defRPr sz="1200">
-                <a:solidFill>
-                  <a:srgbClr val="1E293B"/>
-                </a:solidFill>
-                <a:latin typeface="Calibri"/>
-              </a:defRPr>
             </a:pPr>
             <a:r>
-              <a:t>Objective 6 — Unified Aggregation Engine &amp; User Interface: Deploy the mathematical multi-factor scoring formula in a FastAPI backend and interactive Streamlit web dashboard presenting transparent evidence cards.</a:t>
+              <a:rPr b="1" sz="1100">
+                <a:solidFill>
+                  <a:srgbClr val="102C57"/>
+                </a:solidFill>
+              </a:rPr>
+              <a:t>Objective 6 -- Unified Aggregation Engine &amp; User Interface: </a:t>
+            </a:r>
+            <a:r>
+              <a:rPr sz="1100">
+                <a:solidFill>
+                  <a:srgbClr val="212529"/>
+                </a:solidFill>
+              </a:rPr>
+              <a:t>Deploy the mathematical multi-factor scoring formula in a FastAPI backend and interactive Streamlit web dashboard presenting transparent evidence cards.</a:t>
             </a:r>
           </a:p>
         </p:txBody>
       </p:sp>
     </p:spTree>
+    <p:extLst>
+      <p:ext uri="{BB962C8B-B14F-4D97-AF65-F5344CB8AC3E}">
+        <p14:creationId xmlns:p14="http://schemas.microsoft.com/office/powerpoint/2010/main" val="2000455742"/>
+      </p:ext>
+    </p:extLst>
   </p:cSld>
   <p:clrMapOvr>
     <a:masterClrMapping/>
@@ -18537,36 +19496,50 @@
 </file>
 
 <file path=ppt/slides/slide9.xml><?xml version="1.0" encoding="utf-8"?>
-<p:sld xmlns:a="http://schemas.openxmlformats.org/drawingml/2006/main" xmlns:p="http://schemas.openxmlformats.org/presentationml/2006/main" xmlns:r="http://schemas.openxmlformats.org/officeDocument/2006/relationships">
+<p:sld xmlns:a="http://schemas.openxmlformats.org/drawingml/2006/main" xmlns:r="http://schemas.openxmlformats.org/officeDocument/2006/relationships" xmlns:p="http://schemas.openxmlformats.org/presentationml/2006/main">
   <p:cSld>
     <p:spTree>
       <p:nvGrpSpPr>
-        <p:cNvPr id="1" name=""/>
+        <p:cNvPr id="1" name="Shape 113"/>
         <p:cNvGrpSpPr/>
         <p:nvPr/>
       </p:nvGrpSpPr>
-      <p:grpSpPr/>
+      <p:grpSpPr>
+        <a:xfrm>
+          <a:off x="0" y="0"/>
+          <a:ext cx="0" cy="0"/>
+          <a:chOff x="0" y="0"/>
+          <a:chExt cx="0" cy="0"/>
+        </a:xfrm>
+      </p:grpSpPr>
       <p:sp>
         <p:nvSpPr>
-          <p:cNvPr id="2" name="Title 1"/>
-          <p:cNvSpPr>
-            <a:spLocks noGrp="1"/>
-          </p:cNvSpPr>
-          <p:nvPr>
-            <p:ph type="title"/>
-          </p:nvPr>
+          <p:cNvPr id="2" name="TextBox 1"/>
+          <p:cNvSpPr txBox="1"/>
+          <p:nvPr/>
         </p:nvSpPr>
-        <p:spPr/>
+        <p:spPr>
+          <a:xfrm>
+            <a:off x="731520" y="365760"/>
+            <a:ext cx="10515600" cy="822960"/>
+          </a:xfrm>
+          <a:prstGeom prst="rect">
+            <a:avLst/>
+          </a:prstGeom>
+          <a:noFill/>
+        </p:spPr>
         <p:txBody>
-          <a:bodyPr/>
+          <a:bodyPr wrap="square" lIns="0" tIns="0" rIns="0" bIns="0">
+            <a:spAutoFit/>
+          </a:bodyPr>
           <a:lstStyle/>
           <a:p>
             <a:pPr>
-              <a:defRPr sz="2000" b="1">
-                <a:solidFill>
-                  <a:srgbClr val="1A365D"/>
-                </a:solidFill>
-                <a:latin typeface="Calibri"/>
+              <a:defRPr sz="2400" b="1">
+                <a:solidFill>
+                  <a:srgbClr val="102C57"/>
+                </a:solidFill>
+                <a:latin typeface="Arial"/>
               </a:defRPr>
             </a:pPr>
             <a:r>
@@ -18575,34 +19548,17 @@
           </a:p>
         </p:txBody>
       </p:sp>
-      <p:sp>
-        <p:nvSpPr>
-          <p:cNvPr id="3" name="Text Placeholder 2"/>
-          <p:cNvSpPr>
-            <a:spLocks noGrp="1"/>
-          </p:cNvSpPr>
-          <p:nvPr>
-            <p:ph type="body" idx="1"/>
-          </p:nvPr>
-        </p:nvSpPr>
-        <p:spPr/>
-        <p:txBody>
-          <a:bodyPr/>
-          <a:lstStyle/>
-          <a:p/>
-        </p:txBody>
-      </p:sp>
       <p:graphicFrame>
         <p:nvGraphicFramePr>
-          <p:cNvPr id="4" name="Table 3"/>
+          <p:cNvPr id="3" name="Table 2"/>
           <p:cNvGraphicFramePr>
             <a:graphicFrameLocks noGrp="1"/>
           </p:cNvGraphicFramePr>
           <p:nvPr/>
         </p:nvGraphicFramePr>
         <p:xfrm>
-          <a:off x="822960" y="1188720"/>
-          <a:ext cx="10515600" cy="4389120"/>
+          <a:off x="731520" y="1188720"/>
+          <a:ext cx="10515600" cy="5029200"/>
         </p:xfrm>
         <a:graphic>
           <a:graphicData uri="http://schemas.openxmlformats.org/drawingml/2006/table">
@@ -18611,11 +19567,11 @@
                 <a:tableStyleId>{5C22544A-7EE6-4342-B048-85BDC9FD1C3A}</a:tableStyleId>
               </a:tblPr>
               <a:tblGrid>
-                <a:gridCol w="2377440"/>
-                <a:gridCol w="3474720"/>
-                <a:gridCol w="4663440"/>
+                <a:gridCol w="2560320"/>
+                <a:gridCol w="2926080"/>
+                <a:gridCol w="5029200"/>
               </a:tblGrid>
-              <a:tr h="877824">
+              <a:tr h="1005840">
                 <a:tc>
                   <a:txBody>
                     <a:bodyPr/>
@@ -18624,9 +19580,9 @@
                       <a:pPr algn="l">
                         <a:defRPr sz="1100" b="1">
                           <a:solidFill>
-                            <a:srgbClr val="1A365D"/>
+                            <a:srgbClr val="FFFFFF"/>
                           </a:solidFill>
-                          <a:latin typeface="Calibri"/>
+                          <a:latin typeface="Arial"/>
                         </a:defRPr>
                       </a:pPr>
                       <a:r>
@@ -18634,9 +19590,9 @@
                       </a:r>
                     </a:p>
                   </a:txBody>
-                  <a:tcPr>
+                  <a:tcPr marL="73152" marR="73152" marT="45720" marB="45720" anchor="ctr">
                     <a:solidFill>
-                      <a:srgbClr val="EDF2F7"/>
+                      <a:srgbClr val="102C57"/>
                     </a:solidFill>
                   </a:tcPr>
                 </a:tc>
@@ -18648,9 +19604,9 @@
                       <a:pPr algn="l">
                         <a:defRPr sz="1100" b="1">
                           <a:solidFill>
-                            <a:srgbClr val="1A365D"/>
+                            <a:srgbClr val="FFFFFF"/>
                           </a:solidFill>
-                          <a:latin typeface="Calibri"/>
+                          <a:latin typeface="Arial"/>
                         </a:defRPr>
                       </a:pPr>
                       <a:r>
@@ -18658,9 +19614,9 @@
                       </a:r>
                     </a:p>
                   </a:txBody>
-                  <a:tcPr>
+                  <a:tcPr marL="73152" marR="73152" marT="45720" marB="45720" anchor="ctr">
                     <a:solidFill>
-                      <a:srgbClr val="EDF2F7"/>
+                      <a:srgbClr val="102C57"/>
                     </a:solidFill>
                   </a:tcPr>
                 </a:tc>
@@ -18672,9 +19628,9 @@
                       <a:pPr algn="l">
                         <a:defRPr sz="1100" b="1">
                           <a:solidFill>
-                            <a:srgbClr val="1A365D"/>
+                            <a:srgbClr val="FFFFFF"/>
                           </a:solidFill>
-                          <a:latin typeface="Calibri"/>
+                          <a:latin typeface="Arial"/>
                         </a:defRPr>
                       </a:pPr>
                       <a:r>
@@ -18682,25 +19638,25 @@
                       </a:r>
                     </a:p>
                   </a:txBody>
-                  <a:tcPr>
+                  <a:tcPr marL="73152" marR="73152" marT="45720" marB="45720" anchor="ctr">
                     <a:solidFill>
-                      <a:srgbClr val="EDF2F7"/>
+                      <a:srgbClr val="102C57"/>
                     </a:solidFill>
                   </a:tcPr>
                 </a:tc>
               </a:tr>
-              <a:tr h="877824">
+              <a:tr h="1005840">
                 <a:tc>
                   <a:txBody>
                     <a:bodyPr/>
                     <a:lstStyle/>
                     <a:p>
                       <a:pPr algn="l">
-                        <a:defRPr sz="1000" b="1">
+                        <a:defRPr sz="1000" b="0">
                           <a:solidFill>
-                            <a:srgbClr val="1E293B"/>
+                            <a:srgbClr val="212529"/>
                           </a:solidFill>
-                          <a:latin typeface="Calibri"/>
+                          <a:latin typeface="Arial"/>
                         </a:defRPr>
                       </a:pPr>
                       <a:r>
@@ -18713,9 +19669,9 @@
                       </a:r>
                     </a:p>
                   </a:txBody>
-                  <a:tcPr>
+                  <a:tcPr marL="73152" marR="73152" marT="45720" marB="45720" anchor="ctr">
                     <a:solidFill>
-                      <a:srgbClr val="FFFFFF"/>
+                      <a:srgbClr val="F5F7FA"/>
                     </a:solidFill>
                   </a:tcPr>
                 </a:tc>
@@ -18727,9 +19683,9 @@
                       <a:pPr algn="l">
                         <a:defRPr sz="1000" b="0">
                           <a:solidFill>
-                            <a:srgbClr val="1E293B"/>
+                            <a:srgbClr val="212529"/>
                           </a:solidFill>
-                          <a:latin typeface="Calibri"/>
+                          <a:latin typeface="Arial"/>
                         </a:defRPr>
                       </a:pPr>
                       <a:r>
@@ -18737,9 +19693,9 @@
                       </a:r>
                     </a:p>
                   </a:txBody>
-                  <a:tcPr>
+                  <a:tcPr marL="73152" marR="73152" marT="45720" marB="45720" anchor="ctr">
                     <a:solidFill>
-                      <a:srgbClr val="FFFFFF"/>
+                      <a:srgbClr val="F5F7FA"/>
                     </a:solidFill>
                   </a:tcPr>
                 </a:tc>
@@ -18751,9 +19707,9 @@
                       <a:pPr algn="l">
                         <a:defRPr sz="1000" b="0">
                           <a:solidFill>
-                            <a:srgbClr val="1E293B"/>
+                            <a:srgbClr val="212529"/>
                           </a:solidFill>
-                          <a:latin typeface="Calibri"/>
+                          <a:latin typeface="Arial"/>
                         </a:defRPr>
                       </a:pPr>
                       <a:r>
@@ -18761,25 +19717,25 @@
                       </a:r>
                     </a:p>
                   </a:txBody>
-                  <a:tcPr>
+                  <a:tcPr marL="73152" marR="73152" marT="45720" marB="45720" anchor="ctr">
                     <a:solidFill>
-                      <a:srgbClr val="FFFFFF"/>
+                      <a:srgbClr val="F5F7FA"/>
                     </a:solidFill>
                   </a:tcPr>
                 </a:tc>
               </a:tr>
-              <a:tr h="877824">
+              <a:tr h="1005840">
                 <a:tc>
                   <a:txBody>
                     <a:bodyPr/>
                     <a:lstStyle/>
                     <a:p>
                       <a:pPr algn="l">
-                        <a:defRPr sz="1000" b="1">
+                        <a:defRPr sz="1000" b="0">
                           <a:solidFill>
-                            <a:srgbClr val="1E293B"/>
+                            <a:srgbClr val="212529"/>
                           </a:solidFill>
-                          <a:latin typeface="Calibri"/>
+                          <a:latin typeface="Arial"/>
                         </a:defRPr>
                       </a:pPr>
                       <a:r>
@@ -18787,11 +19743,7 @@
                       </a:r>
                     </a:p>
                   </a:txBody>
-                  <a:tcPr>
-                    <a:solidFill>
-                      <a:srgbClr val="F8FAFC"/>
-                    </a:solidFill>
-                  </a:tcPr>
+                  <a:tcPr marL="73152" marR="73152" marT="45720" marB="45720" anchor="ctr"/>
                 </a:tc>
                 <a:tc>
                   <a:txBody>
@@ -18801,9 +19753,9 @@
                       <a:pPr algn="l">
                         <a:defRPr sz="1000" b="0">
                           <a:solidFill>
-                            <a:srgbClr val="1E293B"/>
+                            <a:srgbClr val="212529"/>
                           </a:solidFill>
-                          <a:latin typeface="Calibri"/>
+                          <a:latin typeface="Arial"/>
                         </a:defRPr>
                       </a:pPr>
                       <a:r>
@@ -18811,11 +19763,7 @@
                       </a:r>
                     </a:p>
                   </a:txBody>
-                  <a:tcPr>
-                    <a:solidFill>
-                      <a:srgbClr val="F8FAFC"/>
-                    </a:solidFill>
-                  </a:tcPr>
+                  <a:tcPr marL="73152" marR="73152" marT="45720" marB="45720" anchor="ctr"/>
                 </a:tc>
                 <a:tc>
                   <a:txBody>
@@ -18825,9 +19773,9 @@
                       <a:pPr algn="l">
                         <a:defRPr sz="1000" b="0">
                           <a:solidFill>
-                            <a:srgbClr val="1E293B"/>
+                            <a:srgbClr val="212529"/>
                           </a:solidFill>
-                          <a:latin typeface="Calibri"/>
+                          <a:latin typeface="Arial"/>
                         </a:defRPr>
                       </a:pPr>
                       <a:r>
@@ -18835,25 +19783,21 @@
                       </a:r>
                     </a:p>
                   </a:txBody>
-                  <a:tcPr>
-                    <a:solidFill>
-                      <a:srgbClr val="F8FAFC"/>
-                    </a:solidFill>
-                  </a:tcPr>
+                  <a:tcPr marL="73152" marR="73152" marT="45720" marB="45720" anchor="ctr"/>
                 </a:tc>
               </a:tr>
-              <a:tr h="877824">
+              <a:tr h="1005840">
                 <a:tc>
                   <a:txBody>
                     <a:bodyPr/>
                     <a:lstStyle/>
                     <a:p>
                       <a:pPr algn="l">
-                        <a:defRPr sz="1000" b="1">
+                        <a:defRPr sz="1000" b="0">
                           <a:solidFill>
-                            <a:srgbClr val="1E293B"/>
+                            <a:srgbClr val="212529"/>
                           </a:solidFill>
-                          <a:latin typeface="Calibri"/>
+                          <a:latin typeface="Arial"/>
                         </a:defRPr>
                       </a:pPr>
                       <a:r>
@@ -18866,9 +19810,9 @@
                       </a:r>
                     </a:p>
                   </a:txBody>
-                  <a:tcPr>
+                  <a:tcPr marL="73152" marR="73152" marT="45720" marB="45720" anchor="ctr">
                     <a:solidFill>
-                      <a:srgbClr val="FFFFFF"/>
+                      <a:srgbClr val="F5F7FA"/>
                     </a:solidFill>
                   </a:tcPr>
                 </a:tc>
@@ -18880,9 +19824,9 @@
                       <a:pPr algn="l">
                         <a:defRPr sz="1000" b="0">
                           <a:solidFill>
-                            <a:srgbClr val="1E293B"/>
+                            <a:srgbClr val="212529"/>
                           </a:solidFill>
-                          <a:latin typeface="Calibri"/>
+                          <a:latin typeface="Arial"/>
                         </a:defRPr>
                       </a:pPr>
                       <a:r>
@@ -18890,9 +19834,9 @@
                       </a:r>
                     </a:p>
                   </a:txBody>
-                  <a:tcPr>
+                  <a:tcPr marL="73152" marR="73152" marT="45720" marB="45720" anchor="ctr">
                     <a:solidFill>
-                      <a:srgbClr val="FFFFFF"/>
+                      <a:srgbClr val="F5F7FA"/>
                     </a:solidFill>
                   </a:tcPr>
                 </a:tc>
@@ -18904,9 +19848,9 @@
                       <a:pPr algn="l">
                         <a:defRPr sz="1000" b="0">
                           <a:solidFill>
-                            <a:srgbClr val="1E293B"/>
+                            <a:srgbClr val="212529"/>
                           </a:solidFill>
-                          <a:latin typeface="Calibri"/>
+                          <a:latin typeface="Arial"/>
                         </a:defRPr>
                       </a:pPr>
                       <a:r>
@@ -18914,25 +19858,25 @@
                       </a:r>
                     </a:p>
                   </a:txBody>
-                  <a:tcPr>
+                  <a:tcPr marL="73152" marR="73152" marT="45720" marB="45720" anchor="ctr">
                     <a:solidFill>
-                      <a:srgbClr val="FFFFFF"/>
+                      <a:srgbClr val="F5F7FA"/>
                     </a:solidFill>
                   </a:tcPr>
                 </a:tc>
               </a:tr>
-              <a:tr h="877824">
+              <a:tr h="1005840">
                 <a:tc>
                   <a:txBody>
                     <a:bodyPr/>
                     <a:lstStyle/>
                     <a:p>
                       <a:pPr algn="l">
-                        <a:defRPr sz="1000" b="1">
+                        <a:defRPr sz="1000" b="0">
                           <a:solidFill>
-                            <a:srgbClr val="1E293B"/>
+                            <a:srgbClr val="212529"/>
                           </a:solidFill>
-                          <a:latin typeface="Calibri"/>
+                          <a:latin typeface="Arial"/>
                         </a:defRPr>
                       </a:pPr>
                       <a:r>
@@ -18940,11 +19884,7 @@
                       </a:r>
                     </a:p>
                   </a:txBody>
-                  <a:tcPr>
-                    <a:solidFill>
-                      <a:srgbClr val="F8FAFC"/>
-                    </a:solidFill>
-                  </a:tcPr>
+                  <a:tcPr marL="73152" marR="73152" marT="45720" marB="45720" anchor="ctr"/>
                 </a:tc>
                 <a:tc>
                   <a:txBody>
@@ -18954,9 +19894,9 @@
                       <a:pPr algn="l">
                         <a:defRPr sz="1000" b="0">
                           <a:solidFill>
-                            <a:srgbClr val="1E293B"/>
+                            <a:srgbClr val="212529"/>
                           </a:solidFill>
-                          <a:latin typeface="Calibri"/>
+                          <a:latin typeface="Arial"/>
                         </a:defRPr>
                       </a:pPr>
                       <a:r>
@@ -18964,11 +19904,7 @@
                       </a:r>
                     </a:p>
                   </a:txBody>
-                  <a:tcPr>
-                    <a:solidFill>
-                      <a:srgbClr val="F8FAFC"/>
-                    </a:solidFill>
-                  </a:tcPr>
+                  <a:tcPr marL="73152" marR="73152" marT="45720" marB="45720" anchor="ctr"/>
                 </a:tc>
                 <a:tc>
                   <a:txBody>
@@ -18978,9 +19914,9 @@
                       <a:pPr algn="l">
                         <a:defRPr sz="1000" b="0">
                           <a:solidFill>
-                            <a:srgbClr val="1E293B"/>
+                            <a:srgbClr val="212529"/>
                           </a:solidFill>
-                          <a:latin typeface="Calibri"/>
+                          <a:latin typeface="Arial"/>
                         </a:defRPr>
                       </a:pPr>
                       <a:r>
@@ -18988,11 +19924,7 @@
                       </a:r>
                     </a:p>
                   </a:txBody>
-                  <a:tcPr>
-                    <a:solidFill>
-                      <a:srgbClr val="F8FAFC"/>
-                    </a:solidFill>
-                  </a:tcPr>
+                  <a:tcPr marL="73152" marR="73152" marT="45720" marB="45720" anchor="ctr"/>
                 </a:tc>
               </a:tr>
             </a:tbl>
@@ -19000,6 +19932,11 @@
         </a:graphic>
       </p:graphicFrame>
     </p:spTree>
+    <p:extLst>
+      <p:ext uri="{BB962C8B-B14F-4D97-AF65-F5344CB8AC3E}">
+        <p14:creationId xmlns:p14="http://schemas.microsoft.com/office/powerpoint/2010/main" val="479890276"/>
+      </p:ext>
+    </p:extLst>
   </p:cSld>
   <p:clrMapOvr>
     <a:masterClrMapping/>

--- a/docs/AI_News_Credibility_Scorer_Review2.pptx
+++ b/docs/AI_News_Credibility_Scorer_Review2.pptx
@@ -12282,7 +12282,7 @@
         <p:spPr>
           <a:xfrm>
             <a:off x="731520" y="365760"/>
-            <a:ext cx="10515600" cy="822960"/>
+            <a:ext cx="10789920" cy="822960"/>
           </a:xfrm>
           <a:prstGeom prst="rect">
             <a:avLst/>
@@ -12296,7 +12296,7 @@
           <a:lstStyle/>
           <a:p>
             <a:pPr>
-              <a:defRPr sz="2400" b="1">
+              <a:defRPr sz="2600" b="1">
                 <a:solidFill>
                   <a:srgbClr val="102C57"/>
                 </a:solidFill>
@@ -12304,7 +12304,7 @@
               </a:defRPr>
             </a:pPr>
             <a:r>
-              <a:t>Proposed Method &amp; Feasibility Study (Rubric: 3 Marks)</a:t>
+              <a:t>Proposed Method &amp; Feasibility Study</a:t>
             </a:r>
           </a:p>
         </p:txBody>
@@ -12318,7 +12318,7 @@
         <p:spPr>
           <a:xfrm>
             <a:off x="731520" y="1188720"/>
-            <a:ext cx="10515600" cy="5120640"/>
+            <a:ext cx="10789920" cy="5120640"/>
           </a:xfrm>
           <a:prstGeom prst="rect">
             <a:avLst/>
@@ -12337,7 +12337,7 @@
               </a:spcAft>
             </a:pPr>
             <a:r>
-              <a:rPr b="1" sz="1300">
+              <a:rPr b="1" sz="1400">
                 <a:solidFill>
                   <a:srgbClr val="102C57"/>
                 </a:solidFill>
@@ -12352,7 +12352,7 @@
               </a:spcAft>
             </a:pPr>
             <a:r>
-              <a:rPr sz="1100">
+              <a:rPr sz="1200">
                 <a:solidFill>
                   <a:srgbClr val="212529"/>
                 </a:solidFill>
@@ -12365,11 +12365,11 @@
           <a:p>
             <a:pPr>
               <a:spcAft>
-                <a:spcPts val="400"/>
+                <a:spcPts val="500"/>
               </a:spcAft>
             </a:pPr>
             <a:r>
-              <a:rPr b="1" sz="1100">
+              <a:rPr b="1" sz="1250">
                 <a:solidFill>
                   <a:srgbClr val="3565A9"/>
                 </a:solidFill>
@@ -12377,7 +12377,7 @@
               <a:t>1. Technical Feasibility: </a:t>
             </a:r>
             <a:r>
-              <a:rPr sz="1100">
+              <a:rPr sz="1250">
                 <a:solidFill>
                   <a:srgbClr val="212529"/>
                 </a:solidFill>
@@ -12388,11 +12388,11 @@
           <a:p>
             <a:pPr>
               <a:spcAft>
-                <a:spcPts val="400"/>
+                <a:spcPts val="500"/>
               </a:spcAft>
             </a:pPr>
             <a:r>
-              <a:rPr b="1" sz="1100">
+              <a:rPr b="1" sz="1250">
                 <a:solidFill>
                   <a:srgbClr val="3565A9"/>
                 </a:solidFill>
@@ -12400,7 +12400,7 @@
               <a:t>2. Economic / Cost Feasibility ($0 Cost): </a:t>
             </a:r>
             <a:r>
-              <a:rPr sz="1100">
+              <a:rPr sz="1250">
                 <a:solidFill>
                   <a:srgbClr val="212529"/>
                 </a:solidFill>
@@ -12411,11 +12411,11 @@
           <a:p>
             <a:pPr>
               <a:spcAft>
-                <a:spcPts val="400"/>
+                <a:spcPts val="500"/>
               </a:spcAft>
             </a:pPr>
             <a:r>
-              <a:rPr b="1" sz="1100">
+              <a:rPr b="1" sz="1250">
                 <a:solidFill>
                   <a:srgbClr val="3565A9"/>
                 </a:solidFill>
@@ -12423,7 +12423,7 @@
               <a:t>3. Computational Feasibility: </a:t>
             </a:r>
             <a:r>
-              <a:rPr sz="1100">
+              <a:rPr sz="1250">
                 <a:solidFill>
                   <a:srgbClr val="212529"/>
                 </a:solidFill>
@@ -12434,11 +12434,11 @@
           <a:p>
             <a:pPr>
               <a:spcAft>
-                <a:spcPts val="400"/>
+                <a:spcPts val="500"/>
               </a:spcAft>
             </a:pPr>
             <a:r>
-              <a:rPr b="1" sz="1100">
+              <a:rPr b="1" sz="1250">
                 <a:solidFill>
                   <a:srgbClr val="3565A9"/>
                 </a:solidFill>
@@ -12446,7 +12446,7 @@
               <a:t>4. Resource Availability: </a:t>
             </a:r>
             <a:r>
-              <a:rPr sz="1100">
+              <a:rPr sz="1250">
                 <a:solidFill>
                   <a:srgbClr val="212529"/>
                 </a:solidFill>
@@ -12490,7 +12490,7 @@
         <p:spPr>
           <a:xfrm>
             <a:off x="731520" y="365760"/>
-            <a:ext cx="10515600" cy="822960"/>
+            <a:ext cx="10789920" cy="822960"/>
           </a:xfrm>
           <a:prstGeom prst="rect">
             <a:avLst/>
@@ -12504,7 +12504,7 @@
           <a:lstStyle/>
           <a:p>
             <a:pPr>
-              <a:defRPr sz="2400" b="1">
+              <a:defRPr sz="2600" b="1">
                 <a:solidFill>
                   <a:srgbClr val="102C57"/>
                 </a:solidFill>
@@ -12512,7 +12512,7 @@
               </a:defRPr>
             </a:pPr>
             <a:r>
-              <a:t>System Architecture Diagram (Rubric: 3 Marks)</a:t>
+              <a:t>System Architecture Diagram</a:t>
             </a:r>
           </a:p>
         </p:txBody>
@@ -12562,7 +12562,7 @@
               <a:spcAft>
                 <a:spcPts val="600"/>
               </a:spcAft>
-              <a:defRPr sz="1200" b="1">
+              <a:defRPr sz="1300" b="1">
                 <a:solidFill>
                   <a:srgbClr val="102C57"/>
                 </a:solidFill>
@@ -12576,9 +12576,9 @@
           <a:p>
             <a:pPr>
               <a:spcAft>
-                <a:spcPts val="200"/>
-              </a:spcAft>
-              <a:defRPr sz="1000" b="1">
+                <a:spcPts val="250"/>
+              </a:spcAft>
+              <a:defRPr sz="1100" b="1">
                 <a:solidFill>
                   <a:srgbClr val="102C57"/>
                 </a:solidFill>
@@ -12592,9 +12592,9 @@
           <a:p>
             <a:pPr>
               <a:spcAft>
-                <a:spcPts val="200"/>
-              </a:spcAft>
-              <a:defRPr sz="1000" b="0">
+                <a:spcPts val="250"/>
+              </a:spcAft>
+              <a:defRPr sz="1100" b="0">
                 <a:solidFill>
                   <a:srgbClr val="212529"/>
                 </a:solidFill>
@@ -12608,9 +12608,9 @@
           <a:p>
             <a:pPr>
               <a:spcAft>
-                <a:spcPts val="200"/>
-              </a:spcAft>
-              <a:defRPr sz="1000" b="0">
+                <a:spcPts val="250"/>
+              </a:spcAft>
+              <a:defRPr sz="1100" b="0">
                 <a:solidFill>
                   <a:srgbClr val="212529"/>
                 </a:solidFill>
@@ -12624,9 +12624,9 @@
           <a:p>
             <a:pPr>
               <a:spcAft>
-                <a:spcPts val="200"/>
-              </a:spcAft>
-              <a:defRPr sz="1000" b="0">
+                <a:spcPts val="250"/>
+              </a:spcAft>
+              <a:defRPr sz="1100" b="0">
                 <a:solidFill>
                   <a:srgbClr val="212529"/>
                 </a:solidFill>
@@ -12637,9 +12637,9 @@
           <a:p>
             <a:pPr>
               <a:spcAft>
-                <a:spcPts val="200"/>
-              </a:spcAft>
-              <a:defRPr sz="1000" b="1">
+                <a:spcPts val="250"/>
+              </a:spcAft>
+              <a:defRPr sz="1100" b="1">
                 <a:solidFill>
                   <a:srgbClr val="102C57"/>
                 </a:solidFill>
@@ -12653,9 +12653,9 @@
           <a:p>
             <a:pPr>
               <a:spcAft>
-                <a:spcPts val="200"/>
-              </a:spcAft>
-              <a:defRPr sz="1000" b="0">
+                <a:spcPts val="250"/>
+              </a:spcAft>
+              <a:defRPr sz="1100" b="0">
                 <a:solidFill>
                   <a:srgbClr val="212529"/>
                 </a:solidFill>
@@ -12669,9 +12669,9 @@
           <a:p>
             <a:pPr>
               <a:spcAft>
-                <a:spcPts val="200"/>
-              </a:spcAft>
-              <a:defRPr sz="1000" b="0">
+                <a:spcPts val="250"/>
+              </a:spcAft>
+              <a:defRPr sz="1100" b="0">
                 <a:solidFill>
                   <a:srgbClr val="212529"/>
                 </a:solidFill>
@@ -12685,9 +12685,9 @@
           <a:p>
             <a:pPr>
               <a:spcAft>
-                <a:spcPts val="200"/>
-              </a:spcAft>
-              <a:defRPr sz="1000" b="0">
+                <a:spcPts val="250"/>
+              </a:spcAft>
+              <a:defRPr sz="1100" b="0">
                 <a:solidFill>
                   <a:srgbClr val="212529"/>
                 </a:solidFill>
@@ -12701,9 +12701,9 @@
           <a:p>
             <a:pPr>
               <a:spcAft>
-                <a:spcPts val="200"/>
-              </a:spcAft>
-              <a:defRPr sz="1000" b="0">
+                <a:spcPts val="250"/>
+              </a:spcAft>
+              <a:defRPr sz="1100" b="0">
                 <a:solidFill>
                   <a:srgbClr val="212529"/>
                 </a:solidFill>
@@ -12761,7 +12761,7 @@
               <a:spcAft>
                 <a:spcPts val="600"/>
               </a:spcAft>
-              <a:defRPr sz="1200" b="1">
+              <a:defRPr sz="1300" b="1">
                 <a:solidFill>
                   <a:srgbClr val="102C57"/>
                 </a:solidFill>
@@ -12775,9 +12775,9 @@
           <a:p>
             <a:pPr>
               <a:spcAft>
-                <a:spcPts val="200"/>
-              </a:spcAft>
-              <a:defRPr sz="1000" b="1">
+                <a:spcPts val="250"/>
+              </a:spcAft>
+              <a:defRPr sz="1100" b="1">
                 <a:solidFill>
                   <a:srgbClr val="102C57"/>
                 </a:solidFill>
@@ -12791,9 +12791,9 @@
           <a:p>
             <a:pPr>
               <a:spcAft>
-                <a:spcPts val="200"/>
-              </a:spcAft>
-              <a:defRPr sz="1000" b="0">
+                <a:spcPts val="250"/>
+              </a:spcAft>
+              <a:defRPr sz="1100" b="0">
                 <a:solidFill>
                   <a:srgbClr val="212529"/>
                 </a:solidFill>
@@ -12807,9 +12807,9 @@
           <a:p>
             <a:pPr>
               <a:spcAft>
-                <a:spcPts val="200"/>
-              </a:spcAft>
-              <a:defRPr sz="1000" b="0">
+                <a:spcPts val="250"/>
+              </a:spcAft>
+              <a:defRPr sz="1100" b="0">
                 <a:solidFill>
                   <a:srgbClr val="212529"/>
                 </a:solidFill>
@@ -12823,9 +12823,9 @@
           <a:p>
             <a:pPr>
               <a:spcAft>
-                <a:spcPts val="200"/>
-              </a:spcAft>
-              <a:defRPr sz="1000" b="0">
+                <a:spcPts val="250"/>
+              </a:spcAft>
+              <a:defRPr sz="1100" b="0">
                 <a:solidFill>
                   <a:srgbClr val="212529"/>
                 </a:solidFill>
@@ -12836,9 +12836,9 @@
           <a:p>
             <a:pPr>
               <a:spcAft>
-                <a:spcPts val="200"/>
-              </a:spcAft>
-              <a:defRPr sz="1000" b="1">
+                <a:spcPts val="250"/>
+              </a:spcAft>
+              <a:defRPr sz="1100" b="1">
                 <a:solidFill>
                   <a:srgbClr val="102C57"/>
                 </a:solidFill>
@@ -12852,9 +12852,9 @@
           <a:p>
             <a:pPr>
               <a:spcAft>
-                <a:spcPts val="200"/>
-              </a:spcAft>
-              <a:defRPr sz="1000" b="0">
+                <a:spcPts val="250"/>
+              </a:spcAft>
+              <a:defRPr sz="1100" b="0">
                 <a:solidFill>
                   <a:srgbClr val="212529"/>
                 </a:solidFill>
@@ -12868,9 +12868,9 @@
           <a:p>
             <a:pPr>
               <a:spcAft>
-                <a:spcPts val="200"/>
-              </a:spcAft>
-              <a:defRPr sz="1000" b="0">
+                <a:spcPts val="250"/>
+              </a:spcAft>
+              <a:defRPr sz="1100" b="0">
                 <a:solidFill>
                   <a:srgbClr val="212529"/>
                 </a:solidFill>
@@ -12884,9 +12884,9 @@
           <a:p>
             <a:pPr>
               <a:spcAft>
-                <a:spcPts val="200"/>
-              </a:spcAft>
-              <a:defRPr sz="1000" b="0">
+                <a:spcPts val="250"/>
+              </a:spcAft>
+              <a:defRPr sz="1100" b="0">
                 <a:solidFill>
                   <a:srgbClr val="212529"/>
                 </a:solidFill>
@@ -12900,9 +12900,9 @@
           <a:p>
             <a:pPr>
               <a:spcAft>
-                <a:spcPts val="200"/>
-              </a:spcAft>
-              <a:defRPr sz="1000" b="0">
+                <a:spcPts val="250"/>
+              </a:spcAft>
+              <a:defRPr sz="1100" b="0">
                 <a:solidFill>
                   <a:srgbClr val="212529"/>
                 </a:solidFill>
@@ -12916,9 +12916,9 @@
           <a:p>
             <a:pPr>
               <a:spcAft>
-                <a:spcPts val="200"/>
-              </a:spcAft>
-              <a:defRPr sz="1000" b="0">
+                <a:spcPts val="250"/>
+              </a:spcAft>
+              <a:defRPr sz="1100" b="0">
                 <a:solidFill>
                   <a:srgbClr val="212529"/>
                 </a:solidFill>
@@ -12932,9 +12932,9 @@
           <a:p>
             <a:pPr>
               <a:spcAft>
-                <a:spcPts val="200"/>
-              </a:spcAft>
-              <a:defRPr sz="1000" b="0">
+                <a:spcPts val="250"/>
+              </a:spcAft>
+              <a:defRPr sz="1100" b="0">
                 <a:solidFill>
                   <a:srgbClr val="212529"/>
                 </a:solidFill>
@@ -12992,7 +12992,7 @@
               <a:spcAft>
                 <a:spcPts val="600"/>
               </a:spcAft>
-              <a:defRPr sz="1200" b="1">
+              <a:defRPr sz="1300" b="1">
                 <a:solidFill>
                   <a:srgbClr val="102C57"/>
                 </a:solidFill>
@@ -13006,9 +13006,9 @@
           <a:p>
             <a:pPr>
               <a:spcAft>
-                <a:spcPts val="200"/>
-              </a:spcAft>
-              <a:defRPr sz="1000" b="1">
+                <a:spcPts val="250"/>
+              </a:spcAft>
+              <a:defRPr sz="1100" b="1">
                 <a:solidFill>
                   <a:srgbClr val="102C57"/>
                 </a:solidFill>
@@ -13022,9 +13022,9 @@
           <a:p>
             <a:pPr>
               <a:spcAft>
-                <a:spcPts val="200"/>
-              </a:spcAft>
-              <a:defRPr sz="1000" b="0">
+                <a:spcPts val="250"/>
+              </a:spcAft>
+              <a:defRPr sz="1100" b="0">
                 <a:solidFill>
                   <a:srgbClr val="212529"/>
                 </a:solidFill>
@@ -13038,9 +13038,9 @@
           <a:p>
             <a:pPr>
               <a:spcAft>
-                <a:spcPts val="200"/>
-              </a:spcAft>
-              <a:defRPr sz="1000" b="0">
+                <a:spcPts val="250"/>
+              </a:spcAft>
+              <a:defRPr sz="1100" b="0">
                 <a:solidFill>
                   <a:srgbClr val="212529"/>
                 </a:solidFill>
@@ -13054,9 +13054,9 @@
           <a:p>
             <a:pPr>
               <a:spcAft>
-                <a:spcPts val="200"/>
-              </a:spcAft>
-              <a:defRPr sz="1000" b="0">
+                <a:spcPts val="250"/>
+              </a:spcAft>
+              <a:defRPr sz="1100" b="0">
                 <a:solidFill>
                   <a:srgbClr val="212529"/>
                 </a:solidFill>
@@ -13070,9 +13070,9 @@
           <a:p>
             <a:pPr>
               <a:spcAft>
-                <a:spcPts val="200"/>
-              </a:spcAft>
-              <a:defRPr sz="1000" b="0">
+                <a:spcPts val="250"/>
+              </a:spcAft>
+              <a:defRPr sz="1100" b="0">
                 <a:solidFill>
                   <a:srgbClr val="212529"/>
                 </a:solidFill>
@@ -13083,9 +13083,9 @@
           <a:p>
             <a:pPr>
               <a:spcAft>
-                <a:spcPts val="200"/>
-              </a:spcAft>
-              <a:defRPr sz="1000" b="1">
+                <a:spcPts val="250"/>
+              </a:spcAft>
+              <a:defRPr sz="1100" b="1">
                 <a:solidFill>
                   <a:srgbClr val="102C57"/>
                 </a:solidFill>
@@ -13099,9 +13099,9 @@
           <a:p>
             <a:pPr>
               <a:spcAft>
-                <a:spcPts val="200"/>
-              </a:spcAft>
-              <a:defRPr sz="1000" b="0">
+                <a:spcPts val="250"/>
+              </a:spcAft>
+              <a:defRPr sz="1100" b="0">
                 <a:solidFill>
                   <a:srgbClr val="212529"/>
                 </a:solidFill>
@@ -13115,9 +13115,9 @@
           <a:p>
             <a:pPr>
               <a:spcAft>
-                <a:spcPts val="200"/>
-              </a:spcAft>
-              <a:defRPr sz="1000" b="0">
+                <a:spcPts val="250"/>
+              </a:spcAft>
+              <a:defRPr sz="1100" b="0">
                 <a:solidFill>
                   <a:srgbClr val="212529"/>
                 </a:solidFill>
@@ -13128,9 +13128,9 @@
           <a:p>
             <a:pPr>
               <a:spcAft>
-                <a:spcPts val="200"/>
-              </a:spcAft>
-              <a:defRPr sz="1000" b="1">
+                <a:spcPts val="250"/>
+              </a:spcAft>
+              <a:defRPr sz="1100" b="1">
                 <a:solidFill>
                   <a:srgbClr val="102C57"/>
                 </a:solidFill>
@@ -13144,9 +13144,9 @@
           <a:p>
             <a:pPr>
               <a:spcAft>
-                <a:spcPts val="200"/>
-              </a:spcAft>
-              <a:defRPr sz="1000" b="0">
+                <a:spcPts val="250"/>
+              </a:spcAft>
+              <a:defRPr sz="1100" b="0">
                 <a:solidFill>
                   <a:srgbClr val="212529"/>
                 </a:solidFill>
@@ -13160,9 +13160,9 @@
           <a:p>
             <a:pPr>
               <a:spcAft>
-                <a:spcPts val="200"/>
-              </a:spcAft>
-              <a:defRPr sz="1000" b="0">
+                <a:spcPts val="250"/>
+              </a:spcAft>
+              <a:defRPr sz="1100" b="0">
                 <a:solidFill>
                   <a:srgbClr val="212529"/>
                 </a:solidFill>
@@ -13173,9 +13173,9 @@
           <a:p>
             <a:pPr>
               <a:spcAft>
-                <a:spcPts val="200"/>
-              </a:spcAft>
-              <a:defRPr sz="1000" b="0">
+                <a:spcPts val="250"/>
+              </a:spcAft>
+              <a:defRPr sz="1100" b="0">
                 <a:solidFill>
                   <a:srgbClr val="212529"/>
                 </a:solidFill>
@@ -13215,7 +13215,7 @@
         <p:spPr>
           <a:xfrm>
             <a:off x="731520" y="365760"/>
-            <a:ext cx="10515600" cy="822960"/>
+            <a:ext cx="10789920" cy="822960"/>
           </a:xfrm>
           <a:prstGeom prst="rect">
             <a:avLst/>
@@ -13229,7 +13229,7 @@
           <a:lstStyle/>
           <a:p>
             <a:pPr>
-              <a:defRPr sz="2400" b="1">
+              <a:defRPr sz="2600" b="1">
                 <a:solidFill>
                   <a:srgbClr val="102C57"/>
                 </a:solidFill>
@@ -13237,7 +13237,7 @@
               </a:defRPr>
             </a:pPr>
             <a:r>
-              <a:t>System Modules Breakdown (Rubric: 2 Marks)</a:t>
+              <a:t>System Modules Breakdown</a:t>
             </a:r>
           </a:p>
         </p:txBody>
@@ -13251,7 +13251,7 @@
         <p:spPr>
           <a:xfrm>
             <a:off x="731520" y="1188720"/>
-            <a:ext cx="10515600" cy="5120640"/>
+            <a:ext cx="10789920" cy="5120640"/>
           </a:xfrm>
           <a:prstGeom prst="rect">
             <a:avLst/>
@@ -13266,11 +13266,11 @@
           <a:p>
             <a:pPr>
               <a:spcAft>
-                <a:spcPts val="600"/>
+                <a:spcPts val="700"/>
               </a:spcAft>
             </a:pPr>
             <a:r>
-              <a:rPr b="1" sz="1100">
+              <a:rPr b="1" sz="1250">
                 <a:solidFill>
                   <a:srgbClr val="102C57"/>
                 </a:solidFill>
@@ -13278,7 +13278,7 @@
               <a:t>Module 1 -- Article Ingestion &amp; Web Scraper: </a:t>
             </a:r>
             <a:r>
-              <a:rPr sz="1100">
+              <a:rPr sz="1250">
                 <a:solidFill>
                   <a:srgbClr val="212529"/>
                 </a:solidFill>
@@ -13289,11 +13289,11 @@
           <a:p>
             <a:pPr>
               <a:spcAft>
-                <a:spcPts val="600"/>
+                <a:spcPts val="700"/>
               </a:spcAft>
             </a:pPr>
             <a:r>
-              <a:rPr b="1" sz="1100">
+              <a:rPr b="1" sz="1250">
                 <a:solidFill>
                   <a:srgbClr val="102C57"/>
                 </a:solidFill>
@@ -13301,7 +13301,7 @@
               <a:t>Module 2 -- Factual Claim Extractor: </a:t>
             </a:r>
             <a:r>
-              <a:rPr sz="1100">
+              <a:rPr sz="1250">
                 <a:solidFill>
                   <a:srgbClr val="212529"/>
                 </a:solidFill>
@@ -13312,11 +13312,11 @@
           <a:p>
             <a:pPr>
               <a:spcAft>
-                <a:spcPts val="600"/>
+                <a:spcPts val="700"/>
               </a:spcAft>
             </a:pPr>
             <a:r>
-              <a:rPr b="1" sz="1100">
+              <a:rPr b="1" sz="1250">
                 <a:solidFill>
                   <a:srgbClr val="102C57"/>
                 </a:solidFill>
@@ -13324,7 +13324,7 @@
               <a:t>Module 3 -- Evidence Retrieval Engine: </a:t>
             </a:r>
             <a:r>
-              <a:rPr sz="1100">
+              <a:rPr sz="1250">
                 <a:solidFill>
                   <a:srgbClr val="212529"/>
                 </a:solidFill>
@@ -13335,11 +13335,11 @@
           <a:p>
             <a:pPr>
               <a:spcAft>
-                <a:spcPts val="600"/>
+                <a:spcPts val="700"/>
               </a:spcAft>
             </a:pPr>
             <a:r>
-              <a:rPr b="1" sz="1100">
+              <a:rPr b="1" sz="1250">
                 <a:solidFill>
                   <a:srgbClr val="102C57"/>
                 </a:solidFill>
@@ -13347,7 +13347,7 @@
               <a:t>Module 4 -- MBFC Source Reputation Database: </a:t>
             </a:r>
             <a:r>
-              <a:rPr sz="1100">
+              <a:rPr sz="1250">
                 <a:solidFill>
                   <a:srgbClr val="212529"/>
                 </a:solidFill>
@@ -13358,11 +13358,11 @@
           <a:p>
             <a:pPr>
               <a:spcAft>
-                <a:spcPts val="600"/>
+                <a:spcPts val="700"/>
               </a:spcAft>
             </a:pPr>
             <a:r>
-              <a:rPr b="1" sz="1100">
+              <a:rPr b="1" sz="1250">
                 <a:solidFill>
                   <a:srgbClr val="102C57"/>
                 </a:solidFill>
@@ -13370,7 +13370,7 @@
               <a:t>Module 5 -- RoBERTa-MNLI &amp; Manipulation Engine: </a:t>
             </a:r>
             <a:r>
-              <a:rPr sz="1100">
+              <a:rPr sz="1250">
                 <a:solidFill>
                   <a:srgbClr val="212529"/>
                 </a:solidFill>
@@ -13381,11 +13381,11 @@
           <a:p>
             <a:pPr>
               <a:spcAft>
-                <a:spcPts val="600"/>
+                <a:spcPts val="700"/>
               </a:spcAft>
             </a:pPr>
             <a:r>
-              <a:rPr b="1" sz="1100">
+              <a:rPr b="1" sz="1250">
                 <a:solidFill>
                   <a:srgbClr val="102C57"/>
                 </a:solidFill>
@@ -13393,7 +13393,7 @@
               <a:t>Module 6 -- Score Aggregation &amp; Visual Dashboard: </a:t>
             </a:r>
             <a:r>
-              <a:rPr sz="1100">
+              <a:rPr sz="1250">
                 <a:solidFill>
                   <a:srgbClr val="212529"/>
                 </a:solidFill>
@@ -13430,7 +13430,7 @@
         <p:spPr>
           <a:xfrm>
             <a:off x="731520" y="365760"/>
-            <a:ext cx="10515600" cy="822960"/>
+            <a:ext cx="10789920" cy="822960"/>
           </a:xfrm>
           <a:prstGeom prst="rect">
             <a:avLst/>
@@ -13444,7 +13444,7 @@
           <a:lstStyle/>
           <a:p>
             <a:pPr>
-              <a:defRPr sz="2400" b="1">
+              <a:defRPr sz="2600" b="1">
                 <a:solidFill>
                   <a:srgbClr val="102C57"/>
                 </a:solidFill>
@@ -13452,7 +13452,7 @@
               </a:defRPr>
             </a:pPr>
             <a:r>
-              <a:t>Hardware and Software Details (Rubric: 1 Mark)</a:t>
+              <a:t>Hardware and Software Details</a:t>
             </a:r>
           </a:p>
         </p:txBody>
@@ -13467,7 +13467,7 @@
         </p:nvGraphicFramePr>
         <p:xfrm>
           <a:off x="731520" y="1188720"/>
-          <a:ext cx="10515600" cy="5120640"/>
+          <a:ext cx="10789920" cy="5120640"/>
         </p:xfrm>
         <a:graphic>
           <a:graphicData uri="http://schemas.openxmlformats.org/drawingml/2006/table">
@@ -13477,8 +13477,8 @@
               </a:tblPr>
               <a:tblGrid>
                 <a:gridCol w="2286000"/>
-                <a:gridCol w="3840480"/>
-                <a:gridCol w="4389120"/>
+                <a:gridCol w="3931920"/>
+                <a:gridCol w="4572000"/>
               </a:tblGrid>
               <a:tr h="465512">
                 <a:tc>
@@ -13487,7 +13487,7 @@
                     <a:lstStyle/>
                     <a:p>
                       <a:pPr algn="l">
-                        <a:defRPr sz="950" b="1">
+                        <a:defRPr sz="1100" b="1">
                           <a:solidFill>
                             <a:srgbClr val="FFFFFF"/>
                           </a:solidFill>
@@ -13511,7 +13511,7 @@
                     <a:lstStyle/>
                     <a:p>
                       <a:pPr algn="l">
-                        <a:defRPr sz="950" b="1">
+                        <a:defRPr sz="1100" b="1">
                           <a:solidFill>
                             <a:srgbClr val="FFFFFF"/>
                           </a:solidFill>
@@ -13535,7 +13535,7 @@
                     <a:lstStyle/>
                     <a:p>
                       <a:pPr algn="l">
-                        <a:defRPr sz="950" b="1">
+                        <a:defRPr sz="1100" b="1">
                           <a:solidFill>
                             <a:srgbClr val="FFFFFF"/>
                           </a:solidFill>
@@ -13561,7 +13561,7 @@
                     <a:lstStyle/>
                     <a:p>
                       <a:pPr algn="l">
-                        <a:defRPr sz="850" b="0">
+                        <a:defRPr sz="950" b="0">
                           <a:solidFill>
                             <a:srgbClr val="212529"/>
                           </a:solidFill>
@@ -13585,7 +13585,7 @@
                     <a:lstStyle/>
                     <a:p>
                       <a:pPr algn="l">
-                        <a:defRPr sz="850" b="0">
+                        <a:defRPr sz="950" b="0">
                           <a:solidFill>
                             <a:srgbClr val="212529"/>
                           </a:solidFill>
@@ -13609,7 +13609,7 @@
                     <a:lstStyle/>
                     <a:p>
                       <a:pPr algn="l">
-                        <a:defRPr sz="850" b="0">
+                        <a:defRPr sz="950" b="0">
                           <a:solidFill>
                             <a:srgbClr val="212529"/>
                           </a:solidFill>
@@ -13635,7 +13635,7 @@
                     <a:lstStyle/>
                     <a:p>
                       <a:pPr algn="l">
-                        <a:defRPr sz="850" b="0">
+                        <a:defRPr sz="950" b="0">
                           <a:solidFill>
                             <a:srgbClr val="212529"/>
                           </a:solidFill>
@@ -13655,7 +13655,7 @@
                     <a:lstStyle/>
                     <a:p>
                       <a:pPr algn="l">
-                        <a:defRPr sz="850" b="0">
+                        <a:defRPr sz="950" b="0">
                           <a:solidFill>
                             <a:srgbClr val="212529"/>
                           </a:solidFill>
@@ -13675,7 +13675,7 @@
                     <a:lstStyle/>
                     <a:p>
                       <a:pPr algn="l">
-                        <a:defRPr sz="850" b="0">
+                        <a:defRPr sz="950" b="0">
                           <a:solidFill>
                             <a:srgbClr val="212529"/>
                           </a:solidFill>
@@ -13697,7 +13697,7 @@
                     <a:lstStyle/>
                     <a:p>
                       <a:pPr algn="l">
-                        <a:defRPr sz="850" b="0">
+                        <a:defRPr sz="950" b="0">
                           <a:solidFill>
                             <a:srgbClr val="212529"/>
                           </a:solidFill>
@@ -13721,7 +13721,7 @@
                     <a:lstStyle/>
                     <a:p>
                       <a:pPr algn="l">
-                        <a:defRPr sz="850" b="0">
+                        <a:defRPr sz="950" b="0">
                           <a:solidFill>
                             <a:srgbClr val="212529"/>
                           </a:solidFill>
@@ -13745,7 +13745,7 @@
                     <a:lstStyle/>
                     <a:p>
                       <a:pPr algn="l">
-                        <a:defRPr sz="850" b="0">
+                        <a:defRPr sz="950" b="0">
                           <a:solidFill>
                             <a:srgbClr val="212529"/>
                           </a:solidFill>
@@ -13771,7 +13771,7 @@
                     <a:lstStyle/>
                     <a:p>
                       <a:pPr algn="l">
-                        <a:defRPr sz="850" b="0">
+                        <a:defRPr sz="950" b="0">
                           <a:solidFill>
                             <a:srgbClr val="212529"/>
                           </a:solidFill>
@@ -13791,7 +13791,7 @@
                     <a:lstStyle/>
                     <a:p>
                       <a:pPr algn="l">
-                        <a:defRPr sz="850" b="0">
+                        <a:defRPr sz="950" b="0">
                           <a:solidFill>
                             <a:srgbClr val="212529"/>
                           </a:solidFill>
@@ -13811,7 +13811,7 @@
                     <a:lstStyle/>
                     <a:p>
                       <a:pPr algn="l">
-                        <a:defRPr sz="850" b="0">
+                        <a:defRPr sz="950" b="0">
                           <a:solidFill>
                             <a:srgbClr val="212529"/>
                           </a:solidFill>
@@ -13833,7 +13833,7 @@
                     <a:lstStyle/>
                     <a:p>
                       <a:pPr algn="l">
-                        <a:defRPr sz="850" b="0">
+                        <a:defRPr sz="950" b="0">
                           <a:solidFill>
                             <a:srgbClr val="212529"/>
                           </a:solidFill>
@@ -13857,7 +13857,7 @@
                     <a:lstStyle/>
                     <a:p>
                       <a:pPr algn="l">
-                        <a:defRPr sz="850" b="0">
+                        <a:defRPr sz="950" b="0">
                           <a:solidFill>
                             <a:srgbClr val="212529"/>
                           </a:solidFill>
@@ -13881,7 +13881,7 @@
                     <a:lstStyle/>
                     <a:p>
                       <a:pPr algn="l">
-                        <a:defRPr sz="850" b="0">
+                        <a:defRPr sz="950" b="0">
                           <a:solidFill>
                             <a:srgbClr val="212529"/>
                           </a:solidFill>
@@ -13907,7 +13907,7 @@
                     <a:lstStyle/>
                     <a:p>
                       <a:pPr algn="l">
-                        <a:defRPr sz="850" b="0">
+                        <a:defRPr sz="950" b="0">
                           <a:solidFill>
                             <a:srgbClr val="212529"/>
                           </a:solidFill>
@@ -13927,7 +13927,7 @@
                     <a:lstStyle/>
                     <a:p>
                       <a:pPr algn="l">
-                        <a:defRPr sz="850" b="0">
+                        <a:defRPr sz="950" b="0">
                           <a:solidFill>
                             <a:srgbClr val="212529"/>
                           </a:solidFill>
@@ -13947,7 +13947,7 @@
                     <a:lstStyle/>
                     <a:p>
                       <a:pPr algn="l">
-                        <a:defRPr sz="850" b="0">
+                        <a:defRPr sz="950" b="0">
                           <a:solidFill>
                             <a:srgbClr val="212529"/>
                           </a:solidFill>
@@ -13969,7 +13969,7 @@
                     <a:lstStyle/>
                     <a:p>
                       <a:pPr algn="l">
-                        <a:defRPr sz="850" b="0">
+                        <a:defRPr sz="950" b="0">
                           <a:solidFill>
                             <a:srgbClr val="212529"/>
                           </a:solidFill>
@@ -13993,7 +13993,7 @@
                     <a:lstStyle/>
                     <a:p>
                       <a:pPr algn="l">
-                        <a:defRPr sz="850" b="0">
+                        <a:defRPr sz="950" b="0">
                           <a:solidFill>
                             <a:srgbClr val="212529"/>
                           </a:solidFill>
@@ -14017,7 +14017,7 @@
                     <a:lstStyle/>
                     <a:p>
                       <a:pPr algn="l">
-                        <a:defRPr sz="850" b="0">
+                        <a:defRPr sz="950" b="0">
                           <a:solidFill>
                             <a:srgbClr val="212529"/>
                           </a:solidFill>
@@ -14043,7 +14043,7 @@
                     <a:lstStyle/>
                     <a:p>
                       <a:pPr algn="l">
-                        <a:defRPr sz="850" b="0">
+                        <a:defRPr sz="950" b="0">
                           <a:solidFill>
                             <a:srgbClr val="212529"/>
                           </a:solidFill>
@@ -14063,7 +14063,7 @@
                     <a:lstStyle/>
                     <a:p>
                       <a:pPr algn="l">
-                        <a:defRPr sz="850" b="0">
+                        <a:defRPr sz="950" b="0">
                           <a:solidFill>
                             <a:srgbClr val="212529"/>
                           </a:solidFill>
@@ -14083,7 +14083,7 @@
                     <a:lstStyle/>
                     <a:p>
                       <a:pPr algn="l">
-                        <a:defRPr sz="850" b="0">
+                        <a:defRPr sz="950" b="0">
                           <a:solidFill>
                             <a:srgbClr val="212529"/>
                           </a:solidFill>
@@ -14105,7 +14105,7 @@
                     <a:lstStyle/>
                     <a:p>
                       <a:pPr algn="l">
-                        <a:defRPr sz="850" b="0">
+                        <a:defRPr sz="950" b="0">
                           <a:solidFill>
                             <a:srgbClr val="212529"/>
                           </a:solidFill>
@@ -14129,7 +14129,7 @@
                     <a:lstStyle/>
                     <a:p>
                       <a:pPr algn="l">
-                        <a:defRPr sz="850" b="0">
+                        <a:defRPr sz="950" b="0">
                           <a:solidFill>
                             <a:srgbClr val="212529"/>
                           </a:solidFill>
@@ -14153,7 +14153,7 @@
                     <a:lstStyle/>
                     <a:p>
                       <a:pPr algn="l">
-                        <a:defRPr sz="850" b="0">
+                        <a:defRPr sz="950" b="0">
                           <a:solidFill>
                             <a:srgbClr val="212529"/>
                           </a:solidFill>
@@ -14179,7 +14179,7 @@
                     <a:lstStyle/>
                     <a:p>
                       <a:pPr algn="l">
-                        <a:defRPr sz="850" b="0">
+                        <a:defRPr sz="950" b="0">
                           <a:solidFill>
                             <a:srgbClr val="212529"/>
                           </a:solidFill>
@@ -14199,7 +14199,7 @@
                     <a:lstStyle/>
                     <a:p>
                       <a:pPr algn="l">
-                        <a:defRPr sz="850" b="0">
+                        <a:defRPr sz="950" b="0">
                           <a:solidFill>
                             <a:srgbClr val="212529"/>
                           </a:solidFill>
@@ -14224,7 +14224,7 @@
                     <a:lstStyle/>
                     <a:p>
                       <a:pPr algn="l">
-                        <a:defRPr sz="850" b="0">
+                        <a:defRPr sz="950" b="0">
                           <a:solidFill>
                             <a:srgbClr val="212529"/>
                           </a:solidFill>
@@ -14270,7 +14270,7 @@
         <p:spPr>
           <a:xfrm>
             <a:off x="731520" y="365760"/>
-            <a:ext cx="10515600" cy="822960"/>
+            <a:ext cx="10789920" cy="822960"/>
           </a:xfrm>
           <a:prstGeom prst="rect">
             <a:avLst/>
@@ -14284,7 +14284,7 @@
           <a:lstStyle/>
           <a:p>
             <a:pPr>
-              <a:defRPr sz="2400" b="1">
+              <a:defRPr sz="2600" b="1">
                 <a:solidFill>
                   <a:srgbClr val="102C57"/>
                 </a:solidFill>
@@ -14292,7 +14292,7 @@
               </a:defRPr>
             </a:pPr>
             <a:r>
-              <a:t>Timeline of the Project -- 5-Phase Plan (Rubric: 1 Mark)</a:t>
+              <a:t>Timeline of the Project -- 5-Phase Plan</a:t>
             </a:r>
           </a:p>
         </p:txBody>
@@ -14307,7 +14307,7 @@
         </p:nvGraphicFramePr>
         <p:xfrm>
           <a:off x="731520" y="1280160"/>
-          <a:ext cx="10515600" cy="4754880"/>
+          <a:ext cx="10789920" cy="4754880"/>
         </p:xfrm>
         <a:graphic>
           <a:graphicData uri="http://schemas.openxmlformats.org/drawingml/2006/table">
@@ -14318,7 +14318,7 @@
               <a:tblGrid>
                 <a:gridCol w="1280160"/>
                 <a:gridCol w="1463040"/>
-                <a:gridCol w="5943600"/>
+                <a:gridCol w="6217920"/>
                 <a:gridCol w="1828800"/>
               </a:tblGrid>
               <a:tr h="792480">
@@ -14328,7 +14328,7 @@
                     <a:lstStyle/>
                     <a:p>
                       <a:pPr algn="l">
-                        <a:defRPr sz="1100" b="1">
+                        <a:defRPr sz="1200" b="1">
                           <a:solidFill>
                             <a:srgbClr val="FFFFFF"/>
                           </a:solidFill>
@@ -14352,7 +14352,7 @@
                     <a:lstStyle/>
                     <a:p>
                       <a:pPr algn="l">
-                        <a:defRPr sz="1100" b="1">
+                        <a:defRPr sz="1200" b="1">
                           <a:solidFill>
                             <a:srgbClr val="FFFFFF"/>
                           </a:solidFill>
@@ -14376,7 +14376,7 @@
                     <a:lstStyle/>
                     <a:p>
                       <a:pPr algn="l">
-                        <a:defRPr sz="1100" b="1">
+                        <a:defRPr sz="1200" b="1">
                           <a:solidFill>
                             <a:srgbClr val="FFFFFF"/>
                           </a:solidFill>
@@ -14400,7 +14400,7 @@
                     <a:lstStyle/>
                     <a:p>
                       <a:pPr algn="l">
-                        <a:defRPr sz="1100" b="1">
+                        <a:defRPr sz="1200" b="1">
                           <a:solidFill>
                             <a:srgbClr val="FFFFFF"/>
                           </a:solidFill>
@@ -14426,7 +14426,7 @@
                     <a:lstStyle/>
                     <a:p>
                       <a:pPr algn="l">
-                        <a:defRPr sz="1000" b="0">
+                        <a:defRPr sz="1100" b="0">
                           <a:solidFill>
                             <a:srgbClr val="212529"/>
                           </a:solidFill>
@@ -14450,7 +14450,7 @@
                     <a:lstStyle/>
                     <a:p>
                       <a:pPr algn="l">
-                        <a:defRPr sz="1000" b="0">
+                        <a:defRPr sz="1100" b="0">
                           <a:solidFill>
                             <a:srgbClr val="212529"/>
                           </a:solidFill>
@@ -14474,7 +14474,7 @@
                     <a:lstStyle/>
                     <a:p>
                       <a:pPr algn="l">
-                        <a:defRPr sz="1000" b="0">
+                        <a:defRPr sz="1100" b="0">
                           <a:solidFill>
                             <a:srgbClr val="212529"/>
                           </a:solidFill>
@@ -14498,7 +14498,7 @@
                     <a:lstStyle/>
                     <a:p>
                       <a:pPr algn="l">
-                        <a:defRPr sz="1000" b="0">
+                        <a:defRPr sz="1100" b="0">
                           <a:solidFill>
                             <a:srgbClr val="212529"/>
                           </a:solidFill>
@@ -14524,7 +14524,7 @@
                     <a:lstStyle/>
                     <a:p>
                       <a:pPr algn="l">
-                        <a:defRPr sz="1000" b="0">
+                        <a:defRPr sz="1100" b="0">
                           <a:solidFill>
                             <a:srgbClr val="212529"/>
                           </a:solidFill>
@@ -14544,7 +14544,7 @@
                     <a:lstStyle/>
                     <a:p>
                       <a:pPr algn="l">
-                        <a:defRPr sz="1000" b="0">
+                        <a:defRPr sz="1100" b="0">
                           <a:solidFill>
                             <a:srgbClr val="212529"/>
                           </a:solidFill>
@@ -14564,7 +14564,7 @@
                     <a:lstStyle/>
                     <a:p>
                       <a:pPr algn="l">
-                        <a:defRPr sz="1000" b="0">
+                        <a:defRPr sz="1100" b="0">
                           <a:solidFill>
                             <a:srgbClr val="212529"/>
                           </a:solidFill>
@@ -14584,7 +14584,7 @@
                     <a:lstStyle/>
                     <a:p>
                       <a:pPr algn="l">
-                        <a:defRPr sz="1000" b="0">
+                        <a:defRPr sz="1100" b="0">
                           <a:solidFill>
                             <a:srgbClr val="212529"/>
                           </a:solidFill>
@@ -14606,7 +14606,7 @@
                     <a:lstStyle/>
                     <a:p>
                       <a:pPr algn="l">
-                        <a:defRPr sz="1000" b="0">
+                        <a:defRPr sz="1100" b="0">
                           <a:solidFill>
                             <a:srgbClr val="212529"/>
                           </a:solidFill>
@@ -14630,7 +14630,7 @@
                     <a:lstStyle/>
                     <a:p>
                       <a:pPr algn="l">
-                        <a:defRPr sz="1000" b="0">
+                        <a:defRPr sz="1100" b="0">
                           <a:solidFill>
                             <a:srgbClr val="212529"/>
                           </a:solidFill>
@@ -14654,7 +14654,7 @@
                     <a:lstStyle/>
                     <a:p>
                       <a:pPr algn="l">
-                        <a:defRPr sz="1000" b="0">
+                        <a:defRPr sz="1100" b="0">
                           <a:solidFill>
                             <a:srgbClr val="212529"/>
                           </a:solidFill>
@@ -14678,7 +14678,7 @@
                     <a:lstStyle/>
                     <a:p>
                       <a:pPr algn="l">
-                        <a:defRPr sz="1000" b="0">
+                        <a:defRPr sz="1100" b="0">
                           <a:solidFill>
                             <a:srgbClr val="212529"/>
                           </a:solidFill>
@@ -14704,7 +14704,7 @@
                     <a:lstStyle/>
                     <a:p>
                       <a:pPr algn="l">
-                        <a:defRPr sz="1000" b="0">
+                        <a:defRPr sz="1100" b="0">
                           <a:solidFill>
                             <a:srgbClr val="212529"/>
                           </a:solidFill>
@@ -14724,7 +14724,7 @@
                     <a:lstStyle/>
                     <a:p>
                       <a:pPr algn="l">
-                        <a:defRPr sz="1000" b="0">
+                        <a:defRPr sz="1100" b="0">
                           <a:solidFill>
                             <a:srgbClr val="212529"/>
                           </a:solidFill>
@@ -14744,7 +14744,7 @@
                     <a:lstStyle/>
                     <a:p>
                       <a:pPr algn="l">
-                        <a:defRPr sz="1000" b="0">
+                        <a:defRPr sz="1100" b="0">
                           <a:solidFill>
                             <a:srgbClr val="212529"/>
                           </a:solidFill>
@@ -14764,7 +14764,7 @@
                     <a:lstStyle/>
                     <a:p>
                       <a:pPr algn="l">
-                        <a:defRPr sz="1000" b="0">
+                        <a:defRPr sz="1100" b="0">
                           <a:solidFill>
                             <a:srgbClr val="212529"/>
                           </a:solidFill>
@@ -14786,7 +14786,7 @@
                     <a:lstStyle/>
                     <a:p>
                       <a:pPr algn="l">
-                        <a:defRPr sz="1000" b="0">
+                        <a:defRPr sz="1100" b="0">
                           <a:solidFill>
                             <a:srgbClr val="212529"/>
                           </a:solidFill>
@@ -14810,7 +14810,7 @@
                     <a:lstStyle/>
                     <a:p>
                       <a:pPr algn="l">
-                        <a:defRPr sz="1000" b="0">
+                        <a:defRPr sz="1100" b="0">
                           <a:solidFill>
                             <a:srgbClr val="212529"/>
                           </a:solidFill>
@@ -14834,7 +14834,7 @@
                     <a:lstStyle/>
                     <a:p>
                       <a:pPr algn="l">
-                        <a:defRPr sz="1000" b="0">
+                        <a:defRPr sz="1100" b="0">
                           <a:solidFill>
                             <a:srgbClr val="212529"/>
                           </a:solidFill>
@@ -14858,7 +14858,7 @@
                     <a:lstStyle/>
                     <a:p>
                       <a:pPr algn="l">
-                        <a:defRPr sz="1000" b="0">
+                        <a:defRPr sz="1100" b="0">
                           <a:solidFill>
                             <a:srgbClr val="212529"/>
                           </a:solidFill>
@@ -14908,7 +14908,7 @@
         <p:spPr>
           <a:xfrm>
             <a:off x="731520" y="365760"/>
-            <a:ext cx="10515600" cy="822960"/>
+            <a:ext cx="10789920" cy="822960"/>
           </a:xfrm>
           <a:prstGeom prst="rect">
             <a:avLst/>
@@ -14922,7 +14922,7 @@
           <a:lstStyle/>
           <a:p>
             <a:pPr>
-              <a:defRPr sz="2400" b="1">
+              <a:defRPr sz="2600" b="1">
                 <a:solidFill>
                   <a:srgbClr val="102C57"/>
                 </a:solidFill>
@@ -14930,7 +14930,7 @@
               </a:defRPr>
             </a:pPr>
             <a:r>
-              <a:t>References (IEEE Format -- Rubric: 1 Mark)</a:t>
+              <a:t>References (IEEE Format)</a:t>
             </a:r>
           </a:p>
         </p:txBody>
@@ -14944,7 +14944,7 @@
         <p:spPr>
           <a:xfrm>
             <a:off x="731520" y="1188720"/>
-            <a:ext cx="10515600" cy="5120640"/>
+            <a:ext cx="10789920" cy="5120640"/>
           </a:xfrm>
           <a:prstGeom prst="rect">
             <a:avLst/>
@@ -14961,7 +14961,7 @@
               <a:spcAft>
                 <a:spcPts val="250"/>
               </a:spcAft>
-              <a:defRPr sz="850">
+              <a:defRPr sz="950">
                 <a:solidFill>
                   <a:srgbClr val="212529"/>
                 </a:solidFill>
@@ -14977,7 +14977,7 @@
               <a:spcAft>
                 <a:spcPts val="250"/>
               </a:spcAft>
-              <a:defRPr sz="850">
+              <a:defRPr sz="950">
                 <a:solidFill>
                   <a:srgbClr val="212529"/>
                 </a:solidFill>
@@ -14993,7 +14993,7 @@
               <a:spcAft>
                 <a:spcPts val="250"/>
               </a:spcAft>
-              <a:defRPr sz="850">
+              <a:defRPr sz="950">
                 <a:solidFill>
                   <a:srgbClr val="212529"/>
                 </a:solidFill>
@@ -15009,7 +15009,7 @@
               <a:spcAft>
                 <a:spcPts val="250"/>
               </a:spcAft>
-              <a:defRPr sz="850">
+              <a:defRPr sz="950">
                 <a:solidFill>
                   <a:srgbClr val="212529"/>
                 </a:solidFill>
@@ -15025,7 +15025,7 @@
               <a:spcAft>
                 <a:spcPts val="250"/>
               </a:spcAft>
-              <a:defRPr sz="850">
+              <a:defRPr sz="950">
                 <a:solidFill>
                   <a:srgbClr val="212529"/>
                 </a:solidFill>
@@ -15041,7 +15041,7 @@
               <a:spcAft>
                 <a:spcPts val="250"/>
               </a:spcAft>
-              <a:defRPr sz="850">
+              <a:defRPr sz="950">
                 <a:solidFill>
                   <a:srgbClr val="212529"/>
                 </a:solidFill>
@@ -15057,7 +15057,7 @@
               <a:spcAft>
                 <a:spcPts val="250"/>
               </a:spcAft>
-              <a:defRPr sz="850">
+              <a:defRPr sz="950">
                 <a:solidFill>
                   <a:srgbClr val="212529"/>
                 </a:solidFill>
@@ -15073,7 +15073,7 @@
               <a:spcAft>
                 <a:spcPts val="250"/>
               </a:spcAft>
-              <a:defRPr sz="850">
+              <a:defRPr sz="950">
                 <a:solidFill>
                   <a:srgbClr val="212529"/>
                 </a:solidFill>
@@ -15089,7 +15089,7 @@
               <a:spcAft>
                 <a:spcPts val="250"/>
               </a:spcAft>
-              <a:defRPr sz="850">
+              <a:defRPr sz="950">
                 <a:solidFill>
                   <a:srgbClr val="212529"/>
                 </a:solidFill>
@@ -15105,7 +15105,7 @@
               <a:spcAft>
                 <a:spcPts val="250"/>
               </a:spcAft>
-              <a:defRPr sz="850">
+              <a:defRPr sz="950">
                 <a:solidFill>
                   <a:srgbClr val="212529"/>
                 </a:solidFill>
@@ -15121,7 +15121,7 @@
               <a:spcAft>
                 <a:spcPts val="250"/>
               </a:spcAft>
-              <a:defRPr sz="850">
+              <a:defRPr sz="950">
                 <a:solidFill>
                   <a:srgbClr val="212529"/>
                 </a:solidFill>
@@ -15137,7 +15137,7 @@
               <a:spcAft>
                 <a:spcPts val="250"/>
               </a:spcAft>
-              <a:defRPr sz="850">
+              <a:defRPr sz="950">
                 <a:solidFill>
                   <a:srgbClr val="212529"/>
                 </a:solidFill>
@@ -15177,7 +15177,7 @@
         <p:spPr>
           <a:xfrm>
             <a:off x="731520" y="365760"/>
-            <a:ext cx="10515600" cy="822960"/>
+            <a:ext cx="10789920" cy="822960"/>
           </a:xfrm>
           <a:prstGeom prst="rect">
             <a:avLst/>
@@ -15191,7 +15191,7 @@
           <a:lstStyle/>
           <a:p>
             <a:pPr>
-              <a:defRPr sz="2400" b="1">
+              <a:defRPr sz="2600" b="1">
                 <a:solidFill>
                   <a:srgbClr val="102C57"/>
                 </a:solidFill>
@@ -15213,7 +15213,7 @@
         <p:spPr>
           <a:xfrm>
             <a:off x="731520" y="1188720"/>
-            <a:ext cx="10515600" cy="5120640"/>
+            <a:ext cx="10789920" cy="5120640"/>
           </a:xfrm>
           <a:prstGeom prst="rect">
             <a:avLst/>
@@ -15228,9 +15228,9 @@
           <a:p>
             <a:pPr>
               <a:spcAft>
-                <a:spcPts val="600"/>
-              </a:spcAft>
-              <a:defRPr sz="1400" b="1">
+                <a:spcPts val="800"/>
+              </a:spcAft>
+              <a:defRPr sz="1500" b="1">
                 <a:solidFill>
                   <a:srgbClr val="102C57"/>
                 </a:solidFill>
@@ -15244,11 +15244,11 @@
           <a:p>
             <a:pPr>
               <a:spcAft>
-                <a:spcPts val="400"/>
+                <a:spcPts val="500"/>
               </a:spcAft>
             </a:pPr>
             <a:r>
-              <a:rPr b="1" sz="1100">
+              <a:rPr b="1" sz="1250">
                 <a:solidFill>
                   <a:srgbClr val="28A745"/>
                 </a:solidFill>
@@ -15256,7 +15256,7 @@
               <a:t>[+] Source Reputation Database: </a:t>
             </a:r>
             <a:r>
-              <a:rPr sz="1100">
+              <a:rPr sz="1250">
                 <a:solidFill>
                   <a:srgbClr val="212529"/>
                 </a:solidFill>
@@ -15267,11 +15267,11 @@
           <a:p>
             <a:pPr>
               <a:spcAft>
-                <a:spcPts val="400"/>
+                <a:spcPts val="500"/>
               </a:spcAft>
             </a:pPr>
             <a:r>
-              <a:rPr b="1" sz="1100">
+              <a:rPr b="1" sz="1250">
                 <a:solidFill>
                   <a:srgbClr val="28A745"/>
                 </a:solidFill>
@@ -15279,7 +15279,7 @@
               <a:t>[+] Canonical Domain Resolver: </a:t>
             </a:r>
             <a:r>
-              <a:rPr sz="1100">
+              <a:rPr sz="1250">
                 <a:solidFill>
                   <a:srgbClr val="212529"/>
                 </a:solidFill>
@@ -15290,11 +15290,11 @@
           <a:p>
             <a:pPr>
               <a:spcAft>
-                <a:spcPts val="400"/>
+                <a:spcPts val="500"/>
               </a:spcAft>
             </a:pPr>
             <a:r>
-              <a:rPr b="1" sz="1100">
+              <a:rPr b="1" sz="1250">
                 <a:solidFill>
                   <a:srgbClr val="28A745"/>
                 </a:solidFill>
@@ -15302,7 +15302,7 @@
               <a:t>[+] Manipulation Detection Engine: </a:t>
             </a:r>
             <a:r>
-              <a:rPr sz="1100">
+              <a:rPr sz="1250">
                 <a:solidFill>
                   <a:srgbClr val="212529"/>
                 </a:solidFill>
@@ -15313,11 +15313,11 @@
           <a:p>
             <a:pPr>
               <a:spcAft>
-                <a:spcPts val="400"/>
+                <a:spcPts val="500"/>
               </a:spcAft>
             </a:pPr>
             <a:r>
-              <a:rPr b="1" sz="1100">
+              <a:rPr b="1" sz="1250">
                 <a:solidFill>
                   <a:srgbClr val="28A745"/>
                 </a:solidFill>
@@ -15325,7 +15325,7 @@
               <a:t>[+] Ground-Truth Testbed: </a:t>
             </a:r>
             <a:r>
-              <a:rPr sz="1100">
+              <a:rPr sz="1250">
                 <a:solidFill>
                   <a:srgbClr val="212529"/>
                 </a:solidFill>
@@ -15336,11 +15336,11 @@
           <a:p>
             <a:pPr>
               <a:spcAft>
-                <a:spcPts val="400"/>
+                <a:spcPts val="500"/>
               </a:spcAft>
             </a:pPr>
             <a:r>
-              <a:rPr b="1" sz="1100">
+              <a:rPr b="1" sz="1250">
                 <a:solidFill>
                   <a:srgbClr val="28A745"/>
                 </a:solidFill>
@@ -15348,7 +15348,7 @@
               <a:t>[+] Automated Quality Assurance: </a:t>
             </a:r>
             <a:r>
-              <a:rPr sz="1100">
+              <a:rPr sz="1250">
                 <a:solidFill>
                   <a:srgbClr val="212529"/>
                 </a:solidFill>
@@ -15359,11 +15359,11 @@
           <a:p>
             <a:pPr>
               <a:spcAft>
-                <a:spcPts val="400"/>
+                <a:spcPts val="500"/>
               </a:spcAft>
             </a:pPr>
             <a:r>
-              <a:rPr b="1" sz="1100">
+              <a:rPr b="1" sz="1250">
                 <a:solidFill>
                   <a:srgbClr val="28A745"/>
                 </a:solidFill>
@@ -15371,7 +15371,7 @@
               <a:t>[+] GitHub Repository: </a:t>
             </a:r>
             <a:r>
-              <a:rPr sz="1100">
+              <a:rPr sz="1250">
                 <a:solidFill>
                   <a:srgbClr val="212529"/>
                 </a:solidFill>
@@ -16779,7 +16779,7 @@
         <p:spPr>
           <a:xfrm>
             <a:off x="731520" y="365760"/>
-            <a:ext cx="10515600" cy="822960"/>
+            <a:ext cx="10789920" cy="822960"/>
           </a:xfrm>
           <a:prstGeom prst="rect">
             <a:avLst/>
@@ -16793,7 +16793,7 @@
           <a:lstStyle/>
           <a:p>
             <a:pPr>
-              <a:defRPr sz="2400" b="1">
+              <a:defRPr sz="2600" b="1">
                 <a:solidFill>
                   <a:srgbClr val="102C57"/>
                 </a:solidFill>
@@ -16801,7 +16801,7 @@
               </a:defRPr>
             </a:pPr>
             <a:r>
-              <a:t>Table of Contents (Review 2 Evaluation)</a:t>
+              <a:t>Table of Contents</a:t>
             </a:r>
           </a:p>
         </p:txBody>
@@ -16815,7 +16815,7 @@
         <p:spPr>
           <a:xfrm>
             <a:off x="731520" y="1188720"/>
-            <a:ext cx="10515600" cy="5029200"/>
+            <a:ext cx="10789920" cy="5120640"/>
           </a:xfrm>
           <a:prstGeom prst="rect">
             <a:avLst/>
@@ -16830,9 +16830,9 @@
           <a:p>
             <a:pPr>
               <a:spcAft>
-                <a:spcPts val="400"/>
-              </a:spcAft>
-              <a:defRPr sz="1200">
+                <a:spcPts val="350"/>
+              </a:spcAft>
+              <a:defRPr sz="1300">
                 <a:solidFill>
                   <a:srgbClr val="212529"/>
                 </a:solidFill>
@@ -16846,9 +16846,9 @@
           <a:p>
             <a:pPr>
               <a:spcAft>
-                <a:spcPts val="400"/>
-              </a:spcAft>
-              <a:defRPr sz="1200">
+                <a:spcPts val="350"/>
+              </a:spcAft>
+              <a:defRPr sz="1300">
                 <a:solidFill>
                   <a:srgbClr val="212529"/>
                 </a:solidFill>
@@ -16856,15 +16856,15 @@
               </a:defRPr>
             </a:pPr>
             <a:r>
-              <a:t>2. Abstract  --  Problem, Objectives &amp; Approach (Rubric: 2 Marks)</a:t>
+              <a:t>2. Abstract  --  Problem, Objectives &amp; Approach</a:t>
             </a:r>
           </a:p>
           <a:p>
             <a:pPr>
               <a:spcAft>
-                <a:spcPts val="400"/>
-              </a:spcAft>
-              <a:defRPr sz="1200">
+                <a:spcPts val="350"/>
+              </a:spcAft>
+              <a:defRPr sz="1300">
                 <a:solidFill>
                   <a:srgbClr val="212529"/>
                 </a:solidFill>
@@ -16872,15 +16872,15 @@
               </a:defRPr>
             </a:pPr>
             <a:r>
-              <a:t>3. Literature Survey (12 IEEE / Scopus Papers)  --  Critical Analysis &amp; Comparative Matrix (Rubric: 3 Marks)</a:t>
+              <a:t>3. Literature Survey (12 IEEE / Scopus Papers)  --  Critical Analysis &amp; Comparative Matrix</a:t>
             </a:r>
           </a:p>
           <a:p>
             <a:pPr>
               <a:spcAft>
-                <a:spcPts val="400"/>
-              </a:spcAft>
-              <a:defRPr sz="1200">
+                <a:spcPts val="350"/>
+              </a:spcAft>
+              <a:defRPr sz="1300">
                 <a:solidFill>
                   <a:srgbClr val="212529"/>
                 </a:solidFill>
@@ -16888,15 +16888,15 @@
               </a:defRPr>
             </a:pPr>
             <a:r>
-              <a:t>4. Project Objectives  --  SMART Outcome-Focused Goals (Rubric: 2 Marks)</a:t>
+              <a:t>4. Project Objectives  --  SMART Outcome-Focused Goals</a:t>
             </a:r>
           </a:p>
           <a:p>
             <a:pPr>
               <a:spcAft>
-                <a:spcPts val="400"/>
-              </a:spcAft>
-              <a:defRPr sz="1200">
+                <a:spcPts val="350"/>
+              </a:spcAft>
+              <a:defRPr sz="1300">
                 <a:solidFill>
                   <a:srgbClr val="212529"/>
                 </a:solidFill>
@@ -16904,15 +16904,15 @@
               </a:defRPr>
             </a:pPr>
             <a:r>
-              <a:t>5. Existing Methods and Drawbacks  --  Comparative Critique of Current Approaches (Rubric: 2 Marks)</a:t>
+              <a:t>5. Existing Methods and Drawbacks  --  Comparative Critique of Current Approaches</a:t>
             </a:r>
           </a:p>
           <a:p>
             <a:pPr>
               <a:spcAft>
-                <a:spcPts val="400"/>
-              </a:spcAft>
-              <a:defRPr sz="1200">
+                <a:spcPts val="350"/>
+              </a:spcAft>
+              <a:defRPr sz="1300">
                 <a:solidFill>
                   <a:srgbClr val="212529"/>
                 </a:solidFill>
@@ -16920,15 +16920,15 @@
               </a:defRPr>
             </a:pPr>
             <a:r>
-              <a:t>6. Proposed Method &amp; Feasibility Study  --  Cross-Source NLI &amp; Technical/Cost Feasibility (Rubric: 3 Marks)</a:t>
+              <a:t>6. Proposed Method &amp; Feasibility Study  --  Cross-Source NLI &amp; Technical / Cost Feasibility</a:t>
             </a:r>
           </a:p>
           <a:p>
             <a:pPr>
               <a:spcAft>
-                <a:spcPts val="400"/>
-              </a:spcAft>
-              <a:defRPr sz="1200">
+                <a:spcPts val="350"/>
+              </a:spcAft>
+              <a:defRPr sz="1300">
                 <a:solidFill>
                   <a:srgbClr val="212529"/>
                 </a:solidFill>
@@ -16936,15 +16936,15 @@
               </a:defRPr>
             </a:pPr>
             <a:r>
-              <a:t>7. System Architecture Diagram  --  3-Tier Dataflow &amp; Model Integration (Rubric: 3 Marks)</a:t>
+              <a:t>7. System Architecture Diagram  --  3-Tier Dataflow &amp; Model Integration</a:t>
             </a:r>
           </a:p>
           <a:p>
             <a:pPr>
               <a:spcAft>
-                <a:spcPts val="400"/>
-              </a:spcAft>
-              <a:defRPr sz="1200">
+                <a:spcPts val="350"/>
+              </a:spcAft>
+              <a:defRPr sz="1300">
                 <a:solidFill>
                   <a:srgbClr val="212529"/>
                 </a:solidFill>
@@ -16952,15 +16952,15 @@
               </a:defRPr>
             </a:pPr>
             <a:r>
-              <a:t>8. System Modules Breakdown  --  Modules 1 to 6 Functional Details (Rubric: 2 Marks)</a:t>
+              <a:t>8. System Modules Breakdown  --  Modules 1 to 6 Functional Details</a:t>
             </a:r>
           </a:p>
           <a:p>
             <a:pPr>
               <a:spcAft>
-                <a:spcPts val="400"/>
-              </a:spcAft>
-              <a:defRPr sz="1200">
+                <a:spcPts val="350"/>
+              </a:spcAft>
+              <a:defRPr sz="1300">
                 <a:solidFill>
                   <a:srgbClr val="212529"/>
                 </a:solidFill>
@@ -16968,15 +16968,15 @@
               </a:defRPr>
             </a:pPr>
             <a:r>
-              <a:t>9. Hardware and Software Details  --  Tech Stack, Dependencies &amp; Hardware Specs (Rubric: 1 Mark)</a:t>
+              <a:t>9. Hardware and Software Details  --  Tech Stack, Dependencies &amp; Hardware Specs</a:t>
             </a:r>
           </a:p>
           <a:p>
             <a:pPr>
               <a:spcAft>
-                <a:spcPts val="400"/>
-              </a:spcAft>
-              <a:defRPr sz="1200">
+                <a:spcPts val="350"/>
+              </a:spcAft>
+              <a:defRPr sz="1300">
                 <a:solidFill>
                   <a:srgbClr val="212529"/>
                 </a:solidFill>
@@ -16984,15 +16984,15 @@
               </a:defRPr>
             </a:pPr>
             <a:r>
-              <a:t>10. Timeline of the Project (Gantt Chart)  --  5-Phase Development Plan &amp; Milestones (Rubric: 1 Mark)</a:t>
+              <a:t>10. Timeline of the Project (Gantt Chart)  --  5-Phase Development Plan &amp; Milestones</a:t>
             </a:r>
           </a:p>
           <a:p>
             <a:pPr>
               <a:spcAft>
-                <a:spcPts val="400"/>
-              </a:spcAft>
-              <a:defRPr sz="1200">
+                <a:spcPts val="350"/>
+              </a:spcAft>
+              <a:defRPr sz="1300">
                 <a:solidFill>
                   <a:srgbClr val="212529"/>
                 </a:solidFill>
@@ -17000,15 +17000,15 @@
               </a:defRPr>
             </a:pPr>
             <a:r>
-              <a:t>11. References  --  IEEE Standard Citation Format (Rubric: 1 Mark)</a:t>
+              <a:t>11. References  --  IEEE Standard Citation Format</a:t>
             </a:r>
           </a:p>
           <a:p>
             <a:pPr>
               <a:spcAft>
-                <a:spcPts val="400"/>
-              </a:spcAft>
-              <a:defRPr sz="1200">
+                <a:spcPts val="350"/>
+              </a:spcAft>
+              <a:defRPr sz="1300">
                 <a:solidFill>
                   <a:srgbClr val="212529"/>
                 </a:solidFill>
@@ -17016,7 +17016,7 @@
               </a:defRPr>
             </a:pPr>
             <a:r>
-              <a:t>12. Review 2 Phase Deliverables &amp; Live Demo  --  MBFC SQLite Database &amp; Baseline Verification</a:t>
+              <a:t>12. Review 2 Deliverables &amp; Demonstration  --  MBFC SQLite Database &amp; Verification Testbed</a:t>
             </a:r>
           </a:p>
         </p:txBody>
@@ -17055,7 +17055,7 @@
         <p:spPr>
           <a:xfrm>
             <a:off x="731520" y="365760"/>
-            <a:ext cx="10515600" cy="822960"/>
+            <a:ext cx="10789920" cy="822960"/>
           </a:xfrm>
           <a:prstGeom prst="rect">
             <a:avLst/>
@@ -17069,7 +17069,7 @@
           <a:lstStyle/>
           <a:p>
             <a:pPr>
-              <a:defRPr sz="2400" b="1">
+              <a:defRPr sz="2600" b="1">
                 <a:solidFill>
                   <a:srgbClr val="102C57"/>
                 </a:solidFill>
@@ -17090,8 +17090,8 @@
         </p:nvSpPr>
         <p:spPr>
           <a:xfrm>
-            <a:off x="731520" y="1280160"/>
-            <a:ext cx="10515600" cy="5029200"/>
+            <a:off x="731520" y="1188720"/>
+            <a:ext cx="10789920" cy="5120640"/>
           </a:xfrm>
           <a:prstGeom prst="rect">
             <a:avLst/>
@@ -17106,9 +17106,9 @@
           <a:p>
             <a:pPr>
               <a:spcAft>
-                <a:spcPts val="1000"/>
-              </a:spcAft>
-              <a:defRPr sz="1600" b="1">
+                <a:spcPts val="1200"/>
+              </a:spcAft>
+              <a:defRPr sz="1800" b="1">
                 <a:solidFill>
                   <a:srgbClr val="102C57"/>
                 </a:solidFill>
@@ -17126,7 +17126,7 @@
               </a:spcAft>
             </a:pPr>
             <a:r>
-              <a:rPr b="1" sz="1400">
+              <a:rPr b="1" sz="1500">
                 <a:solidFill>
                   <a:srgbClr val="102C57"/>
                 </a:solidFill>
@@ -17134,7 +17134,7 @@
               <a:t>Organization: </a:t>
             </a:r>
             <a:r>
-              <a:rPr b="0" sz="1400">
+              <a:rPr b="0" sz="1500">
                 <a:solidFill>
                   <a:srgbClr val="212529"/>
                 </a:solidFill>
@@ -17149,7 +17149,7 @@
               </a:spcAft>
             </a:pPr>
             <a:r>
-              <a:rPr b="1" sz="1400">
+              <a:rPr b="1" sz="1500">
                 <a:solidFill>
                   <a:srgbClr val="102C57"/>
                 </a:solidFill>
@@ -17157,7 +17157,7 @@
               <a:t>Category: </a:t>
             </a:r>
             <a:r>
-              <a:rPr b="0" sz="1400">
+              <a:rPr b="0" sz="1500">
                 <a:solidFill>
                   <a:srgbClr val="212529"/>
                 </a:solidFill>
@@ -17172,7 +17172,7 @@
               </a:spcAft>
             </a:pPr>
             <a:r>
-              <a:rPr b="1" sz="1400">
+              <a:rPr b="1" sz="1500">
                 <a:solidFill>
                   <a:srgbClr val="102C57"/>
                 </a:solidFill>
@@ -17180,7 +17180,7 @@
               <a:t>Difficulty Level: </a:t>
             </a:r>
             <a:r>
-              <a:rPr b="0" sz="1400">
+              <a:rPr b="0" sz="1500">
                 <a:solidFill>
                   <a:srgbClr val="212529"/>
                 </a:solidFill>
@@ -17195,7 +17195,7 @@
               </a:spcAft>
             </a:pPr>
             <a:r>
-              <a:rPr b="1" sz="1400">
+              <a:rPr b="1" sz="1500">
                 <a:solidFill>
                   <a:srgbClr val="102C57"/>
                 </a:solidFill>
@@ -17203,7 +17203,7 @@
               <a:t>Problem Description: </a:t>
             </a:r>
             <a:r>
-              <a:rPr b="0" sz="1400">
+              <a:rPr b="0" sz="1500">
                 <a:solidFill>
                   <a:srgbClr val="212529"/>
                 </a:solidFill>
@@ -17218,7 +17218,7 @@
               </a:spcAft>
             </a:pPr>
             <a:r>
-              <a:rPr b="1" sz="1400">
+              <a:rPr b="1" sz="1500">
                 <a:solidFill>
                   <a:srgbClr val="3565A9"/>
                 </a:solidFill>
@@ -17226,7 +17226,7 @@
               <a:t>Official GitHub Repository: </a:t>
             </a:r>
             <a:r>
-              <a:rPr b="1" sz="1400">
+              <a:rPr b="1" sz="1500">
                 <a:solidFill>
                   <a:srgbClr val="28A745"/>
                 </a:solidFill>
@@ -17275,7 +17275,7 @@
         <p:spPr>
           <a:xfrm>
             <a:off x="731520" y="365760"/>
-            <a:ext cx="10515600" cy="822960"/>
+            <a:ext cx="10789920" cy="822960"/>
           </a:xfrm>
           <a:prstGeom prst="rect">
             <a:avLst/>
@@ -17289,7 +17289,7 @@
           <a:lstStyle/>
           <a:p>
             <a:pPr>
-              <a:defRPr sz="2400" b="1">
+              <a:defRPr sz="2600" b="1">
                 <a:solidFill>
                   <a:srgbClr val="102C57"/>
                 </a:solidFill>
@@ -17297,7 +17297,7 @@
               </a:defRPr>
             </a:pPr>
             <a:r>
-              <a:t>Abstract (Rubric: 2 Marks)</a:t>
+              <a:t>Abstract</a:t>
             </a:r>
           </a:p>
         </p:txBody>
@@ -17310,8 +17310,8 @@
         </p:nvSpPr>
         <p:spPr>
           <a:xfrm>
-            <a:off x="731520" y="1280160"/>
-            <a:ext cx="10515600" cy="5029200"/>
+            <a:off x="731520" y="1188720"/>
+            <a:ext cx="10789920" cy="5120640"/>
           </a:xfrm>
           <a:prstGeom prst="rect">
             <a:avLst/>
@@ -17330,7 +17330,7 @@
               </a:spcAft>
             </a:pPr>
             <a:r>
-              <a:rPr b="1" sz="1300">
+              <a:rPr b="1" sz="1400">
                 <a:solidFill>
                   <a:srgbClr val="102C57"/>
                 </a:solidFill>
@@ -17338,7 +17338,7 @@
               <a:t>Problem Context: </a:t>
             </a:r>
             <a:r>
-              <a:rPr sz="1300">
+              <a:rPr sz="1400">
                 <a:solidFill>
                   <a:srgbClr val="212529"/>
                 </a:solidFill>
@@ -17353,7 +17353,7 @@
               </a:spcAft>
             </a:pPr>
             <a:r>
-              <a:rPr b="1" sz="1300">
+              <a:rPr b="1" sz="1400">
                 <a:solidFill>
                   <a:srgbClr val="102C57"/>
                 </a:solidFill>
@@ -17361,7 +17361,7 @@
               <a:t>Core Project Objective: </a:t>
             </a:r>
             <a:r>
-              <a:rPr sz="1300">
+              <a:rPr sz="1400">
                 <a:solidFill>
                   <a:srgbClr val="212529"/>
                 </a:solidFill>
@@ -17376,7 +17376,7 @@
               </a:spcAft>
             </a:pPr>
             <a:r>
-              <a:rPr b="1" sz="1300">
+              <a:rPr b="1" sz="1400">
                 <a:solidFill>
                   <a:srgbClr val="102C57"/>
                 </a:solidFill>
@@ -17384,7 +17384,7 @@
               <a:t>Proposed Approach &amp; Workflow: </a:t>
             </a:r>
             <a:r>
-              <a:rPr sz="1300">
+              <a:rPr sz="1400">
                 <a:solidFill>
                   <a:srgbClr val="212529"/>
                 </a:solidFill>
@@ -17399,7 +17399,7 @@
               </a:spcAft>
             </a:pPr>
             <a:r>
-              <a:rPr b="1" sz="1300">
+              <a:rPr b="1" sz="1400">
                 <a:solidFill>
                   <a:srgbClr val="102C57"/>
                 </a:solidFill>
@@ -17407,7 +17407,7 @@
               <a:t>Deliverables &amp; Impact: </a:t>
             </a:r>
             <a:r>
-              <a:rPr sz="1300">
+              <a:rPr sz="1400">
                 <a:solidFill>
                   <a:srgbClr val="212529"/>
                 </a:solidFill>
@@ -17456,7 +17456,7 @@
         <p:spPr>
           <a:xfrm>
             <a:off x="731520" y="365760"/>
-            <a:ext cx="10515600" cy="822960"/>
+            <a:ext cx="10789920" cy="822960"/>
           </a:xfrm>
           <a:prstGeom prst="rect">
             <a:avLst/>
@@ -17470,7 +17470,7 @@
           <a:lstStyle/>
           <a:p>
             <a:pPr>
-              <a:defRPr sz="2400" b="1">
+              <a:defRPr sz="2600" b="1">
                 <a:solidFill>
                   <a:srgbClr val="102C57"/>
                 </a:solidFill>
@@ -17478,7 +17478,7 @@
               </a:defRPr>
             </a:pPr>
             <a:r>
-              <a:t>Literature Survey -- Part 1 (Rubric: 3 Marks)</a:t>
+              <a:t>Literature Survey -- Part 1</a:t>
             </a:r>
           </a:p>
         </p:txBody>
@@ -17515,7 +17515,7 @@
                     <a:lstStyle/>
                     <a:p>
                       <a:pPr algn="l">
-                        <a:defRPr sz="1000" b="1">
+                        <a:defRPr sz="1100" b="1">
                           <a:solidFill>
                             <a:srgbClr val="FFFFFF"/>
                           </a:solidFill>
@@ -17539,7 +17539,7 @@
                     <a:lstStyle/>
                     <a:p>
                       <a:pPr algn="l">
-                        <a:defRPr sz="1000" b="1">
+                        <a:defRPr sz="1100" b="1">
                           <a:solidFill>
                             <a:srgbClr val="FFFFFF"/>
                           </a:solidFill>
@@ -17563,7 +17563,7 @@
                     <a:lstStyle/>
                     <a:p>
                       <a:pPr algn="l">
-                        <a:defRPr sz="1000" b="1">
+                        <a:defRPr sz="1100" b="1">
                           <a:solidFill>
                             <a:srgbClr val="FFFFFF"/>
                           </a:solidFill>
@@ -17587,7 +17587,7 @@
                     <a:lstStyle/>
                     <a:p>
                       <a:pPr algn="l">
-                        <a:defRPr sz="1000" b="1">
+                        <a:defRPr sz="1100" b="1">
                           <a:solidFill>
                             <a:srgbClr val="FFFFFF"/>
                           </a:solidFill>
@@ -17611,7 +17611,7 @@
                     <a:lstStyle/>
                     <a:p>
                       <a:pPr algn="l">
-                        <a:defRPr sz="1000" b="1">
+                        <a:defRPr sz="1100" b="1">
                           <a:solidFill>
                             <a:srgbClr val="FFFFFF"/>
                           </a:solidFill>
@@ -17637,7 +17637,7 @@
                     <a:lstStyle/>
                     <a:p>
                       <a:pPr algn="l">
-                        <a:defRPr sz="900" b="0">
+                        <a:defRPr sz="1000" b="0">
                           <a:solidFill>
                             <a:srgbClr val="212529"/>
                           </a:solidFill>
@@ -17666,7 +17666,7 @@
                     <a:lstStyle/>
                     <a:p>
                       <a:pPr algn="l">
-                        <a:defRPr sz="900" b="0">
+                        <a:defRPr sz="1000" b="0">
                           <a:solidFill>
                             <a:srgbClr val="212529"/>
                           </a:solidFill>
@@ -17690,7 +17690,7 @@
                     <a:lstStyle/>
                     <a:p>
                       <a:pPr algn="l">
-                        <a:defRPr sz="900" b="0">
+                        <a:defRPr sz="1000" b="0">
                           <a:solidFill>
                             <a:srgbClr val="212529"/>
                           </a:solidFill>
@@ -17714,7 +17714,7 @@
                     <a:lstStyle/>
                     <a:p>
                       <a:pPr algn="l">
-                        <a:defRPr sz="900" b="0">
+                        <a:defRPr sz="1000" b="0">
                           <a:solidFill>
                             <a:srgbClr val="212529"/>
                           </a:solidFill>
@@ -17738,7 +17738,7 @@
                     <a:lstStyle/>
                     <a:p>
                       <a:pPr algn="l">
-                        <a:defRPr sz="900" b="0">
+                        <a:defRPr sz="1000" b="0">
                           <a:solidFill>
                             <a:srgbClr val="212529"/>
                           </a:solidFill>
@@ -17764,7 +17764,7 @@
                     <a:lstStyle/>
                     <a:p>
                       <a:pPr algn="l">
-                        <a:defRPr sz="900" b="0">
+                        <a:defRPr sz="1000" b="0">
                           <a:solidFill>
                             <a:srgbClr val="212529"/>
                           </a:solidFill>
@@ -17789,7 +17789,7 @@
                     <a:lstStyle/>
                     <a:p>
                       <a:pPr algn="l">
-                        <a:defRPr sz="900" b="0">
+                        <a:defRPr sz="1000" b="0">
                           <a:solidFill>
                             <a:srgbClr val="212529"/>
                           </a:solidFill>
@@ -17809,7 +17809,7 @@
                     <a:lstStyle/>
                     <a:p>
                       <a:pPr algn="l">
-                        <a:defRPr sz="900" b="0">
+                        <a:defRPr sz="1000" b="0">
                           <a:solidFill>
                             <a:srgbClr val="212529"/>
                           </a:solidFill>
@@ -17829,7 +17829,7 @@
                     <a:lstStyle/>
                     <a:p>
                       <a:pPr algn="l">
-                        <a:defRPr sz="900" b="0">
+                        <a:defRPr sz="1000" b="0">
                           <a:solidFill>
                             <a:srgbClr val="212529"/>
                           </a:solidFill>
@@ -17849,7 +17849,7 @@
                     <a:lstStyle/>
                     <a:p>
                       <a:pPr algn="l">
-                        <a:defRPr sz="900" b="0">
+                        <a:defRPr sz="1000" b="0">
                           <a:solidFill>
                             <a:srgbClr val="212529"/>
                           </a:solidFill>
@@ -17871,7 +17871,7 @@
                     <a:lstStyle/>
                     <a:p>
                       <a:pPr algn="l">
-                        <a:defRPr sz="900" b="0">
+                        <a:defRPr sz="1000" b="0">
                           <a:solidFill>
                             <a:srgbClr val="212529"/>
                           </a:solidFill>
@@ -17900,7 +17900,7 @@
                     <a:lstStyle/>
                     <a:p>
                       <a:pPr algn="l">
-                        <a:defRPr sz="900" b="0">
+                        <a:defRPr sz="1000" b="0">
                           <a:solidFill>
                             <a:srgbClr val="212529"/>
                           </a:solidFill>
@@ -17924,7 +17924,7 @@
                     <a:lstStyle/>
                     <a:p>
                       <a:pPr algn="l">
-                        <a:defRPr sz="900" b="0">
+                        <a:defRPr sz="1000" b="0">
                           <a:solidFill>
                             <a:srgbClr val="212529"/>
                           </a:solidFill>
@@ -17948,7 +17948,7 @@
                     <a:lstStyle/>
                     <a:p>
                       <a:pPr algn="l">
-                        <a:defRPr sz="900" b="0">
+                        <a:defRPr sz="1000" b="0">
                           <a:solidFill>
                             <a:srgbClr val="212529"/>
                           </a:solidFill>
@@ -17972,7 +17972,7 @@
                     <a:lstStyle/>
                     <a:p>
                       <a:pPr algn="l">
-                        <a:defRPr sz="900" b="0">
+                        <a:defRPr sz="1000" b="0">
                           <a:solidFill>
                             <a:srgbClr val="212529"/>
                           </a:solidFill>
@@ -17998,7 +17998,7 @@
                     <a:lstStyle/>
                     <a:p>
                       <a:pPr algn="l">
-                        <a:defRPr sz="900" b="0">
+                        <a:defRPr sz="1000" b="0">
                           <a:solidFill>
                             <a:srgbClr val="212529"/>
                           </a:solidFill>
@@ -18023,7 +18023,7 @@
                     <a:lstStyle/>
                     <a:p>
                       <a:pPr algn="l">
-                        <a:defRPr sz="900" b="0">
+                        <a:defRPr sz="1000" b="0">
                           <a:solidFill>
                             <a:srgbClr val="212529"/>
                           </a:solidFill>
@@ -18043,7 +18043,7 @@
                     <a:lstStyle/>
                     <a:p>
                       <a:pPr algn="l">
-                        <a:defRPr sz="900" b="0">
+                        <a:defRPr sz="1000" b="0">
                           <a:solidFill>
                             <a:srgbClr val="212529"/>
                           </a:solidFill>
@@ -18063,7 +18063,7 @@
                     <a:lstStyle/>
                     <a:p>
                       <a:pPr algn="l">
-                        <a:defRPr sz="900" b="0">
+                        <a:defRPr sz="1000" b="0">
                           <a:solidFill>
                             <a:srgbClr val="212529"/>
                           </a:solidFill>
@@ -18083,7 +18083,7 @@
                     <a:lstStyle/>
                     <a:p>
                       <a:pPr algn="l">
-                        <a:defRPr sz="900" b="0">
+                        <a:defRPr sz="1000" b="0">
                           <a:solidFill>
                             <a:srgbClr val="212529"/>
                           </a:solidFill>
@@ -18105,7 +18105,7 @@
                     <a:lstStyle/>
                     <a:p>
                       <a:pPr algn="l">
-                        <a:defRPr sz="900" b="0">
+                        <a:defRPr sz="1000" b="0">
                           <a:solidFill>
                             <a:srgbClr val="212529"/>
                           </a:solidFill>
@@ -18134,7 +18134,7 @@
                     <a:lstStyle/>
                     <a:p>
                       <a:pPr algn="l">
-                        <a:defRPr sz="900" b="0">
+                        <a:defRPr sz="1000" b="0">
                           <a:solidFill>
                             <a:srgbClr val="212529"/>
                           </a:solidFill>
@@ -18158,7 +18158,7 @@
                     <a:lstStyle/>
                     <a:p>
                       <a:pPr algn="l">
-                        <a:defRPr sz="900" b="0">
+                        <a:defRPr sz="1000" b="0">
                           <a:solidFill>
                             <a:srgbClr val="212529"/>
                           </a:solidFill>
@@ -18182,7 +18182,7 @@
                     <a:lstStyle/>
                     <a:p>
                       <a:pPr algn="l">
-                        <a:defRPr sz="900" b="0">
+                        <a:defRPr sz="1000" b="0">
                           <a:solidFill>
                             <a:srgbClr val="212529"/>
                           </a:solidFill>
@@ -18206,7 +18206,7 @@
                     <a:lstStyle/>
                     <a:p>
                       <a:pPr algn="l">
-                        <a:defRPr sz="900" b="0">
+                        <a:defRPr sz="1000" b="0">
                           <a:solidFill>
                             <a:srgbClr val="212529"/>
                           </a:solidFill>
@@ -18232,7 +18232,7 @@
                     <a:lstStyle/>
                     <a:p>
                       <a:pPr algn="l">
-                        <a:defRPr sz="900" b="0">
+                        <a:defRPr sz="1000" b="0">
                           <a:solidFill>
                             <a:srgbClr val="212529"/>
                           </a:solidFill>
@@ -18257,7 +18257,7 @@
                     <a:lstStyle/>
                     <a:p>
                       <a:pPr algn="l">
-                        <a:defRPr sz="900" b="0">
+                        <a:defRPr sz="1000" b="0">
                           <a:solidFill>
                             <a:srgbClr val="212529"/>
                           </a:solidFill>
@@ -18277,7 +18277,7 @@
                     <a:lstStyle/>
                     <a:p>
                       <a:pPr algn="l">
-                        <a:defRPr sz="900" b="0">
+                        <a:defRPr sz="1000" b="0">
                           <a:solidFill>
                             <a:srgbClr val="212529"/>
                           </a:solidFill>
@@ -18297,7 +18297,7 @@
                     <a:lstStyle/>
                     <a:p>
                       <a:pPr algn="l">
-                        <a:defRPr sz="900" b="0">
+                        <a:defRPr sz="1000" b="0">
                           <a:solidFill>
                             <a:srgbClr val="212529"/>
                           </a:solidFill>
@@ -18317,7 +18317,7 @@
                     <a:lstStyle/>
                     <a:p>
                       <a:pPr algn="l">
-                        <a:defRPr sz="900" b="0">
+                        <a:defRPr sz="1000" b="0">
                           <a:solidFill>
                             <a:srgbClr val="212529"/>
                           </a:solidFill>
@@ -18375,7 +18375,7 @@
         <p:spPr>
           <a:xfrm>
             <a:off x="731520" y="365760"/>
-            <a:ext cx="10515600" cy="822960"/>
+            <a:ext cx="10789920" cy="822960"/>
           </a:xfrm>
           <a:prstGeom prst="rect">
             <a:avLst/>
@@ -18389,7 +18389,7 @@
           <a:lstStyle/>
           <a:p>
             <a:pPr>
-              <a:defRPr sz="2400" b="1">
+              <a:defRPr sz="2600" b="1">
                 <a:solidFill>
                   <a:srgbClr val="102C57"/>
                 </a:solidFill>
@@ -18397,7 +18397,7 @@
               </a:defRPr>
             </a:pPr>
             <a:r>
-              <a:t>Literature Survey -- Part 2 (Rubric: 3 Marks)</a:t>
+              <a:t>Literature Survey -- Part 2</a:t>
             </a:r>
           </a:p>
         </p:txBody>
@@ -18434,7 +18434,7 @@
                     <a:lstStyle/>
                     <a:p>
                       <a:pPr algn="l">
-                        <a:defRPr sz="1000" b="1">
+                        <a:defRPr sz="1100" b="1">
                           <a:solidFill>
                             <a:srgbClr val="FFFFFF"/>
                           </a:solidFill>
@@ -18458,7 +18458,7 @@
                     <a:lstStyle/>
                     <a:p>
                       <a:pPr algn="l">
-                        <a:defRPr sz="1000" b="1">
+                        <a:defRPr sz="1100" b="1">
                           <a:solidFill>
                             <a:srgbClr val="FFFFFF"/>
                           </a:solidFill>
@@ -18482,7 +18482,7 @@
                     <a:lstStyle/>
                     <a:p>
                       <a:pPr algn="l">
-                        <a:defRPr sz="1000" b="1">
+                        <a:defRPr sz="1100" b="1">
                           <a:solidFill>
                             <a:srgbClr val="FFFFFF"/>
                           </a:solidFill>
@@ -18506,7 +18506,7 @@
                     <a:lstStyle/>
                     <a:p>
                       <a:pPr algn="l">
-                        <a:defRPr sz="1000" b="1">
+                        <a:defRPr sz="1100" b="1">
                           <a:solidFill>
                             <a:srgbClr val="FFFFFF"/>
                           </a:solidFill>
@@ -18530,7 +18530,7 @@
                     <a:lstStyle/>
                     <a:p>
                       <a:pPr algn="l">
-                        <a:defRPr sz="1000" b="1">
+                        <a:defRPr sz="1100" b="1">
                           <a:solidFill>
                             <a:srgbClr val="FFFFFF"/>
                           </a:solidFill>
@@ -18556,7 +18556,7 @@
                     <a:lstStyle/>
                     <a:p>
                       <a:pPr algn="l">
-                        <a:defRPr sz="900" b="0">
+                        <a:defRPr sz="1000" b="0">
                           <a:solidFill>
                             <a:srgbClr val="212529"/>
                           </a:solidFill>
@@ -18585,7 +18585,7 @@
                     <a:lstStyle/>
                     <a:p>
                       <a:pPr algn="l">
-                        <a:defRPr sz="900" b="0">
+                        <a:defRPr sz="1000" b="0">
                           <a:solidFill>
                             <a:srgbClr val="212529"/>
                           </a:solidFill>
@@ -18609,7 +18609,7 @@
                     <a:lstStyle/>
                     <a:p>
                       <a:pPr algn="l">
-                        <a:defRPr sz="900" b="0">
+                        <a:defRPr sz="1000" b="0">
                           <a:solidFill>
                             <a:srgbClr val="212529"/>
                           </a:solidFill>
@@ -18633,7 +18633,7 @@
                     <a:lstStyle/>
                     <a:p>
                       <a:pPr algn="l">
-                        <a:defRPr sz="900" b="0">
+                        <a:defRPr sz="1000" b="0">
                           <a:solidFill>
                             <a:srgbClr val="212529"/>
                           </a:solidFill>
@@ -18657,7 +18657,7 @@
                     <a:lstStyle/>
                     <a:p>
                       <a:pPr algn="l">
-                        <a:defRPr sz="900" b="0">
+                        <a:defRPr sz="1000" b="0">
                           <a:solidFill>
                             <a:srgbClr val="212529"/>
                           </a:solidFill>
@@ -18683,7 +18683,7 @@
                     <a:lstStyle/>
                     <a:p>
                       <a:pPr algn="l">
-                        <a:defRPr sz="900" b="0">
+                        <a:defRPr sz="1000" b="0">
                           <a:solidFill>
                             <a:srgbClr val="212529"/>
                           </a:solidFill>
@@ -18708,7 +18708,7 @@
                     <a:lstStyle/>
                     <a:p>
                       <a:pPr algn="l">
-                        <a:defRPr sz="900" b="0">
+                        <a:defRPr sz="1000" b="0">
                           <a:solidFill>
                             <a:srgbClr val="212529"/>
                           </a:solidFill>
@@ -18728,7 +18728,7 @@
                     <a:lstStyle/>
                     <a:p>
                       <a:pPr algn="l">
-                        <a:defRPr sz="900" b="0">
+                        <a:defRPr sz="1000" b="0">
                           <a:solidFill>
                             <a:srgbClr val="212529"/>
                           </a:solidFill>
@@ -18748,7 +18748,7 @@
                     <a:lstStyle/>
                     <a:p>
                       <a:pPr algn="l">
-                        <a:defRPr sz="900" b="0">
+                        <a:defRPr sz="1000" b="0">
                           <a:solidFill>
                             <a:srgbClr val="212529"/>
                           </a:solidFill>
@@ -18768,7 +18768,7 @@
                     <a:lstStyle/>
                     <a:p>
                       <a:pPr algn="l">
-                        <a:defRPr sz="900" b="0">
+                        <a:defRPr sz="1000" b="0">
                           <a:solidFill>
                             <a:srgbClr val="212529"/>
                           </a:solidFill>
@@ -18790,7 +18790,7 @@
                     <a:lstStyle/>
                     <a:p>
                       <a:pPr algn="l">
-                        <a:defRPr sz="900" b="0">
+                        <a:defRPr sz="1000" b="0">
                           <a:solidFill>
                             <a:srgbClr val="212529"/>
                           </a:solidFill>
@@ -18819,7 +18819,7 @@
                     <a:lstStyle/>
                     <a:p>
                       <a:pPr algn="l">
-                        <a:defRPr sz="900" b="0">
+                        <a:defRPr sz="1000" b="0">
                           <a:solidFill>
                             <a:srgbClr val="212529"/>
                           </a:solidFill>
@@ -18843,7 +18843,7 @@
                     <a:lstStyle/>
                     <a:p>
                       <a:pPr algn="l">
-                        <a:defRPr sz="900" b="0">
+                        <a:defRPr sz="1000" b="0">
                           <a:solidFill>
                             <a:srgbClr val="212529"/>
                           </a:solidFill>
@@ -18867,7 +18867,7 @@
                     <a:lstStyle/>
                     <a:p>
                       <a:pPr algn="l">
-                        <a:defRPr sz="900" b="0">
+                        <a:defRPr sz="1000" b="0">
                           <a:solidFill>
                             <a:srgbClr val="212529"/>
                           </a:solidFill>
@@ -18891,7 +18891,7 @@
                     <a:lstStyle/>
                     <a:p>
                       <a:pPr algn="l">
-                        <a:defRPr sz="900" b="0">
+                        <a:defRPr sz="1000" b="0">
                           <a:solidFill>
                             <a:srgbClr val="212529"/>
                           </a:solidFill>
@@ -18917,7 +18917,7 @@
                     <a:lstStyle/>
                     <a:p>
                       <a:pPr algn="l">
-                        <a:defRPr sz="900" b="0">
+                        <a:defRPr sz="1000" b="0">
                           <a:solidFill>
                             <a:srgbClr val="212529"/>
                           </a:solidFill>
@@ -18942,7 +18942,7 @@
                     <a:lstStyle/>
                     <a:p>
                       <a:pPr algn="l">
-                        <a:defRPr sz="900" b="0">
+                        <a:defRPr sz="1000" b="0">
                           <a:solidFill>
                             <a:srgbClr val="212529"/>
                           </a:solidFill>
@@ -18962,7 +18962,7 @@
                     <a:lstStyle/>
                     <a:p>
                       <a:pPr algn="l">
-                        <a:defRPr sz="900" b="0">
+                        <a:defRPr sz="1000" b="0">
                           <a:solidFill>
                             <a:srgbClr val="212529"/>
                           </a:solidFill>
@@ -18982,7 +18982,7 @@
                     <a:lstStyle/>
                     <a:p>
                       <a:pPr algn="l">
-                        <a:defRPr sz="900" b="0">
+                        <a:defRPr sz="1000" b="0">
                           <a:solidFill>
                             <a:srgbClr val="212529"/>
                           </a:solidFill>
@@ -19002,7 +19002,7 @@
                     <a:lstStyle/>
                     <a:p>
                       <a:pPr algn="l">
-                        <a:defRPr sz="900" b="0">
+                        <a:defRPr sz="1000" b="0">
                           <a:solidFill>
                             <a:srgbClr val="212529"/>
                           </a:solidFill>
@@ -19024,7 +19024,7 @@
                     <a:lstStyle/>
                     <a:p>
                       <a:pPr algn="l">
-                        <a:defRPr sz="900" b="0">
+                        <a:defRPr sz="1000" b="0">
                           <a:solidFill>
                             <a:srgbClr val="212529"/>
                           </a:solidFill>
@@ -19053,7 +19053,7 @@
                     <a:lstStyle/>
                     <a:p>
                       <a:pPr algn="l">
-                        <a:defRPr sz="900" b="0">
+                        <a:defRPr sz="1000" b="0">
                           <a:solidFill>
                             <a:srgbClr val="212529"/>
                           </a:solidFill>
@@ -19077,7 +19077,7 @@
                     <a:lstStyle/>
                     <a:p>
                       <a:pPr algn="l">
-                        <a:defRPr sz="900" b="0">
+                        <a:defRPr sz="1000" b="0">
                           <a:solidFill>
                             <a:srgbClr val="212529"/>
                           </a:solidFill>
@@ -19101,7 +19101,7 @@
                     <a:lstStyle/>
                     <a:p>
                       <a:pPr algn="l">
-                        <a:defRPr sz="900" b="0">
+                        <a:defRPr sz="1000" b="0">
                           <a:solidFill>
                             <a:srgbClr val="212529"/>
                           </a:solidFill>
@@ -19125,7 +19125,7 @@
                     <a:lstStyle/>
                     <a:p>
                       <a:pPr algn="l">
-                        <a:defRPr sz="900" b="0">
+                        <a:defRPr sz="1000" b="0">
                           <a:solidFill>
                             <a:srgbClr val="212529"/>
                           </a:solidFill>
@@ -19151,7 +19151,7 @@
                     <a:lstStyle/>
                     <a:p>
                       <a:pPr algn="l">
-                        <a:defRPr sz="900" b="0">
+                        <a:defRPr sz="1000" b="0">
                           <a:solidFill>
                             <a:srgbClr val="212529"/>
                           </a:solidFill>
@@ -19176,7 +19176,7 @@
                     <a:lstStyle/>
                     <a:p>
                       <a:pPr algn="l">
-                        <a:defRPr sz="900" b="0">
+                        <a:defRPr sz="1000" b="0">
                           <a:solidFill>
                             <a:srgbClr val="212529"/>
                           </a:solidFill>
@@ -19196,7 +19196,7 @@
                     <a:lstStyle/>
                     <a:p>
                       <a:pPr algn="l">
-                        <a:defRPr sz="900" b="0">
+                        <a:defRPr sz="1000" b="0">
                           <a:solidFill>
                             <a:srgbClr val="212529"/>
                           </a:solidFill>
@@ -19216,7 +19216,7 @@
                     <a:lstStyle/>
                     <a:p>
                       <a:pPr algn="l">
-                        <a:defRPr sz="900" b="0">
+                        <a:defRPr sz="1000" b="0">
                           <a:solidFill>
                             <a:srgbClr val="212529"/>
                           </a:solidFill>
@@ -19236,7 +19236,7 @@
                     <a:lstStyle/>
                     <a:p>
                       <a:pPr algn="l">
-                        <a:defRPr sz="900" b="0">
+                        <a:defRPr sz="1000" b="0">
                           <a:solidFill>
                             <a:srgbClr val="212529"/>
                           </a:solidFill>
@@ -19294,7 +19294,7 @@
         <p:spPr>
           <a:xfrm>
             <a:off x="731520" y="365760"/>
-            <a:ext cx="10515600" cy="822960"/>
+            <a:ext cx="10789920" cy="822960"/>
           </a:xfrm>
           <a:prstGeom prst="rect">
             <a:avLst/>
@@ -19308,7 +19308,7 @@
           <a:lstStyle/>
           <a:p>
             <a:pPr>
-              <a:defRPr sz="2400" b="1">
+              <a:defRPr sz="2600" b="1">
                 <a:solidFill>
                   <a:srgbClr val="102C57"/>
                 </a:solidFill>
@@ -19316,7 +19316,7 @@
               </a:defRPr>
             </a:pPr>
             <a:r>
-              <a:t>Project Objectives (Rubric: 2 Marks)</a:t>
+              <a:t>Project Objectives</a:t>
             </a:r>
           </a:p>
         </p:txBody>
@@ -19330,7 +19330,7 @@
         <p:spPr>
           <a:xfrm>
             <a:off x="731520" y="1188720"/>
-            <a:ext cx="10515600" cy="5120640"/>
+            <a:ext cx="10789920" cy="5120640"/>
           </a:xfrm>
           <a:prstGeom prst="rect">
             <a:avLst/>
@@ -19345,11 +19345,11 @@
           <a:p>
             <a:pPr>
               <a:spcAft>
-                <a:spcPts val="600"/>
+                <a:spcPts val="700"/>
               </a:spcAft>
             </a:pPr>
             <a:r>
-              <a:rPr b="1" sz="1100">
+              <a:rPr b="1" sz="1250">
                 <a:solidFill>
                   <a:srgbClr val="102C57"/>
                 </a:solidFill>
@@ -19357,7 +19357,7 @@
               <a:t>Objective 1 -- Automated Factual Claim Extraction: </a:t>
             </a:r>
             <a:r>
-              <a:rPr sz="1100">
+              <a:rPr sz="1250">
                 <a:solidFill>
                   <a:srgbClr val="212529"/>
                 </a:solidFill>
@@ -19368,11 +19368,11 @@
           <a:p>
             <a:pPr>
               <a:spcAft>
-                <a:spcPts val="600"/>
+                <a:spcPts val="700"/>
               </a:spcAft>
             </a:pPr>
             <a:r>
-              <a:rPr b="1" sz="1100">
+              <a:rPr b="1" sz="1250">
                 <a:solidFill>
                   <a:srgbClr val="102C57"/>
                 </a:solidFill>
@@ -19380,7 +19380,7 @@
               <a:t>Objective 2 -- High-Speed Source Reputation Profiling: </a:t>
             </a:r>
             <a:r>
-              <a:rPr sz="1100">
+              <a:rPr sz="1250">
                 <a:solidFill>
                   <a:srgbClr val="212529"/>
                 </a:solidFill>
@@ -19391,11 +19391,11 @@
           <a:p>
             <a:pPr>
               <a:spcAft>
-                <a:spcPts val="600"/>
+                <a:spcPts val="700"/>
               </a:spcAft>
             </a:pPr>
             <a:r>
-              <a:rPr b="1" sz="1100">
+              <a:rPr b="1" sz="1250">
                 <a:solidFill>
                   <a:srgbClr val="102C57"/>
                 </a:solidFill>
@@ -19403,7 +19403,7 @@
               <a:t>Objective 3 -- Multi-Source Evidence Retrieval: </a:t>
             </a:r>
             <a:r>
-              <a:rPr sz="1100">
+              <a:rPr sz="1250">
                 <a:solidFill>
                   <a:srgbClr val="212529"/>
                 </a:solidFill>
@@ -19414,11 +19414,11 @@
           <a:p>
             <a:pPr>
               <a:spcAft>
-                <a:spcPts val="600"/>
+                <a:spcPts val="700"/>
               </a:spcAft>
             </a:pPr>
             <a:r>
-              <a:rPr b="1" sz="1100">
+              <a:rPr b="1" sz="1250">
                 <a:solidFill>
                   <a:srgbClr val="102C57"/>
                 </a:solidFill>
@@ -19426,7 +19426,7 @@
               <a:t>Objective 4 -- RoBERTa-MNLI Cross-Source Corroboration: </a:t>
             </a:r>
             <a:r>
-              <a:rPr sz="1100">
+              <a:rPr sz="1250">
                 <a:solidFill>
                   <a:srgbClr val="212529"/>
                 </a:solidFill>
@@ -19437,11 +19437,11 @@
           <a:p>
             <a:pPr>
               <a:spcAft>
-                <a:spcPts val="600"/>
+                <a:spcPts val="700"/>
               </a:spcAft>
             </a:pPr>
             <a:r>
-              <a:rPr b="1" sz="1100">
+              <a:rPr b="1" sz="1250">
                 <a:solidFill>
                   <a:srgbClr val="102C57"/>
                 </a:solidFill>
@@ -19449,7 +19449,7 @@
               <a:t>Objective 5 -- Manipulation &amp; Clickbait Indexing: </a:t>
             </a:r>
             <a:r>
-              <a:rPr sz="1100">
+              <a:rPr sz="1250">
                 <a:solidFill>
                   <a:srgbClr val="212529"/>
                 </a:solidFill>
@@ -19460,11 +19460,11 @@
           <a:p>
             <a:pPr>
               <a:spcAft>
-                <a:spcPts val="600"/>
+                <a:spcPts val="700"/>
               </a:spcAft>
             </a:pPr>
             <a:r>
-              <a:rPr b="1" sz="1100">
+              <a:rPr b="1" sz="1250">
                 <a:solidFill>
                   <a:srgbClr val="102C57"/>
                 </a:solidFill>
@@ -19472,7 +19472,7 @@
               <a:t>Objective 6 -- Unified Aggregation Engine &amp; User Interface: </a:t>
             </a:r>
             <a:r>
-              <a:rPr sz="1100">
+              <a:rPr sz="1250">
                 <a:solidFill>
                   <a:srgbClr val="212529"/>
                 </a:solidFill>
@@ -19521,7 +19521,7 @@
         <p:spPr>
           <a:xfrm>
             <a:off x="731520" y="365760"/>
-            <a:ext cx="10515600" cy="822960"/>
+            <a:ext cx="10789920" cy="822960"/>
           </a:xfrm>
           <a:prstGeom prst="rect">
             <a:avLst/>
@@ -19535,7 +19535,7 @@
           <a:lstStyle/>
           <a:p>
             <a:pPr>
-              <a:defRPr sz="2400" b="1">
+              <a:defRPr sz="2600" b="1">
                 <a:solidFill>
                   <a:srgbClr val="102C57"/>
                 </a:solidFill>
@@ -19543,7 +19543,7 @@
               </a:defRPr>
             </a:pPr>
             <a:r>
-              <a:t>Existing Methods and Drawbacks (Rubric: 2 Marks)</a:t>
+              <a:t>Existing Methods and Drawbacks</a:t>
             </a:r>
           </a:p>
         </p:txBody>
@@ -19558,7 +19558,7 @@
         </p:nvGraphicFramePr>
         <p:xfrm>
           <a:off x="731520" y="1188720"/>
-          <a:ext cx="10515600" cy="5029200"/>
+          <a:ext cx="10789920" cy="5120640"/>
         </p:xfrm>
         <a:graphic>
           <a:graphicData uri="http://schemas.openxmlformats.org/drawingml/2006/table">
@@ -19569,16 +19569,16 @@
               <a:tblGrid>
                 <a:gridCol w="2560320"/>
                 <a:gridCol w="2926080"/>
-                <a:gridCol w="5029200"/>
+                <a:gridCol w="5303520"/>
               </a:tblGrid>
-              <a:tr h="1005840">
+              <a:tr h="1024128">
                 <a:tc>
                   <a:txBody>
                     <a:bodyPr/>
                     <a:lstStyle/>
                     <a:p>
                       <a:pPr algn="l">
-                        <a:defRPr sz="1100" b="1">
+                        <a:defRPr sz="1200" b="1">
                           <a:solidFill>
                             <a:srgbClr val="FFFFFF"/>
                           </a:solidFill>
@@ -19602,7 +19602,7 @@
                     <a:lstStyle/>
                     <a:p>
                       <a:pPr algn="l">
-                        <a:defRPr sz="1100" b="1">
+                        <a:defRPr sz="1200" b="1">
                           <a:solidFill>
                             <a:srgbClr val="FFFFFF"/>
                           </a:solidFill>
@@ -19626,7 +19626,7 @@
                     <a:lstStyle/>
                     <a:p>
                       <a:pPr algn="l">
-                        <a:defRPr sz="1100" b="1">
+                        <a:defRPr sz="1200" b="1">
                           <a:solidFill>
                             <a:srgbClr val="FFFFFF"/>
                           </a:solidFill>
@@ -19645,14 +19645,14 @@
                   </a:tcPr>
                 </a:tc>
               </a:tr>
-              <a:tr h="1005840">
+              <a:tr h="1024128">
                 <a:tc>
                   <a:txBody>
                     <a:bodyPr/>
                     <a:lstStyle/>
                     <a:p>
                       <a:pPr algn="l">
-                        <a:defRPr sz="1000" b="0">
+                        <a:defRPr sz="1100" b="0">
                           <a:solidFill>
                             <a:srgbClr val="212529"/>
                           </a:solidFill>
@@ -19681,7 +19681,7 @@
                     <a:lstStyle/>
                     <a:p>
                       <a:pPr algn="l">
-                        <a:defRPr sz="1000" b="0">
+                        <a:defRPr sz="1100" b="0">
                           <a:solidFill>
                             <a:srgbClr val="212529"/>
                           </a:solidFill>
@@ -19705,7 +19705,7 @@
                     <a:lstStyle/>
                     <a:p>
                       <a:pPr algn="l">
-                        <a:defRPr sz="1000" b="0">
+                        <a:defRPr sz="1100" b="0">
                           <a:solidFill>
                             <a:srgbClr val="212529"/>
                           </a:solidFill>
@@ -19724,14 +19724,14 @@
                   </a:tcPr>
                 </a:tc>
               </a:tr>
-              <a:tr h="1005840">
+              <a:tr h="1024128">
                 <a:tc>
                   <a:txBody>
                     <a:bodyPr/>
                     <a:lstStyle/>
                     <a:p>
                       <a:pPr algn="l">
-                        <a:defRPr sz="1000" b="0">
+                        <a:defRPr sz="1100" b="0">
                           <a:solidFill>
                             <a:srgbClr val="212529"/>
                           </a:solidFill>
@@ -19751,7 +19751,7 @@
                     <a:lstStyle/>
                     <a:p>
                       <a:pPr algn="l">
-                        <a:defRPr sz="1000" b="0">
+                        <a:defRPr sz="1100" b="0">
                           <a:solidFill>
                             <a:srgbClr val="212529"/>
                           </a:solidFill>
@@ -19771,7 +19771,7 @@
                     <a:lstStyle/>
                     <a:p>
                       <a:pPr algn="l">
-                        <a:defRPr sz="1000" b="0">
+                        <a:defRPr sz="1100" b="0">
                           <a:solidFill>
                             <a:srgbClr val="212529"/>
                           </a:solidFill>
@@ -19786,14 +19786,14 @@
                   <a:tcPr marL="73152" marR="73152" marT="45720" marB="45720" anchor="ctr"/>
                 </a:tc>
               </a:tr>
-              <a:tr h="1005840">
+              <a:tr h="1024128">
                 <a:tc>
                   <a:txBody>
                     <a:bodyPr/>
                     <a:lstStyle/>
                     <a:p>
                       <a:pPr algn="l">
-                        <a:defRPr sz="1000" b="0">
+                        <a:defRPr sz="1100" b="0">
                           <a:solidFill>
                             <a:srgbClr val="212529"/>
                           </a:solidFill>
@@ -19822,7 +19822,7 @@
                     <a:lstStyle/>
                     <a:p>
                       <a:pPr algn="l">
-                        <a:defRPr sz="1000" b="0">
+                        <a:defRPr sz="1100" b="0">
                           <a:solidFill>
                             <a:srgbClr val="212529"/>
                           </a:solidFill>
@@ -19846,7 +19846,7 @@
                     <a:lstStyle/>
                     <a:p>
                       <a:pPr algn="l">
-                        <a:defRPr sz="1000" b="0">
+                        <a:defRPr sz="1100" b="0">
                           <a:solidFill>
                             <a:srgbClr val="212529"/>
                           </a:solidFill>
@@ -19865,14 +19865,14 @@
                   </a:tcPr>
                 </a:tc>
               </a:tr>
-              <a:tr h="1005840">
+              <a:tr h="1024128">
                 <a:tc>
                   <a:txBody>
                     <a:bodyPr/>
                     <a:lstStyle/>
                     <a:p>
                       <a:pPr algn="l">
-                        <a:defRPr sz="1000" b="0">
+                        <a:defRPr sz="1100" b="0">
                           <a:solidFill>
                             <a:srgbClr val="212529"/>
                           </a:solidFill>
@@ -19892,7 +19892,7 @@
                     <a:lstStyle/>
                     <a:p>
                       <a:pPr algn="l">
-                        <a:defRPr sz="1000" b="0">
+                        <a:defRPr sz="1100" b="0">
                           <a:solidFill>
                             <a:srgbClr val="212529"/>
                           </a:solidFill>
@@ -19912,7 +19912,7 @@
                     <a:lstStyle/>
                     <a:p>
                       <a:pPr algn="l">
-                        <a:defRPr sz="1000" b="0">
+                        <a:defRPr sz="1100" b="0">
                           <a:solidFill>
                             <a:srgbClr val="212529"/>
                           </a:solidFill>
